--- a/docs/slides/dsquasar_guide.pptx
+++ b/docs/slides/dsquasar_guide.pptx
@@ -36,9 +36,11 @@
     <p:sldId id="284" r:id="rId30"/>
     <p:sldId id="285" r:id="rId31"/>
     <p:sldId id="286" r:id="rId32"/>
+    <p:sldId id="287" r:id="rId33"/>
+    <p:sldId id="288" r:id="rId34"/>
   </p:sldIdLst>
   <p:notesMasterIdLst>
-    <p:notesMasterId r:id="rId33"/>
+    <p:notesMasterId r:id="rId35"/>
   </p:notesMasterIdLst>
   <p:sldSz cx="12192000" cy="6858000"/>
   <p:notesSz cx="6858000" cy="12192000"/>
@@ -2668,6 +2670,182 @@
             <a:fld id="{F7021451-1387-4CA6-816F-3879F97B5CBC}" type="slidenum">
               <a:rPr lang="en-US"/>
               <a:t>31</a:t>
+            </a:fld>
+            <a:endParaRPr lang="en-US"/>
+          </a:p>
+        </p:txBody>
+      </p:sp>
+    </p:spTree>
+    <p:extLst>
+      <p:ext uri="{BB962C8B-B14F-4D97-AF65-F5344CB8AC3E}">
+        <p14:creationId xmlns:p14="http://schemas.microsoft.com/office/powerpoint/2010/main" val="1024086991"/>
+      </p:ext>
+    </p:extLst>
+  </p:cSld>
+  <p:clrMapOvr>
+    <a:masterClrMapping/>
+  </p:clrMapOvr>
+</p:notes>
+</file>
+
+<file path=ppt/notesSlides/notesSlide32.xml><?xml version="1.0" encoding="utf-8"?>
+<p:notes xmlns:a="http://schemas.openxmlformats.org/drawingml/2006/main" xmlns:r="http://schemas.openxmlformats.org/officeDocument/2006/relationships" xmlns:p="http://schemas.openxmlformats.org/presentationml/2006/main">
+  <p:cSld>
+    <p:spTree>
+      <p:nvGrpSpPr>
+        <p:cNvPr id="1" name=""/>
+        <p:cNvGrpSpPr/>
+        <p:nvPr/>
+      </p:nvGrpSpPr>
+      <p:grpSpPr>
+        <a:xfrm>
+          <a:off x="0" y="0"/>
+          <a:ext cx="0" cy="0"/>
+          <a:chOff x="0" y="0"/>
+          <a:chExt cx="0" cy="0"/>
+        </a:xfrm>
+      </p:grpSpPr>
+      <p:sp>
+        <p:nvSpPr>
+          <p:cNvPr id="2" name="Slide Image Placeholder 1"/>
+          <p:cNvSpPr>
+            <a:spLocks noGrp="1" noRot="1" noChangeAspect="1"/>
+          </p:cNvSpPr>
+          <p:nvPr>
+            <p:ph type="sldImg"/>
+          </p:nvPr>
+        </p:nvSpPr>
+        <p:spPr/>
+      </p:sp>
+      <p:sp>
+        <p:nvSpPr>
+          <p:cNvPr id="3" name="Notes Placeholder 2"/>
+          <p:cNvSpPr>
+            <a:spLocks noGrp="1"/>
+          </p:cNvSpPr>
+          <p:nvPr>
+            <p:ph type="body" idx="1"/>
+          </p:nvPr>
+        </p:nvSpPr>
+        <p:spPr/>
+        <p:txBody>
+          <a:bodyPr/>
+          <a:lstStyle/>
+          <a:p>
+            <a:r>
+              <a:rPr lang="en-US" dirty="0"/>
+              <a:t/>
+            </a:r>
+            <a:endParaRPr lang="en-US" dirty="0"/>
+          </a:p>
+        </p:txBody>
+      </p:sp>
+      <p:sp>
+        <p:nvSpPr>
+          <p:cNvPr id="4" name="Slide Number Placeholder 3"/>
+          <p:cNvSpPr>
+            <a:spLocks noGrp="1"/>
+          </p:cNvSpPr>
+          <p:nvPr>
+            <p:ph type="sldNum" sz="quarter" idx="10"/>
+          </p:nvPr>
+        </p:nvSpPr>
+        <p:spPr/>
+        <p:txBody>
+          <a:bodyPr/>
+          <a:lstStyle/>
+          <a:p>
+            <a:fld id="{F7021451-1387-4CA6-816F-3879F97B5CBC}" type="slidenum">
+              <a:rPr lang="en-US"/>
+              <a:t>32</a:t>
+            </a:fld>
+            <a:endParaRPr lang="en-US"/>
+          </a:p>
+        </p:txBody>
+      </p:sp>
+    </p:spTree>
+    <p:extLst>
+      <p:ext uri="{BB962C8B-B14F-4D97-AF65-F5344CB8AC3E}">
+        <p14:creationId xmlns:p14="http://schemas.microsoft.com/office/powerpoint/2010/main" val="1024086991"/>
+      </p:ext>
+    </p:extLst>
+  </p:cSld>
+  <p:clrMapOvr>
+    <a:masterClrMapping/>
+  </p:clrMapOvr>
+</p:notes>
+</file>
+
+<file path=ppt/notesSlides/notesSlide33.xml><?xml version="1.0" encoding="utf-8"?>
+<p:notes xmlns:a="http://schemas.openxmlformats.org/drawingml/2006/main" xmlns:r="http://schemas.openxmlformats.org/officeDocument/2006/relationships" xmlns:p="http://schemas.openxmlformats.org/presentationml/2006/main">
+  <p:cSld>
+    <p:spTree>
+      <p:nvGrpSpPr>
+        <p:cNvPr id="1" name=""/>
+        <p:cNvGrpSpPr/>
+        <p:nvPr/>
+      </p:nvGrpSpPr>
+      <p:grpSpPr>
+        <a:xfrm>
+          <a:off x="0" y="0"/>
+          <a:ext cx="0" cy="0"/>
+          <a:chOff x="0" y="0"/>
+          <a:chExt cx="0" cy="0"/>
+        </a:xfrm>
+      </p:grpSpPr>
+      <p:sp>
+        <p:nvSpPr>
+          <p:cNvPr id="2" name="Slide Image Placeholder 1"/>
+          <p:cNvSpPr>
+            <a:spLocks noGrp="1" noRot="1" noChangeAspect="1"/>
+          </p:cNvSpPr>
+          <p:nvPr>
+            <p:ph type="sldImg"/>
+          </p:nvPr>
+        </p:nvSpPr>
+        <p:spPr/>
+      </p:sp>
+      <p:sp>
+        <p:nvSpPr>
+          <p:cNvPr id="3" name="Notes Placeholder 2"/>
+          <p:cNvSpPr>
+            <a:spLocks noGrp="1"/>
+          </p:cNvSpPr>
+          <p:nvPr>
+            <p:ph type="body" idx="1"/>
+          </p:nvPr>
+        </p:nvSpPr>
+        <p:spPr/>
+        <p:txBody>
+          <a:bodyPr/>
+          <a:lstStyle/>
+          <a:p>
+            <a:r>
+              <a:rPr lang="en-US" dirty="0"/>
+              <a:t/>
+            </a:r>
+            <a:endParaRPr lang="en-US" dirty="0"/>
+          </a:p>
+        </p:txBody>
+      </p:sp>
+      <p:sp>
+        <p:nvSpPr>
+          <p:cNvPr id="4" name="Slide Number Placeholder 3"/>
+          <p:cNvSpPr>
+            <a:spLocks noGrp="1"/>
+          </p:cNvSpPr>
+          <p:nvPr>
+            <p:ph type="sldNum" sz="quarter" idx="10"/>
+          </p:nvPr>
+        </p:nvSpPr>
+        <p:spPr/>
+        <p:txBody>
+          <a:bodyPr/>
+          <a:lstStyle/>
+          <a:p>
+            <a:fld id="{F7021451-1387-4CA6-816F-3879F97B5CBC}" type="slidenum">
+              <a:rPr lang="en-US"/>
+              <a:t>33</a:t>
             </a:fld>
             <a:endParaRPr lang="en-US"/>
           </a:p>
@@ -16284,13 +16462,13 @@
             <a:r>
               <a:rPr lang="en-US" sz="1200" b="1" spc="200" kern="0" dirty="0">
                 <a:solidFill>
-                  <a:srgbClr val="C25E00"/>
-                </a:solidFill>
-                <a:latin typeface="Poppins" pitchFamily="34" charset="0"/>
-                <a:ea typeface="Poppins" pitchFamily="34" charset="-122"/>
-                <a:cs typeface="Poppins" pitchFamily="34" charset="-120"/>
-              </a:rPr>
-              <a:t>PARALLELISM</a:t>
+                  <a:srgbClr val="0092DB"/>
+                </a:solidFill>
+                <a:latin typeface="Poppins" pitchFamily="34" charset="0"/>
+                <a:ea typeface="Poppins" pitchFamily="34" charset="-122"/>
+                <a:cs typeface="Poppins" pitchFamily="34" charset="-120"/>
+              </a:rPr>
+              <a:t>SCHEDULING</a:t>
             </a:r>
             <a:endParaRPr lang="en-US" sz="1200" dirty="0"/>
           </a:p>
@@ -16329,7 +16507,7 @@
                 <a:ea typeface="Poppins" pitchFamily="34" charset="-122"/>
                 <a:cs typeface="Poppins" pitchFamily="34" charset="-120"/>
               </a:rPr>
-              <a:t>How Many CPUs Does the Job Ask For?</a:t>
+              <a:t>Watching a Run with dscheck</a:t>
             </a:r>
             <a:endParaRPr lang="en-US" sz="3200" dirty="0"/>
           </a:p>
@@ -16343,8 +16521,8 @@
         </p:nvSpPr>
         <p:spPr>
           <a:xfrm>
-            <a:off x="457200" y="1463040"/>
-            <a:ext cx="11292840" cy="548640"/>
+            <a:off x="457200" y="1444752"/>
+            <a:ext cx="11292840" cy="365760"/>
           </a:xfrm>
           <a:prstGeom prst="rect">
             <a:avLst/>
@@ -16371,7 +16549,7 @@
                 <a:ea typeface="Poppins" pitchFamily="34" charset="-122"/>
                 <a:cs typeface="Poppins" pitchFamily="34" charset="-120"/>
               </a:rPr>
-              <a:t>Tarring and uploading have very different shapes, so they are sized independently and the larger request wins — the phases run one after the other inside a single PBS allocation, sharing one ncpus.</a:t>
+              <a:t>-d hands the run to dscheck, so dscheck is also where it is watched — in the browser, or on the command line.</a:t>
             </a:r>
             <a:endParaRPr lang="en-US" sz="1450" dirty="0"/>
           </a:p>
@@ -16385,16 +16563,492 @@
         </p:nvSpPr>
         <p:spPr>
           <a:xfrm>
-            <a:off x="457200" y="2148840"/>
-            <a:ext cx="5532120" cy="2286000"/>
+            <a:off x="457200" y="1874520"/>
+            <a:ext cx="5532120" cy="960120"/>
           </a:xfrm>
           <a:prstGeom prst="roundRect">
             <a:avLst>
-              <a:gd name="adj" fmla="val 4000"/>
+              <a:gd name="adj" fmla="val 8571"/>
             </a:avLst>
           </a:prstGeom>
           <a:solidFill>
-            <a:srgbClr val="FFFFFF"/>
+            <a:srgbClr val="DCEBF7"/>
+          </a:solidFill>
+          <a:ln w="12700">
+            <a:solidFill>
+              <a:srgbClr val="A9D6F2"/>
+            </a:solidFill>
+            <a:prstDash val="solid"/>
+          </a:ln>
+        </p:spPr>
+      </p:sp>
+      <p:sp>
+        <p:nvSpPr>
+          <p:cNvPr id="6" name="Text 4"/>
+          <p:cNvSpPr/>
+          <p:nvPr/>
+        </p:nvSpPr>
+        <p:spPr>
+          <a:xfrm>
+            <a:off x="658368" y="1874520"/>
+            <a:ext cx="5120640" cy="960120"/>
+          </a:xfrm>
+          <a:prstGeom prst="rect">
+            <a:avLst/>
+          </a:prstGeom>
+          <a:noFill/>
+          <a:ln/>
+        </p:spPr>
+        <p:txBody>
+          <a:bodyPr wrap="square" lIns="0" tIns="0" rIns="0" bIns="0" rtlCol="0" anchor="ctr"/>
+          <a:lstStyle/>
+          <a:p>
+            <a:pPr indent="0" marL="0">
+              <a:lnSpc>
+                <a:spcPct val="115000"/>
+              </a:lnSpc>
+              <a:buNone/>
+            </a:pPr>
+            <a:r>
+              <a:rPr lang="en-US" sz="1300" b="1" dirty="0">
+                <a:solidFill>
+                  <a:srgbClr val="0057C2"/>
+                </a:solidFill>
+                <a:latin typeface="Poppins" pitchFamily="34" charset="0"/>
+                <a:ea typeface="Poppins" pitchFamily="34" charset="-122"/>
+                <a:cs typeface="Poppins" pitchFamily="34" charset="-120"/>
+              </a:rPr>
+              <a:t>In the browser
+</a:t>
+            </a:r>
+            <a:pPr indent="0" marL="0">
+              <a:lnSpc>
+                <a:spcPct val="115000"/>
+              </a:lnSpc>
+              <a:buNone/>
+            </a:pPr>
+            <a:r>
+              <a:rPr lang="en-US" sz="1100" b="1" u="sng" dirty="0">
+                <a:solidFill>
+                  <a:srgbClr val="0057C2"/>
+                </a:solidFill>
+                <a:latin typeface="Courier New" pitchFamily="34" charset="0"/>
+                <a:ea typeface="Courier New" pitchFamily="34" charset="-122"/>
+                <a:cs typeface="Courier New" pitchFamily="34" charset="-120"/>
+                <a:hlinkClick r:id="rId1" invalidUrl="" action="" tgtFrame="" tooltip="" history="1" highlightClick="0" endSnd="0">
+                  <a:extLst>
+                    <a:ext uri="{A12FA001-AC4F-418D-AE19-62706E023703}">
+                      <ahyp:hlinkClr xmlns:ahyp="http://schemas.microsoft.com/office/drawing/2018/hyperlinkcolor" val="tx"/>
+                    </a:ext>
+                  </a:extLst>
+                </a:hlinkClick>
+              </a:rPr>
+              <a:t>gdex.ucar.edu/rda_pg_config/</a:t>
+            </a:r>
+            <a:pPr indent="0" marL="0">
+              <a:lnSpc>
+                <a:spcPct val="115000"/>
+              </a:lnSpc>
+              <a:buNone/>
+            </a:pPr>
+            <a:r>
+              <a:rPr lang="en-US" sz="1100" dirty="0">
+                <a:solidFill>
+                  <a:srgbClr val="00357A"/>
+                </a:solidFill>
+                <a:latin typeface="Poppins" pitchFamily="34" charset="0"/>
+                <a:ea typeface="Poppins" pitchFamily="34" charset="-122"/>
+                <a:cs typeface="Poppins" pitchFamily="34" charset="-120"/>
+              </a:rPr>
+              <a:t>  →  DSCHECK → Check Information, then search on Command = dsquasar.</a:t>
+            </a:r>
+            <a:endParaRPr lang="en-US" sz="1100" dirty="0"/>
+          </a:p>
+        </p:txBody>
+      </p:sp>
+      <p:sp>
+        <p:nvSpPr>
+          <p:cNvPr id="7" name="Shape 5"/>
+          <p:cNvSpPr/>
+          <p:nvPr/>
+        </p:nvSpPr>
+        <p:spPr>
+          <a:xfrm>
+            <a:off x="6309360" y="1874520"/>
+            <a:ext cx="5440680" cy="960120"/>
+          </a:xfrm>
+          <a:prstGeom prst="roundRect">
+            <a:avLst>
+              <a:gd name="adj" fmla="val 4762"/>
+            </a:avLst>
+          </a:prstGeom>
+          <a:solidFill>
+            <a:srgbClr val="011837"/>
+          </a:solidFill>
+          <a:ln/>
+        </p:spPr>
+      </p:sp>
+      <p:sp>
+        <p:nvSpPr>
+          <p:cNvPr id="8" name="Text 6"/>
+          <p:cNvSpPr/>
+          <p:nvPr/>
+        </p:nvSpPr>
+        <p:spPr>
+          <a:xfrm>
+            <a:off x="6437376" y="1874520"/>
+            <a:ext cx="5184648" cy="960120"/>
+          </a:xfrm>
+          <a:prstGeom prst="rect">
+            <a:avLst/>
+          </a:prstGeom>
+          <a:noFill/>
+          <a:ln/>
+        </p:spPr>
+        <p:txBody>
+          <a:bodyPr wrap="square" lIns="0" tIns="0" rIns="0" bIns="0" rtlCol="0" anchor="ctr"/>
+          <a:lstStyle/>
+          <a:p>
+            <a:pPr indent="0" marL="0">
+              <a:lnSpc>
+                <a:spcPct val="100000"/>
+              </a:lnSpc>
+              <a:buNone/>
+            </a:pPr>
+            <a:r>
+              <a:rPr lang="en-US" sz="1050" dirty="0">
+                <a:solidFill>
+                  <a:srgbClr val="0097A7"/>
+                </a:solidFill>
+                <a:latin typeface="Courier New" pitchFamily="34" charset="0"/>
+                <a:ea typeface="Courier New" pitchFamily="34" charset="-122"/>
+                <a:cs typeface="Courier New" pitchFamily="34" charset="-120"/>
+              </a:rPr>
+              <a:t># the same records from the command line</a:t>
+            </a:r>
+            <a:endParaRPr lang="en-US" sz="1050" dirty="0"/>
+          </a:p>
+          <a:p>
+            <a:pPr indent="0" marL="0">
+              <a:lnSpc>
+                <a:spcPct val="100000"/>
+              </a:lnSpc>
+              <a:buNone/>
+            </a:pPr>
+            <a:r>
+              <a:rPr lang="en-US" sz="1050" dirty="0">
+                <a:solidFill>
+                  <a:srgbClr val="0097A7"/>
+                </a:solidFill>
+                <a:latin typeface="Courier New" pitchFamily="34" charset="0"/>
+                <a:ea typeface="Courier New" pitchFamily="34" charset="-122"/>
+                <a:cs typeface="Courier New" pitchFamily="34" charset="-120"/>
+              </a:rPr>
+              <a:t>dscheck gc -cs -cm dsquasar</a:t>
+            </a:r>
+            <a:endParaRPr lang="en-US" sz="1050" dirty="0"/>
+          </a:p>
+          <a:p>
+            <a:pPr indent="0" marL="0">
+              <a:lnSpc>
+                <a:spcPct val="100000"/>
+              </a:lnSpc>
+              <a:buNone/>
+            </a:pPr>
+            <a:r>
+              <a:rPr lang="en-US" sz="1050" dirty="0">
+                <a:solidFill>
+                  <a:srgbClr val="0097A7"/>
+                </a:solidFill>
+                <a:latin typeface="Courier New" pitchFamily="34" charset="0"/>
+                <a:ea typeface="Courier New" pitchFamily="34" charset="-122"/>
+                <a:cs typeface="Courier New" pitchFamily="34" charset="-120"/>
+              </a:rPr>
+              <a:t>dscheck gc -cs -cm dsquasar -fn all</a:t>
+            </a:r>
+            <a:endParaRPr lang="en-US" sz="1050" dirty="0"/>
+          </a:p>
+        </p:txBody>
+      </p:sp>
+      <p:sp>
+        <p:nvSpPr>
+          <p:cNvPr id="9" name="Text 7"/>
+          <p:cNvSpPr/>
+          <p:nvPr/>
+        </p:nvSpPr>
+        <p:spPr>
+          <a:xfrm>
+            <a:off x="457200" y="2926080"/>
+            <a:ext cx="11292840" cy="320040"/>
+          </a:xfrm>
+          <a:prstGeom prst="rect">
+            <a:avLst/>
+          </a:prstGeom>
+          <a:noFill/>
+          <a:ln/>
+        </p:spPr>
+        <p:txBody>
+          <a:bodyPr wrap="square" lIns="0" tIns="0" rIns="0" bIns="0" rtlCol="0" anchor="ctr"/>
+          <a:lstStyle/>
+          <a:p>
+            <a:pPr indent="0" marL="0">
+              <a:buNone/>
+            </a:pPr>
+            <a:r>
+              <a:rPr lang="en-US" sz="1150" b="1" dirty="0">
+                <a:solidFill>
+                  <a:srgbClr val="0057C2"/>
+                </a:solidFill>
+                <a:latin typeface="Courier New" pitchFamily="34" charset="0"/>
+                <a:ea typeface="Courier New" pitchFamily="34" charset="-122"/>
+                <a:cs typeface="Courier New" pitchFamily="34" charset="-120"/>
+              </a:rPr>
+              <a:t>-GC</a:t>
+            </a:r>
+            <a:pPr indent="0" marL="0">
+              <a:buNone/>
+            </a:pPr>
+            <a:r>
+              <a:rPr lang="en-US" sz="1150" dirty="0">
+                <a:solidFill>
+                  <a:srgbClr val="00357A"/>
+                </a:solidFill>
+                <a:latin typeface="Poppins" pitchFamily="34" charset="0"/>
+                <a:ea typeface="Poppins" pitchFamily="34" charset="-122"/>
+                <a:cs typeface="Poppins" pitchFamily="34" charset="-120"/>
+              </a:rPr>
+              <a:t> lists the check records,  </a:t>
+            </a:r>
+            <a:pPr indent="0" marL="0">
+              <a:buNone/>
+            </a:pPr>
+            <a:r>
+              <a:rPr lang="en-US" sz="1150" b="1" dirty="0">
+                <a:solidFill>
+                  <a:srgbClr val="0057C2"/>
+                </a:solidFill>
+                <a:latin typeface="Courier New" pitchFamily="34" charset="0"/>
+                <a:ea typeface="Courier New" pitchFamily="34" charset="-122"/>
+                <a:cs typeface="Courier New" pitchFamily="34" charset="-120"/>
+              </a:rPr>
+              <a:t>-CS</a:t>
+            </a:r>
+            <a:pPr indent="0" marL="0">
+              <a:buNone/>
+            </a:pPr>
+            <a:r>
+              <a:rPr lang="en-US" sz="1150" dirty="0">
+                <a:solidFill>
+                  <a:srgbClr val="00357A"/>
+                </a:solidFill>
+                <a:latin typeface="Poppins" pitchFamily="34" charset="0"/>
+                <a:ea typeface="Poppins" pitchFamily="34" charset="-122"/>
+                <a:cs typeface="Poppins" pitchFamily="34" charset="-120"/>
+              </a:rPr>
+              <a:t> adds the live status line,  </a:t>
+            </a:r>
+            <a:pPr indent="0" marL="0">
+              <a:buNone/>
+            </a:pPr>
+            <a:r>
+              <a:rPr lang="en-US" sz="1150" b="1" dirty="0">
+                <a:solidFill>
+                  <a:srgbClr val="0057C2"/>
+                </a:solidFill>
+                <a:latin typeface="Courier New" pitchFamily="34" charset="0"/>
+                <a:ea typeface="Courier New" pitchFamily="34" charset="-122"/>
+                <a:cs typeface="Courier New" pitchFamily="34" charset="-120"/>
+              </a:rPr>
+              <a:t>-CM</a:t>
+            </a:r>
+            <a:pPr indent="0" marL="0">
+              <a:buNone/>
+            </a:pPr>
+            <a:r>
+              <a:rPr lang="en-US" sz="1150" dirty="0">
+                <a:solidFill>
+                  <a:srgbClr val="00357A"/>
+                </a:solidFill>
+                <a:latin typeface="Poppins" pitchFamily="34" charset="0"/>
+                <a:ea typeface="Poppins" pitchFamily="34" charset="-122"/>
+                <a:cs typeface="Poppins" pitchFamily="34" charset="-120"/>
+              </a:rPr>
+              <a:t> narrows the list to one command, and  </a:t>
+            </a:r>
+            <a:pPr indent="0" marL="0">
+              <a:buNone/>
+            </a:pPr>
+            <a:r>
+              <a:rPr lang="en-US" sz="1150" b="1" dirty="0">
+                <a:solidFill>
+                  <a:srgbClr val="0057C2"/>
+                </a:solidFill>
+                <a:latin typeface="Courier New" pitchFamily="34" charset="0"/>
+                <a:ea typeface="Courier New" pitchFamily="34" charset="-122"/>
+                <a:cs typeface="Courier New" pitchFamily="34" charset="-120"/>
+              </a:rPr>
+              <a:t>-FN all</a:t>
+            </a:r>
+            <a:pPr indent="0" marL="0">
+              <a:buNone/>
+            </a:pPr>
+            <a:r>
+              <a:rPr lang="en-US" sz="1150" dirty="0">
+                <a:solidFill>
+                  <a:srgbClr val="00357A"/>
+                </a:solidFill>
+                <a:latin typeface="Poppins" pitchFamily="34" charset="0"/>
+                <a:ea typeface="Poppins" pitchFamily="34" charset="-122"/>
+                <a:cs typeface="Poppins" pitchFamily="34" charset="-120"/>
+              </a:rPr>
+              <a:t> returns every field instead of the short set.</a:t>
+            </a:r>
+            <a:endParaRPr lang="en-US" sz="1150" dirty="0"/>
+          </a:p>
+        </p:txBody>
+      </p:sp>
+      <p:sp>
+        <p:nvSpPr>
+          <p:cNvPr id="10" name="Shape 8"/>
+          <p:cNvSpPr/>
+          <p:nvPr/>
+        </p:nvSpPr>
+        <p:spPr>
+          <a:xfrm>
+            <a:off x="457200" y="3291840"/>
+            <a:ext cx="11292840" cy="960120"/>
+          </a:xfrm>
+          <a:prstGeom prst="roundRect">
+            <a:avLst>
+              <a:gd name="adj" fmla="val 4762"/>
+            </a:avLst>
+          </a:prstGeom>
+          <a:solidFill>
+            <a:srgbClr val="011837"/>
+          </a:solidFill>
+          <a:ln/>
+        </p:spPr>
+      </p:sp>
+      <p:sp>
+        <p:nvSpPr>
+          <p:cNvPr id="11" name="Text 9"/>
+          <p:cNvSpPr/>
+          <p:nvPr/>
+        </p:nvSpPr>
+        <p:spPr>
+          <a:xfrm>
+            <a:off x="585216" y="3291840"/>
+            <a:ext cx="11036808" cy="960120"/>
+          </a:xfrm>
+          <a:prstGeom prst="rect">
+            <a:avLst/>
+          </a:prstGeom>
+          <a:noFill/>
+          <a:ln/>
+        </p:spPr>
+        <p:txBody>
+          <a:bodyPr wrap="square" lIns="0" tIns="0" rIns="0" bIns="0" rtlCol="0" anchor="ctr"/>
+          <a:lstStyle/>
+          <a:p>
+            <a:pPr indent="0" marL="0">
+              <a:lnSpc>
+                <a:spcPct val="100000"/>
+              </a:lnSpc>
+              <a:buNone/>
+            </a:pPr>
+            <a:r>
+              <a:rPr lang="en-US" sz="950" dirty="0">
+                <a:solidFill>
+                  <a:srgbClr val="0097A7"/>
+                </a:solidFill>
+                <a:latin typeface="Courier New" pitchFamily="34" charset="0"/>
+                <a:ea typeface="Courier New" pitchFamily="34" charset="-122"/>
+                <a:cs typeface="Courier New" pitchFamily="34" charset="-120"/>
+              </a:rPr>
+              <a:t>CheckIndex&lt;:&gt;ArgumentVector&lt;:&gt;Status&lt;:&gt;FileCount&lt;:&gt;DoneCount&lt;:&gt;</a:t>
+            </a:r>
+            <a:endParaRPr lang="en-US" sz="950" dirty="0"/>
+          </a:p>
+          <a:p>
+            <a:pPr indent="0" marL="0">
+              <a:lnSpc>
+                <a:spcPct val="100000"/>
+              </a:lnSpc>
+              <a:buNone/>
+            </a:pPr>
+            <a:r>
+              <a:rPr lang="en-US" sz="950" dirty="0">
+                <a:solidFill>
+                  <a:srgbClr val="0097A7"/>
+                </a:solidFill>
+                <a:latin typeface="Courier New" pitchFamily="34" charset="0"/>
+                <a:ea typeface="Courier New" pitchFamily="34" charset="-122"/>
+                <a:cs typeface="Courier New" pitchFamily="34" charset="-120"/>
+              </a:rPr>
+              <a:t>4105237&lt;:&gt;-a -A 3 -e -b -d PBS&lt;:&gt;Run 2H4M5S, 6% done PBS&lt;5948540&gt;/casper62&lt;:&gt;19195&lt;:&gt;1214&lt;:&gt;</a:t>
+            </a:r>
+            <a:endParaRPr lang="en-US" sz="950" dirty="0"/>
+          </a:p>
+          <a:p>
+            <a:pPr indent="0" marL="0">
+              <a:lnSpc>
+                <a:spcPct val="100000"/>
+              </a:lnSpc>
+              <a:buNone/>
+            </a:pPr>
+            <a:r>
+              <a:rPr lang="en-US" sz="950" dirty="0">
+                <a:solidFill>
+                  <a:srgbClr val="0097A7"/>
+                </a:solidFill>
+                <a:latin typeface="Courier New" pitchFamily="34" charset="0"/>
+                <a:ea typeface="Courier New" pitchFamily="34" charset="-122"/>
+                <a:cs typeface="Courier New" pitchFamily="34" charset="-120"/>
+              </a:rPr>
+              <a:t>4102650&lt;:&gt;-a -A 3 -e -b -d PBS -w 2&lt;:&gt;Run 23H37M58S, 2% done PBS&lt;5928624&gt;/casper64&lt;:&gt;54290&lt;:&gt;1193&lt;:&gt;</a:t>
+            </a:r>
+            <a:endParaRPr lang="en-US" sz="950" dirty="0"/>
+          </a:p>
+          <a:p>
+            <a:pPr indent="0" marL="0">
+              <a:lnSpc>
+                <a:spcPct val="100000"/>
+              </a:lnSpc>
+              <a:buNone/>
+            </a:pPr>
+            <a:r>
+              <a:rPr lang="en-US" sz="950" dirty="0">
+                <a:solidFill>
+                  <a:srgbClr val="0097A7"/>
+                </a:solidFill>
+                <a:latin typeface="Courier New" pitchFamily="34" charset="0"/>
+                <a:ea typeface="Courier New" pitchFamily="34" charset="-122"/>
+                <a:cs typeface="Courier New" pitchFamily="34" charset="-120"/>
+              </a:rPr>
+              <a:t>2 check records retrieved                                        # columns trimmed to fit</a:t>
+            </a:r>
+            <a:endParaRPr lang="en-US" sz="950" dirty="0"/>
+          </a:p>
+        </p:txBody>
+      </p:sp>
+      <p:sp>
+        <p:nvSpPr>
+          <p:cNvPr id="12" name="Shape 10"/>
+          <p:cNvSpPr/>
+          <p:nvPr/>
+        </p:nvSpPr>
+        <p:spPr>
+          <a:xfrm>
+            <a:off x="457200" y="4370832"/>
+            <a:ext cx="3611880" cy="1298448"/>
+          </a:xfrm>
+          <a:prstGeom prst="roundRect">
+            <a:avLst>
+              <a:gd name="adj" fmla="val 6338"/>
+            </a:avLst>
+          </a:prstGeom>
+          <a:solidFill>
+            <a:srgbClr val="DCEBF7"/>
           </a:solidFill>
           <a:ln w="19050">
             <a:solidFill>
@@ -16406,14 +17060,14 @@
       </p:sp>
       <p:sp>
         <p:nvSpPr>
-          <p:cNvPr id="6" name="Text 4"/>
-          <p:cNvSpPr/>
-          <p:nvPr/>
-        </p:nvSpPr>
-        <p:spPr>
-          <a:xfrm>
-            <a:off x="685800" y="2286000"/>
-            <a:ext cx="5120640" cy="320040"/>
+          <p:cNvPr id="13" name="Text 11"/>
+          <p:cNvSpPr/>
+          <p:nvPr/>
+        </p:nvSpPr>
+        <p:spPr>
+          <a:xfrm>
+            <a:off x="658368" y="4462272"/>
+            <a:ext cx="3246120" cy="292608"/>
           </a:xfrm>
           <a:prstGeom prst="rect">
             <a:avLst/>
@@ -16429,200 +17083,80 @@
               <a:buNone/>
             </a:pPr>
             <a:r>
-              <a:rPr lang="en-US" sz="1500" b="1" dirty="0">
+              <a:rPr lang="en-US" sz="1150" b="1" dirty="0">
                 <a:solidFill>
                   <a:srgbClr val="0057C2"/>
-                </a:solidFill>
-                <a:latin typeface="Poppins" pitchFamily="34" charset="0"/>
-                <a:ea typeface="Poppins" pitchFamily="34" charset="-122"/>
-                <a:cs typeface="Poppins" pitchFamily="34" charset="-120"/>
-              </a:rPr>
-              <a:t>Tarring   (-A 2, -A 3)</a:t>
-            </a:r>
-            <a:endParaRPr lang="en-US" sz="1500" dirty="0"/>
-          </a:p>
-        </p:txBody>
-      </p:sp>
-      <p:sp>
-        <p:nvSpPr>
-          <p:cNvPr id="7" name="Text 5"/>
-          <p:cNvSpPr/>
-          <p:nvPr/>
-        </p:nvSpPr>
-        <p:spPr>
-          <a:xfrm>
-            <a:off x="685800" y="2606040"/>
-            <a:ext cx="5120640" cy="274320"/>
-          </a:xfrm>
-          <a:prstGeom prst="rect">
-            <a:avLst/>
-          </a:prstGeom>
-          <a:noFill/>
-          <a:ln/>
-        </p:spPr>
-        <p:txBody>
-          <a:bodyPr wrap="square" lIns="0" tIns="0" rIns="0" bIns="0" rtlCol="0" anchor="ctr"/>
-          <a:lstStyle/>
-          <a:p>
-            <a:pPr indent="0" marL="0">
-              <a:buNone/>
-            </a:pPr>
-            <a:r>
-              <a:rPr lang="en-US" sz="1150" dirty="0">
-                <a:solidFill>
-                  <a:srgbClr val="53565A"/>
-                </a:solidFill>
-                <a:latin typeface="Poppins" pitchFamily="34" charset="0"/>
-                <a:ea typeface="Poppins" pitchFamily="34" charset="-122"/>
-                <a:cs typeface="Poppins" pitchFamily="34" charset="-120"/>
-              </a:rPr>
-              <a:t>One child per tar file — many small, cheap units.</a:t>
-            </a:r>
-            <a:endParaRPr lang="en-US" sz="1150" dirty="0"/>
-          </a:p>
-        </p:txBody>
-      </p:sp>
-      <p:sp>
-        <p:nvSpPr>
-          <p:cNvPr id="8" name="Shape 6"/>
-          <p:cNvSpPr/>
-          <p:nvPr/>
-        </p:nvSpPr>
-        <p:spPr>
-          <a:xfrm>
-            <a:off x="685800" y="2926080"/>
-            <a:ext cx="5120640" cy="685800"/>
-          </a:xfrm>
-          <a:prstGeom prst="roundRect">
-            <a:avLst>
-              <a:gd name="adj" fmla="val 6667"/>
-            </a:avLst>
-          </a:prstGeom>
-          <a:solidFill>
-            <a:srgbClr val="011837"/>
-          </a:solidFill>
-          <a:ln/>
-        </p:spPr>
-      </p:sp>
-      <p:sp>
-        <p:nvSpPr>
-          <p:cNvPr id="9" name="Text 7"/>
-          <p:cNvSpPr/>
-          <p:nvPr/>
-        </p:nvSpPr>
-        <p:spPr>
-          <a:xfrm>
-            <a:off x="813816" y="2926080"/>
-            <a:ext cx="4864608" cy="685800"/>
-          </a:xfrm>
-          <a:prstGeom prst="rect">
-            <a:avLst/>
-          </a:prstGeom>
-          <a:noFill/>
-          <a:ln/>
-        </p:spPr>
-        <p:txBody>
-          <a:bodyPr wrap="square" lIns="0" tIns="0" rIns="0" bIns="0" rtlCol="0" anchor="ctr"/>
-          <a:lstStyle/>
-          <a:p>
-            <a:pPr indent="0" marL="0">
-              <a:lnSpc>
-                <a:spcPct val="100000"/>
-              </a:lnSpc>
-              <a:buNone/>
-            </a:pPr>
-            <a:r>
-              <a:rPr lang="en-US" sz="1150" dirty="0">
-                <a:solidFill>
-                  <a:srgbClr val="0097A7"/>
                 </a:solidFill>
                 <a:latin typeface="Courier New" pitchFamily="34" charset="0"/>
                 <a:ea typeface="Courier New" pitchFamily="34" charset="-122"/>
                 <a:cs typeface="Courier New" pitchFamily="34" charset="-120"/>
               </a:rPr>
-              <a:t>MPTLIMIT = 200   tar files per process</a:t>
+              <a:t>Status</a:t>
             </a:r>
             <a:endParaRPr lang="en-US" sz="1150" dirty="0"/>
           </a:p>
+        </p:txBody>
+      </p:sp>
+      <p:sp>
+        <p:nvSpPr>
+          <p:cNvPr id="14" name="Text 12"/>
+          <p:cNvSpPr/>
+          <p:nvPr/>
+        </p:nvSpPr>
+        <p:spPr>
+          <a:xfrm>
+            <a:off x="658368" y="4773168"/>
+            <a:ext cx="3246120" cy="822960"/>
+          </a:xfrm>
+          <a:prstGeom prst="rect">
+            <a:avLst/>
+          </a:prstGeom>
+          <a:noFill/>
+          <a:ln/>
+        </p:spPr>
+        <p:txBody>
+          <a:bodyPr wrap="square" lIns="0" tIns="0" rIns="0" bIns="0" rtlCol="0" anchor="t"/>
+          <a:lstStyle/>
           <a:p>
             <a:pPr indent="0" marL="0">
               <a:lnSpc>
-                <a:spcPct val="100000"/>
+                <a:spcPct val="105000"/>
               </a:lnSpc>
               <a:buNone/>
             </a:pPr>
             <a:r>
-              <a:rPr lang="en-US" sz="1150" dirty="0">
-                <a:solidFill>
-                  <a:srgbClr val="0097A7"/>
-                </a:solidFill>
-                <a:latin typeface="Courier New" pitchFamily="34" charset="0"/>
-                <a:ea typeface="Courier New" pitchFamily="34" charset="-122"/>
-                <a:cs typeface="Courier New" pitchFamily="34" charset="-120"/>
-              </a:rPr>
-              <a:t>MPTMAX   =  12   process ceiling</a:t>
-            </a:r>
-            <a:endParaRPr lang="en-US" sz="1150" dirty="0"/>
-          </a:p>
-        </p:txBody>
-      </p:sp>
-      <p:sp>
-        <p:nvSpPr>
-          <p:cNvPr id="10" name="Text 8"/>
-          <p:cNvSpPr/>
-          <p:nvPr/>
-        </p:nvSpPr>
-        <p:spPr>
-          <a:xfrm>
-            <a:off x="685800" y="3703320"/>
-            <a:ext cx="5120640" cy="548640"/>
-          </a:xfrm>
-          <a:prstGeom prst="rect">
-            <a:avLst/>
-          </a:prstGeom>
-          <a:noFill/>
-          <a:ln/>
-        </p:spPr>
-        <p:txBody>
-          <a:bodyPr wrap="square" lIns="0" tIns="0" rIns="0" bIns="0" rtlCol="0" anchor="t"/>
-          <a:lstStyle/>
-          <a:p>
-            <a:pPr indent="0" marL="0">
-              <a:buNone/>
-            </a:pPr>
-            <a:r>
-              <a:rPr lang="en-US" sz="1100" dirty="0">
-                <a:solidFill>
-                  <a:srgbClr val="00357A"/>
-                </a:solidFill>
-                <a:latin typeface="Poppins" pitchFamily="34" charset="0"/>
-                <a:ea typeface="Poppins" pitchFamily="34" charset="-122"/>
-                <a:cs typeface="Poppins" pitchFamily="34" charset="-120"/>
-              </a:rPr>
-              <a:t>A small divisor with a high cap: lots of tar work should spread wide.</a:t>
-            </a:r>
-            <a:endParaRPr lang="en-US" sz="1100" dirty="0"/>
-          </a:p>
-        </p:txBody>
-      </p:sp>
-      <p:sp>
-        <p:nvSpPr>
-          <p:cNvPr id="11" name="Shape 9"/>
-          <p:cNvSpPr/>
-          <p:nvPr/>
-        </p:nvSpPr>
-        <p:spPr>
-          <a:xfrm>
-            <a:off x="6309360" y="2148840"/>
-            <a:ext cx="5440680" cy="2286000"/>
+              <a:rPr lang="en-US" sz="1000" dirty="0">
+                <a:solidFill>
+                  <a:srgbClr val="53565A"/>
+                </a:solidFill>
+                <a:latin typeface="Poppins" pitchFamily="34" charset="0"/>
+                <a:ea typeface="Poppins" pitchFamily="34" charset="-122"/>
+                <a:cs typeface="Poppins" pitchFamily="34" charset="-120"/>
+              </a:rPr>
+              <a:t>How long the job has been running, how far along it is, and the PBS job id with the node it landed on. A failed check carries the error message here instead.</a:t>
+            </a:r>
+            <a:endParaRPr lang="en-US" sz="1000" dirty="0"/>
+          </a:p>
+        </p:txBody>
+      </p:sp>
+      <p:sp>
+        <p:nvSpPr>
+          <p:cNvPr id="15" name="Shape 13"/>
+          <p:cNvSpPr/>
+          <p:nvPr/>
+        </p:nvSpPr>
+        <p:spPr>
+          <a:xfrm>
+            <a:off x="4297680" y="4370832"/>
+            <a:ext cx="3611880" cy="1298448"/>
           </a:xfrm>
           <a:prstGeom prst="roundRect">
             <a:avLst>
-              <a:gd name="adj" fmla="val 4000"/>
+              <a:gd name="adj" fmla="val 6338"/>
             </a:avLst>
           </a:prstGeom>
           <a:solidFill>
-            <a:srgbClr val="FFFFFF"/>
+            <a:srgbClr val="DCEBF7"/>
           </a:solidFill>
           <a:ln w="19050">
             <a:solidFill>
@@ -16634,14 +17168,14 @@
       </p:sp>
       <p:sp>
         <p:nvSpPr>
-          <p:cNvPr id="12" name="Text 10"/>
-          <p:cNvSpPr/>
-          <p:nvPr/>
-        </p:nvSpPr>
-        <p:spPr>
-          <a:xfrm>
-            <a:off x="6537960" y="2286000"/>
-            <a:ext cx="5029200" cy="320040"/>
+          <p:cNvPr id="16" name="Text 14"/>
+          <p:cNvSpPr/>
+          <p:nvPr/>
+        </p:nvSpPr>
+        <p:spPr>
+          <a:xfrm>
+            <a:off x="4498848" y="4462272"/>
+            <a:ext cx="3246120" cy="292608"/>
           </a:xfrm>
           <a:prstGeom prst="rect">
             <a:avLst/>
@@ -16657,46 +17191,49 @@
               <a:buNone/>
             </a:pPr>
             <a:r>
-              <a:rPr lang="en-US" sz="1500" b="1" dirty="0">
+              <a:rPr lang="en-US" sz="1150" b="1" dirty="0">
                 <a:solidFill>
                   <a:srgbClr val="0097A7"/>
                 </a:solidFill>
-                <a:latin typeface="Poppins" pitchFamily="34" charset="0"/>
-                <a:ea typeface="Poppins" pitchFamily="34" charset="-122"/>
-                <a:cs typeface="Poppins" pitchFamily="34" charset="-120"/>
-              </a:rPr>
-              <a:t>Uploading   (-A 4)</a:t>
-            </a:r>
-            <a:endParaRPr lang="en-US" sz="1500" dirty="0"/>
-          </a:p>
-        </p:txBody>
-      </p:sp>
-      <p:sp>
-        <p:nvSpPr>
-          <p:cNvPr id="13" name="Text 11"/>
-          <p:cNvSpPr/>
-          <p:nvPr/>
-        </p:nvSpPr>
-        <p:spPr>
-          <a:xfrm>
-            <a:off x="6537960" y="2606040"/>
-            <a:ext cx="5029200" cy="274320"/>
-          </a:xfrm>
-          <a:prstGeom prst="rect">
-            <a:avLst/>
-          </a:prstGeom>
-          <a:noFill/>
-          <a:ln/>
-        </p:spPr>
-        <p:txBody>
-          <a:bodyPr wrap="square" lIns="0" tIns="0" rIns="0" bIns="0" rtlCol="0" anchor="ctr"/>
-          <a:lstStyle/>
-          <a:p>
-            <a:pPr indent="0" marL="0">
-              <a:buNone/>
-            </a:pPr>
-            <a:r>
-              <a:rPr lang="en-US" sz="1150" dirty="0">
+                <a:latin typeface="Courier New" pitchFamily="34" charset="0"/>
+                <a:ea typeface="Courier New" pitchFamily="34" charset="-122"/>
+                <a:cs typeface="Courier New" pitchFamily="34" charset="-120"/>
+              </a:rPr>
+              <a:t>FileCount / DoneCount</a:t>
+            </a:r>
+            <a:endParaRPr lang="en-US" sz="1150" dirty="0"/>
+          </a:p>
+        </p:txBody>
+      </p:sp>
+      <p:sp>
+        <p:nvSpPr>
+          <p:cNvPr id="17" name="Text 15"/>
+          <p:cNvSpPr/>
+          <p:nvPr/>
+        </p:nvSpPr>
+        <p:spPr>
+          <a:xfrm>
+            <a:off x="4498848" y="4773168"/>
+            <a:ext cx="3246120" cy="822960"/>
+          </a:xfrm>
+          <a:prstGeom prst="rect">
+            <a:avLst/>
+          </a:prstGeom>
+          <a:noFill/>
+          <a:ln/>
+        </p:spPr>
+        <p:txBody>
+          <a:bodyPr wrap="square" lIns="0" tIns="0" rIns="0" bIns="0" rtlCol="0" anchor="t"/>
+          <a:lstStyle/>
+          <a:p>
+            <a:pPr indent="0" marL="0">
+              <a:lnSpc>
+                <a:spcPct val="105000"/>
+              </a:lnSpc>
+              <a:buNone/>
+            </a:pPr>
+            <a:r>
+              <a:rPr lang="en-US" sz="1000" dirty="0">
                 <a:solidFill>
                   <a:srgbClr val="53565A"/>
                 </a:solidFill>
@@ -16704,26 +17241,134 @@
                 <a:ea typeface="Poppins" pitchFamily="34" charset="-122"/>
                 <a:cs typeface="Poppins" pitchFamily="34" charset="-120"/>
               </a:rPr>
-              <a:t>One child per 90 GB batch — few large, network-bound units.</a:t>
-            </a:r>
-            <a:endParaRPr lang="en-US" sz="1150" dirty="0"/>
-          </a:p>
-        </p:txBody>
-      </p:sp>
-      <p:sp>
-        <p:nvSpPr>
-          <p:cNvPr id="14" name="Shape 12"/>
-          <p:cNvSpPr/>
-          <p:nvPr/>
-        </p:nvSpPr>
-        <p:spPr>
-          <a:xfrm>
-            <a:off x="6537960" y="2926080"/>
-            <a:ext cx="5029200" cy="685800"/>
+              <a:t>The work in the record and the part of it finished, which is where the percentage comes from. Unchanged between two checks means the job is alive but not progressing.</a:t>
+            </a:r>
+            <a:endParaRPr lang="en-US" sz="1000" dirty="0"/>
+          </a:p>
+        </p:txBody>
+      </p:sp>
+      <p:sp>
+        <p:nvSpPr>
+          <p:cNvPr id="18" name="Shape 16"/>
+          <p:cNvSpPr/>
+          <p:nvPr/>
+        </p:nvSpPr>
+        <p:spPr>
+          <a:xfrm>
+            <a:off x="8138160" y="4370832"/>
+            <a:ext cx="3611880" cy="1298448"/>
           </a:xfrm>
           <a:prstGeom prst="roundRect">
             <a:avLst>
-              <a:gd name="adj" fmla="val 6667"/>
+              <a:gd name="adj" fmla="val 6338"/>
+            </a:avLst>
+          </a:prstGeom>
+          <a:solidFill>
+            <a:srgbClr val="DCEBF7"/>
+          </a:solidFill>
+          <a:ln w="19050">
+            <a:solidFill>
+              <a:srgbClr val="C25E00"/>
+            </a:solidFill>
+            <a:prstDash val="solid"/>
+          </a:ln>
+        </p:spPr>
+      </p:sp>
+      <p:sp>
+        <p:nvSpPr>
+          <p:cNvPr id="19" name="Text 17"/>
+          <p:cNvSpPr/>
+          <p:nvPr/>
+        </p:nvSpPr>
+        <p:spPr>
+          <a:xfrm>
+            <a:off x="8339328" y="4462272"/>
+            <a:ext cx="3246120" cy="292608"/>
+          </a:xfrm>
+          <a:prstGeom prst="rect">
+            <a:avLst/>
+          </a:prstGeom>
+          <a:noFill/>
+          <a:ln/>
+        </p:spPr>
+        <p:txBody>
+          <a:bodyPr wrap="square" lIns="0" tIns="0" rIns="0" bIns="0" rtlCol="0" anchor="ctr"/>
+          <a:lstStyle/>
+          <a:p>
+            <a:pPr indent="0" marL="0">
+              <a:buNone/>
+            </a:pPr>
+            <a:r>
+              <a:rPr lang="en-US" sz="1150" b="1" dirty="0">
+                <a:solidFill>
+                  <a:srgbClr val="C25E00"/>
+                </a:solidFill>
+                <a:latin typeface="Courier New" pitchFamily="34" charset="0"/>
+                <a:ea typeface="Courier New" pitchFamily="34" charset="-122"/>
+                <a:cs typeface="Courier New" pitchFamily="34" charset="-120"/>
+              </a:rPr>
+              <a:t>ArgumentVector</a:t>
+            </a:r>
+            <a:endParaRPr lang="en-US" sz="1150" dirty="0"/>
+          </a:p>
+        </p:txBody>
+      </p:sp>
+      <p:sp>
+        <p:nvSpPr>
+          <p:cNvPr id="20" name="Text 18"/>
+          <p:cNvSpPr/>
+          <p:nvPr/>
+        </p:nvSpPr>
+        <p:spPr>
+          <a:xfrm>
+            <a:off x="8339328" y="4773168"/>
+            <a:ext cx="3246120" cy="822960"/>
+          </a:xfrm>
+          <a:prstGeom prst="rect">
+            <a:avLst/>
+          </a:prstGeom>
+          <a:noFill/>
+          <a:ln/>
+        </p:spPr>
+        <p:txBody>
+          <a:bodyPr wrap="square" lIns="0" tIns="0" rIns="0" bIns="0" rtlCol="0" anchor="t"/>
+          <a:lstStyle/>
+          <a:p>
+            <a:pPr indent="0" marL="0">
+              <a:lnSpc>
+                <a:spcPct val="105000"/>
+              </a:lnSpc>
+              <a:buNone/>
+            </a:pPr>
+            <a:r>
+              <a:rPr lang="en-US" sz="1000" dirty="0">
+                <a:solidFill>
+                  <a:srgbClr val="53565A"/>
+                </a:solidFill>
+                <a:latin typeface="Poppins" pitchFamily="34" charset="0"/>
+                <a:ea typeface="Poppins" pitchFamily="34" charset="-122"/>
+                <a:cs typeface="Poppins" pitchFamily="34" charset="-120"/>
+              </a:rPr>
+              <a:t>The duplicate key. The second record differs only by -w 2, the extra worker slot, which is exactly why it gets a record of its own.</a:t>
+            </a:r>
+            <a:endParaRPr lang="en-US" sz="1000" dirty="0"/>
+          </a:p>
+        </p:txBody>
+      </p:sp>
+      <p:sp>
+        <p:nvSpPr>
+          <p:cNvPr id="21" name="Shape 19"/>
+          <p:cNvSpPr/>
+          <p:nvPr/>
+        </p:nvSpPr>
+        <p:spPr>
+          <a:xfrm>
+            <a:off x="457200" y="5760720"/>
+            <a:ext cx="11292840" cy="502920"/>
+          </a:xfrm>
+          <a:prstGeom prst="roundRect">
+            <a:avLst>
+              <a:gd name="adj" fmla="val 14545"/>
             </a:avLst>
           </a:prstGeom>
           <a:solidFill>
@@ -16734,14 +17379,14 @@
       </p:sp>
       <p:sp>
         <p:nvSpPr>
-          <p:cNvPr id="15" name="Text 13"/>
-          <p:cNvSpPr/>
-          <p:nvPr/>
-        </p:nvSpPr>
-        <p:spPr>
-          <a:xfrm>
-            <a:off x="6665976" y="2926080"/>
-            <a:ext cx="4773168" cy="685800"/>
+          <p:cNvPr id="22" name="Text 20"/>
+          <p:cNvSpPr/>
+          <p:nvPr/>
+        </p:nvSpPr>
+        <p:spPr>
+          <a:xfrm>
+            <a:off x="658368" y="5760720"/>
+            <a:ext cx="10881360" cy="502920"/>
           </a:xfrm>
           <a:prstGeom prst="rect">
             <a:avLst/>
@@ -16754,80 +17399,32 @@
           <a:lstStyle/>
           <a:p>
             <a:pPr indent="0" marL="0">
-              <a:lnSpc>
-                <a:spcPct val="100000"/>
-              </a:lnSpc>
-              <a:buNone/>
-            </a:pPr>
-            <a:r>
-              <a:rPr lang="en-US" sz="1150" dirty="0">
-                <a:solidFill>
-                  <a:srgbClr val="0097A7"/>
-                </a:solidFill>
-                <a:latin typeface="Courier New" pitchFamily="34" charset="0"/>
-                <a:ea typeface="Courier New" pitchFamily="34" charset="-122"/>
-                <a:cs typeface="Courier New" pitchFamily="34" charset="-120"/>
-              </a:rPr>
-              <a:t>MPBLIMIT = 5000  tar files per process</a:t>
-            </a:r>
-            <a:endParaRPr lang="en-US" sz="1150" dirty="0"/>
-          </a:p>
-          <a:p>
-            <a:pPr indent="0" marL="0">
-              <a:lnSpc>
-                <a:spcPct val="100000"/>
-              </a:lnSpc>
-              <a:buNone/>
-            </a:pPr>
-            <a:r>
-              <a:rPr lang="en-US" sz="1150" dirty="0">
-                <a:solidFill>
-                  <a:srgbClr val="0097A7"/>
-                </a:solidFill>
-                <a:latin typeface="Courier New" pitchFamily="34" charset="0"/>
-                <a:ea typeface="Courier New" pitchFamily="34" charset="-122"/>
-                <a:cs typeface="Courier New" pitchFamily="34" charset="-120"/>
-              </a:rPr>
-              <a:t>MPBMAX   =    4  process ceiling</a:t>
-            </a:r>
-            <a:endParaRPr lang="en-US" sz="1150" dirty="0"/>
-          </a:p>
-        </p:txBody>
-      </p:sp>
-      <p:sp>
-        <p:nvSpPr>
-          <p:cNvPr id="16" name="Text 14"/>
-          <p:cNvSpPr/>
-          <p:nvPr/>
-        </p:nvSpPr>
-        <p:spPr>
-          <a:xfrm>
-            <a:off x="6537960" y="3703320"/>
-            <a:ext cx="5029200" cy="548640"/>
-          </a:xfrm>
-          <a:prstGeom prst="rect">
-            <a:avLst/>
-          </a:prstGeom>
-          <a:noFill/>
-          <a:ln/>
-        </p:spPr>
-        <p:txBody>
-          <a:bodyPr wrap="square" lIns="0" tIns="0" rIns="0" bIns="0" rtlCol="0" anchor="t"/>
-          <a:lstStyle/>
-          <a:p>
+              <a:buNone/>
+            </a:pPr>
+            <a:r>
+              <a:rPr lang="en-US" sz="1100" b="1" dirty="0">
+                <a:solidFill>
+                  <a:srgbClr val="42C0FF"/>
+                </a:solidFill>
+                <a:latin typeface="Poppins" pitchFamily="34" charset="0"/>
+                <a:ea typeface="Poppins" pitchFamily="34" charset="-122"/>
+                <a:cs typeface="Poppins" pitchFamily="34" charset="-120"/>
+              </a:rPr>
+              <a:t>A long-running record is not by itself a problem.  </a:t>
+            </a:r>
             <a:pPr indent="0" marL="0">
               <a:buNone/>
             </a:pPr>
             <a:r>
               <a:rPr lang="en-US" sz="1100" dirty="0">
                 <a:solidFill>
-                  <a:srgbClr val="00357A"/>
-                </a:solidFill>
-                <a:latin typeface="Poppins" pitchFamily="34" charset="0"/>
-                <a:ea typeface="Poppins" pitchFamily="34" charset="-122"/>
-                <a:cs typeface="Poppins" pitchFamily="34" charset="-120"/>
-              </a:rPr>
-              <a:t>A large divisor with a low cap: more Globus streams do not move more bytes.</a:t>
+                  <a:srgbClr val="C3D7EE"/>
+                </a:solidFill>
+                <a:latin typeface="Poppins" pitchFamily="34" charset="0"/>
+                <a:ea typeface="Poppins" pitchFamily="34" charset="-122"/>
+                <a:cs typeface="Poppins" pitchFamily="34" charset="-120"/>
+              </a:rPr>
+              <a:t>A first pass over a big archive legitimately runs for hours. The one to look at is the record whose DoneCount stops moving — it holds the duplicate key, so every later cron line blocks behind it.</a:t>
             </a:r>
             <a:endParaRPr lang="en-US" sz="1100" dirty="0"/>
           </a:p>
@@ -16835,168 +17432,7 @@
       </p:sp>
       <p:sp>
         <p:nvSpPr>
-          <p:cNvPr id="17" name="Text 15"/>
-          <p:cNvSpPr/>
-          <p:nvPr/>
-        </p:nvSpPr>
-        <p:spPr>
-          <a:xfrm>
-            <a:off x="457200" y="4572000"/>
-            <a:ext cx="11292840" cy="320040"/>
-          </a:xfrm>
-          <a:prstGeom prst="rect">
-            <a:avLst/>
-          </a:prstGeom>
-          <a:noFill/>
-          <a:ln/>
-        </p:spPr>
-        <p:txBody>
-          <a:bodyPr wrap="square" lIns="0" tIns="0" rIns="0" bIns="0" rtlCol="0" anchor="ctr"/>
-          <a:lstStyle/>
-          <a:p>
-            <a:pPr indent="0" marL="0">
-              <a:buNone/>
-            </a:pPr>
-            <a:r>
-              <a:rPr lang="en-US" sz="1500" b="1" dirty="0">
-                <a:solidFill>
-                  <a:srgbClr val="00357A"/>
-                </a:solidFill>
-                <a:latin typeface="Poppins" pitchFamily="34" charset="0"/>
-                <a:ea typeface="Poppins" pitchFamily="34" charset="-122"/>
-                <a:cs typeface="Poppins" pitchFamily="34" charset="-120"/>
-              </a:rPr>
-              <a:t>Why the two sets of numbers</a:t>
-            </a:r>
-            <a:endParaRPr lang="en-US" sz="1500" dirty="0"/>
-          </a:p>
-        </p:txBody>
-      </p:sp>
-      <p:sp>
-        <p:nvSpPr>
-          <p:cNvPr id="18" name="Text 16"/>
-          <p:cNvSpPr/>
-          <p:nvPr/>
-        </p:nvSpPr>
-        <p:spPr>
-          <a:xfrm>
-            <a:off x="457200" y="4892040"/>
-            <a:ext cx="11292840" cy="502920"/>
-          </a:xfrm>
-          <a:prstGeom prst="rect">
-            <a:avLst/>
-          </a:prstGeom>
-          <a:noFill/>
-          <a:ln/>
-        </p:spPr>
-        <p:txBody>
-          <a:bodyPr wrap="square" lIns="0" tIns="0" rIns="0" bIns="0" rtlCol="0" anchor="t"/>
-          <a:lstStyle/>
-          <a:p>
-            <a:pPr indent="0" marL="0">
-              <a:lnSpc>
-                <a:spcPct val="105000"/>
-              </a:lnSpc>
-              <a:buNone/>
-            </a:pPr>
-            <a:r>
-              <a:rPr lang="en-US" sz="1200" dirty="0">
-                <a:solidFill>
-                  <a:srgbClr val="53565A"/>
-                </a:solidFill>
-                <a:latin typeface="Poppins" pitchFamily="34" charset="0"/>
-                <a:ea typeface="Poppins" pitchFamily="34" charset="-122"/>
-                <a:cs typeface="Poppins" pitchFamily="34" charset="-120"/>
-              </a:rPr>
-              <a:t>Both phases once shared a single limit. Tarring came out under-provisioned while uploading reserved cpus it could never use — cpus that PBS charges for and that other jobs then cannot have. Splitting the constants fixed both ends.</a:t>
-            </a:r>
-            <a:endParaRPr lang="en-US" sz="1200" dirty="0"/>
-          </a:p>
-        </p:txBody>
-      </p:sp>
-      <p:sp>
-        <p:nvSpPr>
-          <p:cNvPr id="19" name="Shape 17"/>
-          <p:cNvSpPr/>
-          <p:nvPr/>
-        </p:nvSpPr>
-        <p:spPr>
-          <a:xfrm>
-            <a:off x="457200" y="5486400"/>
-            <a:ext cx="11292840" cy="548640"/>
-          </a:xfrm>
-          <a:prstGeom prst="roundRect">
-            <a:avLst>
-              <a:gd name="adj" fmla="val 13333"/>
-            </a:avLst>
-          </a:prstGeom>
-          <a:solidFill>
-            <a:srgbClr val="C7E4F5"/>
-          </a:solidFill>
-          <a:ln w="12700">
-            <a:solidFill>
-              <a:srgbClr val="A9D6F2"/>
-            </a:solidFill>
-            <a:prstDash val="solid"/>
-          </a:ln>
-        </p:spPr>
-      </p:sp>
-      <p:sp>
-        <p:nvSpPr>
-          <p:cNvPr id="20" name="Text 18"/>
-          <p:cNvSpPr/>
-          <p:nvPr/>
-        </p:nvSpPr>
-        <p:spPr>
-          <a:xfrm>
-            <a:off x="658368" y="5486400"/>
-            <a:ext cx="10881360" cy="548640"/>
-          </a:xfrm>
-          <a:prstGeom prst="rect">
-            <a:avLst/>
-          </a:prstGeom>
-          <a:noFill/>
-          <a:ln/>
-        </p:spPr>
-        <p:txBody>
-          <a:bodyPr wrap="square" lIns="0" tIns="0" rIns="0" bIns="0" rtlCol="0" anchor="ctr"/>
-          <a:lstStyle/>
-          <a:p>
-            <a:pPr indent="0" marL="0">
-              <a:buNone/>
-            </a:pPr>
-            <a:r>
-              <a:rPr lang="en-US" sz="1150" b="1" dirty="0">
-                <a:solidFill>
-                  <a:srgbClr val="0057C2"/>
-                </a:solidFill>
-                <a:latin typeface="Poppins" pitchFamily="34" charset="0"/>
-                <a:ea typeface="Poppins" pitchFamily="34" charset="-122"/>
-                <a:cs typeface="Poppins" pitchFamily="34" charset="-120"/>
-              </a:rPr>
-              <a:t>-m sets the count by hand.  </a:t>
-            </a:r>
-            <a:pPr indent="0" marL="0">
-              <a:buNone/>
-            </a:pPr>
-            <a:r>
-              <a:rPr lang="en-US" sz="1150" dirty="0">
-                <a:solidFill>
-                  <a:srgbClr val="00357A"/>
-                </a:solidFill>
-                <a:latin typeface="Poppins" pitchFamily="34" charset="0"/>
-                <a:ea typeface="Poppins" pitchFamily="34" charset="-122"/>
-                <a:cs typeface="Poppins" pitchFamily="34" charset="-120"/>
-              </a:rPr>
-              <a:t>With no -m, a delayed run sizes itself and reads the count back from the reserved PBS ncpus. An explicit -m always wins — including -m 1 to force a single process.</a:t>
-            </a:r>
-            <a:endParaRPr lang="en-US" sz="1150" dirty="0"/>
-          </a:p>
-        </p:txBody>
-      </p:sp>
-      <p:sp>
-        <p:nvSpPr>
-          <p:cNvPr id="21" name="Text 19"/>
+          <p:cNvPr id="23" name="Text 21"/>
           <p:cNvSpPr/>
           <p:nvPr/>
         </p:nvSpPr>
@@ -17035,7 +17471,7 @@
       </p:sp>
       <p:sp>
         <p:nvSpPr>
-          <p:cNvPr id="22" name="Text 20"/>
+          <p:cNvPr id="24" name="Text 22"/>
           <p:cNvSpPr/>
           <p:nvPr/>
         </p:nvSpPr>
@@ -17124,13 +17560,13 @@
             <a:r>
               <a:rPr lang="en-US" sz="1200" b="1" spc="200" kern="0" dirty="0">
                 <a:solidFill>
-                  <a:srgbClr val="42C0FF"/>
-                </a:solidFill>
-                <a:latin typeface="Poppins" pitchFamily="34" charset="0"/>
-                <a:ea typeface="Poppins" pitchFamily="34" charset="-122"/>
-                <a:cs typeface="Poppins" pitchFamily="34" charset="-120"/>
-              </a:rPr>
-              <a:t>WALLTIME GUARD</a:t>
+                  <a:srgbClr val="0092DB"/>
+                </a:solidFill>
+                <a:latin typeface="Poppins" pitchFamily="34" charset="0"/>
+                <a:ea typeface="Poppins" pitchFamily="34" charset="-122"/>
+                <a:cs typeface="Poppins" pitchFamily="34" charset="-120"/>
+              </a:rPr>
+              <a:t>SCHEDULING</a:t>
             </a:r>
             <a:endParaRPr lang="en-US" sz="1200" dirty="0"/>
           </a:p>
@@ -17163,13 +17599,13 @@
             <a:r>
               <a:rPr lang="en-US" sz="3200" b="1" dirty="0">
                 <a:solidFill>
-                  <a:srgbClr val="FFFFFF"/>
-                </a:solidFill>
-                <a:latin typeface="Poppins" pitchFamily="34" charset="0"/>
-                <a:ea typeface="Poppins" pitchFamily="34" charset="-122"/>
-                <a:cs typeface="Poppins" pitchFamily="34" charset="-120"/>
-              </a:rPr>
-              <a:t>Stopping Cleanly Before PBS Kills the Job</a:t>
+                  <a:srgbClr val="00357A"/>
+                </a:solidFill>
+                <a:latin typeface="Poppins" pitchFamily="34" charset="0"/>
+                <a:ea typeface="Poppins" pitchFamily="34" charset="-122"/>
+                <a:cs typeface="Poppins" pitchFamily="34" charset="-120"/>
+              </a:rPr>
+              <a:t>-fn all  —  The Whole Check Record</a:t>
             </a:r>
             <a:endParaRPr lang="en-US" sz="3200" dirty="0"/>
           </a:p>
@@ -17183,8 +17619,8 @@
         </p:nvSpPr>
         <p:spPr>
           <a:xfrm>
-            <a:off x="457200" y="1481328"/>
-            <a:ext cx="11292840" cy="548640"/>
+            <a:off x="457200" y="1444752"/>
+            <a:ext cx="11292840" cy="365760"/>
           </a:xfrm>
           <a:prstGeom prst="rect">
             <a:avLst/>
@@ -17205,13 +17641,13 @@
             <a:r>
               <a:rPr lang="en-US" sz="1450" dirty="0">
                 <a:solidFill>
-                  <a:srgbClr val="C3D7EE"/>
-                </a:solidFill>
-                <a:latin typeface="Poppins" pitchFamily="34" charset="0"/>
-                <a:ea typeface="Poppins" pitchFamily="34" charset="-122"/>
-                <a:cs typeface="Poppins" pitchFamily="34" charset="-120"/>
-              </a:rPr>
-              <a:t>The queue gives the job 24 hours. A tar file killed halfway through leaves a partial file on disk and a bfile record that claims work is in progress. So dsquasar watches the clock itself.</a:t>
+                  <a:srgbClr val="00357A"/>
+                </a:solidFill>
+                <a:latin typeface="Poppins" pitchFamily="34" charset="0"/>
+                <a:ea typeface="Poppins" pitchFamily="34" charset="-122"/>
+                <a:cs typeface="Poppins" pitchFamily="34" charset="-120"/>
+              </a:rPr>
+              <a:t>The long form prints every column of the record. A few of them say more than the status line does.</a:t>
             </a:r>
             <a:endParaRPr lang="en-US" sz="1450" dirty="0"/>
           </a:p>
@@ -17225,52 +17661,30 @@
         </p:nvSpPr>
         <p:spPr>
           <a:xfrm>
-            <a:off x="822960" y="2514600"/>
-            <a:ext cx="10515600" cy="384048"/>
+            <a:off x="457200" y="1874520"/>
+            <a:ext cx="11292840" cy="914400"/>
           </a:xfrm>
           <a:prstGeom prst="roundRect">
             <a:avLst>
-              <a:gd name="adj" fmla="val 19048"/>
+              <a:gd name="adj" fmla="val 5000"/>
             </a:avLst>
           </a:prstGeom>
           <a:solidFill>
-            <a:srgbClr val="0B2A63"/>
+            <a:srgbClr val="011837"/>
           </a:solidFill>
           <a:ln/>
         </p:spPr>
       </p:sp>
       <p:sp>
         <p:nvSpPr>
-          <p:cNvPr id="6" name="Shape 4"/>
-          <p:cNvSpPr/>
-          <p:nvPr/>
-        </p:nvSpPr>
-        <p:spPr>
-          <a:xfrm>
-            <a:off x="822960" y="2514600"/>
-            <a:ext cx="10077450" cy="384048"/>
-          </a:xfrm>
-          <a:prstGeom prst="roundRect">
-            <a:avLst>
-              <a:gd name="adj" fmla="val 19048"/>
-            </a:avLst>
-          </a:prstGeom>
-          <a:solidFill>
-            <a:srgbClr val="0057C2"/>
-          </a:solidFill>
-          <a:ln/>
-        </p:spPr>
-      </p:sp>
-      <p:sp>
-        <p:nvSpPr>
-          <p:cNvPr id="7" name="Text 5"/>
-          <p:cNvSpPr/>
-          <p:nvPr/>
-        </p:nvSpPr>
-        <p:spPr>
-          <a:xfrm>
-            <a:off x="822960" y="2514600"/>
-            <a:ext cx="10077450" cy="384048"/>
+          <p:cNvPr id="6" name="Text 4"/>
+          <p:cNvSpPr/>
+          <p:nvPr/>
+        </p:nvSpPr>
+        <p:spPr>
+          <a:xfrm>
+            <a:off x="585216" y="1874520"/>
+            <a:ext cx="11036808" cy="914400"/>
           </a:xfrm>
           <a:prstGeom prst="rect">
             <a:avLst/>
@@ -17282,234 +17696,1366 @@
           <a:bodyPr wrap="square" lIns="0" tIns="0" rIns="0" bIns="0" rtlCol="0" anchor="ctr"/>
           <a:lstStyle/>
           <a:p>
-            <a:pPr algn="ctr" indent="0" marL="0">
-              <a:buNone/>
-            </a:pPr>
-            <a:r>
-              <a:rPr lang="en-US" sz="1200" b="1" dirty="0">
-                <a:solidFill>
-                  <a:srgbClr val="FFFFFF"/>
-                </a:solidFill>
-                <a:latin typeface="Poppins" pitchFamily="34" charset="0"/>
-                <a:ea typeface="Poppins" pitchFamily="34" charset="-122"/>
-                <a:cs typeface="Poppins" pitchFamily="34" charset="-120"/>
-              </a:rPr>
-              <a:t>work accepted   —   0 h to 23 h</a:t>
-            </a:r>
-            <a:endParaRPr lang="en-US" sz="1200" dirty="0"/>
-          </a:p>
-        </p:txBody>
-      </p:sp>
-      <p:sp>
-        <p:nvSpPr>
-          <p:cNvPr id="8" name="Text 6"/>
-          <p:cNvSpPr/>
-          <p:nvPr/>
-        </p:nvSpPr>
-        <p:spPr>
-          <a:xfrm>
-            <a:off x="10900410" y="2496312"/>
-            <a:ext cx="438150" cy="420624"/>
-          </a:xfrm>
-          <a:prstGeom prst="rect">
-            <a:avLst/>
-          </a:prstGeom>
-          <a:noFill/>
-          <a:ln/>
-        </p:spPr>
-        <p:txBody>
-          <a:bodyPr wrap="square" lIns="0" tIns="0" rIns="0" bIns="0" rtlCol="0" anchor="ctr"/>
-          <a:lstStyle/>
-          <a:p>
-            <a:pPr algn="ctr" indent="0" marL="0">
-              <a:buNone/>
-            </a:pPr>
-            <a:r>
-              <a:rPr lang="en-US" sz="800" b="1" dirty="0">
-                <a:solidFill>
-                  <a:srgbClr val="42C0FF"/>
-                </a:solidFill>
-                <a:latin typeface="Poppins" pitchFamily="34" charset="0"/>
-                <a:ea typeface="Poppins" pitchFamily="34" charset="-122"/>
-                <a:cs typeface="Poppins" pitchFamily="34" charset="-120"/>
-              </a:rPr>
-              <a:t>wind</a:t>
-            </a:r>
-            <a:endParaRPr lang="en-US" sz="800" dirty="0"/>
-          </a:p>
-          <a:p>
-            <a:pPr algn="ctr" indent="0" marL="0">
-              <a:buNone/>
-            </a:pPr>
-            <a:r>
-              <a:rPr lang="en-US" sz="800" b="1" dirty="0">
-                <a:solidFill>
-                  <a:srgbClr val="42C0FF"/>
-                </a:solidFill>
-                <a:latin typeface="Poppins" pitchFamily="34" charset="0"/>
-                <a:ea typeface="Poppins" pitchFamily="34" charset="-122"/>
-                <a:cs typeface="Poppins" pitchFamily="34" charset="-120"/>
-              </a:rPr>
-              <a:t>down</a:t>
-            </a:r>
-            <a:endParaRPr lang="en-US" sz="800" dirty="0"/>
-          </a:p>
-        </p:txBody>
-      </p:sp>
-      <p:sp>
-        <p:nvSpPr>
-          <p:cNvPr id="9" name="Text 7"/>
-          <p:cNvSpPr/>
-          <p:nvPr/>
-        </p:nvSpPr>
-        <p:spPr>
-          <a:xfrm>
-            <a:off x="8705850" y="2185416"/>
-            <a:ext cx="2194560" cy="274320"/>
-          </a:xfrm>
-          <a:prstGeom prst="rect">
-            <a:avLst/>
-          </a:prstGeom>
-          <a:noFill/>
-          <a:ln/>
-        </p:spPr>
-        <p:txBody>
-          <a:bodyPr wrap="square" lIns="0" tIns="0" rIns="0" bIns="0" rtlCol="0" anchor="ctr"/>
-          <a:lstStyle/>
-          <a:p>
-            <a:pPr algn="r" indent="0" marL="0">
-              <a:buNone/>
-            </a:pPr>
-            <a:r>
-              <a:rPr lang="en-US" sz="1000" dirty="0">
-                <a:solidFill>
-                  <a:srgbClr val="42C0FF"/>
+            <a:pPr indent="0" marL="0">
+              <a:lnSpc>
+                <a:spcPct val="100000"/>
+              </a:lnSpc>
+              <a:buNone/>
+            </a:pPr>
+            <a:r>
+              <a:rPr lang="en-US" sz="950" dirty="0">
+                <a:solidFill>
+                  <a:srgbClr val="0097A7"/>
                 </a:solidFill>
                 <a:latin typeface="Courier New" pitchFamily="34" charset="0"/>
                 <a:ea typeface="Courier New" pitchFamily="34" charset="-122"/>
                 <a:cs typeface="Courier New" pitchFamily="34" charset="-120"/>
               </a:rPr>
-              <a:t>MAXRUNTIME  23 h</a:t>
-            </a:r>
-            <a:endParaRPr lang="en-US" sz="1000" dirty="0"/>
-          </a:p>
-        </p:txBody>
-      </p:sp>
-      <p:sp>
-        <p:nvSpPr>
-          <p:cNvPr id="10" name="Text 8"/>
-          <p:cNvSpPr/>
-          <p:nvPr/>
-        </p:nvSpPr>
-        <p:spPr>
-          <a:xfrm>
-            <a:off x="822960" y="2971800"/>
-            <a:ext cx="1645920" cy="274320"/>
-          </a:xfrm>
-          <a:prstGeom prst="rect">
-            <a:avLst/>
-          </a:prstGeom>
-          <a:noFill/>
-          <a:ln/>
-        </p:spPr>
-        <p:txBody>
-          <a:bodyPr wrap="square" lIns="0" tIns="0" rIns="0" bIns="0" rtlCol="0" anchor="ctr"/>
-          <a:lstStyle/>
-          <a:p>
-            <a:pPr algn="l" indent="0" marL="0">
-              <a:buNone/>
-            </a:pPr>
-            <a:r>
-              <a:rPr lang="en-US" sz="1000" dirty="0">
-                <a:solidFill>
-                  <a:srgbClr val="97999B"/>
+              <a:t>CheckIndex&lt;:&gt;Command&lt;:&gt;ArgumentVector&lt;:&gt;Dataset&lt;:&gt;ActionName&lt;:&gt;Status&lt;:&gt;PBSQueue&lt;:&gt;ParentIndex&lt;:&gt;DownFlags&lt;:&gt;</a:t>
+            </a:r>
+            <a:endParaRPr lang="en-US" sz="950" dirty="0"/>
+          </a:p>
+          <a:p>
+            <a:pPr indent="0" marL="0">
+              <a:lnSpc>
+                <a:spcPct val="100000"/>
+              </a:lnSpc>
+              <a:buNone/>
+            </a:pPr>
+            <a:r>
+              <a:rPr lang="en-US" sz="950" dirty="0">
+                <a:solidFill>
+                  <a:srgbClr val="0097A7"/>
                 </a:solidFill>
                 <a:latin typeface="Courier New" pitchFamily="34" charset="0"/>
                 <a:ea typeface="Courier New" pitchFamily="34" charset="-122"/>
                 <a:cs typeface="Courier New" pitchFamily="34" charset="-120"/>
               </a:rPr>
-              <a:t>0 h</a:t>
-            </a:r>
-            <a:endParaRPr lang="en-US" sz="1000" dirty="0"/>
-          </a:p>
-        </p:txBody>
-      </p:sp>
-      <p:sp>
-        <p:nvSpPr>
-          <p:cNvPr id="11" name="Text 9"/>
-          <p:cNvSpPr/>
-          <p:nvPr/>
-        </p:nvSpPr>
-        <p:spPr>
-          <a:xfrm>
-            <a:off x="9144000" y="2971800"/>
-            <a:ext cx="2194560" cy="274320"/>
-          </a:xfrm>
-          <a:prstGeom prst="rect">
-            <a:avLst/>
-          </a:prstGeom>
-          <a:noFill/>
-          <a:ln/>
-        </p:spPr>
-        <p:txBody>
-          <a:bodyPr wrap="square" lIns="0" tIns="0" rIns="0" bIns="0" rtlCol="0" anchor="ctr"/>
-          <a:lstStyle/>
-          <a:p>
-            <a:pPr algn="r" indent="0" marL="0">
-              <a:buNone/>
-            </a:pPr>
-            <a:r>
-              <a:rPr lang="en-US" sz="1000" dirty="0">
-                <a:solidFill>
-                  <a:srgbClr val="97999B"/>
+              <a:t>FileCount&lt;:&gt;DoneCount&lt;:&gt;TryCount&lt;:&gt;MaxCount&lt;:&gt;DataSize&lt;:&gt;CheckDate&lt;:&gt;CheckTime&lt;:&gt;HostName&lt;:&gt;Specialist&lt;:&gt;</a:t>
+            </a:r>
+            <a:endParaRPr lang="en-US" sz="950" dirty="0"/>
+          </a:p>
+          <a:p>
+            <a:pPr indent="0" marL="0">
+              <a:lnSpc>
+                <a:spcPct val="100000"/>
+              </a:lnSpc>
+              <a:buNone/>
+            </a:pPr>
+            <a:r>
+              <a:rPr lang="en-US" sz="950" dirty="0">
+                <a:solidFill>
+                  <a:srgbClr val="0097A7"/>
                 </a:solidFill>
                 <a:latin typeface="Courier New" pitchFamily="34" charset="0"/>
                 <a:ea typeface="Courier New" pitchFamily="34" charset="-122"/>
                 <a:cs typeface="Courier New" pitchFamily="34" charset="-120"/>
               </a:rPr>
-              <a:t>24 h  PBS walltime</a:t>
-            </a:r>
-            <a:endParaRPr lang="en-US" sz="1000" dirty="0"/>
-          </a:p>
-        </p:txBody>
-      </p:sp>
-      <p:sp>
-        <p:nvSpPr>
-          <p:cNvPr id="12" name="Shape 10"/>
-          <p:cNvSpPr/>
-          <p:nvPr/>
-        </p:nvSpPr>
-        <p:spPr>
-          <a:xfrm>
-            <a:off x="822960" y="3246120"/>
-            <a:ext cx="10515600" cy="621792"/>
+              <a:t>WorkDir&lt;:&gt;Modules&lt;:&gt;Environments&lt;:&gt;QSubOptions&lt;:&gt;ArgumenteXtra&lt;:&gt;ERrormessage&lt;:&gt;</a:t>
+            </a:r>
+            <a:endParaRPr lang="en-US" sz="950" dirty="0"/>
+          </a:p>
+        </p:txBody>
+      </p:sp>
+      <p:graphicFrame>
+        <p:nvGraphicFramePr>
+          <p:cNvPr id="20" name="Table 0"/>
+          <p:cNvGraphicFramePr>
+            <a:graphicFrameLocks noGrp="1"/>
+          </p:cNvGraphicFramePr>
+          <p:nvPr>
+            <p:extLst>
+              <p:ext uri="{D42A27DB-BD31-4B8C-83A1-F6EECF244321}">
+                <p14:modId xmlns:p14="http://schemas.microsoft.com/office/powerpoint/2010/main" val="1579011935"/>
+              </p:ext>
+            </p:extLst>
+          </p:nvPr>
+        </p:nvGraphicFramePr>
+        <p:xfrm>
+          <a:off x="457200" y="2926080"/>
+          <a:ext cx="11292840" cy="914400"/>
+        </p:xfrm>
+        <a:graphic>
+          <a:graphicData uri="http://schemas.openxmlformats.org/drawingml/2006/table">
+            <a:tbl>
+              <a:tblPr/>
+              <a:tblGrid>
+                <a:gridCol w="2286000"/>
+                <a:gridCol w="3931920"/>
+                <a:gridCol w="5074920"/>
+              </a:tblGrid>
+              <a:tr h="365760">
+                <a:tc>
+                  <a:txBody>
+                    <a:bodyPr/>
+                    <a:lstStyle/>
+                    <a:p>
+                      <a:pPr indent="0" marL="0">
+                        <a:buNone/>
+                      </a:pPr>
+                      <a:r>
+                        <a:rPr lang="en-US" sz="1100" b="1" dirty="0">
+                          <a:solidFill>
+                            <a:srgbClr val="FFFFFF"/>
+                          </a:solidFill>
+                          <a:latin typeface="Courier New" pitchFamily="34" charset="0"/>
+                          <a:ea typeface="Courier New" pitchFamily="34" charset="-122"/>
+                          <a:cs typeface="Courier New" pitchFamily="34" charset="-120"/>
+                        </a:rPr>
+                        <a:t>Field</a:t>
+                      </a:r>
+                      <a:endParaRPr lang="en-US" sz="1100" dirty="0">
+                        <a:latin typeface="Courier New" charset="0"/>
+                        <a:ea typeface="Courier New" charset="0"/>
+                        <a:cs typeface="Courier New" charset="0"/>
+                      </a:endParaRPr>
+                    </a:p>
+                  </a:txBody>
+                  <a:tcPr marL="64008" marR="64008" marT="0" marB="0" anchor="ctr">
+                    <a:lnL w="6350" cap="flat" cmpd="sng" algn="ctr">
+                      <a:solidFill>
+                        <a:srgbClr val="A9D6F2"/>
+                      </a:solidFill>
+                      <a:prstDash val="solid"/>
+                      <a:round/>
+                      <a:headEnd type="none" w="med" len="med"/>
+                      <a:tailEnd type="none" w="med" len="med"/>
+                    </a:lnL>
+                    <a:lnR w="6350" cap="flat" cmpd="sng" algn="ctr">
+                      <a:solidFill>
+                        <a:srgbClr val="A9D6F2"/>
+                      </a:solidFill>
+                      <a:prstDash val="solid"/>
+                      <a:round/>
+                      <a:headEnd type="none" w="med" len="med"/>
+                      <a:tailEnd type="none" w="med" len="med"/>
+                    </a:lnR>
+                    <a:lnT w="6350" cap="flat" cmpd="sng" algn="ctr">
+                      <a:solidFill>
+                        <a:srgbClr val="A9D6F2"/>
+                      </a:solidFill>
+                      <a:prstDash val="solid"/>
+                      <a:round/>
+                      <a:headEnd type="none" w="med" len="med"/>
+                      <a:tailEnd type="none" w="med" len="med"/>
+                    </a:lnT>
+                    <a:lnB w="6350" cap="flat" cmpd="sng" algn="ctr">
+                      <a:solidFill>
+                        <a:srgbClr val="A9D6F2"/>
+                      </a:solidFill>
+                      <a:prstDash val="solid"/>
+                      <a:round/>
+                      <a:headEnd type="none" w="med" len="med"/>
+                      <a:tailEnd type="none" w="med" len="med"/>
+                    </a:lnB>
+                    <a:solidFill>
+                      <a:srgbClr val="0092DB"/>
+                    </a:solidFill>
+                  </a:tcPr>
+                </a:tc>
+                <a:tc>
+                  <a:txBody>
+                    <a:bodyPr/>
+                    <a:lstStyle/>
+                    <a:p>
+                      <a:pPr indent="0" marL="0">
+                        <a:buNone/>
+                      </a:pPr>
+                      <a:r>
+                        <a:rPr lang="en-US" sz="1100" b="1" dirty="0">
+                          <a:solidFill>
+                            <a:srgbClr val="FFFFFF"/>
+                          </a:solidFill>
+                          <a:latin typeface="Poppins" pitchFamily="34" charset="0"/>
+                          <a:ea typeface="Poppins" pitchFamily="34" charset="-122"/>
+                          <a:cs typeface="Poppins" pitchFamily="34" charset="-120"/>
+                        </a:rPr>
+                        <a:t>Value in the sample</a:t>
+                      </a:r>
+                      <a:endParaRPr lang="en-US" sz="1100" dirty="0">
+                        <a:latin typeface="Poppins" charset="0"/>
+                        <a:ea typeface="Poppins" charset="0"/>
+                        <a:cs typeface="Poppins" charset="0"/>
+                      </a:endParaRPr>
+                    </a:p>
+                  </a:txBody>
+                  <a:tcPr marL="64008" marR="64008" marT="0" marB="0" anchor="ctr">
+                    <a:lnL w="6350" cap="flat" cmpd="sng" algn="ctr">
+                      <a:solidFill>
+                        <a:srgbClr val="A9D6F2"/>
+                      </a:solidFill>
+                      <a:prstDash val="solid"/>
+                      <a:round/>
+                      <a:headEnd type="none" w="med" len="med"/>
+                      <a:tailEnd type="none" w="med" len="med"/>
+                    </a:lnL>
+                    <a:lnR w="6350" cap="flat" cmpd="sng" algn="ctr">
+                      <a:solidFill>
+                        <a:srgbClr val="A9D6F2"/>
+                      </a:solidFill>
+                      <a:prstDash val="solid"/>
+                      <a:round/>
+                      <a:headEnd type="none" w="med" len="med"/>
+                      <a:tailEnd type="none" w="med" len="med"/>
+                    </a:lnR>
+                    <a:lnT w="6350" cap="flat" cmpd="sng" algn="ctr">
+                      <a:solidFill>
+                        <a:srgbClr val="A9D6F2"/>
+                      </a:solidFill>
+                      <a:prstDash val="solid"/>
+                      <a:round/>
+                      <a:headEnd type="none" w="med" len="med"/>
+                      <a:tailEnd type="none" w="med" len="med"/>
+                    </a:lnT>
+                    <a:lnB w="6350" cap="flat" cmpd="sng" algn="ctr">
+                      <a:solidFill>
+                        <a:srgbClr val="A9D6F2"/>
+                      </a:solidFill>
+                      <a:prstDash val="solid"/>
+                      <a:round/>
+                      <a:headEnd type="none" w="med" len="med"/>
+                      <a:tailEnd type="none" w="med" len="med"/>
+                    </a:lnB>
+                    <a:solidFill>
+                      <a:srgbClr val="0092DB"/>
+                    </a:solidFill>
+                  </a:tcPr>
+                </a:tc>
+                <a:tc>
+                  <a:txBody>
+                    <a:bodyPr/>
+                    <a:lstStyle/>
+                    <a:p>
+                      <a:pPr indent="0" marL="0">
+                        <a:buNone/>
+                      </a:pPr>
+                      <a:r>
+                        <a:rPr lang="en-US" sz="1100" b="1" dirty="0">
+                          <a:solidFill>
+                            <a:srgbClr val="FFFFFF"/>
+                          </a:solidFill>
+                          <a:latin typeface="Poppins" pitchFamily="34" charset="0"/>
+                          <a:ea typeface="Poppins" pitchFamily="34" charset="-122"/>
+                          <a:cs typeface="Poppins" pitchFamily="34" charset="-120"/>
+                        </a:rPr>
+                        <a:t>What it tells you</a:t>
+                      </a:r>
+                      <a:endParaRPr lang="en-US" sz="1100" dirty="0">
+                        <a:latin typeface="Poppins" charset="0"/>
+                        <a:ea typeface="Poppins" charset="0"/>
+                        <a:cs typeface="Poppins" charset="0"/>
+                      </a:endParaRPr>
+                    </a:p>
+                  </a:txBody>
+                  <a:tcPr marL="64008" marR="64008" marT="0" marB="0" anchor="ctr">
+                    <a:lnL w="6350" cap="flat" cmpd="sng" algn="ctr">
+                      <a:solidFill>
+                        <a:srgbClr val="A9D6F2"/>
+                      </a:solidFill>
+                      <a:prstDash val="solid"/>
+                      <a:round/>
+                      <a:headEnd type="none" w="med" len="med"/>
+                      <a:tailEnd type="none" w="med" len="med"/>
+                    </a:lnL>
+                    <a:lnR w="6350" cap="flat" cmpd="sng" algn="ctr">
+                      <a:solidFill>
+                        <a:srgbClr val="A9D6F2"/>
+                      </a:solidFill>
+                      <a:prstDash val="solid"/>
+                      <a:round/>
+                      <a:headEnd type="none" w="med" len="med"/>
+                      <a:tailEnd type="none" w="med" len="med"/>
+                    </a:lnR>
+                    <a:lnT w="6350" cap="flat" cmpd="sng" algn="ctr">
+                      <a:solidFill>
+                        <a:srgbClr val="A9D6F2"/>
+                      </a:solidFill>
+                      <a:prstDash val="solid"/>
+                      <a:round/>
+                      <a:headEnd type="none" w="med" len="med"/>
+                      <a:tailEnd type="none" w="med" len="med"/>
+                    </a:lnT>
+                    <a:lnB w="6350" cap="flat" cmpd="sng" algn="ctr">
+                      <a:solidFill>
+                        <a:srgbClr val="A9D6F2"/>
+                      </a:solidFill>
+                      <a:prstDash val="solid"/>
+                      <a:round/>
+                      <a:headEnd type="none" w="med" len="med"/>
+                      <a:tailEnd type="none" w="med" len="med"/>
+                    </a:lnB>
+                    <a:solidFill>
+                      <a:srgbClr val="0092DB"/>
+                    </a:solidFill>
+                  </a:tcPr>
+                </a:tc>
+              </a:tr>
+              <a:tr h="365760">
+                <a:tc>
+                  <a:txBody>
+                    <a:bodyPr/>
+                    <a:lstStyle/>
+                    <a:p>
+                      <a:pPr indent="0" marL="0">
+                        <a:buNone/>
+                      </a:pPr>
+                      <a:r>
+                        <a:rPr lang="en-US" sz="1100" b="1" dirty="0">
+                          <a:solidFill>
+                            <a:srgbClr val="0057C2"/>
+                          </a:solidFill>
+                          <a:latin typeface="Courier New" pitchFamily="34" charset="0"/>
+                          <a:ea typeface="Courier New" pitchFamily="34" charset="-122"/>
+                          <a:cs typeface="Courier New" pitchFamily="34" charset="-120"/>
+                        </a:rPr>
+                        <a:t>ActionName</a:t>
+                      </a:r>
+                      <a:endParaRPr lang="en-US" sz="1100" dirty="0">
+                        <a:latin typeface="Courier New" charset="0"/>
+                        <a:ea typeface="Courier New" charset="0"/>
+                        <a:cs typeface="Courier New" charset="0"/>
+                      </a:endParaRPr>
+                    </a:p>
+                  </a:txBody>
+                  <a:tcPr marL="64008" marR="64008" marT="0" marB="0" anchor="ctr">
+                    <a:lnL w="6350" cap="flat" cmpd="sng" algn="ctr">
+                      <a:solidFill>
+                        <a:srgbClr val="A9D6F2"/>
+                      </a:solidFill>
+                      <a:prstDash val="solid"/>
+                      <a:round/>
+                      <a:headEnd type="none" w="med" len="med"/>
+                      <a:tailEnd type="none" w="med" len="med"/>
+                    </a:lnL>
+                    <a:lnR w="6350" cap="flat" cmpd="sng" algn="ctr">
+                      <a:solidFill>
+                        <a:srgbClr val="A9D6F2"/>
+                      </a:solidFill>
+                      <a:prstDash val="solid"/>
+                      <a:round/>
+                      <a:headEnd type="none" w="med" len="med"/>
+                      <a:tailEnd type="none" w="med" len="med"/>
+                    </a:lnR>
+                    <a:lnT w="6350" cap="flat" cmpd="sng" algn="ctr">
+                      <a:solidFill>
+                        <a:srgbClr val="A9D6F2"/>
+                      </a:solidFill>
+                      <a:prstDash val="solid"/>
+                      <a:round/>
+                      <a:headEnd type="none" w="med" len="med"/>
+                      <a:tailEnd type="none" w="med" len="med"/>
+                    </a:lnT>
+                    <a:lnB w="6350" cap="flat" cmpd="sng" algn="ctr">
+                      <a:solidFill>
+                        <a:srgbClr val="A9D6F2"/>
+                      </a:solidFill>
+                      <a:prstDash val="solid"/>
+                      <a:round/>
+                      <a:headEnd type="none" w="med" len="med"/>
+                      <a:tailEnd type="none" w="med" len="med"/>
+                    </a:lnB>
+                    <a:solidFill>
+                      <a:srgbClr val="FFFFFF"/>
+                    </a:solidFill>
+                  </a:tcPr>
+                </a:tc>
+                <a:tc>
+                  <a:txBody>
+                    <a:bodyPr/>
+                    <a:lstStyle/>
+                    <a:p>
+                      <a:pPr indent="0" marL="0">
+                        <a:buNone/>
+                      </a:pPr>
+                      <a:r>
+                        <a:rPr lang="en-US" sz="1100" dirty="0">
+                          <a:solidFill>
+                            <a:srgbClr val="00357A"/>
+                          </a:solidFill>
+                          <a:latin typeface="Poppins" pitchFamily="34" charset="0"/>
+                          <a:ea typeface="Poppins" pitchFamily="34" charset="-122"/>
+                          <a:cs typeface="Poppins" pitchFamily="34" charset="-120"/>
+                        </a:rPr>
+                        <a:t>A3</a:t>
+                      </a:r>
+                      <a:endParaRPr lang="en-US" sz="1100" dirty="0">
+                        <a:latin typeface="Poppins" charset="0"/>
+                        <a:ea typeface="Poppins" charset="0"/>
+                        <a:cs typeface="Poppins" charset="0"/>
+                      </a:endParaRPr>
+                    </a:p>
+                  </a:txBody>
+                  <a:tcPr marL="64008" marR="64008" marT="0" marB="0" anchor="ctr">
+                    <a:lnL w="6350" cap="flat" cmpd="sng" algn="ctr">
+                      <a:solidFill>
+                        <a:srgbClr val="A9D6F2"/>
+                      </a:solidFill>
+                      <a:prstDash val="solid"/>
+                      <a:round/>
+                      <a:headEnd type="none" w="med" len="med"/>
+                      <a:tailEnd type="none" w="med" len="med"/>
+                    </a:lnL>
+                    <a:lnR w="6350" cap="flat" cmpd="sng" algn="ctr">
+                      <a:solidFill>
+                        <a:srgbClr val="A9D6F2"/>
+                      </a:solidFill>
+                      <a:prstDash val="solid"/>
+                      <a:round/>
+                      <a:headEnd type="none" w="med" len="med"/>
+                      <a:tailEnd type="none" w="med" len="med"/>
+                    </a:lnR>
+                    <a:lnT w="6350" cap="flat" cmpd="sng" algn="ctr">
+                      <a:solidFill>
+                        <a:srgbClr val="A9D6F2"/>
+                      </a:solidFill>
+                      <a:prstDash val="solid"/>
+                      <a:round/>
+                      <a:headEnd type="none" w="med" len="med"/>
+                      <a:tailEnd type="none" w="med" len="med"/>
+                    </a:lnT>
+                    <a:lnB w="6350" cap="flat" cmpd="sng" algn="ctr">
+                      <a:solidFill>
+                        <a:srgbClr val="A9D6F2"/>
+                      </a:solidFill>
+                      <a:prstDash val="solid"/>
+                      <a:round/>
+                      <a:headEnd type="none" w="med" len="med"/>
+                      <a:tailEnd type="none" w="med" len="med"/>
+                    </a:lnB>
+                    <a:solidFill>
+                      <a:srgbClr val="FFFFFF"/>
+                    </a:solidFill>
+                  </a:tcPr>
+                </a:tc>
+                <a:tc>
+                  <a:txBody>
+                    <a:bodyPr/>
+                    <a:lstStyle/>
+                    <a:p>
+                      <a:pPr indent="0" marL="0">
+                        <a:buNone/>
+                      </a:pPr>
+                      <a:r>
+                        <a:rPr lang="en-US" sz="1100" dirty="0">
+                          <a:solidFill>
+                            <a:srgbClr val="00357A"/>
+                          </a:solidFill>
+                          <a:latin typeface="Poppins" pitchFamily="34" charset="0"/>
+                          <a:ea typeface="Poppins" pitchFamily="34" charset="-122"/>
+                          <a:cs typeface="Poppins" pitchFamily="34" charset="-120"/>
+                        </a:rPr>
+                        <a:t>Which -A action this record is running</a:t>
+                      </a:r>
+                      <a:endParaRPr lang="en-US" sz="1100" dirty="0">
+                        <a:latin typeface="Poppins" charset="0"/>
+                        <a:ea typeface="Poppins" charset="0"/>
+                        <a:cs typeface="Poppins" charset="0"/>
+                      </a:endParaRPr>
+                    </a:p>
+                  </a:txBody>
+                  <a:tcPr marL="64008" marR="64008" marT="0" marB="0" anchor="ctr">
+                    <a:lnL w="6350" cap="flat" cmpd="sng" algn="ctr">
+                      <a:solidFill>
+                        <a:srgbClr val="A9D6F2"/>
+                      </a:solidFill>
+                      <a:prstDash val="solid"/>
+                      <a:round/>
+                      <a:headEnd type="none" w="med" len="med"/>
+                      <a:tailEnd type="none" w="med" len="med"/>
+                    </a:lnL>
+                    <a:lnR w="6350" cap="flat" cmpd="sng" algn="ctr">
+                      <a:solidFill>
+                        <a:srgbClr val="A9D6F2"/>
+                      </a:solidFill>
+                      <a:prstDash val="solid"/>
+                      <a:round/>
+                      <a:headEnd type="none" w="med" len="med"/>
+                      <a:tailEnd type="none" w="med" len="med"/>
+                    </a:lnR>
+                    <a:lnT w="6350" cap="flat" cmpd="sng" algn="ctr">
+                      <a:solidFill>
+                        <a:srgbClr val="A9D6F2"/>
+                      </a:solidFill>
+                      <a:prstDash val="solid"/>
+                      <a:round/>
+                      <a:headEnd type="none" w="med" len="med"/>
+                      <a:tailEnd type="none" w="med" len="med"/>
+                    </a:lnT>
+                    <a:lnB w="6350" cap="flat" cmpd="sng" algn="ctr">
+                      <a:solidFill>
+                        <a:srgbClr val="A9D6F2"/>
+                      </a:solidFill>
+                      <a:prstDash val="solid"/>
+                      <a:round/>
+                      <a:headEnd type="none" w="med" len="med"/>
+                      <a:tailEnd type="none" w="med" len="med"/>
+                    </a:lnB>
+                    <a:solidFill>
+                      <a:srgbClr val="FFFFFF"/>
+                    </a:solidFill>
+                  </a:tcPr>
+                </a:tc>
+              </a:tr>
+              <a:tr h="365760">
+                <a:tc>
+                  <a:txBody>
+                    <a:bodyPr/>
+                    <a:lstStyle/>
+                    <a:p>
+                      <a:pPr indent="0" marL="0">
+                        <a:buNone/>
+                      </a:pPr>
+                      <a:r>
+                        <a:rPr lang="en-US" sz="1100" b="1" dirty="0">
+                          <a:solidFill>
+                            <a:srgbClr val="0057C2"/>
+                          </a:solidFill>
+                          <a:latin typeface="Courier New" pitchFamily="34" charset="0"/>
+                          <a:ea typeface="Courier New" pitchFamily="34" charset="-122"/>
+                          <a:cs typeface="Courier New" pitchFamily="34" charset="-120"/>
+                        </a:rPr>
+                        <a:t>TryCount / MaxCount</a:t>
+                      </a:r>
+                      <a:endParaRPr lang="en-US" sz="1100" dirty="0">
+                        <a:latin typeface="Courier New" charset="0"/>
+                        <a:ea typeface="Courier New" charset="0"/>
+                        <a:cs typeface="Courier New" charset="0"/>
+                      </a:endParaRPr>
+                    </a:p>
+                  </a:txBody>
+                  <a:tcPr marL="64008" marR="64008" marT="0" marB="0" anchor="ctr">
+                    <a:lnL w="6350" cap="flat" cmpd="sng" algn="ctr">
+                      <a:solidFill>
+                        <a:srgbClr val="A9D6F2"/>
+                      </a:solidFill>
+                      <a:prstDash val="solid"/>
+                      <a:round/>
+                      <a:headEnd type="none" w="med" len="med"/>
+                      <a:tailEnd type="none" w="med" len="med"/>
+                    </a:lnL>
+                    <a:lnR w="6350" cap="flat" cmpd="sng" algn="ctr">
+                      <a:solidFill>
+                        <a:srgbClr val="A9D6F2"/>
+                      </a:solidFill>
+                      <a:prstDash val="solid"/>
+                      <a:round/>
+                      <a:headEnd type="none" w="med" len="med"/>
+                      <a:tailEnd type="none" w="med" len="med"/>
+                    </a:lnR>
+                    <a:lnT w="6350" cap="flat" cmpd="sng" algn="ctr">
+                      <a:solidFill>
+                        <a:srgbClr val="A9D6F2"/>
+                      </a:solidFill>
+                      <a:prstDash val="solid"/>
+                      <a:round/>
+                      <a:headEnd type="none" w="med" len="med"/>
+                      <a:tailEnd type="none" w="med" len="med"/>
+                    </a:lnT>
+                    <a:lnB w="6350" cap="flat" cmpd="sng" algn="ctr">
+                      <a:solidFill>
+                        <a:srgbClr val="A9D6F2"/>
+                      </a:solidFill>
+                      <a:prstDash val="solid"/>
+                      <a:round/>
+                      <a:headEnd type="none" w="med" len="med"/>
+                      <a:tailEnd type="none" w="med" len="med"/>
+                    </a:lnB>
+                    <a:solidFill>
+                      <a:srgbClr val="DCEBF7"/>
+                    </a:solidFill>
+                  </a:tcPr>
+                </a:tc>
+                <a:tc>
+                  <a:txBody>
+                    <a:bodyPr/>
+                    <a:lstStyle/>
+                    <a:p>
+                      <a:pPr indent="0" marL="0">
+                        <a:buNone/>
+                      </a:pPr>
+                      <a:r>
+                        <a:rPr lang="en-US" sz="1100" dirty="0">
+                          <a:solidFill>
+                            <a:srgbClr val="00357A"/>
+                          </a:solidFill>
+                          <a:latin typeface="Poppins" pitchFamily="34" charset="0"/>
+                          <a:ea typeface="Poppins" pitchFamily="34" charset="-122"/>
+                          <a:cs typeface="Poppins" pitchFamily="34" charset="-120"/>
+                        </a:rPr>
+                        <a:t>1  /  3</a:t>
+                      </a:r>
+                      <a:endParaRPr lang="en-US" sz="1100" dirty="0">
+                        <a:latin typeface="Poppins" charset="0"/>
+                        <a:ea typeface="Poppins" charset="0"/>
+                        <a:cs typeface="Poppins" charset="0"/>
+                      </a:endParaRPr>
+                    </a:p>
+                  </a:txBody>
+                  <a:tcPr marL="64008" marR="64008" marT="0" marB="0" anchor="ctr">
+                    <a:lnL w="6350" cap="flat" cmpd="sng" algn="ctr">
+                      <a:solidFill>
+                        <a:srgbClr val="A9D6F2"/>
+                      </a:solidFill>
+                      <a:prstDash val="solid"/>
+                      <a:round/>
+                      <a:headEnd type="none" w="med" len="med"/>
+                      <a:tailEnd type="none" w="med" len="med"/>
+                    </a:lnL>
+                    <a:lnR w="6350" cap="flat" cmpd="sng" algn="ctr">
+                      <a:solidFill>
+                        <a:srgbClr val="A9D6F2"/>
+                      </a:solidFill>
+                      <a:prstDash val="solid"/>
+                      <a:round/>
+                      <a:headEnd type="none" w="med" len="med"/>
+                      <a:tailEnd type="none" w="med" len="med"/>
+                    </a:lnR>
+                    <a:lnT w="6350" cap="flat" cmpd="sng" algn="ctr">
+                      <a:solidFill>
+                        <a:srgbClr val="A9D6F2"/>
+                      </a:solidFill>
+                      <a:prstDash val="solid"/>
+                      <a:round/>
+                      <a:headEnd type="none" w="med" len="med"/>
+                      <a:tailEnd type="none" w="med" len="med"/>
+                    </a:lnT>
+                    <a:lnB w="6350" cap="flat" cmpd="sng" algn="ctr">
+                      <a:solidFill>
+                        <a:srgbClr val="A9D6F2"/>
+                      </a:solidFill>
+                      <a:prstDash val="solid"/>
+                      <a:round/>
+                      <a:headEnd type="none" w="med" len="med"/>
+                      <a:tailEnd type="none" w="med" len="med"/>
+                    </a:lnB>
+                    <a:solidFill>
+                      <a:srgbClr val="DCEBF7"/>
+                    </a:solidFill>
+                  </a:tcPr>
+                </a:tc>
+                <a:tc>
+                  <a:txBody>
+                    <a:bodyPr/>
+                    <a:lstStyle/>
+                    <a:p>
+                      <a:pPr indent="0" marL="0">
+                        <a:buNone/>
+                      </a:pPr>
+                      <a:r>
+                        <a:rPr lang="en-US" sz="1100" dirty="0">
+                          <a:solidFill>
+                            <a:srgbClr val="00357A"/>
+                          </a:solidFill>
+                          <a:latin typeface="Poppins" pitchFamily="34" charset="0"/>
+                          <a:ea typeface="Poppins" pitchFamily="34" charset="-122"/>
+                          <a:cs typeface="Poppins" pitchFamily="34" charset="-120"/>
+                        </a:rPr>
+                        <a:t>Submissions so far; a failed run is retried twice more</a:t>
+                      </a:r>
+                      <a:endParaRPr lang="en-US" sz="1100" dirty="0">
+                        <a:latin typeface="Poppins" charset="0"/>
+                        <a:ea typeface="Poppins" charset="0"/>
+                        <a:cs typeface="Poppins" charset="0"/>
+                      </a:endParaRPr>
+                    </a:p>
+                  </a:txBody>
+                  <a:tcPr marL="64008" marR="64008" marT="0" marB="0" anchor="ctr">
+                    <a:lnL w="6350" cap="flat" cmpd="sng" algn="ctr">
+                      <a:solidFill>
+                        <a:srgbClr val="A9D6F2"/>
+                      </a:solidFill>
+                      <a:prstDash val="solid"/>
+                      <a:round/>
+                      <a:headEnd type="none" w="med" len="med"/>
+                      <a:tailEnd type="none" w="med" len="med"/>
+                    </a:lnL>
+                    <a:lnR w="6350" cap="flat" cmpd="sng" algn="ctr">
+                      <a:solidFill>
+                        <a:srgbClr val="A9D6F2"/>
+                      </a:solidFill>
+                      <a:prstDash val="solid"/>
+                      <a:round/>
+                      <a:headEnd type="none" w="med" len="med"/>
+                      <a:tailEnd type="none" w="med" len="med"/>
+                    </a:lnR>
+                    <a:lnT w="6350" cap="flat" cmpd="sng" algn="ctr">
+                      <a:solidFill>
+                        <a:srgbClr val="A9D6F2"/>
+                      </a:solidFill>
+                      <a:prstDash val="solid"/>
+                      <a:round/>
+                      <a:headEnd type="none" w="med" len="med"/>
+                      <a:tailEnd type="none" w="med" len="med"/>
+                    </a:lnT>
+                    <a:lnB w="6350" cap="flat" cmpd="sng" algn="ctr">
+                      <a:solidFill>
+                        <a:srgbClr val="A9D6F2"/>
+                      </a:solidFill>
+                      <a:prstDash val="solid"/>
+                      <a:round/>
+                      <a:headEnd type="none" w="med" len="med"/>
+                      <a:tailEnd type="none" w="med" len="med"/>
+                    </a:lnB>
+                    <a:solidFill>
+                      <a:srgbClr val="DCEBF7"/>
+                    </a:solidFill>
+                  </a:tcPr>
+                </a:tc>
+              </a:tr>
+              <a:tr h="365760">
+                <a:tc>
+                  <a:txBody>
+                    <a:bodyPr/>
+                    <a:lstStyle/>
+                    <a:p>
+                      <a:pPr indent="0" marL="0">
+                        <a:buNone/>
+                      </a:pPr>
+                      <a:r>
+                        <a:rPr lang="en-US" sz="1100" b="1" dirty="0">
+                          <a:solidFill>
+                            <a:srgbClr val="0057C2"/>
+                          </a:solidFill>
+                          <a:latin typeface="Courier New" pitchFamily="34" charset="0"/>
+                          <a:ea typeface="Courier New" pitchFamily="34" charset="-122"/>
+                          <a:cs typeface="Courier New" pitchFamily="34" charset="-120"/>
+                        </a:rPr>
+                        <a:t>DataSize</a:t>
+                      </a:r>
+                      <a:endParaRPr lang="en-US" sz="1100" dirty="0">
+                        <a:latin typeface="Courier New" charset="0"/>
+                        <a:ea typeface="Courier New" charset="0"/>
+                        <a:cs typeface="Courier New" charset="0"/>
+                      </a:endParaRPr>
+                    </a:p>
+                  </a:txBody>
+                  <a:tcPr marL="64008" marR="64008" marT="0" marB="0" anchor="ctr">
+                    <a:lnL w="6350" cap="flat" cmpd="sng" algn="ctr">
+                      <a:solidFill>
+                        <a:srgbClr val="A9D6F2"/>
+                      </a:solidFill>
+                      <a:prstDash val="solid"/>
+                      <a:round/>
+                      <a:headEnd type="none" w="med" len="med"/>
+                      <a:tailEnd type="none" w="med" len="med"/>
+                    </a:lnL>
+                    <a:lnR w="6350" cap="flat" cmpd="sng" algn="ctr">
+                      <a:solidFill>
+                        <a:srgbClr val="A9D6F2"/>
+                      </a:solidFill>
+                      <a:prstDash val="solid"/>
+                      <a:round/>
+                      <a:headEnd type="none" w="med" len="med"/>
+                      <a:tailEnd type="none" w="med" len="med"/>
+                    </a:lnR>
+                    <a:lnT w="6350" cap="flat" cmpd="sng" algn="ctr">
+                      <a:solidFill>
+                        <a:srgbClr val="A9D6F2"/>
+                      </a:solidFill>
+                      <a:prstDash val="solid"/>
+                      <a:round/>
+                      <a:headEnd type="none" w="med" len="med"/>
+                      <a:tailEnd type="none" w="med" len="med"/>
+                    </a:lnT>
+                    <a:lnB w="6350" cap="flat" cmpd="sng" algn="ctr">
+                      <a:solidFill>
+                        <a:srgbClr val="A9D6F2"/>
+                      </a:solidFill>
+                      <a:prstDash val="solid"/>
+                      <a:round/>
+                      <a:headEnd type="none" w="med" len="med"/>
+                      <a:tailEnd type="none" w="med" len="med"/>
+                    </a:lnB>
+                    <a:solidFill>
+                      <a:srgbClr val="FFFFFF"/>
+                    </a:solidFill>
+                  </a:tcPr>
+                </a:tc>
+                <a:tc>
+                  <a:txBody>
+                    <a:bodyPr/>
+                    <a:lstStyle/>
+                    <a:p>
+                      <a:pPr indent="0" marL="0">
+                        <a:buNone/>
+                      </a:pPr>
+                      <a:r>
+                        <a:rPr lang="en-US" sz="1100" dirty="0">
+                          <a:solidFill>
+                            <a:srgbClr val="00357A"/>
+                          </a:solidFill>
+                          <a:latin typeface="Poppins" pitchFamily="34" charset="0"/>
+                          <a:ea typeface="Poppins" pitchFamily="34" charset="-122"/>
+                          <a:cs typeface="Poppins" pitchFamily="34" charset="-120"/>
+                        </a:rPr>
+                        <a:t>227727328477</a:t>
+                      </a:r>
+                      <a:endParaRPr lang="en-US" sz="1100" dirty="0">
+                        <a:latin typeface="Poppins" charset="0"/>
+                        <a:ea typeface="Poppins" charset="0"/>
+                        <a:cs typeface="Poppins" charset="0"/>
+                      </a:endParaRPr>
+                    </a:p>
+                  </a:txBody>
+                  <a:tcPr marL="64008" marR="64008" marT="0" marB="0" anchor="ctr">
+                    <a:lnL w="6350" cap="flat" cmpd="sng" algn="ctr">
+                      <a:solidFill>
+                        <a:srgbClr val="A9D6F2"/>
+                      </a:solidFill>
+                      <a:prstDash val="solid"/>
+                      <a:round/>
+                      <a:headEnd type="none" w="med" len="med"/>
+                      <a:tailEnd type="none" w="med" len="med"/>
+                    </a:lnL>
+                    <a:lnR w="6350" cap="flat" cmpd="sng" algn="ctr">
+                      <a:solidFill>
+                        <a:srgbClr val="A9D6F2"/>
+                      </a:solidFill>
+                      <a:prstDash val="solid"/>
+                      <a:round/>
+                      <a:headEnd type="none" w="med" len="med"/>
+                      <a:tailEnd type="none" w="med" len="med"/>
+                    </a:lnR>
+                    <a:lnT w="6350" cap="flat" cmpd="sng" algn="ctr">
+                      <a:solidFill>
+                        <a:srgbClr val="A9D6F2"/>
+                      </a:solidFill>
+                      <a:prstDash val="solid"/>
+                      <a:round/>
+                      <a:headEnd type="none" w="med" len="med"/>
+                      <a:tailEnd type="none" w="med" len="med"/>
+                    </a:lnT>
+                    <a:lnB w="6350" cap="flat" cmpd="sng" algn="ctr">
+                      <a:solidFill>
+                        <a:srgbClr val="A9D6F2"/>
+                      </a:solidFill>
+                      <a:prstDash val="solid"/>
+                      <a:round/>
+                      <a:headEnd type="none" w="med" len="med"/>
+                      <a:tailEnd type="none" w="med" len="med"/>
+                    </a:lnB>
+                    <a:solidFill>
+                      <a:srgbClr val="FFFFFF"/>
+                    </a:solidFill>
+                  </a:tcPr>
+                </a:tc>
+                <a:tc>
+                  <a:txBody>
+                    <a:bodyPr/>
+                    <a:lstStyle/>
+                    <a:p>
+                      <a:pPr indent="0" marL="0">
+                        <a:buNone/>
+                      </a:pPr>
+                      <a:r>
+                        <a:rPr lang="en-US" sz="1100" dirty="0">
+                          <a:solidFill>
+                            <a:srgbClr val="00357A"/>
+                          </a:solidFill>
+                          <a:latin typeface="Poppins" pitchFamily="34" charset="0"/>
+                          <a:ea typeface="Poppins" pitchFamily="34" charset="-122"/>
+                          <a:cs typeface="Poppins" pitchFamily="34" charset="-120"/>
+                        </a:rPr>
+                        <a:t>The bytes the run has to move</a:t>
+                      </a:r>
+                      <a:endParaRPr lang="en-US" sz="1100" dirty="0">
+                        <a:latin typeface="Poppins" charset="0"/>
+                        <a:ea typeface="Poppins" charset="0"/>
+                        <a:cs typeface="Poppins" charset="0"/>
+                      </a:endParaRPr>
+                    </a:p>
+                  </a:txBody>
+                  <a:tcPr marL="64008" marR="64008" marT="0" marB="0" anchor="ctr">
+                    <a:lnL w="6350" cap="flat" cmpd="sng" algn="ctr">
+                      <a:solidFill>
+                        <a:srgbClr val="A9D6F2"/>
+                      </a:solidFill>
+                      <a:prstDash val="solid"/>
+                      <a:round/>
+                      <a:headEnd type="none" w="med" len="med"/>
+                      <a:tailEnd type="none" w="med" len="med"/>
+                    </a:lnL>
+                    <a:lnR w="6350" cap="flat" cmpd="sng" algn="ctr">
+                      <a:solidFill>
+                        <a:srgbClr val="A9D6F2"/>
+                      </a:solidFill>
+                      <a:prstDash val="solid"/>
+                      <a:round/>
+                      <a:headEnd type="none" w="med" len="med"/>
+                      <a:tailEnd type="none" w="med" len="med"/>
+                    </a:lnR>
+                    <a:lnT w="6350" cap="flat" cmpd="sng" algn="ctr">
+                      <a:solidFill>
+                        <a:srgbClr val="A9D6F2"/>
+                      </a:solidFill>
+                      <a:prstDash val="solid"/>
+                      <a:round/>
+                      <a:headEnd type="none" w="med" len="med"/>
+                      <a:tailEnd type="none" w="med" len="med"/>
+                    </a:lnT>
+                    <a:lnB w="6350" cap="flat" cmpd="sng" algn="ctr">
+                      <a:solidFill>
+                        <a:srgbClr val="A9D6F2"/>
+                      </a:solidFill>
+                      <a:prstDash val="solid"/>
+                      <a:round/>
+                      <a:headEnd type="none" w="med" len="med"/>
+                      <a:tailEnd type="none" w="med" len="med"/>
+                    </a:lnB>
+                    <a:solidFill>
+                      <a:srgbClr val="FFFFFF"/>
+                    </a:solidFill>
+                  </a:tcPr>
+                </a:tc>
+              </a:tr>
+              <a:tr h="365760">
+                <a:tc>
+                  <a:txBody>
+                    <a:bodyPr/>
+                    <a:lstStyle/>
+                    <a:p>
+                      <a:pPr indent="0" marL="0">
+                        <a:buNone/>
+                      </a:pPr>
+                      <a:r>
+                        <a:rPr lang="en-US" sz="1100" b="1" dirty="0">
+                          <a:solidFill>
+                            <a:srgbClr val="0057C2"/>
+                          </a:solidFill>
+                          <a:latin typeface="Courier New" pitchFamily="34" charset="0"/>
+                          <a:ea typeface="Courier New" pitchFamily="34" charset="-122"/>
+                          <a:cs typeface="Courier New" pitchFamily="34" charset="-120"/>
+                        </a:rPr>
+                        <a:t>QSubOptions</a:t>
+                      </a:r>
+                      <a:endParaRPr lang="en-US" sz="1100" dirty="0">
+                        <a:latin typeface="Courier New" charset="0"/>
+                        <a:ea typeface="Courier New" charset="0"/>
+                        <a:cs typeface="Courier New" charset="0"/>
+                      </a:endParaRPr>
+                    </a:p>
+                  </a:txBody>
+                  <a:tcPr marL="64008" marR="64008" marT="0" marB="0" anchor="ctr">
+                    <a:lnL w="6350" cap="flat" cmpd="sng" algn="ctr">
+                      <a:solidFill>
+                        <a:srgbClr val="A9D6F2"/>
+                      </a:solidFill>
+                      <a:prstDash val="solid"/>
+                      <a:round/>
+                      <a:headEnd type="none" w="med" len="med"/>
+                      <a:tailEnd type="none" w="med" len="med"/>
+                    </a:lnL>
+                    <a:lnR w="6350" cap="flat" cmpd="sng" algn="ctr">
+                      <a:solidFill>
+                        <a:srgbClr val="A9D6F2"/>
+                      </a:solidFill>
+                      <a:prstDash val="solid"/>
+                      <a:round/>
+                      <a:headEnd type="none" w="med" len="med"/>
+                      <a:tailEnd type="none" w="med" len="med"/>
+                    </a:lnR>
+                    <a:lnT w="6350" cap="flat" cmpd="sng" algn="ctr">
+                      <a:solidFill>
+                        <a:srgbClr val="A9D6F2"/>
+                      </a:solidFill>
+                      <a:prstDash val="solid"/>
+                      <a:round/>
+                      <a:headEnd type="none" w="med" len="med"/>
+                      <a:tailEnd type="none" w="med" len="med"/>
+                    </a:lnT>
+                    <a:lnB w="6350" cap="flat" cmpd="sng" algn="ctr">
+                      <a:solidFill>
+                        <a:srgbClr val="A9D6F2"/>
+                      </a:solidFill>
+                      <a:prstDash val="solid"/>
+                      <a:round/>
+                      <a:headEnd type="none" w="med" len="med"/>
+                      <a:tailEnd type="none" w="med" len="med"/>
+                    </a:lnB>
+                    <a:solidFill>
+                      <a:srgbClr val="DCEBF7"/>
+                    </a:solidFill>
+                  </a:tcPr>
+                </a:tc>
+                <a:tc>
+                  <a:txBody>
+                    <a:bodyPr/>
+                    <a:lstStyle/>
+                    <a:p>
+                      <a:pPr indent="0" marL="0">
+                        <a:buNone/>
+                      </a:pPr>
+                      <a:r>
+                        <a:rPr lang="en-US" sz="1100" dirty="0">
+                          <a:solidFill>
+                            <a:srgbClr val="00357A"/>
+                          </a:solidFill>
+                          <a:latin typeface="Poppins" pitchFamily="34" charset="0"/>
+                          <a:ea typeface="Poppins" pitchFamily="34" charset="-122"/>
+                          <a:cs typeface="Poppins" pitchFamily="34" charset="-120"/>
+                        </a:rPr>
+                        <a:t>-l walltime=24:00:00,select=1:ncpus=12:mem=12gb</a:t>
+                      </a:r>
+                      <a:endParaRPr lang="en-US" sz="1100" dirty="0">
+                        <a:latin typeface="Poppins" charset="0"/>
+                        <a:ea typeface="Poppins" charset="0"/>
+                        <a:cs typeface="Poppins" charset="0"/>
+                      </a:endParaRPr>
+                    </a:p>
+                  </a:txBody>
+                  <a:tcPr marL="64008" marR="64008" marT="0" marB="0" anchor="ctr">
+                    <a:lnL w="6350" cap="flat" cmpd="sng" algn="ctr">
+                      <a:solidFill>
+                        <a:srgbClr val="A9D6F2"/>
+                      </a:solidFill>
+                      <a:prstDash val="solid"/>
+                      <a:round/>
+                      <a:headEnd type="none" w="med" len="med"/>
+                      <a:tailEnd type="none" w="med" len="med"/>
+                    </a:lnL>
+                    <a:lnR w="6350" cap="flat" cmpd="sng" algn="ctr">
+                      <a:solidFill>
+                        <a:srgbClr val="A9D6F2"/>
+                      </a:solidFill>
+                      <a:prstDash val="solid"/>
+                      <a:round/>
+                      <a:headEnd type="none" w="med" len="med"/>
+                      <a:tailEnd type="none" w="med" len="med"/>
+                    </a:lnR>
+                    <a:lnT w="6350" cap="flat" cmpd="sng" algn="ctr">
+                      <a:solidFill>
+                        <a:srgbClr val="A9D6F2"/>
+                      </a:solidFill>
+                      <a:prstDash val="solid"/>
+                      <a:round/>
+                      <a:headEnd type="none" w="med" len="med"/>
+                      <a:tailEnd type="none" w="med" len="med"/>
+                    </a:lnT>
+                    <a:lnB w="6350" cap="flat" cmpd="sng" algn="ctr">
+                      <a:solidFill>
+                        <a:srgbClr val="A9D6F2"/>
+                      </a:solidFill>
+                      <a:prstDash val="solid"/>
+                      <a:round/>
+                      <a:headEnd type="none" w="med" len="med"/>
+                      <a:tailEnd type="none" w="med" len="med"/>
+                    </a:lnB>
+                    <a:solidFill>
+                      <a:srgbClr val="DCEBF7"/>
+                    </a:solidFill>
+                  </a:tcPr>
+                </a:tc>
+                <a:tc>
+                  <a:txBody>
+                    <a:bodyPr/>
+                    <a:lstStyle/>
+                    <a:p>
+                      <a:pPr indent="0" marL="0">
+                        <a:buNone/>
+                      </a:pPr>
+                      <a:r>
+                        <a:rPr lang="en-US" sz="1100" dirty="0">
+                          <a:solidFill>
+                            <a:srgbClr val="00357A"/>
+                          </a:solidFill>
+                          <a:latin typeface="Poppins" pitchFamily="34" charset="0"/>
+                          <a:ea typeface="Poppins" pitchFamily="34" charset="-122"/>
+                          <a:cs typeface="Poppins" pitchFamily="34" charset="-120"/>
+                        </a:rPr>
+                        <a:t>What -d reserved: the walltime and the cpu count</a:t>
+                      </a:r>
+                      <a:endParaRPr lang="en-US" sz="1100" dirty="0">
+                        <a:latin typeface="Poppins" charset="0"/>
+                        <a:ea typeface="Poppins" charset="0"/>
+                        <a:cs typeface="Poppins" charset="0"/>
+                      </a:endParaRPr>
+                    </a:p>
+                  </a:txBody>
+                  <a:tcPr marL="64008" marR="64008" marT="0" marB="0" anchor="ctr">
+                    <a:lnL w="6350" cap="flat" cmpd="sng" algn="ctr">
+                      <a:solidFill>
+                        <a:srgbClr val="A9D6F2"/>
+                      </a:solidFill>
+                      <a:prstDash val="solid"/>
+                      <a:round/>
+                      <a:headEnd type="none" w="med" len="med"/>
+                      <a:tailEnd type="none" w="med" len="med"/>
+                    </a:lnL>
+                    <a:lnR w="6350" cap="flat" cmpd="sng" algn="ctr">
+                      <a:solidFill>
+                        <a:srgbClr val="A9D6F2"/>
+                      </a:solidFill>
+                      <a:prstDash val="solid"/>
+                      <a:round/>
+                      <a:headEnd type="none" w="med" len="med"/>
+                      <a:tailEnd type="none" w="med" len="med"/>
+                    </a:lnR>
+                    <a:lnT w="6350" cap="flat" cmpd="sng" algn="ctr">
+                      <a:solidFill>
+                        <a:srgbClr val="A9D6F2"/>
+                      </a:solidFill>
+                      <a:prstDash val="solid"/>
+                      <a:round/>
+                      <a:headEnd type="none" w="med" len="med"/>
+                      <a:tailEnd type="none" w="med" len="med"/>
+                    </a:lnT>
+                    <a:lnB w="6350" cap="flat" cmpd="sng" algn="ctr">
+                      <a:solidFill>
+                        <a:srgbClr val="A9D6F2"/>
+                      </a:solidFill>
+                      <a:prstDash val="solid"/>
+                      <a:round/>
+                      <a:headEnd type="none" w="med" len="med"/>
+                      <a:tailEnd type="none" w="med" len="med"/>
+                    </a:lnB>
+                    <a:solidFill>
+                      <a:srgbClr val="DCEBF7"/>
+                    </a:solidFill>
+                  </a:tcPr>
+                </a:tc>
+              </a:tr>
+              <a:tr h="365760">
+                <a:tc>
+                  <a:txBody>
+                    <a:bodyPr/>
+                    <a:lstStyle/>
+                    <a:p>
+                      <a:pPr indent="0" marL="0">
+                        <a:buNone/>
+                      </a:pPr>
+                      <a:r>
+                        <a:rPr lang="en-US" sz="1100" b="1" dirty="0">
+                          <a:solidFill>
+                            <a:srgbClr val="0057C2"/>
+                          </a:solidFill>
+                          <a:latin typeface="Courier New" pitchFamily="34" charset="0"/>
+                          <a:ea typeface="Courier New" pitchFamily="34" charset="-122"/>
+                          <a:cs typeface="Courier New" pitchFamily="34" charset="-120"/>
+                        </a:rPr>
+                        <a:t>ERrormessage</a:t>
+                      </a:r>
+                      <a:endParaRPr lang="en-US" sz="1100" dirty="0">
+                        <a:latin typeface="Courier New" charset="0"/>
+                        <a:ea typeface="Courier New" charset="0"/>
+                        <a:cs typeface="Courier New" charset="0"/>
+                      </a:endParaRPr>
+                    </a:p>
+                  </a:txBody>
+                  <a:tcPr marL="64008" marR="64008" marT="0" marB="0" anchor="ctr">
+                    <a:lnL w="6350" cap="flat" cmpd="sng" algn="ctr">
+                      <a:solidFill>
+                        <a:srgbClr val="A9D6F2"/>
+                      </a:solidFill>
+                      <a:prstDash val="solid"/>
+                      <a:round/>
+                      <a:headEnd type="none" w="med" len="med"/>
+                      <a:tailEnd type="none" w="med" len="med"/>
+                    </a:lnL>
+                    <a:lnR w="6350" cap="flat" cmpd="sng" algn="ctr">
+                      <a:solidFill>
+                        <a:srgbClr val="A9D6F2"/>
+                      </a:solidFill>
+                      <a:prstDash val="solid"/>
+                      <a:round/>
+                      <a:headEnd type="none" w="med" len="med"/>
+                      <a:tailEnd type="none" w="med" len="med"/>
+                    </a:lnR>
+                    <a:lnT w="6350" cap="flat" cmpd="sng" algn="ctr">
+                      <a:solidFill>
+                        <a:srgbClr val="A9D6F2"/>
+                      </a:solidFill>
+                      <a:prstDash val="solid"/>
+                      <a:round/>
+                      <a:headEnd type="none" w="med" len="med"/>
+                      <a:tailEnd type="none" w="med" len="med"/>
+                    </a:lnT>
+                    <a:lnB w="6350" cap="flat" cmpd="sng" algn="ctr">
+                      <a:solidFill>
+                        <a:srgbClr val="A9D6F2"/>
+                      </a:solidFill>
+                      <a:prstDash val="solid"/>
+                      <a:round/>
+                      <a:headEnd type="none" w="med" len="med"/>
+                      <a:tailEnd type="none" w="med" len="med"/>
+                    </a:lnB>
+                    <a:solidFill>
+                      <a:srgbClr val="FFFFFF"/>
+                    </a:solidFill>
+                  </a:tcPr>
+                </a:tc>
+                <a:tc>
+                  <a:txBody>
+                    <a:bodyPr/>
+                    <a:lstStyle/>
+                    <a:p>
+                      <a:pPr indent="0" marL="0">
+                        <a:buNone/>
+                      </a:pPr>
+                      <a:r>
+                        <a:rPr lang="en-US" sz="1100" dirty="0">
+                          <a:solidFill>
+                            <a:srgbClr val="00357A"/>
+                          </a:solidFill>
+                          <a:latin typeface="Poppins" pitchFamily="34" charset="0"/>
+                          <a:ea typeface="Poppins" pitchFamily="34" charset="-122"/>
+                          <a:cs typeface="Poppins" pitchFamily="34" charset="-120"/>
+                        </a:rPr>
+                        <a:t>(empty)</a:t>
+                      </a:r>
+                      <a:endParaRPr lang="en-US" sz="1100" dirty="0">
+                        <a:latin typeface="Poppins" charset="0"/>
+                        <a:ea typeface="Poppins" charset="0"/>
+                        <a:cs typeface="Poppins" charset="0"/>
+                      </a:endParaRPr>
+                    </a:p>
+                  </a:txBody>
+                  <a:tcPr marL="64008" marR="64008" marT="0" marB="0" anchor="ctr">
+                    <a:lnL w="6350" cap="flat" cmpd="sng" algn="ctr">
+                      <a:solidFill>
+                        <a:srgbClr val="A9D6F2"/>
+                      </a:solidFill>
+                      <a:prstDash val="solid"/>
+                      <a:round/>
+                      <a:headEnd type="none" w="med" len="med"/>
+                      <a:tailEnd type="none" w="med" len="med"/>
+                    </a:lnL>
+                    <a:lnR w="6350" cap="flat" cmpd="sng" algn="ctr">
+                      <a:solidFill>
+                        <a:srgbClr val="A9D6F2"/>
+                      </a:solidFill>
+                      <a:prstDash val="solid"/>
+                      <a:round/>
+                      <a:headEnd type="none" w="med" len="med"/>
+                      <a:tailEnd type="none" w="med" len="med"/>
+                    </a:lnR>
+                    <a:lnT w="6350" cap="flat" cmpd="sng" algn="ctr">
+                      <a:solidFill>
+                        <a:srgbClr val="A9D6F2"/>
+                      </a:solidFill>
+                      <a:prstDash val="solid"/>
+                      <a:round/>
+                      <a:headEnd type="none" w="med" len="med"/>
+                      <a:tailEnd type="none" w="med" len="med"/>
+                    </a:lnT>
+                    <a:lnB w="6350" cap="flat" cmpd="sng" algn="ctr">
+                      <a:solidFill>
+                        <a:srgbClr val="A9D6F2"/>
+                      </a:solidFill>
+                      <a:prstDash val="solid"/>
+                      <a:round/>
+                      <a:headEnd type="none" w="med" len="med"/>
+                      <a:tailEnd type="none" w="med" len="med"/>
+                    </a:lnB>
+                    <a:solidFill>
+                      <a:srgbClr val="FFFFFF"/>
+                    </a:solidFill>
+                  </a:tcPr>
+                </a:tc>
+                <a:tc>
+                  <a:txBody>
+                    <a:bodyPr/>
+                    <a:lstStyle/>
+                    <a:p>
+                      <a:pPr indent="0" marL="0">
+                        <a:buNone/>
+                      </a:pPr>
+                      <a:r>
+                        <a:rPr lang="en-US" sz="1100" dirty="0">
+                          <a:solidFill>
+                            <a:srgbClr val="00357A"/>
+                          </a:solidFill>
+                          <a:latin typeface="Poppins" pitchFamily="34" charset="0"/>
+                          <a:ea typeface="Poppins" pitchFamily="34" charset="-122"/>
+                          <a:cs typeface="Poppins" pitchFamily="34" charset="-120"/>
+                        </a:rPr>
+                        <a:t>Carries the failure text once a run gives up</a:t>
+                      </a:r>
+                      <a:endParaRPr lang="en-US" sz="1100" dirty="0">
+                        <a:latin typeface="Poppins" charset="0"/>
+                        <a:ea typeface="Poppins" charset="0"/>
+                        <a:cs typeface="Poppins" charset="0"/>
+                      </a:endParaRPr>
+                    </a:p>
+                  </a:txBody>
+                  <a:tcPr marL="64008" marR="64008" marT="0" marB="0" anchor="ctr">
+                    <a:lnL w="6350" cap="flat" cmpd="sng" algn="ctr">
+                      <a:solidFill>
+                        <a:srgbClr val="A9D6F2"/>
+                      </a:solidFill>
+                      <a:prstDash val="solid"/>
+                      <a:round/>
+                      <a:headEnd type="none" w="med" len="med"/>
+                      <a:tailEnd type="none" w="med" len="med"/>
+                    </a:lnL>
+                    <a:lnR w="6350" cap="flat" cmpd="sng" algn="ctr">
+                      <a:solidFill>
+                        <a:srgbClr val="A9D6F2"/>
+                      </a:solidFill>
+                      <a:prstDash val="solid"/>
+                      <a:round/>
+                      <a:headEnd type="none" w="med" len="med"/>
+                      <a:tailEnd type="none" w="med" len="med"/>
+                    </a:lnR>
+                    <a:lnT w="6350" cap="flat" cmpd="sng" algn="ctr">
+                      <a:solidFill>
+                        <a:srgbClr val="A9D6F2"/>
+                      </a:solidFill>
+                      <a:prstDash val="solid"/>
+                      <a:round/>
+                      <a:headEnd type="none" w="med" len="med"/>
+                      <a:tailEnd type="none" w="med" len="med"/>
+                    </a:lnT>
+                    <a:lnB w="6350" cap="flat" cmpd="sng" algn="ctr">
+                      <a:solidFill>
+                        <a:srgbClr val="A9D6F2"/>
+                      </a:solidFill>
+                      <a:prstDash val="solid"/>
+                      <a:round/>
+                      <a:headEnd type="none" w="med" len="med"/>
+                      <a:tailEnd type="none" w="med" len="med"/>
+                    </a:lnB>
+                    <a:solidFill>
+                      <a:srgbClr val="FFFFFF"/>
+                    </a:solidFill>
+                  </a:tcPr>
+                </a:tc>
+              </a:tr>
+            </a:tbl>
+          </a:graphicData>
+        </a:graphic>
+      </p:graphicFrame>
+      <p:sp>
+        <p:nvSpPr>
+          <p:cNvPr id="8" name="Shape 5"/>
+          <p:cNvSpPr/>
+          <p:nvPr/>
+        </p:nvSpPr>
+        <p:spPr>
+          <a:xfrm>
+            <a:off x="457200" y="5486400"/>
+            <a:ext cx="11292840" cy="731520"/>
           </a:xfrm>
           <a:prstGeom prst="roundRect">
             <a:avLst>
-              <a:gd name="adj" fmla="val 10294"/>
+              <a:gd name="adj" fmla="val 10000"/>
             </a:avLst>
           </a:prstGeom>
           <a:solidFill>
-            <a:srgbClr val="0B2A63"/>
+            <a:srgbClr val="011837"/>
           </a:solidFill>
-          <a:ln w="12700">
-            <a:solidFill>
-              <a:srgbClr val="2C4E7D"/>
-            </a:solidFill>
-            <a:prstDash val="solid"/>
-          </a:ln>
-        </p:spPr>
-      </p:sp>
-      <p:sp>
-        <p:nvSpPr>
-          <p:cNvPr id="13" name="Text 11"/>
-          <p:cNvSpPr/>
-          <p:nvPr/>
-        </p:nvSpPr>
-        <p:spPr>
-          <a:xfrm>
-            <a:off x="1005840" y="3246120"/>
-            <a:ext cx="2286000" cy="621792"/>
+          <a:ln/>
+        </p:spPr>
+      </p:sp>
+      <p:sp>
+        <p:nvSpPr>
+          <p:cNvPr id="9" name="Text 6"/>
+          <p:cNvSpPr/>
+          <p:nvPr/>
+        </p:nvSpPr>
+        <p:spPr>
+          <a:xfrm>
+            <a:off x="658368" y="5486400"/>
+            <a:ext cx="10881360" cy="731520"/>
           </a:xfrm>
           <a:prstGeom prst="rect">
             <a:avLst/>
@@ -17522,10 +19068,13 @@
           <a:lstStyle/>
           <a:p>
             <a:pPr indent="0" marL="0">
-              <a:buNone/>
-            </a:pPr>
-            <a:r>
-              <a:rPr lang="en-US" sz="1250" b="1" dirty="0">
+              <a:lnSpc>
+                <a:spcPct val="105000"/>
+              </a:lnSpc>
+              <a:buNone/>
+            </a:pPr>
+            <a:r>
+              <a:rPr lang="en-US" sz="1150" b="1" dirty="0">
                 <a:solidFill>
                   <a:srgbClr val="42C0FF"/>
                 </a:solidFill>
@@ -17533,41 +19082,16 @@
                 <a:ea typeface="Poppins" pitchFamily="34" charset="-122"/>
                 <a:cs typeface="Poppins" pitchFamily="34" charset="-120"/>
               </a:rPr>
-              <a:t>Before each unit</a:t>
-            </a:r>
-            <a:endParaRPr lang="en-US" sz="1250" dirty="0"/>
-          </a:p>
-        </p:txBody>
-      </p:sp>
-      <p:sp>
-        <p:nvSpPr>
-          <p:cNvPr id="14" name="Text 12"/>
-          <p:cNvSpPr/>
-          <p:nvPr/>
-        </p:nvSpPr>
-        <p:spPr>
-          <a:xfrm>
-            <a:off x="3337560" y="3246120"/>
-            <a:ext cx="7818120" cy="621792"/>
-          </a:xfrm>
-          <a:prstGeom prst="rect">
-            <a:avLst/>
-          </a:prstGeom>
-          <a:noFill/>
-          <a:ln/>
-        </p:spPr>
-        <p:txBody>
-          <a:bodyPr wrap="square" lIns="0" tIns="0" rIns="0" bIns="0" rtlCol="0" anchor="ctr"/>
-          <a:lstStyle/>
-          <a:p>
+              <a:t>ncpus is the auto-sizing, written down.  </a:t>
+            </a:r>
             <a:pPr indent="0" marL="0">
               <a:lnSpc>
-                <a:spcPct val="100000"/>
+                <a:spcPct val="105000"/>
               </a:lnSpc>
               <a:buNone/>
             </a:pPr>
             <a:r>
-              <a:rPr lang="en-US" sz="1100" dirty="0">
+              <a:rPr lang="en-US" sz="1150" dirty="0">
                 <a:solidFill>
                   <a:srgbClr val="C3D7EE"/>
                 </a:solidFill>
@@ -17575,378 +19099,15 @@
                 <a:ea typeface="Poppins" pitchFamily="34" charset="-122"/>
                 <a:cs typeface="Poppins" pitchFamily="34" charset="-120"/>
               </a:rPr>
-              <a:t>The remaining time is compared against what the next tar file or transfer batch is expected to need.</a:t>
-            </a:r>
-            <a:endParaRPr lang="en-US" sz="1100" dirty="0"/>
-          </a:p>
-        </p:txBody>
-      </p:sp>
-      <p:sp>
-        <p:nvSpPr>
-          <p:cNvPr id="15" name="Shape 13"/>
-          <p:cNvSpPr/>
-          <p:nvPr/>
-        </p:nvSpPr>
-        <p:spPr>
-          <a:xfrm>
-            <a:off x="822960" y="3931920"/>
-            <a:ext cx="10515600" cy="621792"/>
-          </a:xfrm>
-          <a:prstGeom prst="roundRect">
-            <a:avLst>
-              <a:gd name="adj" fmla="val 10294"/>
-            </a:avLst>
-          </a:prstGeom>
-          <a:solidFill>
-            <a:srgbClr val="0B2A63"/>
-          </a:solidFill>
-          <a:ln w="12700">
-            <a:solidFill>
-              <a:srgbClr val="2C4E7D"/>
-            </a:solidFill>
-            <a:prstDash val="solid"/>
-          </a:ln>
-        </p:spPr>
-      </p:sp>
-      <p:sp>
-        <p:nvSpPr>
-          <p:cNvPr id="16" name="Text 14"/>
-          <p:cNvSpPr/>
-          <p:nvPr/>
-        </p:nvSpPr>
-        <p:spPr>
-          <a:xfrm>
-            <a:off x="1005840" y="3931920"/>
-            <a:ext cx="2286000" cy="621792"/>
-          </a:xfrm>
-          <a:prstGeom prst="rect">
-            <a:avLst/>
-          </a:prstGeom>
-          <a:noFill/>
-          <a:ln/>
-        </p:spPr>
-        <p:txBody>
-          <a:bodyPr wrap="square" lIns="0" tIns="0" rIns="0" bIns="0" rtlCol="0" anchor="ctr"/>
-          <a:lstStyle/>
-          <a:p>
-            <a:pPr indent="0" marL="0">
-              <a:buNone/>
-            </a:pPr>
-            <a:r>
-              <a:rPr lang="en-US" sz="1250" b="1" dirty="0">
-                <a:solidFill>
-                  <a:srgbClr val="42C0FF"/>
-                </a:solidFill>
-                <a:latin typeface="Poppins" pitchFamily="34" charset="0"/>
-                <a:ea typeface="Poppins" pitchFamily="34" charset="-122"/>
-                <a:cs typeface="Poppins" pitchFamily="34" charset="-120"/>
-              </a:rPr>
-              <a:t>Past 23 hours</a:t>
-            </a:r>
-            <a:endParaRPr lang="en-US" sz="1250" dirty="0"/>
-          </a:p>
-        </p:txBody>
-      </p:sp>
-      <p:sp>
-        <p:nvSpPr>
-          <p:cNvPr id="17" name="Text 15"/>
-          <p:cNvSpPr/>
-          <p:nvPr/>
-        </p:nvSpPr>
-        <p:spPr>
-          <a:xfrm>
-            <a:off x="3337560" y="3931920"/>
-            <a:ext cx="7818120" cy="621792"/>
-          </a:xfrm>
-          <a:prstGeom prst="rect">
-            <a:avLst/>
-          </a:prstGeom>
-          <a:noFill/>
-          <a:ln/>
-        </p:spPr>
-        <p:txBody>
-          <a:bodyPr wrap="square" lIns="0" tIns="0" rIns="0" bIns="0" rtlCol="0" anchor="ctr"/>
-          <a:lstStyle/>
-          <a:p>
-            <a:pPr indent="0" marL="0">
-              <a:lnSpc>
-                <a:spcPct val="100000"/>
-              </a:lnSpc>
-              <a:buNone/>
-            </a:pPr>
-            <a:r>
-              <a:rPr lang="en-US" sz="1100" dirty="0">
-                <a:solidFill>
-                  <a:srgbClr val="C3D7EE"/>
-                </a:solidFill>
-                <a:latin typeface="Poppins" pitchFamily="34" charset="0"/>
-                <a:ea typeface="Poppins" pitchFamily="34" charset="-122"/>
-                <a:cs typeface="Poppins" pitchFamily="34" charset="-120"/>
-              </a:rPr>
-              <a:t>No new unit is started. Children already running are waited on so nothing is truncated.</a:t>
-            </a:r>
-            <a:endParaRPr lang="en-US" sz="1100" dirty="0"/>
-          </a:p>
-        </p:txBody>
-      </p:sp>
-      <p:sp>
-        <p:nvSpPr>
-          <p:cNvPr id="18" name="Shape 16"/>
-          <p:cNvSpPr/>
-          <p:nvPr/>
-        </p:nvSpPr>
-        <p:spPr>
-          <a:xfrm>
-            <a:off x="822960" y="4617720"/>
-            <a:ext cx="10515600" cy="621792"/>
-          </a:xfrm>
-          <a:prstGeom prst="roundRect">
-            <a:avLst>
-              <a:gd name="adj" fmla="val 10294"/>
-            </a:avLst>
-          </a:prstGeom>
-          <a:solidFill>
-            <a:srgbClr val="0B2A63"/>
-          </a:solidFill>
-          <a:ln w="12700">
-            <a:solidFill>
-              <a:srgbClr val="2C4E7D"/>
-            </a:solidFill>
-            <a:prstDash val="solid"/>
-          </a:ln>
-        </p:spPr>
-      </p:sp>
-      <p:sp>
-        <p:nvSpPr>
-          <p:cNvPr id="19" name="Text 17"/>
-          <p:cNvSpPr/>
-          <p:nvPr/>
-        </p:nvSpPr>
-        <p:spPr>
-          <a:xfrm>
-            <a:off x="1005840" y="4617720"/>
-            <a:ext cx="2286000" cy="621792"/>
-          </a:xfrm>
-          <a:prstGeom prst="rect">
-            <a:avLst/>
-          </a:prstGeom>
-          <a:noFill/>
-          <a:ln/>
-        </p:spPr>
-        <p:txBody>
-          <a:bodyPr wrap="square" lIns="0" tIns="0" rIns="0" bIns="0" rtlCol="0" anchor="ctr"/>
-          <a:lstStyle/>
-          <a:p>
-            <a:pPr indent="0" marL="0">
-              <a:buNone/>
-            </a:pPr>
-            <a:r>
-              <a:rPr lang="en-US" sz="1250" b="1" dirty="0">
-                <a:solidFill>
-                  <a:srgbClr val="42C0FF"/>
-                </a:solidFill>
-                <a:latin typeface="Poppins" pitchFamily="34" charset="0"/>
-                <a:ea typeface="Poppins" pitchFamily="34" charset="-122"/>
-                <a:cs typeface="Poppins" pitchFamily="34" charset="-120"/>
-              </a:rPr>
-              <a:t>Progress email</a:t>
-            </a:r>
-            <a:endParaRPr lang="en-US" sz="1250" dirty="0"/>
-          </a:p>
-        </p:txBody>
-      </p:sp>
-      <p:sp>
-        <p:nvSpPr>
-          <p:cNvPr id="20" name="Text 18"/>
-          <p:cNvSpPr/>
-          <p:nvPr/>
-        </p:nvSpPr>
-        <p:spPr>
-          <a:xfrm>
-            <a:off x="3337560" y="4617720"/>
-            <a:ext cx="7818120" cy="621792"/>
-          </a:xfrm>
-          <a:prstGeom prst="rect">
-            <a:avLst/>
-          </a:prstGeom>
-          <a:noFill/>
-          <a:ln/>
-        </p:spPr>
-        <p:txBody>
-          <a:bodyPr wrap="square" lIns="0" tIns="0" rIns="0" bIns="0" rtlCol="0" anchor="ctr"/>
-          <a:lstStyle/>
-          <a:p>
-            <a:pPr indent="0" marL="0">
-              <a:lnSpc>
-                <a:spcPct val="100000"/>
-              </a:lnSpc>
-              <a:buNone/>
-            </a:pPr>
-            <a:r>
-              <a:rPr lang="en-US" sz="1100" dirty="0">
-                <a:solidFill>
-                  <a:srgbClr val="C3D7EE"/>
-                </a:solidFill>
-                <a:latin typeface="Poppins" pitchFamily="34" charset="0"/>
-                <a:ea typeface="Poppins" pitchFamily="34" charset="-122"/>
-                <a:cs typeface="Poppins" pitchFamily="34" charset="-120"/>
-              </a:rPr>
-              <a:t>The specialist is mailed what finished and what is still outstanding, so the next run is not a surprise.</a:t>
-            </a:r>
-            <a:endParaRPr lang="en-US" sz="1100" dirty="0"/>
-          </a:p>
-        </p:txBody>
-      </p:sp>
-      <p:sp>
-        <p:nvSpPr>
-          <p:cNvPr id="21" name="Shape 19"/>
-          <p:cNvSpPr/>
-          <p:nvPr/>
-        </p:nvSpPr>
-        <p:spPr>
-          <a:xfrm>
-            <a:off x="822960" y="5303520"/>
-            <a:ext cx="10515600" cy="621792"/>
-          </a:xfrm>
-          <a:prstGeom prst="roundRect">
-            <a:avLst>
-              <a:gd name="adj" fmla="val 10294"/>
-            </a:avLst>
-          </a:prstGeom>
-          <a:solidFill>
-            <a:srgbClr val="0B2A63"/>
-          </a:solidFill>
-          <a:ln w="12700">
-            <a:solidFill>
-              <a:srgbClr val="2C4E7D"/>
-            </a:solidFill>
-            <a:prstDash val="solid"/>
-          </a:ln>
-        </p:spPr>
-      </p:sp>
-      <p:sp>
-        <p:nvSpPr>
-          <p:cNvPr id="22" name="Text 20"/>
-          <p:cNvSpPr/>
-          <p:nvPr/>
-        </p:nvSpPr>
-        <p:spPr>
-          <a:xfrm>
-            <a:off x="1005840" y="5303520"/>
-            <a:ext cx="2286000" cy="621792"/>
-          </a:xfrm>
-          <a:prstGeom prst="rect">
-            <a:avLst/>
-          </a:prstGeom>
-          <a:noFill/>
-          <a:ln/>
-        </p:spPr>
-        <p:txBody>
-          <a:bodyPr wrap="square" lIns="0" tIns="0" rIns="0" bIns="0" rtlCol="0" anchor="ctr"/>
-          <a:lstStyle/>
-          <a:p>
-            <a:pPr indent="0" marL="0">
-              <a:buNone/>
-            </a:pPr>
-            <a:r>
-              <a:rPr lang="en-US" sz="1250" b="1" dirty="0">
-                <a:solidFill>
-                  <a:srgbClr val="42C0FF"/>
-                </a:solidFill>
-                <a:latin typeface="Poppins" pitchFamily="34" charset="0"/>
-                <a:ea typeface="Poppins" pitchFamily="34" charset="-122"/>
-                <a:cs typeface="Poppins" pitchFamily="34" charset="-120"/>
-              </a:rPr>
-              <a:t>Record kept open</a:t>
-            </a:r>
-            <a:endParaRPr lang="en-US" sz="1250" dirty="0"/>
-          </a:p>
-        </p:txBody>
-      </p:sp>
-      <p:sp>
-        <p:nvSpPr>
-          <p:cNvPr id="23" name="Text 21"/>
-          <p:cNvSpPr/>
-          <p:nvPr/>
-        </p:nvSpPr>
-        <p:spPr>
-          <a:xfrm>
-            <a:off x="3337560" y="5303520"/>
-            <a:ext cx="7818120" cy="621792"/>
-          </a:xfrm>
-          <a:prstGeom prst="rect">
-            <a:avLst/>
-          </a:prstGeom>
-          <a:noFill/>
-          <a:ln/>
-        </p:spPr>
-        <p:txBody>
-          <a:bodyPr wrap="square" lIns="0" tIns="0" rIns="0" bIns="0" rtlCol="0" anchor="ctr"/>
-          <a:lstStyle/>
-          <a:p>
-            <a:pPr indent="0" marL="0">
-              <a:lnSpc>
-                <a:spcPct val="100000"/>
-              </a:lnSpc>
-              <a:buNone/>
-            </a:pPr>
-            <a:r>
-              <a:rPr lang="en-US" sz="1100" dirty="0">
-                <a:solidFill>
-                  <a:srgbClr val="C3D7EE"/>
-                </a:solidFill>
-                <a:latin typeface="Poppins" pitchFamily="34" charset="0"/>
-                <a:ea typeface="Poppins" pitchFamily="34" charset="-122"/>
-                <a:cs typeface="Poppins" pitchFamily="34" charset="-120"/>
-              </a:rPr>
-              <a:t>Untarred bfile records stay at 'N' and untransferred ones at 'T'. The next scheduled run simply resumes.</a:t>
-            </a:r>
-            <a:endParaRPr lang="en-US" sz="1100" dirty="0"/>
-          </a:p>
-        </p:txBody>
-      </p:sp>
-      <p:sp>
-        <p:nvSpPr>
-          <p:cNvPr id="24" name="Text 22"/>
-          <p:cNvSpPr/>
-          <p:nvPr/>
-        </p:nvSpPr>
-        <p:spPr>
-          <a:xfrm>
-            <a:off x="822960" y="6007608"/>
-            <a:ext cx="10515600" cy="320040"/>
-          </a:xfrm>
-          <a:prstGeom prst="rect">
-            <a:avLst/>
-          </a:prstGeom>
-          <a:noFill/>
-          <a:ln/>
-        </p:spPr>
-        <p:txBody>
-          <a:bodyPr wrap="square" lIns="0" tIns="0" rIns="0" bIns="0" rtlCol="0" anchor="ctr"/>
-          <a:lstStyle/>
-          <a:p>
-            <a:pPr indent="0" marL="0">
-              <a:buNone/>
-            </a:pPr>
-            <a:r>
-              <a:rPr lang="en-US" sz="1100" i="1" dirty="0">
-                <a:solidFill>
-                  <a:srgbClr val="97999B"/>
-                </a:solidFill>
-                <a:latin typeface="Poppins" pitchFamily="34" charset="0"/>
-                <a:ea typeface="Poppins" pitchFamily="34" charset="-122"/>
-                <a:cs typeface="Poppins" pitchFamily="34" charset="-120"/>
-              </a:rPr>
-              <a:t>The guard only runs inside a real batch job; a foreground run is left to the operator.</a:t>
-            </a:r>
-            <a:endParaRPr lang="en-US" sz="1100" dirty="0"/>
-          </a:p>
-        </p:txBody>
-      </p:sp>
-      <p:sp>
-        <p:nvSpPr>
-          <p:cNvPr id="25" name="Text 23"/>
+              <a:t>ncpus=12 in QSubOptions is the process count dsquasar worked out from the pending tar count on the login host, stored in the record, and read back when the batch job starts. Reading it here is the simplest way to confirm what a run was actually given.</a:t>
+            </a:r>
+            <a:endParaRPr lang="en-US" sz="1150" dirty="0"/>
+          </a:p>
+        </p:txBody>
+      </p:sp>
+      <p:sp>
+        <p:nvSpPr>
+          <p:cNvPr id="10" name="Text 7"/>
           <p:cNvSpPr/>
           <p:nvPr/>
         </p:nvSpPr>
@@ -17971,7 +19132,7 @@
             <a:r>
               <a:rPr lang="en-US" sz="950" b="1" dirty="0">
                 <a:solidFill>
-                  <a:srgbClr val="FFFFFF"/>
+                  <a:srgbClr val="00357A"/>
                 </a:solidFill>
                 <a:latin typeface="Poppins" pitchFamily="34" charset="0"/>
                 <a:ea typeface="Poppins" pitchFamily="34" charset="-122"/>
@@ -17985,7 +19146,7 @@
       </p:sp>
       <p:sp>
         <p:nvSpPr>
-          <p:cNvPr id="26" name="Text 24"/>
+          <p:cNvPr id="11" name="Text 8"/>
           <p:cNvSpPr/>
           <p:nvPr/>
         </p:nvSpPr>
@@ -18010,7 +19171,7 @@
             <a:r>
               <a:rPr lang="en-US" sz="950" b="1" dirty="0">
                 <a:solidFill>
-                  <a:srgbClr val="FFFFFF"/>
+                  <a:srgbClr val="00357A"/>
                 </a:solidFill>
                 <a:latin typeface="Poppins" pitchFamily="34" charset="0"/>
                 <a:ea typeface="Poppins" pitchFamily="34" charset="-122"/>
@@ -19847,13 +21008,13 @@
             <a:r>
               <a:rPr lang="en-US" sz="1200" b="1" spc="200" kern="0" dirty="0">
                 <a:solidFill>
-                  <a:srgbClr val="0092DB"/>
-                </a:solidFill>
-                <a:latin typeface="Poppins" pitchFamily="34" charset="0"/>
-                <a:ea typeface="Poppins" pitchFamily="34" charset="-122"/>
-                <a:cs typeface="Poppins" pitchFamily="34" charset="-120"/>
-              </a:rPr>
-              <a:t>WORKER SLOTS</a:t>
+                  <a:srgbClr val="C25E00"/>
+                </a:solidFill>
+                <a:latin typeface="Poppins" pitchFamily="34" charset="0"/>
+                <a:ea typeface="Poppins" pitchFamily="34" charset="-122"/>
+                <a:cs typeface="Poppins" pitchFamily="34" charset="-120"/>
+              </a:rPr>
+              <a:t>PARALLELISM</a:t>
             </a:r>
             <a:endParaRPr lang="en-US" sz="1200" dirty="0"/>
           </a:p>
@@ -19892,7 +21053,7 @@
                 <a:ea typeface="Poppins" pitchFamily="34" charset="-122"/>
                 <a:cs typeface="Poppins" pitchFamily="34" charset="-120"/>
               </a:rPr>
-              <a:t>-W / -w  —  When One Batch Job Hangs</a:t>
+              <a:t>How Many CPUs Does the Job Ask For?</a:t>
             </a:r>
             <a:endParaRPr lang="en-US" sz="3200" dirty="0"/>
           </a:p>
@@ -19906,8 +21067,8 @@
         </p:nvSpPr>
         <p:spPr>
           <a:xfrm>
-            <a:off x="457200" y="1444752"/>
-            <a:ext cx="11292840" cy="566928"/>
+            <a:off x="457200" y="1463040"/>
+            <a:ext cx="11292840" cy="548640"/>
           </a:xfrm>
           <a:prstGeom prst="rect">
             <a:avLst/>
@@ -19926,7 +21087,7 @@
               <a:buNone/>
             </a:pPr>
             <a:r>
-              <a:rPr lang="en-US" sz="1400" dirty="0">
+              <a:rPr lang="en-US" sz="1450" dirty="0">
                 <a:solidFill>
                   <a:srgbClr val="00357A"/>
                 </a:solidFill>
@@ -19934,104 +21095,131 @@
                 <a:ea typeface="Poppins" pitchFamily="34" charset="-122"/>
                 <a:cs typeface="Poppins" pitchFamily="34" charset="-120"/>
               </a:rPr>
-              <a:t>The -A 3 gather runs from cron several times a day, so a crashed job restarts quickly — dead locks are taken over and dscheck retries. The gap was a job that is alive but making no progress: it holds the duplicate key and every later cron line simply blocks.</a:t>
-            </a:r>
-            <a:endParaRPr lang="en-US" sz="1400" dirty="0"/>
-          </a:p>
-        </p:txBody>
-      </p:sp>
-      <p:sp>
-        <p:nvSpPr>
-          <p:cNvPr id="5" name="Text 3"/>
+              <a:t>Tarring and uploading have very different shapes, so they are sized independently and the larger request wins — the phases run one after the other inside a single PBS allocation, sharing one ncpus.</a:t>
+            </a:r>
+            <a:endParaRPr lang="en-US" sz="1450" dirty="0"/>
+          </a:p>
+        </p:txBody>
+      </p:sp>
+      <p:sp>
+        <p:nvSpPr>
+          <p:cNvPr id="5" name="Shape 3"/>
           <p:cNvSpPr/>
           <p:nvPr/>
         </p:nvSpPr>
         <p:spPr>
           <a:xfrm>
             <a:off x="457200" y="2148840"/>
-            <a:ext cx="5532120" cy="320040"/>
-          </a:xfrm>
-          <a:prstGeom prst="rect">
-            <a:avLst/>
-          </a:prstGeom>
-          <a:noFill/>
-          <a:ln/>
-        </p:spPr>
-        <p:txBody>
-          <a:bodyPr wrap="square" lIns="0" tIns="0" rIns="0" bIns="0" rtlCol="0" anchor="ctr"/>
-          <a:lstStyle/>
-          <a:p>
-            <a:pPr indent="0" marL="0">
-              <a:buNone/>
-            </a:pPr>
-            <a:r>
-              <a:rPr lang="en-US" sz="1500" b="1" dirty="0">
-                <a:solidFill>
-                  <a:srgbClr val="0057C2"/>
-                </a:solidFill>
-                <a:latin typeface="Poppins" pitchFamily="34" charset="0"/>
-                <a:ea typeface="Poppins" pitchFamily="34" charset="-122"/>
-                <a:cs typeface="Poppins" pitchFamily="34" charset="-120"/>
-              </a:rPr>
-              <a:t>Stall test</a:t>
-            </a:r>
-            <a:endParaRPr lang="en-US" sz="1500" dirty="0"/>
-          </a:p>
-        </p:txBody>
-      </p:sp>
-      <p:sp>
-        <p:nvSpPr>
-          <p:cNvPr id="6" name="Text 4"/>
-          <p:cNvSpPr/>
-          <p:nvPr/>
-        </p:nvSpPr>
-        <p:spPr>
-          <a:xfrm>
-            <a:off x="457200" y="2468880"/>
-            <a:ext cx="5532120" cy="292608"/>
-          </a:xfrm>
-          <a:prstGeom prst="rect">
-            <a:avLst/>
-          </a:prstGeom>
-          <a:noFill/>
-          <a:ln/>
-        </p:spPr>
-        <p:txBody>
-          <a:bodyPr wrap="square" lIns="0" tIns="0" rIns="0" bIns="0" rtlCol="0" anchor="ctr"/>
-          <a:lstStyle/>
-          <a:p>
-            <a:pPr indent="0" marL="0">
-              <a:buNone/>
-            </a:pPr>
-            <a:r>
-              <a:rPr lang="en-US" sz="1150" dirty="0">
-                <a:solidFill>
-                  <a:srgbClr val="53565A"/>
-                </a:solidFill>
-                <a:latin typeface="Poppins" pitchFamily="34" charset="0"/>
-                <a:ea typeface="Poppins" pitchFamily="34" charset="-122"/>
-                <a:cs typeface="Poppins" pitchFamily="34" charset="-120"/>
-              </a:rPr>
-              <a:t>A repeat submit inspects the running job. Both conditions must hold:</a:t>
-            </a:r>
-            <a:endParaRPr lang="en-US" sz="1150" dirty="0"/>
-          </a:p>
-        </p:txBody>
-      </p:sp>
-      <p:sp>
-        <p:nvSpPr>
-          <p:cNvPr id="7" name="Shape 5"/>
-          <p:cNvSpPr/>
-          <p:nvPr/>
-        </p:nvSpPr>
-        <p:spPr>
-          <a:xfrm>
-            <a:off x="457200" y="2788920"/>
-            <a:ext cx="5532120" cy="731520"/>
+            <a:ext cx="5532120" cy="2286000"/>
           </a:xfrm>
           <a:prstGeom prst="roundRect">
             <a:avLst>
-              <a:gd name="adj" fmla="val 6250"/>
+              <a:gd name="adj" fmla="val 4000"/>
+            </a:avLst>
+          </a:prstGeom>
+          <a:solidFill>
+            <a:srgbClr val="FFFFFF"/>
+          </a:solidFill>
+          <a:ln w="19050">
+            <a:solidFill>
+              <a:srgbClr val="0057C2"/>
+            </a:solidFill>
+            <a:prstDash val="solid"/>
+          </a:ln>
+        </p:spPr>
+      </p:sp>
+      <p:sp>
+        <p:nvSpPr>
+          <p:cNvPr id="6" name="Text 4"/>
+          <p:cNvSpPr/>
+          <p:nvPr/>
+        </p:nvSpPr>
+        <p:spPr>
+          <a:xfrm>
+            <a:off x="685800" y="2286000"/>
+            <a:ext cx="5120640" cy="320040"/>
+          </a:xfrm>
+          <a:prstGeom prst="rect">
+            <a:avLst/>
+          </a:prstGeom>
+          <a:noFill/>
+          <a:ln/>
+        </p:spPr>
+        <p:txBody>
+          <a:bodyPr wrap="square" lIns="0" tIns="0" rIns="0" bIns="0" rtlCol="0" anchor="ctr"/>
+          <a:lstStyle/>
+          <a:p>
+            <a:pPr indent="0" marL="0">
+              <a:buNone/>
+            </a:pPr>
+            <a:r>
+              <a:rPr lang="en-US" sz="1500" b="1" dirty="0">
+                <a:solidFill>
+                  <a:srgbClr val="0057C2"/>
+                </a:solidFill>
+                <a:latin typeface="Poppins" pitchFamily="34" charset="0"/>
+                <a:ea typeface="Poppins" pitchFamily="34" charset="-122"/>
+                <a:cs typeface="Poppins" pitchFamily="34" charset="-120"/>
+              </a:rPr>
+              <a:t>Tarring   (-A 2, -A 3)</a:t>
+            </a:r>
+            <a:endParaRPr lang="en-US" sz="1500" dirty="0"/>
+          </a:p>
+        </p:txBody>
+      </p:sp>
+      <p:sp>
+        <p:nvSpPr>
+          <p:cNvPr id="7" name="Text 5"/>
+          <p:cNvSpPr/>
+          <p:nvPr/>
+        </p:nvSpPr>
+        <p:spPr>
+          <a:xfrm>
+            <a:off x="685800" y="2606040"/>
+            <a:ext cx="5120640" cy="274320"/>
+          </a:xfrm>
+          <a:prstGeom prst="rect">
+            <a:avLst/>
+          </a:prstGeom>
+          <a:noFill/>
+          <a:ln/>
+        </p:spPr>
+        <p:txBody>
+          <a:bodyPr wrap="square" lIns="0" tIns="0" rIns="0" bIns="0" rtlCol="0" anchor="ctr"/>
+          <a:lstStyle/>
+          <a:p>
+            <a:pPr indent="0" marL="0">
+              <a:buNone/>
+            </a:pPr>
+            <a:r>
+              <a:rPr lang="en-US" sz="1150" dirty="0">
+                <a:solidFill>
+                  <a:srgbClr val="53565A"/>
+                </a:solidFill>
+                <a:latin typeface="Poppins" pitchFamily="34" charset="0"/>
+                <a:ea typeface="Poppins" pitchFamily="34" charset="-122"/>
+                <a:cs typeface="Poppins" pitchFamily="34" charset="-120"/>
+              </a:rPr>
+              <a:t>One child per tar file — many small, cheap units.</a:t>
+            </a:r>
+            <a:endParaRPr lang="en-US" sz="1150" dirty="0"/>
+          </a:p>
+        </p:txBody>
+      </p:sp>
+      <p:sp>
+        <p:nvSpPr>
+          <p:cNvPr id="8" name="Shape 6"/>
+          <p:cNvSpPr/>
+          <p:nvPr/>
+        </p:nvSpPr>
+        <p:spPr>
+          <a:xfrm>
+            <a:off x="685800" y="2926080"/>
+            <a:ext cx="5120640" cy="685800"/>
+          </a:xfrm>
+          <a:prstGeom prst="roundRect">
+            <a:avLst>
+              <a:gd name="adj" fmla="val 6667"/>
             </a:avLst>
           </a:prstGeom>
           <a:solidFill>
@@ -20042,14 +21230,14 @@
       </p:sp>
       <p:sp>
         <p:nvSpPr>
-          <p:cNvPr id="8" name="Text 6"/>
-          <p:cNvSpPr/>
-          <p:nvPr/>
-        </p:nvSpPr>
-        <p:spPr>
-          <a:xfrm>
-            <a:off x="585216" y="2788920"/>
-            <a:ext cx="5276088" cy="731520"/>
+          <p:cNvPr id="9" name="Text 7"/>
+          <p:cNvSpPr/>
+          <p:nvPr/>
+        </p:nvSpPr>
+        <p:spPr>
+          <a:xfrm>
+            <a:off x="813816" y="2926080"/>
+            <a:ext cx="4864608" cy="685800"/>
           </a:xfrm>
           <a:prstGeom prst="rect">
             <a:avLst/>
@@ -20068,7 +21256,7 @@
               <a:buNone/>
             </a:pPr>
             <a:r>
-              <a:rPr lang="en-US" sz="1200" dirty="0">
+              <a:rPr lang="en-US" sz="1150" dirty="0">
                 <a:solidFill>
                   <a:srgbClr val="0097A7"/>
                 </a:solidFill>
@@ -20076,9 +21264,9 @@
                 <a:ea typeface="Courier New" pitchFamily="34" charset="-122"/>
                 <a:cs typeface="Courier New" pitchFamily="34" charset="-120"/>
               </a:rPr>
-              <a:t>runtime  &gt;  WORKGRACE  (6 hours)</a:t>
-            </a:r>
-            <a:endParaRPr lang="en-US" sz="1200" dirty="0"/>
+              <a:t>MPTLIMIT = 200   tar files per process</a:t>
+            </a:r>
+            <a:endParaRPr lang="en-US" sz="1150" dirty="0"/>
           </a:p>
           <a:p>
             <a:pPr indent="0" marL="0">
@@ -20088,7 +21276,7 @@
               <a:buNone/>
             </a:pPr>
             <a:r>
-              <a:rPr lang="en-US" sz="1200" dirty="0">
+              <a:rPr lang="en-US" sz="1150" dirty="0">
                 <a:solidFill>
                   <a:srgbClr val="0097A7"/>
                 </a:solidFill>
@@ -20096,22 +21284,328 @@
                 <a:ea typeface="Courier New" pitchFamily="34" charset="-122"/>
                 <a:cs typeface="Courier New" pitchFamily="34" charset="-120"/>
               </a:rPr>
-              <a:t>dcount / fcount  &lt;=  MINWDONE  (1 %)</a:t>
-            </a:r>
-            <a:endParaRPr lang="en-US" sz="1200" dirty="0"/>
-          </a:p>
-        </p:txBody>
-      </p:sp>
-      <p:sp>
-        <p:nvSpPr>
-          <p:cNvPr id="9" name="Text 7"/>
-          <p:cNvSpPr/>
-          <p:nvPr/>
-        </p:nvSpPr>
-        <p:spPr>
-          <a:xfrm>
-            <a:off x="457200" y="3657600"/>
-            <a:ext cx="5532120" cy="594360"/>
+              <a:t>MPTMAX   =  12   process ceiling</a:t>
+            </a:r>
+            <a:endParaRPr lang="en-US" sz="1150" dirty="0"/>
+          </a:p>
+        </p:txBody>
+      </p:sp>
+      <p:sp>
+        <p:nvSpPr>
+          <p:cNvPr id="10" name="Text 8"/>
+          <p:cNvSpPr/>
+          <p:nvPr/>
+        </p:nvSpPr>
+        <p:spPr>
+          <a:xfrm>
+            <a:off x="685800" y="3703320"/>
+            <a:ext cx="5120640" cy="548640"/>
+          </a:xfrm>
+          <a:prstGeom prst="rect">
+            <a:avLst/>
+          </a:prstGeom>
+          <a:noFill/>
+          <a:ln/>
+        </p:spPr>
+        <p:txBody>
+          <a:bodyPr wrap="square" lIns="0" tIns="0" rIns="0" bIns="0" rtlCol="0" anchor="t"/>
+          <a:lstStyle/>
+          <a:p>
+            <a:pPr indent="0" marL="0">
+              <a:buNone/>
+            </a:pPr>
+            <a:r>
+              <a:rPr lang="en-US" sz="1100" dirty="0">
+                <a:solidFill>
+                  <a:srgbClr val="00357A"/>
+                </a:solidFill>
+                <a:latin typeface="Poppins" pitchFamily="34" charset="0"/>
+                <a:ea typeface="Poppins" pitchFamily="34" charset="-122"/>
+                <a:cs typeface="Poppins" pitchFamily="34" charset="-120"/>
+              </a:rPr>
+              <a:t>A small divisor with a high cap: lots of tar work should spread wide.</a:t>
+            </a:r>
+            <a:endParaRPr lang="en-US" sz="1100" dirty="0"/>
+          </a:p>
+        </p:txBody>
+      </p:sp>
+      <p:sp>
+        <p:nvSpPr>
+          <p:cNvPr id="11" name="Shape 9"/>
+          <p:cNvSpPr/>
+          <p:nvPr/>
+        </p:nvSpPr>
+        <p:spPr>
+          <a:xfrm>
+            <a:off x="6309360" y="2148840"/>
+            <a:ext cx="5440680" cy="2286000"/>
+          </a:xfrm>
+          <a:prstGeom prst="roundRect">
+            <a:avLst>
+              <a:gd name="adj" fmla="val 4000"/>
+            </a:avLst>
+          </a:prstGeom>
+          <a:solidFill>
+            <a:srgbClr val="FFFFFF"/>
+          </a:solidFill>
+          <a:ln w="19050">
+            <a:solidFill>
+              <a:srgbClr val="0097A7"/>
+            </a:solidFill>
+            <a:prstDash val="solid"/>
+          </a:ln>
+        </p:spPr>
+      </p:sp>
+      <p:sp>
+        <p:nvSpPr>
+          <p:cNvPr id="12" name="Text 10"/>
+          <p:cNvSpPr/>
+          <p:nvPr/>
+        </p:nvSpPr>
+        <p:spPr>
+          <a:xfrm>
+            <a:off x="6537960" y="2286000"/>
+            <a:ext cx="5029200" cy="320040"/>
+          </a:xfrm>
+          <a:prstGeom prst="rect">
+            <a:avLst/>
+          </a:prstGeom>
+          <a:noFill/>
+          <a:ln/>
+        </p:spPr>
+        <p:txBody>
+          <a:bodyPr wrap="square" lIns="0" tIns="0" rIns="0" bIns="0" rtlCol="0" anchor="ctr"/>
+          <a:lstStyle/>
+          <a:p>
+            <a:pPr indent="0" marL="0">
+              <a:buNone/>
+            </a:pPr>
+            <a:r>
+              <a:rPr lang="en-US" sz="1500" b="1" dirty="0">
+                <a:solidFill>
+                  <a:srgbClr val="0097A7"/>
+                </a:solidFill>
+                <a:latin typeface="Poppins" pitchFamily="34" charset="0"/>
+                <a:ea typeface="Poppins" pitchFamily="34" charset="-122"/>
+                <a:cs typeface="Poppins" pitchFamily="34" charset="-120"/>
+              </a:rPr>
+              <a:t>Uploading   (-A 4)</a:t>
+            </a:r>
+            <a:endParaRPr lang="en-US" sz="1500" dirty="0"/>
+          </a:p>
+        </p:txBody>
+      </p:sp>
+      <p:sp>
+        <p:nvSpPr>
+          <p:cNvPr id="13" name="Text 11"/>
+          <p:cNvSpPr/>
+          <p:nvPr/>
+        </p:nvSpPr>
+        <p:spPr>
+          <a:xfrm>
+            <a:off x="6537960" y="2606040"/>
+            <a:ext cx="5029200" cy="274320"/>
+          </a:xfrm>
+          <a:prstGeom prst="rect">
+            <a:avLst/>
+          </a:prstGeom>
+          <a:noFill/>
+          <a:ln/>
+        </p:spPr>
+        <p:txBody>
+          <a:bodyPr wrap="square" lIns="0" tIns="0" rIns="0" bIns="0" rtlCol="0" anchor="ctr"/>
+          <a:lstStyle/>
+          <a:p>
+            <a:pPr indent="0" marL="0">
+              <a:buNone/>
+            </a:pPr>
+            <a:r>
+              <a:rPr lang="en-US" sz="1150" dirty="0">
+                <a:solidFill>
+                  <a:srgbClr val="53565A"/>
+                </a:solidFill>
+                <a:latin typeface="Poppins" pitchFamily="34" charset="0"/>
+                <a:ea typeface="Poppins" pitchFamily="34" charset="-122"/>
+                <a:cs typeface="Poppins" pitchFamily="34" charset="-120"/>
+              </a:rPr>
+              <a:t>One child per 90 GB batch — few large, network-bound units.</a:t>
+            </a:r>
+            <a:endParaRPr lang="en-US" sz="1150" dirty="0"/>
+          </a:p>
+        </p:txBody>
+      </p:sp>
+      <p:sp>
+        <p:nvSpPr>
+          <p:cNvPr id="14" name="Shape 12"/>
+          <p:cNvSpPr/>
+          <p:nvPr/>
+        </p:nvSpPr>
+        <p:spPr>
+          <a:xfrm>
+            <a:off x="6537960" y="2926080"/>
+            <a:ext cx="5029200" cy="685800"/>
+          </a:xfrm>
+          <a:prstGeom prst="roundRect">
+            <a:avLst>
+              <a:gd name="adj" fmla="val 6667"/>
+            </a:avLst>
+          </a:prstGeom>
+          <a:solidFill>
+            <a:srgbClr val="011837"/>
+          </a:solidFill>
+          <a:ln/>
+        </p:spPr>
+      </p:sp>
+      <p:sp>
+        <p:nvSpPr>
+          <p:cNvPr id="15" name="Text 13"/>
+          <p:cNvSpPr/>
+          <p:nvPr/>
+        </p:nvSpPr>
+        <p:spPr>
+          <a:xfrm>
+            <a:off x="6665976" y="2926080"/>
+            <a:ext cx="4773168" cy="685800"/>
+          </a:xfrm>
+          <a:prstGeom prst="rect">
+            <a:avLst/>
+          </a:prstGeom>
+          <a:noFill/>
+          <a:ln/>
+        </p:spPr>
+        <p:txBody>
+          <a:bodyPr wrap="square" lIns="0" tIns="0" rIns="0" bIns="0" rtlCol="0" anchor="ctr"/>
+          <a:lstStyle/>
+          <a:p>
+            <a:pPr indent="0" marL="0">
+              <a:lnSpc>
+                <a:spcPct val="100000"/>
+              </a:lnSpc>
+              <a:buNone/>
+            </a:pPr>
+            <a:r>
+              <a:rPr lang="en-US" sz="1150" dirty="0">
+                <a:solidFill>
+                  <a:srgbClr val="0097A7"/>
+                </a:solidFill>
+                <a:latin typeface="Courier New" pitchFamily="34" charset="0"/>
+                <a:ea typeface="Courier New" pitchFamily="34" charset="-122"/>
+                <a:cs typeface="Courier New" pitchFamily="34" charset="-120"/>
+              </a:rPr>
+              <a:t>MPBLIMIT = 5000  tar files per process</a:t>
+            </a:r>
+            <a:endParaRPr lang="en-US" sz="1150" dirty="0"/>
+          </a:p>
+          <a:p>
+            <a:pPr indent="0" marL="0">
+              <a:lnSpc>
+                <a:spcPct val="100000"/>
+              </a:lnSpc>
+              <a:buNone/>
+            </a:pPr>
+            <a:r>
+              <a:rPr lang="en-US" sz="1150" dirty="0">
+                <a:solidFill>
+                  <a:srgbClr val="0097A7"/>
+                </a:solidFill>
+                <a:latin typeface="Courier New" pitchFamily="34" charset="0"/>
+                <a:ea typeface="Courier New" pitchFamily="34" charset="-122"/>
+                <a:cs typeface="Courier New" pitchFamily="34" charset="-120"/>
+              </a:rPr>
+              <a:t>MPBMAX   =    4  process ceiling</a:t>
+            </a:r>
+            <a:endParaRPr lang="en-US" sz="1150" dirty="0"/>
+          </a:p>
+        </p:txBody>
+      </p:sp>
+      <p:sp>
+        <p:nvSpPr>
+          <p:cNvPr id="16" name="Text 14"/>
+          <p:cNvSpPr/>
+          <p:nvPr/>
+        </p:nvSpPr>
+        <p:spPr>
+          <a:xfrm>
+            <a:off x="6537960" y="3703320"/>
+            <a:ext cx="5029200" cy="548640"/>
+          </a:xfrm>
+          <a:prstGeom prst="rect">
+            <a:avLst/>
+          </a:prstGeom>
+          <a:noFill/>
+          <a:ln/>
+        </p:spPr>
+        <p:txBody>
+          <a:bodyPr wrap="square" lIns="0" tIns="0" rIns="0" bIns="0" rtlCol="0" anchor="t"/>
+          <a:lstStyle/>
+          <a:p>
+            <a:pPr indent="0" marL="0">
+              <a:buNone/>
+            </a:pPr>
+            <a:r>
+              <a:rPr lang="en-US" sz="1100" dirty="0">
+                <a:solidFill>
+                  <a:srgbClr val="00357A"/>
+                </a:solidFill>
+                <a:latin typeface="Poppins" pitchFamily="34" charset="0"/>
+                <a:ea typeface="Poppins" pitchFamily="34" charset="-122"/>
+                <a:cs typeface="Poppins" pitchFamily="34" charset="-120"/>
+              </a:rPr>
+              <a:t>A large divisor with a low cap: more Globus streams do not move more bytes.</a:t>
+            </a:r>
+            <a:endParaRPr lang="en-US" sz="1100" dirty="0"/>
+          </a:p>
+        </p:txBody>
+      </p:sp>
+      <p:sp>
+        <p:nvSpPr>
+          <p:cNvPr id="17" name="Text 15"/>
+          <p:cNvSpPr/>
+          <p:nvPr/>
+        </p:nvSpPr>
+        <p:spPr>
+          <a:xfrm>
+            <a:off x="457200" y="4572000"/>
+            <a:ext cx="11292840" cy="320040"/>
+          </a:xfrm>
+          <a:prstGeom prst="rect">
+            <a:avLst/>
+          </a:prstGeom>
+          <a:noFill/>
+          <a:ln/>
+        </p:spPr>
+        <p:txBody>
+          <a:bodyPr wrap="square" lIns="0" tIns="0" rIns="0" bIns="0" rtlCol="0" anchor="ctr"/>
+          <a:lstStyle/>
+          <a:p>
+            <a:pPr indent="0" marL="0">
+              <a:buNone/>
+            </a:pPr>
+            <a:r>
+              <a:rPr lang="en-US" sz="1500" b="1" dirty="0">
+                <a:solidFill>
+                  <a:srgbClr val="00357A"/>
+                </a:solidFill>
+                <a:latin typeface="Poppins" pitchFamily="34" charset="0"/>
+                <a:ea typeface="Poppins" pitchFamily="34" charset="-122"/>
+                <a:cs typeface="Poppins" pitchFamily="34" charset="-120"/>
+              </a:rPr>
+              <a:t>Why the two sets of numbers</a:t>
+            </a:r>
+            <a:endParaRPr lang="en-US" sz="1500" dirty="0"/>
+          </a:p>
+        </p:txBody>
+      </p:sp>
+      <p:sp>
+        <p:nvSpPr>
+          <p:cNvPr id="18" name="Text 16"/>
+          <p:cNvSpPr/>
+          <p:nvPr/>
+        </p:nvSpPr>
+        <p:spPr>
+          <a:xfrm>
+            <a:off x="457200" y="4892040"/>
+            <a:ext cx="11292840" cy="502920"/>
           </a:xfrm>
           <a:prstGeom prst="rect">
             <a:avLst/>
@@ -20130,98 +21624,34 @@
               <a:buNone/>
             </a:pPr>
             <a:r>
-              <a:rPr lang="en-US" sz="1150" dirty="0">
-                <a:solidFill>
-                  <a:srgbClr val="00357A"/>
-                </a:solidFill>
-                <a:latin typeface="Poppins" pitchFamily="34" charset="0"/>
-                <a:ea typeface="Poppins" pitchFamily="34" charset="-122"/>
-                <a:cs typeface="Poppins" pitchFamily="34" charset="-120"/>
-              </a:rPr>
-              <a:t>Six hours in with under one percent of its recorded work done, the job is treated as stalled and an extra worker is submitted alongside it — up to -W MaxWorkers, default 2.</a:t>
-            </a:r>
-            <a:endParaRPr lang="en-US" sz="1150" dirty="0"/>
-          </a:p>
-        </p:txBody>
-      </p:sp>
-      <p:sp>
-        <p:nvSpPr>
-          <p:cNvPr id="10" name="Shape 8"/>
-          <p:cNvSpPr/>
-          <p:nvPr/>
-        </p:nvSpPr>
-        <p:spPr>
-          <a:xfrm>
-            <a:off x="457200" y="4343400"/>
-            <a:ext cx="5532120" cy="457200"/>
+              <a:rPr lang="en-US" sz="1200" dirty="0">
+                <a:solidFill>
+                  <a:srgbClr val="53565A"/>
+                </a:solidFill>
+                <a:latin typeface="Poppins" pitchFamily="34" charset="0"/>
+                <a:ea typeface="Poppins" pitchFamily="34" charset="-122"/>
+                <a:cs typeface="Poppins" pitchFamily="34" charset="-120"/>
+              </a:rPr>
+              <a:t>Both phases once shared a single limit. Tarring came out under-provisioned while uploading reserved cpus it could never use — cpus that PBS charges for and that other jobs then cannot have. Splitting the constants fixed both ends.</a:t>
+            </a:r>
+            <a:endParaRPr lang="en-US" sz="1200" dirty="0"/>
+          </a:p>
+        </p:txBody>
+      </p:sp>
+      <p:sp>
+        <p:nvSpPr>
+          <p:cNvPr id="19" name="Shape 17"/>
+          <p:cNvSpPr/>
+          <p:nvPr/>
+        </p:nvSpPr>
+        <p:spPr>
+          <a:xfrm>
+            <a:off x="457200" y="5486400"/>
+            <a:ext cx="11292840" cy="548640"/>
           </a:xfrm>
           <a:prstGeom prst="roundRect">
             <a:avLst>
-              <a:gd name="adj" fmla="val 10000"/>
-            </a:avLst>
-          </a:prstGeom>
-          <a:solidFill>
-            <a:srgbClr val="011837"/>
-          </a:solidFill>
-          <a:ln/>
-        </p:spPr>
-      </p:sp>
-      <p:sp>
-        <p:nvSpPr>
-          <p:cNvPr id="11" name="Text 9"/>
-          <p:cNvSpPr/>
-          <p:nvPr/>
-        </p:nvSpPr>
-        <p:spPr>
-          <a:xfrm>
-            <a:off x="585216" y="4343400"/>
-            <a:ext cx="5276088" cy="457200"/>
-          </a:xfrm>
-          <a:prstGeom prst="rect">
-            <a:avLst/>
-          </a:prstGeom>
-          <a:noFill/>
-          <a:ln/>
-        </p:spPr>
-        <p:txBody>
-          <a:bodyPr wrap="square" lIns="0" tIns="0" rIns="0" bIns="0" rtlCol="0" anchor="ctr"/>
-          <a:lstStyle/>
-          <a:p>
-            <a:pPr indent="0" marL="0">
-              <a:lnSpc>
-                <a:spcPct val="100000"/>
-              </a:lnSpc>
-              <a:buNone/>
-            </a:pPr>
-            <a:r>
-              <a:rPr lang="en-US" sz="1250" dirty="0">
-                <a:solidFill>
-                  <a:srgbClr val="0097A7"/>
-                </a:solidFill>
-                <a:latin typeface="Courier New" pitchFamily="34" charset="0"/>
-                <a:ea typeface="Courier New" pitchFamily="34" charset="-122"/>
-                <a:cs typeface="Courier New" pitchFamily="34" charset="-120"/>
-              </a:rPr>
-              <a:t>dsquasar -a -A 3 -b -d PBS -W 2</a:t>
-            </a:r>
-            <a:endParaRPr lang="en-US" sz="1250" dirty="0"/>
-          </a:p>
-        </p:txBody>
-      </p:sp>
-      <p:sp>
-        <p:nvSpPr>
-          <p:cNvPr id="12" name="Shape 10"/>
-          <p:cNvSpPr/>
-          <p:nvPr/>
-        </p:nvSpPr>
-        <p:spPr>
-          <a:xfrm>
-            <a:off x="457200" y="4956048"/>
-            <a:ext cx="5532120" cy="1051560"/>
-          </a:xfrm>
-          <a:prstGeom prst="roundRect">
-            <a:avLst>
-              <a:gd name="adj" fmla="val 6957"/>
+              <a:gd name="adj" fmla="val 13333"/>
             </a:avLst>
           </a:prstGeom>
           <a:solidFill>
@@ -20237,14 +21667,573 @@
       </p:sp>
       <p:sp>
         <p:nvSpPr>
+          <p:cNvPr id="20" name="Text 18"/>
+          <p:cNvSpPr/>
+          <p:nvPr/>
+        </p:nvSpPr>
+        <p:spPr>
+          <a:xfrm>
+            <a:off x="658368" y="5486400"/>
+            <a:ext cx="10881360" cy="548640"/>
+          </a:xfrm>
+          <a:prstGeom prst="rect">
+            <a:avLst/>
+          </a:prstGeom>
+          <a:noFill/>
+          <a:ln/>
+        </p:spPr>
+        <p:txBody>
+          <a:bodyPr wrap="square" lIns="0" tIns="0" rIns="0" bIns="0" rtlCol="0" anchor="ctr"/>
+          <a:lstStyle/>
+          <a:p>
+            <a:pPr indent="0" marL="0">
+              <a:buNone/>
+            </a:pPr>
+            <a:r>
+              <a:rPr lang="en-US" sz="1150" b="1" dirty="0">
+                <a:solidFill>
+                  <a:srgbClr val="0057C2"/>
+                </a:solidFill>
+                <a:latin typeface="Poppins" pitchFamily="34" charset="0"/>
+                <a:ea typeface="Poppins" pitchFamily="34" charset="-122"/>
+                <a:cs typeface="Poppins" pitchFamily="34" charset="-120"/>
+              </a:rPr>
+              <a:t>-m sets the count by hand.  </a:t>
+            </a:r>
+            <a:pPr indent="0" marL="0">
+              <a:buNone/>
+            </a:pPr>
+            <a:r>
+              <a:rPr lang="en-US" sz="1150" dirty="0">
+                <a:solidFill>
+                  <a:srgbClr val="00357A"/>
+                </a:solidFill>
+                <a:latin typeface="Poppins" pitchFamily="34" charset="0"/>
+                <a:ea typeface="Poppins" pitchFamily="34" charset="-122"/>
+                <a:cs typeface="Poppins" pitchFamily="34" charset="-120"/>
+              </a:rPr>
+              <a:t>With no -m, a delayed run sizes itself and reads the count back from the reserved PBS ncpus. An explicit -m always wins — including -m 1 to force a single process.</a:t>
+            </a:r>
+            <a:endParaRPr lang="en-US" sz="1150" dirty="0"/>
+          </a:p>
+        </p:txBody>
+      </p:sp>
+      <p:sp>
+        <p:nvSpPr>
+          <p:cNvPr id="21" name="Text 19"/>
+          <p:cNvSpPr/>
+          <p:nvPr/>
+        </p:nvSpPr>
+        <p:spPr>
+          <a:xfrm>
+            <a:off x="256032" y="6446520"/>
+            <a:ext cx="365760" cy="274320"/>
+          </a:xfrm>
+          <a:prstGeom prst="rect">
+            <a:avLst/>
+          </a:prstGeom>
+          <a:noFill/>
+          <a:ln/>
+        </p:spPr>
+        <p:txBody>
+          <a:bodyPr wrap="square" lIns="0" tIns="0" rIns="0" bIns="0" rtlCol="0" anchor="ctr"/>
+          <a:lstStyle/>
+          <a:p>
+            <a:pPr indent="0" marL="0">
+              <a:buNone/>
+            </a:pPr>
+            <a:r>
+              <a:rPr lang="en-US" sz="950" b="1" dirty="0">
+                <a:solidFill>
+                  <a:srgbClr val="00357A"/>
+                </a:solidFill>
+                <a:latin typeface="Poppins" pitchFamily="34" charset="0"/>
+                <a:ea typeface="Poppins" pitchFamily="34" charset="-122"/>
+                <a:cs typeface="Poppins" pitchFamily="34" charset="-120"/>
+              </a:rPr>
+              <a:t>19</a:t>
+            </a:r>
+            <a:endParaRPr lang="en-US" sz="950" dirty="0"/>
+          </a:p>
+        </p:txBody>
+      </p:sp>
+      <p:sp>
+        <p:nvSpPr>
+          <p:cNvPr id="22" name="Text 20"/>
+          <p:cNvSpPr/>
+          <p:nvPr/>
+        </p:nvSpPr>
+        <p:spPr>
+          <a:xfrm>
+            <a:off x="786384" y="6446520"/>
+            <a:ext cx="5486400" cy="274320"/>
+          </a:xfrm>
+          <a:prstGeom prst="rect">
+            <a:avLst/>
+          </a:prstGeom>
+          <a:noFill/>
+          <a:ln/>
+        </p:spPr>
+        <p:txBody>
+          <a:bodyPr wrap="square" lIns="0" tIns="0" rIns="0" bIns="0" rtlCol="0" anchor="ctr"/>
+          <a:lstStyle/>
+          <a:p>
+            <a:pPr indent="0" marL="0">
+              <a:buNone/>
+            </a:pPr>
+            <a:r>
+              <a:rPr lang="en-US" sz="950" b="1" dirty="0">
+                <a:solidFill>
+                  <a:srgbClr val="00357A"/>
+                </a:solidFill>
+                <a:latin typeface="Poppins" pitchFamily="34" charset="0"/>
+                <a:ea typeface="Poppins" pitchFamily="34" charset="-122"/>
+                <a:cs typeface="Poppins" pitchFamily="34" charset="-120"/>
+              </a:rPr>
+              <a:t>DSQUASAR  •  QUASAR BACKUP GUIDE</a:t>
+            </a:r>
+            <a:endParaRPr lang="en-US" sz="950" dirty="0"/>
+          </a:p>
+        </p:txBody>
+      </p:sp>
+    </p:spTree>
+  </p:cSld>
+  <p:clrMapOvr>
+    <a:masterClrMapping/>
+  </p:clrMapOvr>
+</p:sld>
+</file>
+
+<file path=ppt/slides/slide21.xml><?xml version="1.0" encoding="utf-8"?>
+<p:sld xmlns:a="http://schemas.openxmlformats.org/drawingml/2006/main" xmlns:r="http://schemas.openxmlformats.org/officeDocument/2006/relationships" xmlns:p="http://schemas.openxmlformats.org/presentationml/2006/main">
+  <p:cSld name="Slide 21">
+    <p:spTree>
+      <p:nvGrpSpPr>
+        <p:cNvPr id="1" name=""/>
+        <p:cNvGrpSpPr/>
+        <p:nvPr/>
+      </p:nvGrpSpPr>
+      <p:grpSpPr>
+        <a:xfrm>
+          <a:off x="0" y="0"/>
+          <a:ext cx="0" cy="0"/>
+          <a:chOff x="0" y="0"/>
+          <a:chExt cx="0" cy="0"/>
+        </a:xfrm>
+      </p:grpSpPr>
+      <p:sp>
+        <p:nvSpPr>
+          <p:cNvPr id="2" name="Text 0"/>
+          <p:cNvSpPr/>
+          <p:nvPr/>
+        </p:nvSpPr>
+        <p:spPr>
+          <a:xfrm>
+            <a:off x="457200" y="384048"/>
+            <a:ext cx="8229600" cy="274320"/>
+          </a:xfrm>
+          <a:prstGeom prst="rect">
+            <a:avLst/>
+          </a:prstGeom>
+          <a:noFill/>
+          <a:ln/>
+        </p:spPr>
+        <p:txBody>
+          <a:bodyPr wrap="square" lIns="0" tIns="0" rIns="0" bIns="0" rtlCol="0" anchor="ctr"/>
+          <a:lstStyle/>
+          <a:p>
+            <a:pPr indent="0" marL="0">
+              <a:buNone/>
+            </a:pPr>
+            <a:r>
+              <a:rPr lang="en-US" sz="1200" b="1" spc="200" kern="0" dirty="0">
+                <a:solidFill>
+                  <a:srgbClr val="42C0FF"/>
+                </a:solidFill>
+                <a:latin typeface="Poppins" pitchFamily="34" charset="0"/>
+                <a:ea typeface="Poppins" pitchFamily="34" charset="-122"/>
+                <a:cs typeface="Poppins" pitchFamily="34" charset="-120"/>
+              </a:rPr>
+              <a:t>WALLTIME GUARD</a:t>
+            </a:r>
+            <a:endParaRPr lang="en-US" sz="1200" dirty="0"/>
+          </a:p>
+        </p:txBody>
+      </p:sp>
+      <p:sp>
+        <p:nvSpPr>
+          <p:cNvPr id="3" name="Text 1"/>
+          <p:cNvSpPr/>
+          <p:nvPr/>
+        </p:nvSpPr>
+        <p:spPr>
+          <a:xfrm>
+            <a:off x="457200" y="658368"/>
+            <a:ext cx="9326880" cy="640080"/>
+          </a:xfrm>
+          <a:prstGeom prst="rect">
+            <a:avLst/>
+          </a:prstGeom>
+          <a:noFill/>
+          <a:ln/>
+        </p:spPr>
+        <p:txBody>
+          <a:bodyPr wrap="square" lIns="0" tIns="0" rIns="0" bIns="0" rtlCol="0" anchor="ctr"/>
+          <a:lstStyle/>
+          <a:p>
+            <a:pPr indent="0" marL="0">
+              <a:buNone/>
+            </a:pPr>
+            <a:r>
+              <a:rPr lang="en-US" sz="3200" b="1" dirty="0">
+                <a:solidFill>
+                  <a:srgbClr val="FFFFFF"/>
+                </a:solidFill>
+                <a:latin typeface="Poppins" pitchFamily="34" charset="0"/>
+                <a:ea typeface="Poppins" pitchFamily="34" charset="-122"/>
+                <a:cs typeface="Poppins" pitchFamily="34" charset="-120"/>
+              </a:rPr>
+              <a:t>Stopping Cleanly Before PBS Kills the Job</a:t>
+            </a:r>
+            <a:endParaRPr lang="en-US" sz="3200" dirty="0"/>
+          </a:p>
+        </p:txBody>
+      </p:sp>
+      <p:sp>
+        <p:nvSpPr>
+          <p:cNvPr id="4" name="Text 2"/>
+          <p:cNvSpPr/>
+          <p:nvPr/>
+        </p:nvSpPr>
+        <p:spPr>
+          <a:xfrm>
+            <a:off x="457200" y="1481328"/>
+            <a:ext cx="11292840" cy="548640"/>
+          </a:xfrm>
+          <a:prstGeom prst="rect">
+            <a:avLst/>
+          </a:prstGeom>
+          <a:noFill/>
+          <a:ln/>
+        </p:spPr>
+        <p:txBody>
+          <a:bodyPr wrap="square" lIns="0" tIns="0" rIns="0" bIns="0" rtlCol="0" anchor="t"/>
+          <a:lstStyle/>
+          <a:p>
+            <a:pPr indent="0" marL="0">
+              <a:lnSpc>
+                <a:spcPct val="110000"/>
+              </a:lnSpc>
+              <a:buNone/>
+            </a:pPr>
+            <a:r>
+              <a:rPr lang="en-US" sz="1450" dirty="0">
+                <a:solidFill>
+                  <a:srgbClr val="C3D7EE"/>
+                </a:solidFill>
+                <a:latin typeface="Poppins" pitchFamily="34" charset="0"/>
+                <a:ea typeface="Poppins" pitchFamily="34" charset="-122"/>
+                <a:cs typeface="Poppins" pitchFamily="34" charset="-120"/>
+              </a:rPr>
+              <a:t>The queue gives the job 24 hours. A tar file killed halfway through leaves a partial file on disk and a bfile record that claims work is in progress. So dsquasar watches the clock itself.</a:t>
+            </a:r>
+            <a:endParaRPr lang="en-US" sz="1450" dirty="0"/>
+          </a:p>
+        </p:txBody>
+      </p:sp>
+      <p:sp>
+        <p:nvSpPr>
+          <p:cNvPr id="5" name="Shape 3"/>
+          <p:cNvSpPr/>
+          <p:nvPr/>
+        </p:nvSpPr>
+        <p:spPr>
+          <a:xfrm>
+            <a:off x="822960" y="2514600"/>
+            <a:ext cx="10515600" cy="384048"/>
+          </a:xfrm>
+          <a:prstGeom prst="roundRect">
+            <a:avLst>
+              <a:gd name="adj" fmla="val 19048"/>
+            </a:avLst>
+          </a:prstGeom>
+          <a:solidFill>
+            <a:srgbClr val="0B2A63"/>
+          </a:solidFill>
+          <a:ln/>
+        </p:spPr>
+      </p:sp>
+      <p:sp>
+        <p:nvSpPr>
+          <p:cNvPr id="6" name="Shape 4"/>
+          <p:cNvSpPr/>
+          <p:nvPr/>
+        </p:nvSpPr>
+        <p:spPr>
+          <a:xfrm>
+            <a:off x="822960" y="2514600"/>
+            <a:ext cx="10077450" cy="384048"/>
+          </a:xfrm>
+          <a:prstGeom prst="roundRect">
+            <a:avLst>
+              <a:gd name="adj" fmla="val 19048"/>
+            </a:avLst>
+          </a:prstGeom>
+          <a:solidFill>
+            <a:srgbClr val="0057C2"/>
+          </a:solidFill>
+          <a:ln/>
+        </p:spPr>
+      </p:sp>
+      <p:sp>
+        <p:nvSpPr>
+          <p:cNvPr id="7" name="Text 5"/>
+          <p:cNvSpPr/>
+          <p:nvPr/>
+        </p:nvSpPr>
+        <p:spPr>
+          <a:xfrm>
+            <a:off x="822960" y="2514600"/>
+            <a:ext cx="10077450" cy="384048"/>
+          </a:xfrm>
+          <a:prstGeom prst="rect">
+            <a:avLst/>
+          </a:prstGeom>
+          <a:noFill/>
+          <a:ln/>
+        </p:spPr>
+        <p:txBody>
+          <a:bodyPr wrap="square" lIns="0" tIns="0" rIns="0" bIns="0" rtlCol="0" anchor="ctr"/>
+          <a:lstStyle/>
+          <a:p>
+            <a:pPr algn="ctr" indent="0" marL="0">
+              <a:buNone/>
+            </a:pPr>
+            <a:r>
+              <a:rPr lang="en-US" sz="1200" b="1" dirty="0">
+                <a:solidFill>
+                  <a:srgbClr val="FFFFFF"/>
+                </a:solidFill>
+                <a:latin typeface="Poppins" pitchFamily="34" charset="0"/>
+                <a:ea typeface="Poppins" pitchFamily="34" charset="-122"/>
+                <a:cs typeface="Poppins" pitchFamily="34" charset="-120"/>
+              </a:rPr>
+              <a:t>work accepted   —   0 h to 23 h</a:t>
+            </a:r>
+            <a:endParaRPr lang="en-US" sz="1200" dirty="0"/>
+          </a:p>
+        </p:txBody>
+      </p:sp>
+      <p:sp>
+        <p:nvSpPr>
+          <p:cNvPr id="8" name="Text 6"/>
+          <p:cNvSpPr/>
+          <p:nvPr/>
+        </p:nvSpPr>
+        <p:spPr>
+          <a:xfrm>
+            <a:off x="10900410" y="2496312"/>
+            <a:ext cx="438150" cy="420624"/>
+          </a:xfrm>
+          <a:prstGeom prst="rect">
+            <a:avLst/>
+          </a:prstGeom>
+          <a:noFill/>
+          <a:ln/>
+        </p:spPr>
+        <p:txBody>
+          <a:bodyPr wrap="square" lIns="0" tIns="0" rIns="0" bIns="0" rtlCol="0" anchor="ctr"/>
+          <a:lstStyle/>
+          <a:p>
+            <a:pPr algn="ctr" indent="0" marL="0">
+              <a:buNone/>
+            </a:pPr>
+            <a:r>
+              <a:rPr lang="en-US" sz="800" b="1" dirty="0">
+                <a:solidFill>
+                  <a:srgbClr val="42C0FF"/>
+                </a:solidFill>
+                <a:latin typeface="Poppins" pitchFamily="34" charset="0"/>
+                <a:ea typeface="Poppins" pitchFamily="34" charset="-122"/>
+                <a:cs typeface="Poppins" pitchFamily="34" charset="-120"/>
+              </a:rPr>
+              <a:t>wind</a:t>
+            </a:r>
+            <a:endParaRPr lang="en-US" sz="800" dirty="0"/>
+          </a:p>
+          <a:p>
+            <a:pPr algn="ctr" indent="0" marL="0">
+              <a:buNone/>
+            </a:pPr>
+            <a:r>
+              <a:rPr lang="en-US" sz="800" b="1" dirty="0">
+                <a:solidFill>
+                  <a:srgbClr val="42C0FF"/>
+                </a:solidFill>
+                <a:latin typeface="Poppins" pitchFamily="34" charset="0"/>
+                <a:ea typeface="Poppins" pitchFamily="34" charset="-122"/>
+                <a:cs typeface="Poppins" pitchFamily="34" charset="-120"/>
+              </a:rPr>
+              <a:t>down</a:t>
+            </a:r>
+            <a:endParaRPr lang="en-US" sz="800" dirty="0"/>
+          </a:p>
+        </p:txBody>
+      </p:sp>
+      <p:sp>
+        <p:nvSpPr>
+          <p:cNvPr id="9" name="Text 7"/>
+          <p:cNvSpPr/>
+          <p:nvPr/>
+        </p:nvSpPr>
+        <p:spPr>
+          <a:xfrm>
+            <a:off x="8705850" y="2185416"/>
+            <a:ext cx="2194560" cy="274320"/>
+          </a:xfrm>
+          <a:prstGeom prst="rect">
+            <a:avLst/>
+          </a:prstGeom>
+          <a:noFill/>
+          <a:ln/>
+        </p:spPr>
+        <p:txBody>
+          <a:bodyPr wrap="square" lIns="0" tIns="0" rIns="0" bIns="0" rtlCol="0" anchor="ctr"/>
+          <a:lstStyle/>
+          <a:p>
+            <a:pPr algn="r" indent="0" marL="0">
+              <a:buNone/>
+            </a:pPr>
+            <a:r>
+              <a:rPr lang="en-US" sz="1000" dirty="0">
+                <a:solidFill>
+                  <a:srgbClr val="42C0FF"/>
+                </a:solidFill>
+                <a:latin typeface="Courier New" pitchFamily="34" charset="0"/>
+                <a:ea typeface="Courier New" pitchFamily="34" charset="-122"/>
+                <a:cs typeface="Courier New" pitchFamily="34" charset="-120"/>
+              </a:rPr>
+              <a:t>MAXRUNTIME  23 h</a:t>
+            </a:r>
+            <a:endParaRPr lang="en-US" sz="1000" dirty="0"/>
+          </a:p>
+        </p:txBody>
+      </p:sp>
+      <p:sp>
+        <p:nvSpPr>
+          <p:cNvPr id="10" name="Text 8"/>
+          <p:cNvSpPr/>
+          <p:nvPr/>
+        </p:nvSpPr>
+        <p:spPr>
+          <a:xfrm>
+            <a:off x="822960" y="2971800"/>
+            <a:ext cx="1645920" cy="274320"/>
+          </a:xfrm>
+          <a:prstGeom prst="rect">
+            <a:avLst/>
+          </a:prstGeom>
+          <a:noFill/>
+          <a:ln/>
+        </p:spPr>
+        <p:txBody>
+          <a:bodyPr wrap="square" lIns="0" tIns="0" rIns="0" bIns="0" rtlCol="0" anchor="ctr"/>
+          <a:lstStyle/>
+          <a:p>
+            <a:pPr algn="l" indent="0" marL="0">
+              <a:buNone/>
+            </a:pPr>
+            <a:r>
+              <a:rPr lang="en-US" sz="1000" dirty="0">
+                <a:solidFill>
+                  <a:srgbClr val="97999B"/>
+                </a:solidFill>
+                <a:latin typeface="Courier New" pitchFamily="34" charset="0"/>
+                <a:ea typeface="Courier New" pitchFamily="34" charset="-122"/>
+                <a:cs typeface="Courier New" pitchFamily="34" charset="-120"/>
+              </a:rPr>
+              <a:t>0 h</a:t>
+            </a:r>
+            <a:endParaRPr lang="en-US" sz="1000" dirty="0"/>
+          </a:p>
+        </p:txBody>
+      </p:sp>
+      <p:sp>
+        <p:nvSpPr>
+          <p:cNvPr id="11" name="Text 9"/>
+          <p:cNvSpPr/>
+          <p:nvPr/>
+        </p:nvSpPr>
+        <p:spPr>
+          <a:xfrm>
+            <a:off x="9144000" y="2971800"/>
+            <a:ext cx="2194560" cy="274320"/>
+          </a:xfrm>
+          <a:prstGeom prst="rect">
+            <a:avLst/>
+          </a:prstGeom>
+          <a:noFill/>
+          <a:ln/>
+        </p:spPr>
+        <p:txBody>
+          <a:bodyPr wrap="square" lIns="0" tIns="0" rIns="0" bIns="0" rtlCol="0" anchor="ctr"/>
+          <a:lstStyle/>
+          <a:p>
+            <a:pPr algn="r" indent="0" marL="0">
+              <a:buNone/>
+            </a:pPr>
+            <a:r>
+              <a:rPr lang="en-US" sz="1000" dirty="0">
+                <a:solidFill>
+                  <a:srgbClr val="97999B"/>
+                </a:solidFill>
+                <a:latin typeface="Courier New" pitchFamily="34" charset="0"/>
+                <a:ea typeface="Courier New" pitchFamily="34" charset="-122"/>
+                <a:cs typeface="Courier New" pitchFamily="34" charset="-120"/>
+              </a:rPr>
+              <a:t>24 h  PBS walltime</a:t>
+            </a:r>
+            <a:endParaRPr lang="en-US" sz="1000" dirty="0"/>
+          </a:p>
+        </p:txBody>
+      </p:sp>
+      <p:sp>
+        <p:nvSpPr>
+          <p:cNvPr id="12" name="Shape 10"/>
+          <p:cNvSpPr/>
+          <p:nvPr/>
+        </p:nvSpPr>
+        <p:spPr>
+          <a:xfrm>
+            <a:off x="822960" y="3246120"/>
+            <a:ext cx="10515600" cy="621792"/>
+          </a:xfrm>
+          <a:prstGeom prst="roundRect">
+            <a:avLst>
+              <a:gd name="adj" fmla="val 10294"/>
+            </a:avLst>
+          </a:prstGeom>
+          <a:solidFill>
+            <a:srgbClr val="0B2A63"/>
+          </a:solidFill>
+          <a:ln w="12700">
+            <a:solidFill>
+              <a:srgbClr val="2C4E7D"/>
+            </a:solidFill>
+            <a:prstDash val="solid"/>
+          </a:ln>
+        </p:spPr>
+      </p:sp>
+      <p:sp>
+        <p:nvSpPr>
           <p:cNvPr id="13" name="Text 11"/>
           <p:cNvSpPr/>
           <p:nvPr/>
         </p:nvSpPr>
         <p:spPr>
           <a:xfrm>
-            <a:off x="640080" y="4956048"/>
-            <a:ext cx="5166360" cy="1051560"/>
+            <a:off x="1005840" y="3246120"/>
+            <a:ext cx="2286000" cy="621792"/>
           </a:xfrm>
           <a:prstGeom prst="rect">
             <a:avLst/>
@@ -20254,6 +22243,835 @@
         </p:spPr>
         <p:txBody>
           <a:bodyPr wrap="square" lIns="0" tIns="0" rIns="0" bIns="0" rtlCol="0" anchor="ctr"/>
+          <a:lstStyle/>
+          <a:p>
+            <a:pPr indent="0" marL="0">
+              <a:buNone/>
+            </a:pPr>
+            <a:r>
+              <a:rPr lang="en-US" sz="1250" b="1" dirty="0">
+                <a:solidFill>
+                  <a:srgbClr val="42C0FF"/>
+                </a:solidFill>
+                <a:latin typeface="Poppins" pitchFamily="34" charset="0"/>
+                <a:ea typeface="Poppins" pitchFamily="34" charset="-122"/>
+                <a:cs typeface="Poppins" pitchFamily="34" charset="-120"/>
+              </a:rPr>
+              <a:t>Before each unit</a:t>
+            </a:r>
+            <a:endParaRPr lang="en-US" sz="1250" dirty="0"/>
+          </a:p>
+        </p:txBody>
+      </p:sp>
+      <p:sp>
+        <p:nvSpPr>
+          <p:cNvPr id="14" name="Text 12"/>
+          <p:cNvSpPr/>
+          <p:nvPr/>
+        </p:nvSpPr>
+        <p:spPr>
+          <a:xfrm>
+            <a:off x="3337560" y="3246120"/>
+            <a:ext cx="7818120" cy="621792"/>
+          </a:xfrm>
+          <a:prstGeom prst="rect">
+            <a:avLst/>
+          </a:prstGeom>
+          <a:noFill/>
+          <a:ln/>
+        </p:spPr>
+        <p:txBody>
+          <a:bodyPr wrap="square" lIns="0" tIns="0" rIns="0" bIns="0" rtlCol="0" anchor="ctr"/>
+          <a:lstStyle/>
+          <a:p>
+            <a:pPr indent="0" marL="0">
+              <a:lnSpc>
+                <a:spcPct val="100000"/>
+              </a:lnSpc>
+              <a:buNone/>
+            </a:pPr>
+            <a:r>
+              <a:rPr lang="en-US" sz="1100" dirty="0">
+                <a:solidFill>
+                  <a:srgbClr val="C3D7EE"/>
+                </a:solidFill>
+                <a:latin typeface="Poppins" pitchFamily="34" charset="0"/>
+                <a:ea typeface="Poppins" pitchFamily="34" charset="-122"/>
+                <a:cs typeface="Poppins" pitchFamily="34" charset="-120"/>
+              </a:rPr>
+              <a:t>The remaining time is compared against what the next tar file or transfer batch is expected to need.</a:t>
+            </a:r>
+            <a:endParaRPr lang="en-US" sz="1100" dirty="0"/>
+          </a:p>
+        </p:txBody>
+      </p:sp>
+      <p:sp>
+        <p:nvSpPr>
+          <p:cNvPr id="15" name="Shape 13"/>
+          <p:cNvSpPr/>
+          <p:nvPr/>
+        </p:nvSpPr>
+        <p:spPr>
+          <a:xfrm>
+            <a:off x="822960" y="3931920"/>
+            <a:ext cx="10515600" cy="621792"/>
+          </a:xfrm>
+          <a:prstGeom prst="roundRect">
+            <a:avLst>
+              <a:gd name="adj" fmla="val 10294"/>
+            </a:avLst>
+          </a:prstGeom>
+          <a:solidFill>
+            <a:srgbClr val="0B2A63"/>
+          </a:solidFill>
+          <a:ln w="12700">
+            <a:solidFill>
+              <a:srgbClr val="2C4E7D"/>
+            </a:solidFill>
+            <a:prstDash val="solid"/>
+          </a:ln>
+        </p:spPr>
+      </p:sp>
+      <p:sp>
+        <p:nvSpPr>
+          <p:cNvPr id="16" name="Text 14"/>
+          <p:cNvSpPr/>
+          <p:nvPr/>
+        </p:nvSpPr>
+        <p:spPr>
+          <a:xfrm>
+            <a:off x="1005840" y="3931920"/>
+            <a:ext cx="2286000" cy="621792"/>
+          </a:xfrm>
+          <a:prstGeom prst="rect">
+            <a:avLst/>
+          </a:prstGeom>
+          <a:noFill/>
+          <a:ln/>
+        </p:spPr>
+        <p:txBody>
+          <a:bodyPr wrap="square" lIns="0" tIns="0" rIns="0" bIns="0" rtlCol="0" anchor="ctr"/>
+          <a:lstStyle/>
+          <a:p>
+            <a:pPr indent="0" marL="0">
+              <a:buNone/>
+            </a:pPr>
+            <a:r>
+              <a:rPr lang="en-US" sz="1250" b="1" dirty="0">
+                <a:solidFill>
+                  <a:srgbClr val="42C0FF"/>
+                </a:solidFill>
+                <a:latin typeface="Poppins" pitchFamily="34" charset="0"/>
+                <a:ea typeface="Poppins" pitchFamily="34" charset="-122"/>
+                <a:cs typeface="Poppins" pitchFamily="34" charset="-120"/>
+              </a:rPr>
+              <a:t>Past 23 hours</a:t>
+            </a:r>
+            <a:endParaRPr lang="en-US" sz="1250" dirty="0"/>
+          </a:p>
+        </p:txBody>
+      </p:sp>
+      <p:sp>
+        <p:nvSpPr>
+          <p:cNvPr id="17" name="Text 15"/>
+          <p:cNvSpPr/>
+          <p:nvPr/>
+        </p:nvSpPr>
+        <p:spPr>
+          <a:xfrm>
+            <a:off x="3337560" y="3931920"/>
+            <a:ext cx="7818120" cy="621792"/>
+          </a:xfrm>
+          <a:prstGeom prst="rect">
+            <a:avLst/>
+          </a:prstGeom>
+          <a:noFill/>
+          <a:ln/>
+        </p:spPr>
+        <p:txBody>
+          <a:bodyPr wrap="square" lIns="0" tIns="0" rIns="0" bIns="0" rtlCol="0" anchor="ctr"/>
+          <a:lstStyle/>
+          <a:p>
+            <a:pPr indent="0" marL="0">
+              <a:lnSpc>
+                <a:spcPct val="100000"/>
+              </a:lnSpc>
+              <a:buNone/>
+            </a:pPr>
+            <a:r>
+              <a:rPr lang="en-US" sz="1100" dirty="0">
+                <a:solidFill>
+                  <a:srgbClr val="C3D7EE"/>
+                </a:solidFill>
+                <a:latin typeface="Poppins" pitchFamily="34" charset="0"/>
+                <a:ea typeface="Poppins" pitchFamily="34" charset="-122"/>
+                <a:cs typeface="Poppins" pitchFamily="34" charset="-120"/>
+              </a:rPr>
+              <a:t>No new unit is started. Children already running are waited on so nothing is truncated.</a:t>
+            </a:r>
+            <a:endParaRPr lang="en-US" sz="1100" dirty="0"/>
+          </a:p>
+        </p:txBody>
+      </p:sp>
+      <p:sp>
+        <p:nvSpPr>
+          <p:cNvPr id="18" name="Shape 16"/>
+          <p:cNvSpPr/>
+          <p:nvPr/>
+        </p:nvSpPr>
+        <p:spPr>
+          <a:xfrm>
+            <a:off x="822960" y="4617720"/>
+            <a:ext cx="10515600" cy="621792"/>
+          </a:xfrm>
+          <a:prstGeom prst="roundRect">
+            <a:avLst>
+              <a:gd name="adj" fmla="val 10294"/>
+            </a:avLst>
+          </a:prstGeom>
+          <a:solidFill>
+            <a:srgbClr val="0B2A63"/>
+          </a:solidFill>
+          <a:ln w="12700">
+            <a:solidFill>
+              <a:srgbClr val="2C4E7D"/>
+            </a:solidFill>
+            <a:prstDash val="solid"/>
+          </a:ln>
+        </p:spPr>
+      </p:sp>
+      <p:sp>
+        <p:nvSpPr>
+          <p:cNvPr id="19" name="Text 17"/>
+          <p:cNvSpPr/>
+          <p:nvPr/>
+        </p:nvSpPr>
+        <p:spPr>
+          <a:xfrm>
+            <a:off x="1005840" y="4617720"/>
+            <a:ext cx="2286000" cy="621792"/>
+          </a:xfrm>
+          <a:prstGeom prst="rect">
+            <a:avLst/>
+          </a:prstGeom>
+          <a:noFill/>
+          <a:ln/>
+        </p:spPr>
+        <p:txBody>
+          <a:bodyPr wrap="square" lIns="0" tIns="0" rIns="0" bIns="0" rtlCol="0" anchor="ctr"/>
+          <a:lstStyle/>
+          <a:p>
+            <a:pPr indent="0" marL="0">
+              <a:buNone/>
+            </a:pPr>
+            <a:r>
+              <a:rPr lang="en-US" sz="1250" b="1" dirty="0">
+                <a:solidFill>
+                  <a:srgbClr val="42C0FF"/>
+                </a:solidFill>
+                <a:latin typeface="Poppins" pitchFamily="34" charset="0"/>
+                <a:ea typeface="Poppins" pitchFamily="34" charset="-122"/>
+                <a:cs typeface="Poppins" pitchFamily="34" charset="-120"/>
+              </a:rPr>
+              <a:t>Progress email</a:t>
+            </a:r>
+            <a:endParaRPr lang="en-US" sz="1250" dirty="0"/>
+          </a:p>
+        </p:txBody>
+      </p:sp>
+      <p:sp>
+        <p:nvSpPr>
+          <p:cNvPr id="20" name="Text 18"/>
+          <p:cNvSpPr/>
+          <p:nvPr/>
+        </p:nvSpPr>
+        <p:spPr>
+          <a:xfrm>
+            <a:off x="3337560" y="4617720"/>
+            <a:ext cx="7818120" cy="621792"/>
+          </a:xfrm>
+          <a:prstGeom prst="rect">
+            <a:avLst/>
+          </a:prstGeom>
+          <a:noFill/>
+          <a:ln/>
+        </p:spPr>
+        <p:txBody>
+          <a:bodyPr wrap="square" lIns="0" tIns="0" rIns="0" bIns="0" rtlCol="0" anchor="ctr"/>
+          <a:lstStyle/>
+          <a:p>
+            <a:pPr indent="0" marL="0">
+              <a:lnSpc>
+                <a:spcPct val="100000"/>
+              </a:lnSpc>
+              <a:buNone/>
+            </a:pPr>
+            <a:r>
+              <a:rPr lang="en-US" sz="1100" dirty="0">
+                <a:solidFill>
+                  <a:srgbClr val="C3D7EE"/>
+                </a:solidFill>
+                <a:latin typeface="Poppins" pitchFamily="34" charset="0"/>
+                <a:ea typeface="Poppins" pitchFamily="34" charset="-122"/>
+                <a:cs typeface="Poppins" pitchFamily="34" charset="-120"/>
+              </a:rPr>
+              <a:t>The specialist is mailed what finished and what is still outstanding, so the next run is not a surprise.</a:t>
+            </a:r>
+            <a:endParaRPr lang="en-US" sz="1100" dirty="0"/>
+          </a:p>
+        </p:txBody>
+      </p:sp>
+      <p:sp>
+        <p:nvSpPr>
+          <p:cNvPr id="21" name="Shape 19"/>
+          <p:cNvSpPr/>
+          <p:nvPr/>
+        </p:nvSpPr>
+        <p:spPr>
+          <a:xfrm>
+            <a:off x="822960" y="5303520"/>
+            <a:ext cx="10515600" cy="621792"/>
+          </a:xfrm>
+          <a:prstGeom prst="roundRect">
+            <a:avLst>
+              <a:gd name="adj" fmla="val 10294"/>
+            </a:avLst>
+          </a:prstGeom>
+          <a:solidFill>
+            <a:srgbClr val="0B2A63"/>
+          </a:solidFill>
+          <a:ln w="12700">
+            <a:solidFill>
+              <a:srgbClr val="2C4E7D"/>
+            </a:solidFill>
+            <a:prstDash val="solid"/>
+          </a:ln>
+        </p:spPr>
+      </p:sp>
+      <p:sp>
+        <p:nvSpPr>
+          <p:cNvPr id="22" name="Text 20"/>
+          <p:cNvSpPr/>
+          <p:nvPr/>
+        </p:nvSpPr>
+        <p:spPr>
+          <a:xfrm>
+            <a:off x="1005840" y="5303520"/>
+            <a:ext cx="2286000" cy="621792"/>
+          </a:xfrm>
+          <a:prstGeom prst="rect">
+            <a:avLst/>
+          </a:prstGeom>
+          <a:noFill/>
+          <a:ln/>
+        </p:spPr>
+        <p:txBody>
+          <a:bodyPr wrap="square" lIns="0" tIns="0" rIns="0" bIns="0" rtlCol="0" anchor="ctr"/>
+          <a:lstStyle/>
+          <a:p>
+            <a:pPr indent="0" marL="0">
+              <a:buNone/>
+            </a:pPr>
+            <a:r>
+              <a:rPr lang="en-US" sz="1250" b="1" dirty="0">
+                <a:solidFill>
+                  <a:srgbClr val="42C0FF"/>
+                </a:solidFill>
+                <a:latin typeface="Poppins" pitchFamily="34" charset="0"/>
+                <a:ea typeface="Poppins" pitchFamily="34" charset="-122"/>
+                <a:cs typeface="Poppins" pitchFamily="34" charset="-120"/>
+              </a:rPr>
+              <a:t>Record kept open</a:t>
+            </a:r>
+            <a:endParaRPr lang="en-US" sz="1250" dirty="0"/>
+          </a:p>
+        </p:txBody>
+      </p:sp>
+      <p:sp>
+        <p:nvSpPr>
+          <p:cNvPr id="23" name="Text 21"/>
+          <p:cNvSpPr/>
+          <p:nvPr/>
+        </p:nvSpPr>
+        <p:spPr>
+          <a:xfrm>
+            <a:off x="3337560" y="5303520"/>
+            <a:ext cx="7818120" cy="621792"/>
+          </a:xfrm>
+          <a:prstGeom prst="rect">
+            <a:avLst/>
+          </a:prstGeom>
+          <a:noFill/>
+          <a:ln/>
+        </p:spPr>
+        <p:txBody>
+          <a:bodyPr wrap="square" lIns="0" tIns="0" rIns="0" bIns="0" rtlCol="0" anchor="ctr"/>
+          <a:lstStyle/>
+          <a:p>
+            <a:pPr indent="0" marL="0">
+              <a:lnSpc>
+                <a:spcPct val="100000"/>
+              </a:lnSpc>
+              <a:buNone/>
+            </a:pPr>
+            <a:r>
+              <a:rPr lang="en-US" sz="1100" dirty="0">
+                <a:solidFill>
+                  <a:srgbClr val="C3D7EE"/>
+                </a:solidFill>
+                <a:latin typeface="Poppins" pitchFamily="34" charset="0"/>
+                <a:ea typeface="Poppins" pitchFamily="34" charset="-122"/>
+                <a:cs typeface="Poppins" pitchFamily="34" charset="-120"/>
+              </a:rPr>
+              <a:t>Untarred bfile records stay at 'N' and untransferred ones at 'T'. The next scheduled run simply resumes.</a:t>
+            </a:r>
+            <a:endParaRPr lang="en-US" sz="1100" dirty="0"/>
+          </a:p>
+        </p:txBody>
+      </p:sp>
+      <p:sp>
+        <p:nvSpPr>
+          <p:cNvPr id="24" name="Text 22"/>
+          <p:cNvSpPr/>
+          <p:nvPr/>
+        </p:nvSpPr>
+        <p:spPr>
+          <a:xfrm>
+            <a:off x="822960" y="6007608"/>
+            <a:ext cx="10515600" cy="320040"/>
+          </a:xfrm>
+          <a:prstGeom prst="rect">
+            <a:avLst/>
+          </a:prstGeom>
+          <a:noFill/>
+          <a:ln/>
+        </p:spPr>
+        <p:txBody>
+          <a:bodyPr wrap="square" lIns="0" tIns="0" rIns="0" bIns="0" rtlCol="0" anchor="ctr"/>
+          <a:lstStyle/>
+          <a:p>
+            <a:pPr indent="0" marL="0">
+              <a:buNone/>
+            </a:pPr>
+            <a:r>
+              <a:rPr lang="en-US" sz="1100" i="1" dirty="0">
+                <a:solidFill>
+                  <a:srgbClr val="97999B"/>
+                </a:solidFill>
+                <a:latin typeface="Poppins" pitchFamily="34" charset="0"/>
+                <a:ea typeface="Poppins" pitchFamily="34" charset="-122"/>
+                <a:cs typeface="Poppins" pitchFamily="34" charset="-120"/>
+              </a:rPr>
+              <a:t>The guard only runs inside a real batch job; a foreground run is left to the operator.</a:t>
+            </a:r>
+            <a:endParaRPr lang="en-US" sz="1100" dirty="0"/>
+          </a:p>
+        </p:txBody>
+      </p:sp>
+      <p:sp>
+        <p:nvSpPr>
+          <p:cNvPr id="25" name="Text 23"/>
+          <p:cNvSpPr/>
+          <p:nvPr/>
+        </p:nvSpPr>
+        <p:spPr>
+          <a:xfrm>
+            <a:off x="256032" y="6446520"/>
+            <a:ext cx="365760" cy="274320"/>
+          </a:xfrm>
+          <a:prstGeom prst="rect">
+            <a:avLst/>
+          </a:prstGeom>
+          <a:noFill/>
+          <a:ln/>
+        </p:spPr>
+        <p:txBody>
+          <a:bodyPr wrap="square" lIns="0" tIns="0" rIns="0" bIns="0" rtlCol="0" anchor="ctr"/>
+          <a:lstStyle/>
+          <a:p>
+            <a:pPr indent="0" marL="0">
+              <a:buNone/>
+            </a:pPr>
+            <a:r>
+              <a:rPr lang="en-US" sz="950" b="1" dirty="0">
+                <a:solidFill>
+                  <a:srgbClr val="FFFFFF"/>
+                </a:solidFill>
+                <a:latin typeface="Poppins" pitchFamily="34" charset="0"/>
+                <a:ea typeface="Poppins" pitchFamily="34" charset="-122"/>
+                <a:cs typeface="Poppins" pitchFamily="34" charset="-120"/>
+              </a:rPr>
+              <a:t>20</a:t>
+            </a:r>
+            <a:endParaRPr lang="en-US" sz="950" dirty="0"/>
+          </a:p>
+        </p:txBody>
+      </p:sp>
+      <p:sp>
+        <p:nvSpPr>
+          <p:cNvPr id="26" name="Text 24"/>
+          <p:cNvSpPr/>
+          <p:nvPr/>
+        </p:nvSpPr>
+        <p:spPr>
+          <a:xfrm>
+            <a:off x="786384" y="6446520"/>
+            <a:ext cx="5486400" cy="274320"/>
+          </a:xfrm>
+          <a:prstGeom prst="rect">
+            <a:avLst/>
+          </a:prstGeom>
+          <a:noFill/>
+          <a:ln/>
+        </p:spPr>
+        <p:txBody>
+          <a:bodyPr wrap="square" lIns="0" tIns="0" rIns="0" bIns="0" rtlCol="0" anchor="ctr"/>
+          <a:lstStyle/>
+          <a:p>
+            <a:pPr indent="0" marL="0">
+              <a:buNone/>
+            </a:pPr>
+            <a:r>
+              <a:rPr lang="en-US" sz="950" b="1" dirty="0">
+                <a:solidFill>
+                  <a:srgbClr val="FFFFFF"/>
+                </a:solidFill>
+                <a:latin typeface="Poppins" pitchFamily="34" charset="0"/>
+                <a:ea typeface="Poppins" pitchFamily="34" charset="-122"/>
+                <a:cs typeface="Poppins" pitchFamily="34" charset="-120"/>
+              </a:rPr>
+              <a:t>DSQUASAR  •  QUASAR BACKUP GUIDE</a:t>
+            </a:r>
+            <a:endParaRPr lang="en-US" sz="950" dirty="0"/>
+          </a:p>
+        </p:txBody>
+      </p:sp>
+    </p:spTree>
+  </p:cSld>
+  <p:clrMapOvr>
+    <a:masterClrMapping/>
+  </p:clrMapOvr>
+</p:sld>
+</file>
+
+<file path=ppt/slides/slide22.xml><?xml version="1.0" encoding="utf-8"?>
+<p:sld xmlns:a="http://schemas.openxmlformats.org/drawingml/2006/main" xmlns:r="http://schemas.openxmlformats.org/officeDocument/2006/relationships" xmlns:p="http://schemas.openxmlformats.org/presentationml/2006/main">
+  <p:cSld name="Slide 22">
+    <p:spTree>
+      <p:nvGrpSpPr>
+        <p:cNvPr id="1" name=""/>
+        <p:cNvGrpSpPr/>
+        <p:nvPr/>
+      </p:nvGrpSpPr>
+      <p:grpSpPr>
+        <a:xfrm>
+          <a:off x="0" y="0"/>
+          <a:ext cx="0" cy="0"/>
+          <a:chOff x="0" y="0"/>
+          <a:chExt cx="0" cy="0"/>
+        </a:xfrm>
+      </p:grpSpPr>
+      <p:sp>
+        <p:nvSpPr>
+          <p:cNvPr id="2" name="Text 0"/>
+          <p:cNvSpPr/>
+          <p:nvPr/>
+        </p:nvSpPr>
+        <p:spPr>
+          <a:xfrm>
+            <a:off x="457200" y="384048"/>
+            <a:ext cx="8229600" cy="274320"/>
+          </a:xfrm>
+          <a:prstGeom prst="rect">
+            <a:avLst/>
+          </a:prstGeom>
+          <a:noFill/>
+          <a:ln/>
+        </p:spPr>
+        <p:txBody>
+          <a:bodyPr wrap="square" lIns="0" tIns="0" rIns="0" bIns="0" rtlCol="0" anchor="ctr"/>
+          <a:lstStyle/>
+          <a:p>
+            <a:pPr indent="0" marL="0">
+              <a:buNone/>
+            </a:pPr>
+            <a:r>
+              <a:rPr lang="en-US" sz="1200" b="1" spc="200" kern="0" dirty="0">
+                <a:solidFill>
+                  <a:srgbClr val="0092DB"/>
+                </a:solidFill>
+                <a:latin typeface="Poppins" pitchFamily="34" charset="0"/>
+                <a:ea typeface="Poppins" pitchFamily="34" charset="-122"/>
+                <a:cs typeface="Poppins" pitchFamily="34" charset="-120"/>
+              </a:rPr>
+              <a:t>WORKER SLOTS</a:t>
+            </a:r>
+            <a:endParaRPr lang="en-US" sz="1200" dirty="0"/>
+          </a:p>
+        </p:txBody>
+      </p:sp>
+      <p:sp>
+        <p:nvSpPr>
+          <p:cNvPr id="3" name="Text 1"/>
+          <p:cNvSpPr/>
+          <p:nvPr/>
+        </p:nvSpPr>
+        <p:spPr>
+          <a:xfrm>
+            <a:off x="457200" y="658368"/>
+            <a:ext cx="9326880" cy="640080"/>
+          </a:xfrm>
+          <a:prstGeom prst="rect">
+            <a:avLst/>
+          </a:prstGeom>
+          <a:noFill/>
+          <a:ln/>
+        </p:spPr>
+        <p:txBody>
+          <a:bodyPr wrap="square" lIns="0" tIns="0" rIns="0" bIns="0" rtlCol="0" anchor="ctr"/>
+          <a:lstStyle/>
+          <a:p>
+            <a:pPr indent="0" marL="0">
+              <a:buNone/>
+            </a:pPr>
+            <a:r>
+              <a:rPr lang="en-US" sz="3200" b="1" dirty="0">
+                <a:solidFill>
+                  <a:srgbClr val="00357A"/>
+                </a:solidFill>
+                <a:latin typeface="Poppins" pitchFamily="34" charset="0"/>
+                <a:ea typeface="Poppins" pitchFamily="34" charset="-122"/>
+                <a:cs typeface="Poppins" pitchFamily="34" charset="-120"/>
+              </a:rPr>
+              <a:t>-W / -w  —  When One Batch Job Hangs</a:t>
+            </a:r>
+            <a:endParaRPr lang="en-US" sz="3200" dirty="0"/>
+          </a:p>
+        </p:txBody>
+      </p:sp>
+      <p:sp>
+        <p:nvSpPr>
+          <p:cNvPr id="4" name="Text 2"/>
+          <p:cNvSpPr/>
+          <p:nvPr/>
+        </p:nvSpPr>
+        <p:spPr>
+          <a:xfrm>
+            <a:off x="457200" y="1444752"/>
+            <a:ext cx="11292840" cy="566928"/>
+          </a:xfrm>
+          <a:prstGeom prst="rect">
+            <a:avLst/>
+          </a:prstGeom>
+          <a:noFill/>
+          <a:ln/>
+        </p:spPr>
+        <p:txBody>
+          <a:bodyPr wrap="square" lIns="0" tIns="0" rIns="0" bIns="0" rtlCol="0" anchor="t"/>
+          <a:lstStyle/>
+          <a:p>
+            <a:pPr indent="0" marL="0">
+              <a:lnSpc>
+                <a:spcPct val="110000"/>
+              </a:lnSpc>
+              <a:buNone/>
+            </a:pPr>
+            <a:r>
+              <a:rPr lang="en-US" sz="1400" dirty="0">
+                <a:solidFill>
+                  <a:srgbClr val="00357A"/>
+                </a:solidFill>
+                <a:latin typeface="Poppins" pitchFamily="34" charset="0"/>
+                <a:ea typeface="Poppins" pitchFamily="34" charset="-122"/>
+                <a:cs typeface="Poppins" pitchFamily="34" charset="-120"/>
+              </a:rPr>
+              <a:t>The -A 3 gather runs from cron several times a day, so a crashed job restarts quickly — dead locks are taken over and dscheck retries. The gap was a job that is alive but making no progress: it holds the duplicate key and every later cron line simply blocks.</a:t>
+            </a:r>
+            <a:endParaRPr lang="en-US" sz="1400" dirty="0"/>
+          </a:p>
+        </p:txBody>
+      </p:sp>
+      <p:sp>
+        <p:nvSpPr>
+          <p:cNvPr id="5" name="Text 3"/>
+          <p:cNvSpPr/>
+          <p:nvPr/>
+        </p:nvSpPr>
+        <p:spPr>
+          <a:xfrm>
+            <a:off x="457200" y="2148840"/>
+            <a:ext cx="5532120" cy="320040"/>
+          </a:xfrm>
+          <a:prstGeom prst="rect">
+            <a:avLst/>
+          </a:prstGeom>
+          <a:noFill/>
+          <a:ln/>
+        </p:spPr>
+        <p:txBody>
+          <a:bodyPr wrap="square" lIns="0" tIns="0" rIns="0" bIns="0" rtlCol="0" anchor="ctr"/>
+          <a:lstStyle/>
+          <a:p>
+            <a:pPr indent="0" marL="0">
+              <a:buNone/>
+            </a:pPr>
+            <a:r>
+              <a:rPr lang="en-US" sz="1500" b="1" dirty="0">
+                <a:solidFill>
+                  <a:srgbClr val="0057C2"/>
+                </a:solidFill>
+                <a:latin typeface="Poppins" pitchFamily="34" charset="0"/>
+                <a:ea typeface="Poppins" pitchFamily="34" charset="-122"/>
+                <a:cs typeface="Poppins" pitchFamily="34" charset="-120"/>
+              </a:rPr>
+              <a:t>Stall test</a:t>
+            </a:r>
+            <a:endParaRPr lang="en-US" sz="1500" dirty="0"/>
+          </a:p>
+        </p:txBody>
+      </p:sp>
+      <p:sp>
+        <p:nvSpPr>
+          <p:cNvPr id="6" name="Text 4"/>
+          <p:cNvSpPr/>
+          <p:nvPr/>
+        </p:nvSpPr>
+        <p:spPr>
+          <a:xfrm>
+            <a:off x="457200" y="2468880"/>
+            <a:ext cx="5532120" cy="292608"/>
+          </a:xfrm>
+          <a:prstGeom prst="rect">
+            <a:avLst/>
+          </a:prstGeom>
+          <a:noFill/>
+          <a:ln/>
+        </p:spPr>
+        <p:txBody>
+          <a:bodyPr wrap="square" lIns="0" tIns="0" rIns="0" bIns="0" rtlCol="0" anchor="ctr"/>
+          <a:lstStyle/>
+          <a:p>
+            <a:pPr indent="0" marL="0">
+              <a:buNone/>
+            </a:pPr>
+            <a:r>
+              <a:rPr lang="en-US" sz="1150" dirty="0">
+                <a:solidFill>
+                  <a:srgbClr val="53565A"/>
+                </a:solidFill>
+                <a:latin typeface="Poppins" pitchFamily="34" charset="0"/>
+                <a:ea typeface="Poppins" pitchFamily="34" charset="-122"/>
+                <a:cs typeface="Poppins" pitchFamily="34" charset="-120"/>
+              </a:rPr>
+              <a:t>A repeat submit inspects the running job. Both conditions must hold:</a:t>
+            </a:r>
+            <a:endParaRPr lang="en-US" sz="1150" dirty="0"/>
+          </a:p>
+        </p:txBody>
+      </p:sp>
+      <p:sp>
+        <p:nvSpPr>
+          <p:cNvPr id="7" name="Shape 5"/>
+          <p:cNvSpPr/>
+          <p:nvPr/>
+        </p:nvSpPr>
+        <p:spPr>
+          <a:xfrm>
+            <a:off x="457200" y="2788920"/>
+            <a:ext cx="5532120" cy="731520"/>
+          </a:xfrm>
+          <a:prstGeom prst="roundRect">
+            <a:avLst>
+              <a:gd name="adj" fmla="val 6250"/>
+            </a:avLst>
+          </a:prstGeom>
+          <a:solidFill>
+            <a:srgbClr val="011837"/>
+          </a:solidFill>
+          <a:ln/>
+        </p:spPr>
+      </p:sp>
+      <p:sp>
+        <p:nvSpPr>
+          <p:cNvPr id="8" name="Text 6"/>
+          <p:cNvSpPr/>
+          <p:nvPr/>
+        </p:nvSpPr>
+        <p:spPr>
+          <a:xfrm>
+            <a:off x="585216" y="2788920"/>
+            <a:ext cx="5276088" cy="731520"/>
+          </a:xfrm>
+          <a:prstGeom prst="rect">
+            <a:avLst/>
+          </a:prstGeom>
+          <a:noFill/>
+          <a:ln/>
+        </p:spPr>
+        <p:txBody>
+          <a:bodyPr wrap="square" lIns="0" tIns="0" rIns="0" bIns="0" rtlCol="0" anchor="ctr"/>
+          <a:lstStyle/>
+          <a:p>
+            <a:pPr indent="0" marL="0">
+              <a:lnSpc>
+                <a:spcPct val="100000"/>
+              </a:lnSpc>
+              <a:buNone/>
+            </a:pPr>
+            <a:r>
+              <a:rPr lang="en-US" sz="1200" dirty="0">
+                <a:solidFill>
+                  <a:srgbClr val="0097A7"/>
+                </a:solidFill>
+                <a:latin typeface="Courier New" pitchFamily="34" charset="0"/>
+                <a:ea typeface="Courier New" pitchFamily="34" charset="-122"/>
+                <a:cs typeface="Courier New" pitchFamily="34" charset="-120"/>
+              </a:rPr>
+              <a:t>runtime  &gt;  WORKGRACE  (6 hours)</a:t>
+            </a:r>
+            <a:endParaRPr lang="en-US" sz="1200" dirty="0"/>
+          </a:p>
+          <a:p>
+            <a:pPr indent="0" marL="0">
+              <a:lnSpc>
+                <a:spcPct val="100000"/>
+              </a:lnSpc>
+              <a:buNone/>
+            </a:pPr>
+            <a:r>
+              <a:rPr lang="en-US" sz="1200" dirty="0">
+                <a:solidFill>
+                  <a:srgbClr val="0097A7"/>
+                </a:solidFill>
+                <a:latin typeface="Courier New" pitchFamily="34" charset="0"/>
+                <a:ea typeface="Courier New" pitchFamily="34" charset="-122"/>
+                <a:cs typeface="Courier New" pitchFamily="34" charset="-120"/>
+              </a:rPr>
+              <a:t>dcount / fcount  &lt;=  MINWDONE  (1 %)</a:t>
+            </a:r>
+            <a:endParaRPr lang="en-US" sz="1200" dirty="0"/>
+          </a:p>
+        </p:txBody>
+      </p:sp>
+      <p:sp>
+        <p:nvSpPr>
+          <p:cNvPr id="9" name="Text 7"/>
+          <p:cNvSpPr/>
+          <p:nvPr/>
+        </p:nvSpPr>
+        <p:spPr>
+          <a:xfrm>
+            <a:off x="457200" y="3657600"/>
+            <a:ext cx="5532120" cy="594360"/>
+          </a:xfrm>
+          <a:prstGeom prst="rect">
+            <a:avLst/>
+          </a:prstGeom>
+          <a:noFill/>
+          <a:ln/>
+        </p:spPr>
+        <p:txBody>
+          <a:bodyPr wrap="square" lIns="0" tIns="0" rIns="0" bIns="0" rtlCol="0" anchor="t"/>
           <a:lstStyle/>
           <a:p>
             <a:pPr indent="0" marL="0">
@@ -20263,16 +23081,132 @@
               <a:buNone/>
             </a:pPr>
             <a:r>
-              <a:rPr lang="en-US" sz="1100" b="1" dirty="0">
-                <a:solidFill>
-                  <a:srgbClr val="0057C2"/>
-                </a:solidFill>
-                <a:latin typeface="Poppins" pitchFamily="34" charset="0"/>
-                <a:ea typeface="Poppins" pitchFamily="34" charset="-122"/>
-                <a:cs typeface="Poppins" pitchFamily="34" charset="-120"/>
-              </a:rPr>
-              <a:t>Pinned to a single worker when locking is off.  </a:t>
-            </a:r>
+              <a:rPr lang="en-US" sz="1150" dirty="0">
+                <a:solidFill>
+                  <a:srgbClr val="00357A"/>
+                </a:solidFill>
+                <a:latin typeface="Poppins" pitchFamily="34" charset="0"/>
+                <a:ea typeface="Poppins" pitchFamily="34" charset="-122"/>
+                <a:cs typeface="Poppins" pitchFamily="34" charset="-120"/>
+              </a:rPr>
+              <a:t>Six hours in with under one percent of its recorded work done, the job is treated as stalled and an extra worker is submitted alongside it — up to -W MaxWorkers, default 2.</a:t>
+            </a:r>
+            <a:endParaRPr lang="en-US" sz="1150" dirty="0"/>
+          </a:p>
+        </p:txBody>
+      </p:sp>
+      <p:sp>
+        <p:nvSpPr>
+          <p:cNvPr id="10" name="Shape 8"/>
+          <p:cNvSpPr/>
+          <p:nvPr/>
+        </p:nvSpPr>
+        <p:spPr>
+          <a:xfrm>
+            <a:off x="457200" y="4343400"/>
+            <a:ext cx="5532120" cy="457200"/>
+          </a:xfrm>
+          <a:prstGeom prst="roundRect">
+            <a:avLst>
+              <a:gd name="adj" fmla="val 10000"/>
+            </a:avLst>
+          </a:prstGeom>
+          <a:solidFill>
+            <a:srgbClr val="011837"/>
+          </a:solidFill>
+          <a:ln/>
+        </p:spPr>
+      </p:sp>
+      <p:sp>
+        <p:nvSpPr>
+          <p:cNvPr id="11" name="Text 9"/>
+          <p:cNvSpPr/>
+          <p:nvPr/>
+        </p:nvSpPr>
+        <p:spPr>
+          <a:xfrm>
+            <a:off x="585216" y="4343400"/>
+            <a:ext cx="5276088" cy="457200"/>
+          </a:xfrm>
+          <a:prstGeom prst="rect">
+            <a:avLst/>
+          </a:prstGeom>
+          <a:noFill/>
+          <a:ln/>
+        </p:spPr>
+        <p:txBody>
+          <a:bodyPr wrap="square" lIns="0" tIns="0" rIns="0" bIns="0" rtlCol="0" anchor="ctr"/>
+          <a:lstStyle/>
+          <a:p>
+            <a:pPr indent="0" marL="0">
+              <a:lnSpc>
+                <a:spcPct val="100000"/>
+              </a:lnSpc>
+              <a:buNone/>
+            </a:pPr>
+            <a:r>
+              <a:rPr lang="en-US" sz="1250" dirty="0">
+                <a:solidFill>
+                  <a:srgbClr val="0097A7"/>
+                </a:solidFill>
+                <a:latin typeface="Courier New" pitchFamily="34" charset="0"/>
+                <a:ea typeface="Courier New" pitchFamily="34" charset="-122"/>
+                <a:cs typeface="Courier New" pitchFamily="34" charset="-120"/>
+              </a:rPr>
+              <a:t>dsquasar -a -A 3 -b -d PBS -W 2</a:t>
+            </a:r>
+            <a:endParaRPr lang="en-US" sz="1250" dirty="0"/>
+          </a:p>
+        </p:txBody>
+      </p:sp>
+      <p:sp>
+        <p:nvSpPr>
+          <p:cNvPr id="12" name="Shape 10"/>
+          <p:cNvSpPr/>
+          <p:nvPr/>
+        </p:nvSpPr>
+        <p:spPr>
+          <a:xfrm>
+            <a:off x="457200" y="4956048"/>
+            <a:ext cx="5532120" cy="1051560"/>
+          </a:xfrm>
+          <a:prstGeom prst="roundRect">
+            <a:avLst>
+              <a:gd name="adj" fmla="val 6957"/>
+            </a:avLst>
+          </a:prstGeom>
+          <a:solidFill>
+            <a:srgbClr val="C7E4F5"/>
+          </a:solidFill>
+          <a:ln w="12700">
+            <a:solidFill>
+              <a:srgbClr val="A9D6F2"/>
+            </a:solidFill>
+            <a:prstDash val="solid"/>
+          </a:ln>
+        </p:spPr>
+      </p:sp>
+      <p:sp>
+        <p:nvSpPr>
+          <p:cNvPr id="13" name="Text 11"/>
+          <p:cNvSpPr/>
+          <p:nvPr/>
+        </p:nvSpPr>
+        <p:spPr>
+          <a:xfrm>
+            <a:off x="640080" y="4956048"/>
+            <a:ext cx="5166360" cy="1051560"/>
+          </a:xfrm>
+          <a:prstGeom prst="rect">
+            <a:avLst/>
+          </a:prstGeom>
+          <a:noFill/>
+          <a:ln/>
+        </p:spPr>
+        <p:txBody>
+          <a:bodyPr wrap="square" lIns="0" tIns="0" rIns="0" bIns="0" rtlCol="0" anchor="ctr"/>
+          <a:lstStyle/>
+          <a:p>
             <a:pPr indent="0" marL="0">
               <a:lnSpc>
                 <a:spcPct val="105000"/>
@@ -20280,46 +23214,7 @@
               <a:buNone/>
             </a:pPr>
             <a:r>
-              <a:rPr lang="en-US" sz="1100" dirty="0">
-                <a:solidFill>
-                  <a:srgbClr val="00357A"/>
-                </a:solidFill>
-                <a:latin typeface="Poppins" pitchFamily="34" charset="0"/>
-                <a:ea typeface="Poppins" pitchFamily="34" charset="-122"/>
-                <a:cs typeface="Poppins" pitchFamily="34" charset="-120"/>
-              </a:rPr>
-              <a:t>Extra workers rely on dataset locks to stay off each other's files, so -l N and the transfer actions (-A 4, 6, 7) always run one worker.</a:t>
-            </a:r>
-            <a:endParaRPr lang="en-US" sz="1100" dirty="0"/>
-          </a:p>
-        </p:txBody>
-      </p:sp>
-      <p:sp>
-        <p:nvSpPr>
-          <p:cNvPr id="14" name="Text 12"/>
-          <p:cNvSpPr/>
-          <p:nvPr/>
-        </p:nvSpPr>
-        <p:spPr>
-          <a:xfrm>
-            <a:off x="6309360" y="2148840"/>
-            <a:ext cx="5440680" cy="320040"/>
-          </a:xfrm>
-          <a:prstGeom prst="rect">
-            <a:avLst/>
-          </a:prstGeom>
-          <a:noFill/>
-          <a:ln/>
-        </p:spPr>
-        <p:txBody>
-          <a:bodyPr wrap="square" lIns="0" tIns="0" rIns="0" bIns="0" rtlCol="0" anchor="ctr"/>
-          <a:lstStyle/>
-          <a:p>
-            <a:pPr indent="0" marL="0">
-              <a:buNone/>
-            </a:pPr>
-            <a:r>
-              <a:rPr lang="en-US" sz="1500" b="1" dirty="0">
+              <a:rPr lang="en-US" sz="1100" b="1" dirty="0">
                 <a:solidFill>
                   <a:srgbClr val="0057C2"/>
                 </a:solidFill>
@@ -20327,33 +23222,8 @@
                 <a:ea typeface="Poppins" pitchFamily="34" charset="-122"/>
                 <a:cs typeface="Poppins" pitchFamily="34" charset="-120"/>
               </a:rPr>
-              <a:t>Slot numbering and direction</a:t>
-            </a:r>
-            <a:endParaRPr lang="en-US" sz="1500" dirty="0"/>
-          </a:p>
-        </p:txBody>
-      </p:sp>
-      <p:sp>
-        <p:nvSpPr>
-          <p:cNvPr id="15" name="Text 13"/>
-          <p:cNvSpPr/>
-          <p:nvPr/>
-        </p:nvSpPr>
-        <p:spPr>
-          <a:xfrm>
-            <a:off x="6309360" y="2468880"/>
-            <a:ext cx="5440680" cy="566928"/>
-          </a:xfrm>
-          <a:prstGeom prst="rect">
-            <a:avLst/>
-          </a:prstGeom>
-          <a:noFill/>
-          <a:ln/>
-        </p:spPr>
-        <p:txBody>
-          <a:bodyPr wrap="square" lIns="0" tIns="0" rIns="0" bIns="0" rtlCol="0" anchor="t"/>
-          <a:lstStyle/>
-          <a:p>
+              <a:t>Pinned to a single worker when locking is off.  </a:t>
+            </a:r>
             <a:pPr indent="0" marL="0">
               <a:lnSpc>
                 <a:spcPct val="105000"/>
@@ -20361,6 +23231,87 @@
               <a:buNone/>
             </a:pPr>
             <a:r>
+              <a:rPr lang="en-US" sz="1100" dirty="0">
+                <a:solidFill>
+                  <a:srgbClr val="00357A"/>
+                </a:solidFill>
+                <a:latin typeface="Poppins" pitchFamily="34" charset="0"/>
+                <a:ea typeface="Poppins" pitchFamily="34" charset="-122"/>
+                <a:cs typeface="Poppins" pitchFamily="34" charset="-120"/>
+              </a:rPr>
+              <a:t>Extra workers rely on dataset locks to stay off each other's files, so -l N and the transfer actions (-A 4, 6, 7) always run one worker.</a:t>
+            </a:r>
+            <a:endParaRPr lang="en-US" sz="1100" dirty="0"/>
+          </a:p>
+        </p:txBody>
+      </p:sp>
+      <p:sp>
+        <p:nvSpPr>
+          <p:cNvPr id="14" name="Text 12"/>
+          <p:cNvSpPr/>
+          <p:nvPr/>
+        </p:nvSpPr>
+        <p:spPr>
+          <a:xfrm>
+            <a:off x="6309360" y="2148840"/>
+            <a:ext cx="5440680" cy="320040"/>
+          </a:xfrm>
+          <a:prstGeom prst="rect">
+            <a:avLst/>
+          </a:prstGeom>
+          <a:noFill/>
+          <a:ln/>
+        </p:spPr>
+        <p:txBody>
+          <a:bodyPr wrap="square" lIns="0" tIns="0" rIns="0" bIns="0" rtlCol="0" anchor="ctr"/>
+          <a:lstStyle/>
+          <a:p>
+            <a:pPr indent="0" marL="0">
+              <a:buNone/>
+            </a:pPr>
+            <a:r>
+              <a:rPr lang="en-US" sz="1500" b="1" dirty="0">
+                <a:solidFill>
+                  <a:srgbClr val="0057C2"/>
+                </a:solidFill>
+                <a:latin typeface="Poppins" pitchFamily="34" charset="0"/>
+                <a:ea typeface="Poppins" pitchFamily="34" charset="-122"/>
+                <a:cs typeface="Poppins" pitchFamily="34" charset="-120"/>
+              </a:rPr>
+              <a:t>Slot numbering and direction</a:t>
+            </a:r>
+            <a:endParaRPr lang="en-US" sz="1500" dirty="0"/>
+          </a:p>
+        </p:txBody>
+      </p:sp>
+      <p:sp>
+        <p:nvSpPr>
+          <p:cNvPr id="15" name="Text 13"/>
+          <p:cNvSpPr/>
+          <p:nvPr/>
+        </p:nvSpPr>
+        <p:spPr>
+          <a:xfrm>
+            <a:off x="6309360" y="2468880"/>
+            <a:ext cx="5440680" cy="566928"/>
+          </a:xfrm>
+          <a:prstGeom prst="rect">
+            <a:avLst/>
+          </a:prstGeom>
+          <a:noFill/>
+          <a:ln/>
+        </p:spPr>
+        <p:txBody>
+          <a:bodyPr wrap="square" lIns="0" tIns="0" rIns="0" bIns="0" rtlCol="0" anchor="t"/>
+          <a:lstStyle/>
+          <a:p>
+            <a:pPr indent="0" marL="0">
+              <a:lnSpc>
+                <a:spcPct val="105000"/>
+              </a:lnSpc>
+              <a:buNone/>
+            </a:pPr>
+            <a:r>
               <a:rPr lang="en-US" sz="1150" dirty="0">
                 <a:solidFill>
                   <a:srgbClr val="53565A"/>
@@ -20377,7 +23328,7 @@
       </p:sp>
       <p:graphicFrame>
         <p:nvGraphicFramePr>
-          <p:cNvPr id="21" name="Table 0"/>
+          <p:cNvPr id="23" name="Table 0"/>
           <p:cNvGraphicFramePr>
             <a:graphicFrameLocks noGrp="1"/>
           </p:cNvGraphicFramePr>
@@ -21113,7 +24064,7 @@
                 <a:ea typeface="Poppins" pitchFamily="34" charset="-122"/>
                 <a:cs typeface="Poppins" pitchFamily="34" charset="-120"/>
               </a:rPr>
-              <a:t>19</a:t>
+              <a:t>21</a:t>
             </a:r>
             <a:endParaRPr lang="en-US" sz="950" dirty="0"/>
           </a:p>
@@ -21166,9 +24117,9 @@
 </p:sld>
 </file>
 
-<file path=ppt/slides/slide21.xml><?xml version="1.0" encoding="utf-8"?>
+<file path=ppt/slides/slide23.xml><?xml version="1.0" encoding="utf-8"?>
 <p:sld xmlns:a="http://schemas.openxmlformats.org/drawingml/2006/main" xmlns:r="http://schemas.openxmlformats.org/officeDocument/2006/relationships" xmlns:p="http://schemas.openxmlformats.org/presentationml/2006/main">
-  <p:cSld name="Slide 21">
+  <p:cSld name="Slide 23">
     <p:spTree>
       <p:nvGrpSpPr>
         <p:cNvPr id="1" name=""/>
@@ -21864,7 +24815,7 @@
       </p:sp>
       <p:graphicFrame>
         <p:nvGraphicFramePr>
-          <p:cNvPr id="22" name="Table 0"/>
+          <p:cNvPr id="24" name="Table 0"/>
           <p:cNvGraphicFramePr>
             <a:graphicFrameLocks noGrp="1"/>
           </p:cNvGraphicFramePr>
@@ -22378,7 +25329,7 @@
                 <a:ea typeface="Poppins" pitchFamily="34" charset="-122"/>
                 <a:cs typeface="Poppins" pitchFamily="34" charset="-120"/>
               </a:rPr>
-              <a:t>20</a:t>
+              <a:t>22</a:t>
             </a:r>
             <a:endParaRPr lang="en-US" sz="950" dirty="0"/>
           </a:p>
@@ -22431,9 +25382,9 @@
 </p:sld>
 </file>
 
-<file path=ppt/slides/slide22.xml><?xml version="1.0" encoding="utf-8"?>
+<file path=ppt/slides/slide24.xml><?xml version="1.0" encoding="utf-8"?>
 <p:sld xmlns:a="http://schemas.openxmlformats.org/drawingml/2006/main" xmlns:r="http://schemas.openxmlformats.org/officeDocument/2006/relationships" xmlns:p="http://schemas.openxmlformats.org/presentationml/2006/main">
-  <p:cSld name="Slide 22">
+  <p:cSld name="Slide 24">
     <p:spTree>
       <p:nvGrpSpPr>
         <p:cNvPr id="1" name=""/>
@@ -23193,7 +26144,7 @@
                 <a:ea typeface="Poppins" pitchFamily="34" charset="-122"/>
                 <a:cs typeface="Poppins" pitchFamily="34" charset="-120"/>
               </a:rPr>
-              <a:t>21</a:t>
+              <a:t>23</a:t>
             </a:r>
             <a:endParaRPr lang="en-US" sz="950" dirty="0"/>
           </a:p>
@@ -23246,9 +26197,9 @@
 </p:sld>
 </file>
 
-<file path=ppt/slides/slide23.xml><?xml version="1.0" encoding="utf-8"?>
+<file path=ppt/slides/slide25.xml><?xml version="1.0" encoding="utf-8"?>
 <p:sld xmlns:a="http://schemas.openxmlformats.org/drawingml/2006/main" xmlns:r="http://schemas.openxmlformats.org/officeDocument/2006/relationships" xmlns:p="http://schemas.openxmlformats.org/presentationml/2006/main">
-  <p:cSld name="Slide 23">
+  <p:cSld name="Slide 25">
     <p:spTree>
       <p:nvGrpSpPr>
         <p:cNvPr id="1" name=""/>
@@ -23343,7 +26294,7 @@
       </p:sp>
       <p:graphicFrame>
         <p:nvGraphicFramePr>
-          <p:cNvPr id="24" name="Table 0"/>
+          <p:cNvPr id="26" name="Table 0"/>
           <p:cNvGraphicFramePr>
             <a:graphicFrameLocks noGrp="1"/>
           </p:cNvGraphicFramePr>
@@ -24477,7 +27428,7 @@
       </p:graphicFrame>
       <p:graphicFrame>
         <p:nvGraphicFramePr>
-          <p:cNvPr id="47" name="Table 1"/>
+          <p:cNvPr id="51" name="Table 1"/>
           <p:cNvGraphicFramePr>
             <a:graphicFrameLocks noGrp="1"/>
           </p:cNvGraphicFramePr>
@@ -26103,7 +29054,7 @@
                 <a:ea typeface="Poppins" pitchFamily="34" charset="-122"/>
                 <a:cs typeface="Poppins" pitchFamily="34" charset="-120"/>
               </a:rPr>
-              <a:t>22</a:t>
+              <a:t>24</a:t>
             </a:r>
             <a:endParaRPr lang="en-US" sz="950" dirty="0"/>
           </a:p>
@@ -26156,9 +29107,9 @@
 </p:sld>
 </file>
 
-<file path=ppt/slides/slide24.xml><?xml version="1.0" encoding="utf-8"?>
+<file path=ppt/slides/slide26.xml><?xml version="1.0" encoding="utf-8"?>
 <p:sld xmlns:a="http://schemas.openxmlformats.org/drawingml/2006/main" xmlns:r="http://schemas.openxmlformats.org/officeDocument/2006/relationships" xmlns:p="http://schemas.openxmlformats.org/presentationml/2006/main">
-  <p:cSld name="Slide 24">
+  <p:cSld name="Slide 26">
     <p:spTree>
       <p:nvGrpSpPr>
         <p:cNvPr id="1" name=""/>
@@ -26356,7 +29307,7 @@
       </p:sp>
       <p:graphicFrame>
         <p:nvGraphicFramePr>
-          <p:cNvPr id="25" name="Table 0"/>
+          <p:cNvPr id="27" name="Table 0"/>
           <p:cNvGraphicFramePr>
             <a:graphicFrameLocks noGrp="1"/>
           </p:cNvGraphicFramePr>
@@ -27076,7 +30027,7 @@
       </p:graphicFrame>
       <p:graphicFrame>
         <p:nvGraphicFramePr>
-          <p:cNvPr id="49" name="Table 1"/>
+          <p:cNvPr id="53" name="Table 1"/>
           <p:cNvGraphicFramePr>
             <a:graphicFrameLocks noGrp="1"/>
           </p:cNvGraphicFramePr>
@@ -28131,7 +31082,7 @@
                 <a:ea typeface="Poppins" pitchFamily="34" charset="-122"/>
                 <a:cs typeface="Poppins" pitchFamily="34" charset="-120"/>
               </a:rPr>
-              <a:t>23</a:t>
+              <a:t>25</a:t>
             </a:r>
             <a:endParaRPr lang="en-US" sz="950" dirty="0"/>
           </a:p>
@@ -28184,9 +31135,9 @@
 </p:sld>
 </file>
 
-<file path=ppt/slides/slide25.xml><?xml version="1.0" encoding="utf-8"?>
+<file path=ppt/slides/slide27.xml><?xml version="1.0" encoding="utf-8"?>
 <p:sld xmlns:a="http://schemas.openxmlformats.org/drawingml/2006/main" xmlns:r="http://schemas.openxmlformats.org/officeDocument/2006/relationships" xmlns:p="http://schemas.openxmlformats.org/presentationml/2006/main">
-  <p:cSld name="Slide 25">
+  <p:cSld name="Slide 27">
     <p:spTree>
       <p:nvGrpSpPr>
         <p:cNvPr id="1" name=""/>
@@ -29137,7 +32088,7 @@
                 <a:ea typeface="Poppins" pitchFamily="34" charset="-122"/>
                 <a:cs typeface="Poppins" pitchFamily="34" charset="-120"/>
               </a:rPr>
-              <a:t>24</a:t>
+              <a:t>26</a:t>
             </a:r>
             <a:endParaRPr lang="en-US" sz="950" dirty="0"/>
           </a:p>
@@ -29190,9 +32141,9 @@
 </p:sld>
 </file>
 
-<file path=ppt/slides/slide26.xml><?xml version="1.0" encoding="utf-8"?>
+<file path=ppt/slides/slide28.xml><?xml version="1.0" encoding="utf-8"?>
 <p:sld xmlns:a="http://schemas.openxmlformats.org/drawingml/2006/main" xmlns:r="http://schemas.openxmlformats.org/officeDocument/2006/relationships" xmlns:p="http://schemas.openxmlformats.org/presentationml/2006/main">
-  <p:cSld name="Slide 26">
+  <p:cSld name="Slide 28">
     <p:spTree>
       <p:nvGrpSpPr>
         <p:cNvPr id="1" name=""/>
@@ -29651,7 +32602,7 @@
       </p:sp>
       <p:graphicFrame>
         <p:nvGraphicFramePr>
-          <p:cNvPr id="27" name="Table 0"/>
+          <p:cNvPr id="29" name="Table 0"/>
           <p:cNvGraphicFramePr>
             <a:graphicFrameLocks noGrp="1"/>
           </p:cNvGraphicFramePr>
@@ -30287,7 +33238,7 @@
                 <a:ea typeface="Poppins" pitchFamily="34" charset="-122"/>
                 <a:cs typeface="Poppins" pitchFamily="34" charset="-120"/>
               </a:rPr>
-              <a:t>25</a:t>
+              <a:t>27</a:t>
             </a:r>
             <a:endParaRPr lang="en-US" sz="950" dirty="0"/>
           </a:p>
@@ -30340,9 +33291,9 @@
 </p:sld>
 </file>
 
-<file path=ppt/slides/slide27.xml><?xml version="1.0" encoding="utf-8"?>
+<file path=ppt/slides/slide29.xml><?xml version="1.0" encoding="utf-8"?>
 <p:sld xmlns:a="http://schemas.openxmlformats.org/drawingml/2006/main" xmlns:r="http://schemas.openxmlformats.org/officeDocument/2006/relationships" xmlns:p="http://schemas.openxmlformats.org/presentationml/2006/main">
-  <p:cSld name="Slide 27">
+  <p:cSld name="Slide 29">
     <p:spTree>
       <p:nvGrpSpPr>
         <p:cNvPr id="1" name=""/>
@@ -31479,7 +34430,7 @@
                 <a:ea typeface="Poppins" pitchFamily="34" charset="-122"/>
                 <a:cs typeface="Poppins" pitchFamily="34" charset="-120"/>
               </a:rPr>
-              <a:t>26</a:t>
+              <a:t>28</a:t>
             </a:r>
             <a:endParaRPr lang="en-US" sz="950" dirty="0"/>
           </a:p>
@@ -31532,9 +34483,9 @@
 </p:sld>
 </file>
 
-<file path=ppt/slides/slide28.xml><?xml version="1.0" encoding="utf-8"?>
+<file path=ppt/slides/slide3.xml><?xml version="1.0" encoding="utf-8"?>
 <p:sld xmlns:a="http://schemas.openxmlformats.org/drawingml/2006/main" xmlns:r="http://schemas.openxmlformats.org/officeDocument/2006/relationships" xmlns:p="http://schemas.openxmlformats.org/presentationml/2006/main">
-  <p:cSld name="Slide 28">
+  <p:cSld name="Slide 3">
     <p:spTree>
       <p:nvGrpSpPr>
         <p:cNvPr id="1" name=""/>
@@ -31576,6 +34527,1317 @@
             <a:r>
               <a:rPr lang="en-US" sz="1200" b="1" spc="200" kern="0" dirty="0">
                 <a:solidFill>
+                  <a:srgbClr val="0092DB"/>
+                </a:solidFill>
+                <a:latin typeface="Poppins" pitchFamily="34" charset="0"/>
+                <a:ea typeface="Poppins" pitchFamily="34" charset="-122"/>
+                <a:cs typeface="Poppins" pitchFamily="34" charset="-120"/>
+              </a:rPr>
+              <a:t>GET IT &amp; LEARN IT</a:t>
+            </a:r>
+            <a:endParaRPr lang="en-US" sz="1200" dirty="0"/>
+          </a:p>
+        </p:txBody>
+      </p:sp>
+      <p:sp>
+        <p:nvSpPr>
+          <p:cNvPr id="3" name="Text 1"/>
+          <p:cNvSpPr/>
+          <p:nvPr/>
+        </p:nvSpPr>
+        <p:spPr>
+          <a:xfrm>
+            <a:off x="457200" y="658368"/>
+            <a:ext cx="9326880" cy="640080"/>
+          </a:xfrm>
+          <a:prstGeom prst="rect">
+            <a:avLst/>
+          </a:prstGeom>
+          <a:noFill/>
+          <a:ln/>
+        </p:spPr>
+        <p:txBody>
+          <a:bodyPr wrap="square" lIns="0" tIns="0" rIns="0" bIns="0" rtlCol="0" anchor="ctr"/>
+          <a:lstStyle/>
+          <a:p>
+            <a:pPr indent="0" marL="0">
+              <a:buNone/>
+            </a:pPr>
+            <a:r>
+              <a:rPr lang="en-US" sz="3200" b="1" dirty="0">
+                <a:solidFill>
+                  <a:srgbClr val="00357A"/>
+                </a:solidFill>
+                <a:latin typeface="Poppins" pitchFamily="34" charset="0"/>
+                <a:ea typeface="Poppins" pitchFamily="34" charset="-122"/>
+                <a:cs typeface="Poppins" pitchFamily="34" charset="-120"/>
+              </a:rPr>
+              <a:t>Install &amp; Resources</a:t>
+            </a:r>
+            <a:endParaRPr lang="en-US" sz="3200" dirty="0"/>
+          </a:p>
+        </p:txBody>
+      </p:sp>
+      <p:sp>
+        <p:nvSpPr>
+          <p:cNvPr id="4" name="Shape 2"/>
+          <p:cNvSpPr/>
+          <p:nvPr/>
+        </p:nvSpPr>
+        <p:spPr>
+          <a:xfrm>
+            <a:off x="457200" y="1691640"/>
+            <a:ext cx="3602736" cy="3566160"/>
+          </a:xfrm>
+          <a:prstGeom prst="roundRect">
+            <a:avLst>
+              <a:gd name="adj" fmla="val 2051"/>
+            </a:avLst>
+          </a:prstGeom>
+          <a:solidFill>
+            <a:srgbClr val="FFFFFF"/>
+          </a:solidFill>
+          <a:ln w="12700">
+            <a:solidFill>
+              <a:srgbClr val="A9D6F2"/>
+            </a:solidFill>
+            <a:prstDash val="solid"/>
+          </a:ln>
+          <a:effectLst>
+            <a:outerShdw sx="100000" sy="100000" kx="0" ky="0" algn="bl" rotWithShape="0" blurRad="63500" dist="25400" dir="5400000">
+              <a:srgbClr val="C3D7EE">
+                <a:alpha val="30000"/>
+              </a:srgbClr>
+            </a:outerShdw>
+          </a:effectLst>
+        </p:spPr>
+      </p:sp>
+      <p:sp>
+        <p:nvSpPr>
+          <p:cNvPr id="5" name="Shape 3"/>
+          <p:cNvSpPr/>
+          <p:nvPr/>
+        </p:nvSpPr>
+        <p:spPr>
+          <a:xfrm>
+            <a:off x="457200" y="1691640"/>
+            <a:ext cx="3602736" cy="128016"/>
+          </a:xfrm>
+          <a:prstGeom prst="rect">
+            <a:avLst/>
+          </a:prstGeom>
+          <a:solidFill>
+            <a:srgbClr val="0057C2"/>
+          </a:solidFill>
+          <a:ln/>
+        </p:spPr>
+      </p:sp>
+      <p:sp>
+        <p:nvSpPr>
+          <p:cNvPr id="6" name="Shape 4"/>
+          <p:cNvSpPr/>
+          <p:nvPr/>
+        </p:nvSpPr>
+        <p:spPr>
+          <a:xfrm>
+            <a:off x="731520" y="2075688"/>
+            <a:ext cx="566928" cy="566928"/>
+          </a:xfrm>
+          <a:prstGeom prst="ellipse">
+            <a:avLst/>
+          </a:prstGeom>
+          <a:solidFill>
+            <a:srgbClr val="0057C2"/>
+          </a:solidFill>
+          <a:ln/>
+        </p:spPr>
+      </p:sp>
+      <p:sp>
+        <p:nvSpPr>
+          <p:cNvPr id="7" name="Text 5"/>
+          <p:cNvSpPr/>
+          <p:nvPr/>
+        </p:nvSpPr>
+        <p:spPr>
+          <a:xfrm>
+            <a:off x="731520" y="2075688"/>
+            <a:ext cx="566928" cy="566928"/>
+          </a:xfrm>
+          <a:prstGeom prst="rect">
+            <a:avLst/>
+          </a:prstGeom>
+          <a:noFill/>
+          <a:ln/>
+        </p:spPr>
+        <p:txBody>
+          <a:bodyPr wrap="square" lIns="0" tIns="0" rIns="0" bIns="0" rtlCol="0" anchor="ctr"/>
+          <a:lstStyle/>
+          <a:p>
+            <a:pPr algn="ctr" indent="0" marL="0">
+              <a:buNone/>
+            </a:pPr>
+            <a:r>
+              <a:rPr lang="en-US" sz="2000" b="1" dirty="0">
+                <a:solidFill>
+                  <a:srgbClr val="FFFFFF"/>
+                </a:solidFill>
+                <a:latin typeface="Poppins" pitchFamily="34" charset="0"/>
+                <a:ea typeface="Poppins" pitchFamily="34" charset="-122"/>
+                <a:cs typeface="Poppins" pitchFamily="34" charset="-120"/>
+              </a:rPr>
+              <a:t>⌥</a:t>
+            </a:r>
+            <a:endParaRPr lang="en-US" sz="2000" dirty="0"/>
+          </a:p>
+        </p:txBody>
+      </p:sp>
+      <p:sp>
+        <p:nvSpPr>
+          <p:cNvPr id="8" name="Text 6"/>
+          <p:cNvSpPr/>
+          <p:nvPr/>
+        </p:nvSpPr>
+        <p:spPr>
+          <a:xfrm>
+            <a:off x="1417320" y="2075688"/>
+            <a:ext cx="2459736" cy="566928"/>
+          </a:xfrm>
+          <a:prstGeom prst="rect">
+            <a:avLst/>
+          </a:prstGeom>
+          <a:noFill/>
+          <a:ln/>
+        </p:spPr>
+        <p:txBody>
+          <a:bodyPr wrap="square" lIns="0" tIns="0" rIns="0" bIns="0" rtlCol="0" anchor="ctr"/>
+          <a:lstStyle/>
+          <a:p>
+            <a:pPr indent="0" marL="0">
+              <a:buNone/>
+            </a:pPr>
+            <a:r>
+              <a:rPr lang="en-US" sz="1600" b="1" dirty="0">
+                <a:solidFill>
+                  <a:srgbClr val="00357A"/>
+                </a:solidFill>
+                <a:latin typeface="Poppins" pitchFamily="34" charset="0"/>
+                <a:ea typeface="Poppins" pitchFamily="34" charset="-122"/>
+                <a:cs typeface="Poppins" pitchFamily="34" charset="-120"/>
+              </a:rPr>
+              <a:t>GitHub Repository</a:t>
+            </a:r>
+            <a:endParaRPr lang="en-US" sz="1600" dirty="0"/>
+          </a:p>
+        </p:txBody>
+      </p:sp>
+      <p:sp>
+        <p:nvSpPr>
+          <p:cNvPr id="9" name="Text 7"/>
+          <p:cNvSpPr/>
+          <p:nvPr/>
+        </p:nvSpPr>
+        <p:spPr>
+          <a:xfrm>
+            <a:off x="731520" y="2825496"/>
+            <a:ext cx="3054096" cy="822960"/>
+          </a:xfrm>
+          <a:prstGeom prst="rect">
+            <a:avLst/>
+          </a:prstGeom>
+          <a:noFill/>
+          <a:ln/>
+        </p:spPr>
+        <p:txBody>
+          <a:bodyPr wrap="square" lIns="0" tIns="0" rIns="0" bIns="0" rtlCol="0" anchor="t"/>
+          <a:lstStyle/>
+          <a:p>
+            <a:pPr indent="0" marL="0">
+              <a:lnSpc>
+                <a:spcPct val="108000"/>
+              </a:lnSpc>
+              <a:buNone/>
+            </a:pPr>
+            <a:r>
+              <a:rPr lang="en-US" sz="1250" dirty="0">
+                <a:solidFill>
+                  <a:srgbClr val="53565A"/>
+                </a:solidFill>
+                <a:latin typeface="Poppins" pitchFamily="34" charset="0"/>
+                <a:ea typeface="Poppins" pitchFamily="34" charset="-122"/>
+                <a:cs typeface="Poppins" pitchFamily="34" charset="-120"/>
+              </a:rPr>
+              <a:t>Source code, issues, and contributions.</a:t>
+            </a:r>
+            <a:endParaRPr lang="en-US" sz="1250" dirty="0"/>
+          </a:p>
+        </p:txBody>
+      </p:sp>
+      <p:sp>
+        <p:nvSpPr>
+          <p:cNvPr id="10" name="Shape 8"/>
+          <p:cNvSpPr/>
+          <p:nvPr/>
+        </p:nvSpPr>
+        <p:spPr>
+          <a:xfrm>
+            <a:off x="731520" y="3703320"/>
+            <a:ext cx="3054096" cy="749808"/>
+          </a:xfrm>
+          <a:prstGeom prst="roundRect">
+            <a:avLst>
+              <a:gd name="adj" fmla="val 6098"/>
+            </a:avLst>
+          </a:prstGeom>
+          <a:solidFill>
+            <a:srgbClr val="011837"/>
+          </a:solidFill>
+          <a:ln/>
+        </p:spPr>
+      </p:sp>
+      <p:sp>
+        <p:nvSpPr>
+          <p:cNvPr id="11" name="Text 9"/>
+          <p:cNvSpPr/>
+          <p:nvPr/>
+        </p:nvSpPr>
+        <p:spPr>
+          <a:xfrm>
+            <a:off x="859536" y="3703320"/>
+            <a:ext cx="2798064" cy="749808"/>
+          </a:xfrm>
+          <a:prstGeom prst="rect">
+            <a:avLst/>
+          </a:prstGeom>
+          <a:noFill/>
+          <a:ln/>
+        </p:spPr>
+        <p:txBody>
+          <a:bodyPr wrap="square" lIns="0" tIns="0" rIns="0" bIns="0" rtlCol="0" anchor="ctr"/>
+          <a:lstStyle/>
+          <a:p>
+            <a:pPr indent="0" marL="0">
+              <a:lnSpc>
+                <a:spcPct val="100000"/>
+              </a:lnSpc>
+              <a:buNone/>
+            </a:pPr>
+            <a:r>
+              <a:rPr lang="en-US" sz="1050" dirty="0">
+                <a:solidFill>
+                  <a:srgbClr val="0097A7"/>
+                </a:solidFill>
+                <a:latin typeface="Courier New" pitchFamily="34" charset="0"/>
+                <a:ea typeface="Courier New" pitchFamily="34" charset="-122"/>
+                <a:cs typeface="Courier New" pitchFamily="34" charset="-120"/>
+              </a:rPr>
+              <a:t>git clone https://github.com/</a:t>
+            </a:r>
+            <a:endParaRPr lang="en-US" sz="1050" dirty="0"/>
+          </a:p>
+          <a:p>
+            <a:pPr indent="0" marL="0">
+              <a:lnSpc>
+                <a:spcPct val="100000"/>
+              </a:lnSpc>
+              <a:buNone/>
+            </a:pPr>
+            <a:r>
+              <a:rPr lang="en-US" sz="1050" dirty="0">
+                <a:solidFill>
+                  <a:srgbClr val="0097A7"/>
+                </a:solidFill>
+                <a:latin typeface="Courier New" pitchFamily="34" charset="0"/>
+                <a:ea typeface="Courier New" pitchFamily="34" charset="-122"/>
+                <a:cs typeface="Courier New" pitchFamily="34" charset="-120"/>
+              </a:rPr>
+              <a:t>  NCAR/rda-python-dsquasar.git</a:t>
+            </a:r>
+            <a:endParaRPr lang="en-US" sz="1050" dirty="0"/>
+          </a:p>
+        </p:txBody>
+      </p:sp>
+      <p:sp>
+        <p:nvSpPr>
+          <p:cNvPr id="12" name="Shape 10"/>
+          <p:cNvSpPr/>
+          <p:nvPr/>
+        </p:nvSpPr>
+        <p:spPr>
+          <a:xfrm>
+            <a:off x="731520" y="4800600"/>
+            <a:ext cx="3054096" cy="0"/>
+          </a:xfrm>
+          <a:prstGeom prst="line">
+            <a:avLst/>
+          </a:prstGeom>
+          <a:noFill/>
+          <a:ln w="12700">
+            <a:solidFill>
+              <a:srgbClr val="A9D6F2"/>
+            </a:solidFill>
+            <a:prstDash val="solid"/>
+          </a:ln>
+        </p:spPr>
+      </p:sp>
+      <p:sp>
+        <p:nvSpPr>
+          <p:cNvPr id="13" name="Text 11"/>
+          <p:cNvSpPr/>
+          <p:nvPr/>
+        </p:nvSpPr>
+        <p:spPr>
+          <a:xfrm>
+            <a:off x="731520" y="4855464"/>
+            <a:ext cx="3218688" cy="310896"/>
+          </a:xfrm>
+          <a:prstGeom prst="rect">
+            <a:avLst/>
+          </a:prstGeom>
+          <a:noFill/>
+          <a:ln/>
+        </p:spPr>
+        <p:txBody>
+          <a:bodyPr wrap="square" lIns="0" tIns="0" rIns="0" bIns="0" rtlCol="0" anchor="ctr"/>
+          <a:lstStyle/>
+          <a:p>
+            <a:pPr indent="0" marL="0">
+              <a:buNone/>
+            </a:pPr>
+            <a:r>
+              <a:rPr lang="en-US" sz="950" b="1" dirty="0">
+                <a:solidFill>
+                  <a:srgbClr val="0057C2"/>
+                </a:solidFill>
+                <a:latin typeface="Courier New" pitchFamily="34" charset="0"/>
+                <a:ea typeface="Courier New" pitchFamily="34" charset="-122"/>
+                <a:cs typeface="Courier New" pitchFamily="34" charset="-120"/>
+              </a:rPr>
+              <a:t>→  </a:t>
+            </a:r>
+            <a:pPr indent="0" marL="0">
+              <a:buNone/>
+            </a:pPr>
+            <a:r>
+              <a:rPr lang="en-US" sz="950" b="1" u="sng" dirty="0">
+                <a:solidFill>
+                  <a:srgbClr val="0057C2"/>
+                </a:solidFill>
+                <a:latin typeface="Courier New" pitchFamily="34" charset="0"/>
+                <a:ea typeface="Courier New" pitchFamily="34" charset="-122"/>
+                <a:cs typeface="Courier New" pitchFamily="34" charset="-120"/>
+                <a:hlinkClick r:id="rId1" invalidUrl="" action="" tgtFrame="" tooltip="" history="1" highlightClick="0" endSnd="0">
+                  <a:extLst>
+                    <a:ext uri="{A12FA001-AC4F-418D-AE19-62706E023703}">
+                      <ahyp:hlinkClr xmlns:ahyp="http://schemas.microsoft.com/office/drawing/2018/hyperlinkcolor" val="tx"/>
+                    </a:ext>
+                  </a:extLst>
+                </a:hlinkClick>
+              </a:rPr>
+              <a:t>github.com/NCAR/rda-python-dsquasar</a:t>
+            </a:r>
+            <a:endParaRPr lang="en-US" sz="950" dirty="0"/>
+          </a:p>
+        </p:txBody>
+      </p:sp>
+      <p:sp>
+        <p:nvSpPr>
+          <p:cNvPr id="14" name="Shape 12"/>
+          <p:cNvSpPr/>
+          <p:nvPr/>
+        </p:nvSpPr>
+        <p:spPr>
+          <a:xfrm>
+            <a:off x="4297680" y="1691640"/>
+            <a:ext cx="3602736" cy="3566160"/>
+          </a:xfrm>
+          <a:prstGeom prst="roundRect">
+            <a:avLst>
+              <a:gd name="adj" fmla="val 2051"/>
+            </a:avLst>
+          </a:prstGeom>
+          <a:solidFill>
+            <a:srgbClr val="FFFFFF"/>
+          </a:solidFill>
+          <a:ln w="12700">
+            <a:solidFill>
+              <a:srgbClr val="A9D6F2"/>
+            </a:solidFill>
+            <a:prstDash val="solid"/>
+          </a:ln>
+          <a:effectLst>
+            <a:outerShdw sx="100000" sy="100000" kx="0" ky="0" algn="bl" rotWithShape="0" blurRad="63500" dist="25400" dir="5400000">
+              <a:srgbClr val="C3D7EE">
+                <a:alpha val="30000"/>
+              </a:srgbClr>
+            </a:outerShdw>
+          </a:effectLst>
+        </p:spPr>
+      </p:sp>
+      <p:sp>
+        <p:nvSpPr>
+          <p:cNvPr id="15" name="Shape 13"/>
+          <p:cNvSpPr/>
+          <p:nvPr/>
+        </p:nvSpPr>
+        <p:spPr>
+          <a:xfrm>
+            <a:off x="4297680" y="1691640"/>
+            <a:ext cx="3602736" cy="128016"/>
+          </a:xfrm>
+          <a:prstGeom prst="rect">
+            <a:avLst/>
+          </a:prstGeom>
+          <a:solidFill>
+            <a:srgbClr val="0097A7"/>
+          </a:solidFill>
+          <a:ln/>
+        </p:spPr>
+      </p:sp>
+      <p:sp>
+        <p:nvSpPr>
+          <p:cNvPr id="16" name="Shape 14"/>
+          <p:cNvSpPr/>
+          <p:nvPr/>
+        </p:nvSpPr>
+        <p:spPr>
+          <a:xfrm>
+            <a:off x="4572000" y="2075688"/>
+            <a:ext cx="566928" cy="566928"/>
+          </a:xfrm>
+          <a:prstGeom prst="ellipse">
+            <a:avLst/>
+          </a:prstGeom>
+          <a:solidFill>
+            <a:srgbClr val="0097A7"/>
+          </a:solidFill>
+          <a:ln/>
+        </p:spPr>
+      </p:sp>
+      <p:sp>
+        <p:nvSpPr>
+          <p:cNvPr id="17" name="Text 15"/>
+          <p:cNvSpPr/>
+          <p:nvPr/>
+        </p:nvSpPr>
+        <p:spPr>
+          <a:xfrm>
+            <a:off x="4572000" y="2075688"/>
+            <a:ext cx="566928" cy="566928"/>
+          </a:xfrm>
+          <a:prstGeom prst="rect">
+            <a:avLst/>
+          </a:prstGeom>
+          <a:noFill/>
+          <a:ln/>
+        </p:spPr>
+        <p:txBody>
+          <a:bodyPr wrap="square" lIns="0" tIns="0" rIns="0" bIns="0" rtlCol="0" anchor="ctr"/>
+          <a:lstStyle/>
+          <a:p>
+            <a:pPr algn="ctr" indent="0" marL="0">
+              <a:buNone/>
+            </a:pPr>
+            <a:r>
+              <a:rPr lang="en-US" sz="2000" b="1" dirty="0">
+                <a:solidFill>
+                  <a:srgbClr val="FFFFFF"/>
+                </a:solidFill>
+                <a:latin typeface="Poppins" pitchFamily="34" charset="0"/>
+                <a:ea typeface="Poppins" pitchFamily="34" charset="-122"/>
+                <a:cs typeface="Poppins" pitchFamily="34" charset="-120"/>
+              </a:rPr>
+              <a:t>▼</a:t>
+            </a:r>
+            <a:endParaRPr lang="en-US" sz="2000" dirty="0"/>
+          </a:p>
+        </p:txBody>
+      </p:sp>
+      <p:sp>
+        <p:nvSpPr>
+          <p:cNvPr id="18" name="Text 16"/>
+          <p:cNvSpPr/>
+          <p:nvPr/>
+        </p:nvSpPr>
+        <p:spPr>
+          <a:xfrm>
+            <a:off x="5257800" y="2075688"/>
+            <a:ext cx="2459736" cy="566928"/>
+          </a:xfrm>
+          <a:prstGeom prst="rect">
+            <a:avLst/>
+          </a:prstGeom>
+          <a:noFill/>
+          <a:ln/>
+        </p:spPr>
+        <p:txBody>
+          <a:bodyPr wrap="square" lIns="0" tIns="0" rIns="0" bIns="0" rtlCol="0" anchor="ctr"/>
+          <a:lstStyle/>
+          <a:p>
+            <a:pPr indent="0" marL="0">
+              <a:buNone/>
+            </a:pPr>
+            <a:r>
+              <a:rPr lang="en-US" sz="1600" b="1" dirty="0">
+                <a:solidFill>
+                  <a:srgbClr val="00357A"/>
+                </a:solidFill>
+                <a:latin typeface="Poppins" pitchFamily="34" charset="0"/>
+                <a:ea typeface="Poppins" pitchFamily="34" charset="-122"/>
+                <a:cs typeface="Poppins" pitchFamily="34" charset="-120"/>
+              </a:rPr>
+              <a:t>PyPI Package</a:t>
+            </a:r>
+            <a:endParaRPr lang="en-US" sz="1600" dirty="0"/>
+          </a:p>
+        </p:txBody>
+      </p:sp>
+      <p:sp>
+        <p:nvSpPr>
+          <p:cNvPr id="19" name="Text 17"/>
+          <p:cNvSpPr/>
+          <p:nvPr/>
+        </p:nvSpPr>
+        <p:spPr>
+          <a:xfrm>
+            <a:off x="4572000" y="2825496"/>
+            <a:ext cx="3054096" cy="822960"/>
+          </a:xfrm>
+          <a:prstGeom prst="rect">
+            <a:avLst/>
+          </a:prstGeom>
+          <a:noFill/>
+          <a:ln/>
+        </p:spPr>
+        <p:txBody>
+          <a:bodyPr wrap="square" lIns="0" tIns="0" rIns="0" bIns="0" rtlCol="0" anchor="t"/>
+          <a:lstStyle/>
+          <a:p>
+            <a:pPr indent="0" marL="0">
+              <a:lnSpc>
+                <a:spcPct val="108000"/>
+              </a:lnSpc>
+              <a:buNone/>
+            </a:pPr>
+            <a:r>
+              <a:rPr lang="en-US" sz="1250" dirty="0">
+                <a:solidFill>
+                  <a:srgbClr val="53565A"/>
+                </a:solidFill>
+                <a:latin typeface="Poppins" pitchFamily="34" charset="0"/>
+                <a:ea typeface="Poppins" pitchFamily="34" charset="-122"/>
+                <a:cs typeface="Poppins" pitchFamily="34" charset="-120"/>
+              </a:rPr>
+              <a:t>Install the released package with pip; pulls in rda_python_common and rda_python_dsarch.</a:t>
+            </a:r>
+            <a:endParaRPr lang="en-US" sz="1250" dirty="0"/>
+          </a:p>
+        </p:txBody>
+      </p:sp>
+      <p:sp>
+        <p:nvSpPr>
+          <p:cNvPr id="20" name="Shape 18"/>
+          <p:cNvSpPr/>
+          <p:nvPr/>
+        </p:nvSpPr>
+        <p:spPr>
+          <a:xfrm>
+            <a:off x="4572000" y="3703320"/>
+            <a:ext cx="3054096" cy="749808"/>
+          </a:xfrm>
+          <a:prstGeom prst="roundRect">
+            <a:avLst>
+              <a:gd name="adj" fmla="val 6098"/>
+            </a:avLst>
+          </a:prstGeom>
+          <a:solidFill>
+            <a:srgbClr val="011837"/>
+          </a:solidFill>
+          <a:ln/>
+        </p:spPr>
+      </p:sp>
+      <p:sp>
+        <p:nvSpPr>
+          <p:cNvPr id="21" name="Text 19"/>
+          <p:cNvSpPr/>
+          <p:nvPr/>
+        </p:nvSpPr>
+        <p:spPr>
+          <a:xfrm>
+            <a:off x="4700016" y="3703320"/>
+            <a:ext cx="2798064" cy="749808"/>
+          </a:xfrm>
+          <a:prstGeom prst="rect">
+            <a:avLst/>
+          </a:prstGeom>
+          <a:noFill/>
+          <a:ln/>
+        </p:spPr>
+        <p:txBody>
+          <a:bodyPr wrap="square" lIns="0" tIns="0" rIns="0" bIns="0" rtlCol="0" anchor="ctr"/>
+          <a:lstStyle/>
+          <a:p>
+            <a:pPr indent="0" marL="0">
+              <a:lnSpc>
+                <a:spcPct val="100000"/>
+              </a:lnSpc>
+              <a:buNone/>
+            </a:pPr>
+            <a:r>
+              <a:rPr lang="en-US" sz="1050" dirty="0">
+                <a:solidFill>
+                  <a:srgbClr val="0097A7"/>
+                </a:solidFill>
+                <a:latin typeface="Courier New" pitchFamily="34" charset="0"/>
+                <a:ea typeface="Courier New" pitchFamily="34" charset="-122"/>
+                <a:cs typeface="Courier New" pitchFamily="34" charset="-120"/>
+              </a:rPr>
+              <a:t>pip install rda_python_dsquasar</a:t>
+            </a:r>
+            <a:endParaRPr lang="en-US" sz="1050" dirty="0"/>
+          </a:p>
+        </p:txBody>
+      </p:sp>
+      <p:sp>
+        <p:nvSpPr>
+          <p:cNvPr id="22" name="Shape 20"/>
+          <p:cNvSpPr/>
+          <p:nvPr/>
+        </p:nvSpPr>
+        <p:spPr>
+          <a:xfrm>
+            <a:off x="4572000" y="4800600"/>
+            <a:ext cx="3054096" cy="0"/>
+          </a:xfrm>
+          <a:prstGeom prst="line">
+            <a:avLst/>
+          </a:prstGeom>
+          <a:noFill/>
+          <a:ln w="12700">
+            <a:solidFill>
+              <a:srgbClr val="A9D6F2"/>
+            </a:solidFill>
+            <a:prstDash val="solid"/>
+          </a:ln>
+        </p:spPr>
+      </p:sp>
+      <p:sp>
+        <p:nvSpPr>
+          <p:cNvPr id="23" name="Text 21"/>
+          <p:cNvSpPr/>
+          <p:nvPr/>
+        </p:nvSpPr>
+        <p:spPr>
+          <a:xfrm>
+            <a:off x="4572000" y="4855464"/>
+            <a:ext cx="3218688" cy="310896"/>
+          </a:xfrm>
+          <a:prstGeom prst="rect">
+            <a:avLst/>
+          </a:prstGeom>
+          <a:noFill/>
+          <a:ln/>
+        </p:spPr>
+        <p:txBody>
+          <a:bodyPr wrap="square" lIns="0" tIns="0" rIns="0" bIns="0" rtlCol="0" anchor="ctr"/>
+          <a:lstStyle/>
+          <a:p>
+            <a:pPr indent="0" marL="0">
+              <a:buNone/>
+            </a:pPr>
+            <a:r>
+              <a:rPr lang="en-US" sz="950" b="1" dirty="0">
+                <a:solidFill>
+                  <a:srgbClr val="0097A7"/>
+                </a:solidFill>
+                <a:latin typeface="Courier New" pitchFamily="34" charset="0"/>
+                <a:ea typeface="Courier New" pitchFamily="34" charset="-122"/>
+                <a:cs typeface="Courier New" pitchFamily="34" charset="-120"/>
+              </a:rPr>
+              <a:t>→  </a:t>
+            </a:r>
+            <a:pPr indent="0" marL="0">
+              <a:buNone/>
+            </a:pPr>
+            <a:r>
+              <a:rPr lang="en-US" sz="950" b="1" u="sng" dirty="0">
+                <a:solidFill>
+                  <a:srgbClr val="0057C2"/>
+                </a:solidFill>
+                <a:latin typeface="Courier New" pitchFamily="34" charset="0"/>
+                <a:ea typeface="Courier New" pitchFamily="34" charset="-122"/>
+                <a:cs typeface="Courier New" pitchFamily="34" charset="-120"/>
+                <a:hlinkClick r:id="rId2" invalidUrl="" action="" tgtFrame="" tooltip="" history="1" highlightClick="0" endSnd="0">
+                  <a:extLst>
+                    <a:ext uri="{A12FA001-AC4F-418D-AE19-62706E023703}">
+                      <ahyp:hlinkClr xmlns:ahyp="http://schemas.microsoft.com/office/drawing/2018/hyperlinkcolor" val="tx"/>
+                    </a:ext>
+                  </a:extLst>
+                </a:hlinkClick>
+              </a:rPr>
+              <a:t>pypi.org/project/rda-python-dsquasar</a:t>
+            </a:r>
+            <a:endParaRPr lang="en-US" sz="950" dirty="0"/>
+          </a:p>
+        </p:txBody>
+      </p:sp>
+      <p:sp>
+        <p:nvSpPr>
+          <p:cNvPr id="24" name="Shape 22"/>
+          <p:cNvSpPr/>
+          <p:nvPr/>
+        </p:nvSpPr>
+        <p:spPr>
+          <a:xfrm>
+            <a:off x="8138160" y="1691640"/>
+            <a:ext cx="3602736" cy="3566160"/>
+          </a:xfrm>
+          <a:prstGeom prst="roundRect">
+            <a:avLst>
+              <a:gd name="adj" fmla="val 2051"/>
+            </a:avLst>
+          </a:prstGeom>
+          <a:solidFill>
+            <a:srgbClr val="FFFFFF"/>
+          </a:solidFill>
+          <a:ln w="12700">
+            <a:solidFill>
+              <a:srgbClr val="A9D6F2"/>
+            </a:solidFill>
+            <a:prstDash val="solid"/>
+          </a:ln>
+          <a:effectLst>
+            <a:outerShdw sx="100000" sy="100000" kx="0" ky="0" algn="bl" rotWithShape="0" blurRad="63500" dist="25400" dir="5400000">
+              <a:srgbClr val="C3D7EE">
+                <a:alpha val="30000"/>
+              </a:srgbClr>
+            </a:outerShdw>
+          </a:effectLst>
+        </p:spPr>
+      </p:sp>
+      <p:sp>
+        <p:nvSpPr>
+          <p:cNvPr id="25" name="Shape 23"/>
+          <p:cNvSpPr/>
+          <p:nvPr/>
+        </p:nvSpPr>
+        <p:spPr>
+          <a:xfrm>
+            <a:off x="8138160" y="1691640"/>
+            <a:ext cx="3602736" cy="128016"/>
+          </a:xfrm>
+          <a:prstGeom prst="rect">
+            <a:avLst/>
+          </a:prstGeom>
+          <a:solidFill>
+            <a:srgbClr val="C25E00"/>
+          </a:solidFill>
+          <a:ln/>
+        </p:spPr>
+      </p:sp>
+      <p:sp>
+        <p:nvSpPr>
+          <p:cNvPr id="26" name="Shape 24"/>
+          <p:cNvSpPr/>
+          <p:nvPr/>
+        </p:nvSpPr>
+        <p:spPr>
+          <a:xfrm>
+            <a:off x="8412480" y="2075688"/>
+            <a:ext cx="566928" cy="566928"/>
+          </a:xfrm>
+          <a:prstGeom prst="ellipse">
+            <a:avLst/>
+          </a:prstGeom>
+          <a:solidFill>
+            <a:srgbClr val="C25E00"/>
+          </a:solidFill>
+          <a:ln/>
+        </p:spPr>
+      </p:sp>
+      <p:sp>
+        <p:nvSpPr>
+          <p:cNvPr id="27" name="Text 25"/>
+          <p:cNvSpPr/>
+          <p:nvPr/>
+        </p:nvSpPr>
+        <p:spPr>
+          <a:xfrm>
+            <a:off x="8412480" y="2075688"/>
+            <a:ext cx="566928" cy="566928"/>
+          </a:xfrm>
+          <a:prstGeom prst="rect">
+            <a:avLst/>
+          </a:prstGeom>
+          <a:noFill/>
+          <a:ln/>
+        </p:spPr>
+        <p:txBody>
+          <a:bodyPr wrap="square" lIns="0" tIns="0" rIns="0" bIns="0" rtlCol="0" anchor="ctr"/>
+          <a:lstStyle/>
+          <a:p>
+            <a:pPr algn="ctr" indent="0" marL="0">
+              <a:buNone/>
+            </a:pPr>
+            <a:r>
+              <a:rPr lang="en-US" sz="2000" b="1" dirty="0">
+                <a:solidFill>
+                  <a:srgbClr val="FFFFFF"/>
+                </a:solidFill>
+                <a:latin typeface="Poppins" pitchFamily="34" charset="0"/>
+                <a:ea typeface="Poppins" pitchFamily="34" charset="-122"/>
+                <a:cs typeface="Poppins" pitchFamily="34" charset="-120"/>
+              </a:rPr>
+              <a:t>▤</a:t>
+            </a:r>
+            <a:endParaRPr lang="en-US" sz="2000" dirty="0"/>
+          </a:p>
+        </p:txBody>
+      </p:sp>
+      <p:sp>
+        <p:nvSpPr>
+          <p:cNvPr id="28" name="Text 26"/>
+          <p:cNvSpPr/>
+          <p:nvPr/>
+        </p:nvSpPr>
+        <p:spPr>
+          <a:xfrm>
+            <a:off x="9098280" y="2075688"/>
+            <a:ext cx="2459736" cy="566928"/>
+          </a:xfrm>
+          <a:prstGeom prst="rect">
+            <a:avLst/>
+          </a:prstGeom>
+          <a:noFill/>
+          <a:ln/>
+        </p:spPr>
+        <p:txBody>
+          <a:bodyPr wrap="square" lIns="0" tIns="0" rIns="0" bIns="0" rtlCol="0" anchor="ctr"/>
+          <a:lstStyle/>
+          <a:p>
+            <a:pPr indent="0" marL="0">
+              <a:buNone/>
+            </a:pPr>
+            <a:r>
+              <a:rPr lang="en-US" sz="1600" b="1" dirty="0">
+                <a:solidFill>
+                  <a:srgbClr val="00357A"/>
+                </a:solidFill>
+                <a:latin typeface="Poppins" pitchFamily="34" charset="0"/>
+                <a:ea typeface="Poppins" pitchFamily="34" charset="-122"/>
+                <a:cs typeface="Poppins" pitchFamily="34" charset="-120"/>
+              </a:rPr>
+              <a:t>Built-in Help</a:t>
+            </a:r>
+            <a:endParaRPr lang="en-US" sz="1600" dirty="0"/>
+          </a:p>
+        </p:txBody>
+      </p:sp>
+      <p:sp>
+        <p:nvSpPr>
+          <p:cNvPr id="29" name="Text 27"/>
+          <p:cNvSpPr/>
+          <p:nvPr/>
+        </p:nvSpPr>
+        <p:spPr>
+          <a:xfrm>
+            <a:off x="8412480" y="2825496"/>
+            <a:ext cx="3054096" cy="822960"/>
+          </a:xfrm>
+          <a:prstGeom prst="rect">
+            <a:avLst/>
+          </a:prstGeom>
+          <a:noFill/>
+          <a:ln/>
+        </p:spPr>
+        <p:txBody>
+          <a:bodyPr wrap="square" lIns="0" tIns="0" rIns="0" bIns="0" rtlCol="0" anchor="t"/>
+          <a:lstStyle/>
+          <a:p>
+            <a:pPr indent="0" marL="0">
+              <a:lnSpc>
+                <a:spcPct val="108000"/>
+              </a:lnSpc>
+              <a:buNone/>
+            </a:pPr>
+            <a:r>
+              <a:rPr lang="en-US" sz="1250" dirty="0">
+                <a:solidFill>
+                  <a:srgbClr val="53565A"/>
+                </a:solidFill>
+                <a:latin typeface="Poppins" pitchFamily="34" charset="0"/>
+                <a:ea typeface="Poppins" pitchFamily="34" charset="-122"/>
+                <a:cs typeface="Poppins" pitchFamily="34" charset="-120"/>
+              </a:rPr>
+              <a:t>The full usage document ships with the package and is shown by -h.</a:t>
+            </a:r>
+            <a:endParaRPr lang="en-US" sz="1250" dirty="0"/>
+          </a:p>
+        </p:txBody>
+      </p:sp>
+      <p:sp>
+        <p:nvSpPr>
+          <p:cNvPr id="30" name="Shape 28"/>
+          <p:cNvSpPr/>
+          <p:nvPr/>
+        </p:nvSpPr>
+        <p:spPr>
+          <a:xfrm>
+            <a:off x="8412480" y="3703320"/>
+            <a:ext cx="3054096" cy="749808"/>
+          </a:xfrm>
+          <a:prstGeom prst="roundRect">
+            <a:avLst>
+              <a:gd name="adj" fmla="val 6098"/>
+            </a:avLst>
+          </a:prstGeom>
+          <a:solidFill>
+            <a:srgbClr val="011837"/>
+          </a:solidFill>
+          <a:ln/>
+        </p:spPr>
+      </p:sp>
+      <p:sp>
+        <p:nvSpPr>
+          <p:cNvPr id="31" name="Text 29"/>
+          <p:cNvSpPr/>
+          <p:nvPr/>
+        </p:nvSpPr>
+        <p:spPr>
+          <a:xfrm>
+            <a:off x="8540496" y="3703320"/>
+            <a:ext cx="2798064" cy="749808"/>
+          </a:xfrm>
+          <a:prstGeom prst="rect">
+            <a:avLst/>
+          </a:prstGeom>
+          <a:noFill/>
+          <a:ln/>
+        </p:spPr>
+        <p:txBody>
+          <a:bodyPr wrap="square" lIns="0" tIns="0" rIns="0" bIns="0" rtlCol="0" anchor="ctr"/>
+          <a:lstStyle/>
+          <a:p>
+            <a:pPr indent="0" marL="0">
+              <a:lnSpc>
+                <a:spcPct val="100000"/>
+              </a:lnSpc>
+              <a:buNone/>
+            </a:pPr>
+            <a:r>
+              <a:rPr lang="en-US" sz="1050" dirty="0">
+                <a:solidFill>
+                  <a:srgbClr val="0097A7"/>
+                </a:solidFill>
+                <a:latin typeface="Courier New" pitchFamily="34" charset="0"/>
+                <a:ea typeface="Courier New" pitchFamily="34" charset="-122"/>
+                <a:cs typeface="Courier New" pitchFamily="34" charset="-120"/>
+              </a:rPr>
+              <a:t>dsquasar -h</a:t>
+            </a:r>
+            <a:endParaRPr lang="en-US" sz="1050" dirty="0"/>
+          </a:p>
+          <a:p>
+            <a:pPr indent="0" marL="0">
+              <a:lnSpc>
+                <a:spcPct val="100000"/>
+              </a:lnSpc>
+              <a:buNone/>
+            </a:pPr>
+            <a:r>
+              <a:rPr lang="en-US" sz="1050" dirty="0">
+                <a:solidFill>
+                  <a:srgbClr val="0097A7"/>
+                </a:solidFill>
+                <a:latin typeface="Courier New" pitchFamily="34" charset="0"/>
+                <a:ea typeface="Courier New" pitchFamily="34" charset="-122"/>
+                <a:cs typeface="Courier New" pitchFamily="34" charset="-120"/>
+              </a:rPr>
+              <a:t># renders dsquasar.usg</a:t>
+            </a:r>
+            <a:endParaRPr lang="en-US" sz="1050" dirty="0"/>
+          </a:p>
+        </p:txBody>
+      </p:sp>
+      <p:sp>
+        <p:nvSpPr>
+          <p:cNvPr id="32" name="Shape 30"/>
+          <p:cNvSpPr/>
+          <p:nvPr/>
+        </p:nvSpPr>
+        <p:spPr>
+          <a:xfrm>
+            <a:off x="8412480" y="4800600"/>
+            <a:ext cx="3054096" cy="0"/>
+          </a:xfrm>
+          <a:prstGeom prst="line">
+            <a:avLst/>
+          </a:prstGeom>
+          <a:noFill/>
+          <a:ln w="12700">
+            <a:solidFill>
+              <a:srgbClr val="A9D6F2"/>
+            </a:solidFill>
+            <a:prstDash val="solid"/>
+          </a:ln>
+        </p:spPr>
+      </p:sp>
+      <p:sp>
+        <p:nvSpPr>
+          <p:cNvPr id="33" name="Text 31"/>
+          <p:cNvSpPr/>
+          <p:nvPr/>
+        </p:nvSpPr>
+        <p:spPr>
+          <a:xfrm>
+            <a:off x="8412480" y="4855464"/>
+            <a:ext cx="3218688" cy="310896"/>
+          </a:xfrm>
+          <a:prstGeom prst="rect">
+            <a:avLst/>
+          </a:prstGeom>
+          <a:noFill/>
+          <a:ln/>
+        </p:spPr>
+        <p:txBody>
+          <a:bodyPr wrap="square" lIns="0" tIns="0" rIns="0" bIns="0" rtlCol="0" anchor="ctr"/>
+          <a:lstStyle/>
+          <a:p>
+            <a:pPr indent="0" marL="0">
+              <a:buNone/>
+            </a:pPr>
+            <a:r>
+              <a:rPr lang="en-US" sz="950" b="1" dirty="0">
+                <a:solidFill>
+                  <a:srgbClr val="C25E00"/>
+                </a:solidFill>
+                <a:latin typeface="Courier New" pitchFamily="34" charset="0"/>
+                <a:ea typeface="Courier New" pitchFamily="34" charset="-122"/>
+                <a:cs typeface="Courier New" pitchFamily="34" charset="-120"/>
+              </a:rPr>
+              <a:t>→  </a:t>
+            </a:r>
+            <a:pPr indent="0" marL="0">
+              <a:buNone/>
+            </a:pPr>
+            <a:r>
+              <a:rPr lang="en-US" sz="950" b="1" u="sng" dirty="0">
+                <a:solidFill>
+                  <a:srgbClr val="0057C2"/>
+                </a:solidFill>
+                <a:latin typeface="Courier New" pitchFamily="34" charset="0"/>
+                <a:ea typeface="Courier New" pitchFamily="34" charset="-122"/>
+                <a:cs typeface="Courier New" pitchFamily="34" charset="-120"/>
+                <a:hlinkClick r:id="rId3" invalidUrl="" action="" tgtFrame="" tooltip="" history="1" highlightClick="0" endSnd="0">
+                  <a:extLst>
+                    <a:ext uri="{A12FA001-AC4F-418D-AE19-62706E023703}">
+                      <ahyp:hlinkClr xmlns:ahyp="http://schemas.microsoft.com/office/drawing/2018/hyperlinkcolor" val="tx"/>
+                    </a:ext>
+                  </a:extLst>
+                </a:hlinkClick>
+              </a:rPr>
+              <a:t>src/rda_python_dsquasar/dsquasar.usg</a:t>
+            </a:r>
+            <a:endParaRPr lang="en-US" sz="950" dirty="0"/>
+          </a:p>
+        </p:txBody>
+      </p:sp>
+      <p:sp>
+        <p:nvSpPr>
+          <p:cNvPr id="34" name="Text 32"/>
+          <p:cNvSpPr/>
+          <p:nvPr/>
+        </p:nvSpPr>
+        <p:spPr>
+          <a:xfrm>
+            <a:off x="457200" y="5989320"/>
+            <a:ext cx="11274552" cy="365760"/>
+          </a:xfrm>
+          <a:prstGeom prst="rect">
+            <a:avLst/>
+          </a:prstGeom>
+          <a:noFill/>
+          <a:ln/>
+        </p:spPr>
+        <p:txBody>
+          <a:bodyPr wrap="square" lIns="0" tIns="0" rIns="0" bIns="0" rtlCol="0" anchor="ctr"/>
+          <a:lstStyle/>
+          <a:p>
+            <a:pPr algn="ctr" indent="0" marL="0">
+              <a:buNone/>
+            </a:pPr>
+            <a:r>
+              <a:rPr lang="en-US" sz="1300" b="1" dirty="0">
+                <a:solidFill>
+                  <a:srgbClr val="C25E00"/>
+                </a:solidFill>
+                <a:latin typeface="Poppins" pitchFamily="34" charset="0"/>
+                <a:ea typeface="Poppins" pitchFamily="34" charset="-122"/>
+                <a:cs typeface="Poppins" pitchFamily="34" charset="-120"/>
+              </a:rPr>
+              <a:t>one console command:  </a:t>
+            </a:r>
+            <a:pPr algn="ctr" indent="0" marL="0">
+              <a:buNone/>
+            </a:pPr>
+            <a:r>
+              <a:rPr lang="en-US" sz="1300" b="1" dirty="0">
+                <a:solidFill>
+                  <a:srgbClr val="00357A"/>
+                </a:solidFill>
+                <a:latin typeface="Courier New" pitchFamily="34" charset="0"/>
+                <a:ea typeface="Courier New" pitchFamily="34" charset="-122"/>
+                <a:cs typeface="Courier New" pitchFamily="34" charset="-120"/>
+              </a:rPr>
+              <a:t>dsquasar</a:t>
+            </a:r>
+            <a:pPr algn="ctr" indent="0" marL="0">
+              <a:buNone/>
+            </a:pPr>
+            <a:r>
+              <a:rPr lang="en-US" sz="1300" dirty="0">
+                <a:solidFill>
+                  <a:srgbClr val="00357A"/>
+                </a:solidFill>
+                <a:latin typeface="Poppins" pitchFamily="34" charset="0"/>
+                <a:ea typeface="Poppins" pitchFamily="34" charset="-122"/>
+                <a:cs typeface="Poppins" pitchFamily="34" charset="-120"/>
+              </a:rPr>
+              <a:t>  backs up the whole GDEX archive onto the Quasar end points.</a:t>
+            </a:r>
+            <a:endParaRPr lang="en-US" sz="1300" dirty="0"/>
+          </a:p>
+        </p:txBody>
+      </p:sp>
+      <p:sp>
+        <p:nvSpPr>
+          <p:cNvPr id="35" name="Text 33"/>
+          <p:cNvSpPr/>
+          <p:nvPr/>
+        </p:nvSpPr>
+        <p:spPr>
+          <a:xfrm>
+            <a:off x="256032" y="6446520"/>
+            <a:ext cx="365760" cy="274320"/>
+          </a:xfrm>
+          <a:prstGeom prst="rect">
+            <a:avLst/>
+          </a:prstGeom>
+          <a:noFill/>
+          <a:ln/>
+        </p:spPr>
+        <p:txBody>
+          <a:bodyPr wrap="square" lIns="0" tIns="0" rIns="0" bIns="0" rtlCol="0" anchor="ctr"/>
+          <a:lstStyle/>
+          <a:p>
+            <a:pPr indent="0" marL="0">
+              <a:buNone/>
+            </a:pPr>
+            <a:r>
+              <a:rPr lang="en-US" sz="950" b="1" dirty="0">
+                <a:solidFill>
+                  <a:srgbClr val="00357A"/>
+                </a:solidFill>
+                <a:latin typeface="Poppins" pitchFamily="34" charset="0"/>
+                <a:ea typeface="Poppins" pitchFamily="34" charset="-122"/>
+                <a:cs typeface="Poppins" pitchFamily="34" charset="-120"/>
+              </a:rPr>
+              <a:t>2</a:t>
+            </a:r>
+            <a:endParaRPr lang="en-US" sz="950" dirty="0"/>
+          </a:p>
+        </p:txBody>
+      </p:sp>
+      <p:sp>
+        <p:nvSpPr>
+          <p:cNvPr id="36" name="Text 34"/>
+          <p:cNvSpPr/>
+          <p:nvPr/>
+        </p:nvSpPr>
+        <p:spPr>
+          <a:xfrm>
+            <a:off x="786384" y="6446520"/>
+            <a:ext cx="5486400" cy="274320"/>
+          </a:xfrm>
+          <a:prstGeom prst="rect">
+            <a:avLst/>
+          </a:prstGeom>
+          <a:noFill/>
+          <a:ln/>
+        </p:spPr>
+        <p:txBody>
+          <a:bodyPr wrap="square" lIns="0" tIns="0" rIns="0" bIns="0" rtlCol="0" anchor="ctr"/>
+          <a:lstStyle/>
+          <a:p>
+            <a:pPr indent="0" marL="0">
+              <a:buNone/>
+            </a:pPr>
+            <a:r>
+              <a:rPr lang="en-US" sz="950" b="1" dirty="0">
+                <a:solidFill>
+                  <a:srgbClr val="00357A"/>
+                </a:solidFill>
+                <a:latin typeface="Poppins" pitchFamily="34" charset="0"/>
+                <a:ea typeface="Poppins" pitchFamily="34" charset="-122"/>
+                <a:cs typeface="Poppins" pitchFamily="34" charset="-120"/>
+              </a:rPr>
+              <a:t>DSQUASAR  •  QUASAR BACKUP GUIDE</a:t>
+            </a:r>
+            <a:endParaRPr lang="en-US" sz="950" dirty="0"/>
+          </a:p>
+        </p:txBody>
+      </p:sp>
+    </p:spTree>
+  </p:cSld>
+  <p:clrMapOvr>
+    <a:masterClrMapping/>
+  </p:clrMapOvr>
+</p:sld>
+</file>
+
+<file path=ppt/slides/slide30.xml><?xml version="1.0" encoding="utf-8"?>
+<p:sld xmlns:a="http://schemas.openxmlformats.org/drawingml/2006/main" xmlns:r="http://schemas.openxmlformats.org/officeDocument/2006/relationships" xmlns:p="http://schemas.openxmlformats.org/presentationml/2006/main">
+  <p:cSld name="Slide 30">
+    <p:spTree>
+      <p:nvGrpSpPr>
+        <p:cNvPr id="1" name=""/>
+        <p:cNvGrpSpPr/>
+        <p:nvPr/>
+      </p:nvGrpSpPr>
+      <p:grpSpPr>
+        <a:xfrm>
+          <a:off x="0" y="0"/>
+          <a:ext cx="0" cy="0"/>
+          <a:chOff x="0" y="0"/>
+          <a:chExt cx="0" cy="0"/>
+        </a:xfrm>
+      </p:grpSpPr>
+      <p:sp>
+        <p:nvSpPr>
+          <p:cNvPr id="2" name="Text 0"/>
+          <p:cNvSpPr/>
+          <p:nvPr/>
+        </p:nvSpPr>
+        <p:spPr>
+          <a:xfrm>
+            <a:off x="457200" y="384048"/>
+            <a:ext cx="8229600" cy="274320"/>
+          </a:xfrm>
+          <a:prstGeom prst="rect">
+            <a:avLst/>
+          </a:prstGeom>
+          <a:noFill/>
+          <a:ln/>
+        </p:spPr>
+        <p:txBody>
+          <a:bodyPr wrap="square" lIns="0" tIns="0" rIns="0" bIns="0" rtlCol="0" anchor="ctr"/>
+          <a:lstStyle/>
+          <a:p>
+            <a:pPr indent="0" marL="0">
+              <a:buNone/>
+            </a:pPr>
+            <a:r>
+              <a:rPr lang="en-US" sz="1200" b="1" spc="200" kern="0" dirty="0">
+                <a:solidFill>
                   <a:srgbClr val="C25E00"/>
                 </a:solidFill>
                 <a:latin typeface="Poppins" pitchFamily="34" charset="0"/>
@@ -32481,7 +36743,7 @@
       </p:sp>
       <p:graphicFrame>
         <p:nvGraphicFramePr>
-          <p:cNvPr id="29" name="Table 0"/>
+          <p:cNvPr id="31" name="Table 0"/>
           <p:cNvGraphicFramePr>
             <a:graphicFrameLocks noGrp="1"/>
           </p:cNvGraphicFramePr>
@@ -33232,7 +37494,7 @@
                 <a:ea typeface="Poppins" pitchFamily="34" charset="-122"/>
                 <a:cs typeface="Poppins" pitchFamily="34" charset="-120"/>
               </a:rPr>
-              <a:t>27</a:t>
+              <a:t>29</a:t>
             </a:r>
             <a:endParaRPr lang="en-US" sz="950" dirty="0"/>
           </a:p>
@@ -33285,9 +37547,9 @@
 </p:sld>
 </file>
 
-<file path=ppt/slides/slide29.xml><?xml version="1.0" encoding="utf-8"?>
+<file path=ppt/slides/slide31.xml><?xml version="1.0" encoding="utf-8"?>
 <p:sld xmlns:a="http://schemas.openxmlformats.org/drawingml/2006/main" xmlns:r="http://schemas.openxmlformats.org/officeDocument/2006/relationships" xmlns:p="http://schemas.openxmlformats.org/presentationml/2006/main">
-  <p:cSld name="Slide 29">
+  <p:cSld name="Slide 31">
     <p:spTree>
       <p:nvGrpSpPr>
         <p:cNvPr id="1" name=""/>
@@ -34126,7 +38388,7 @@
                 <a:ea typeface="Poppins" pitchFamily="34" charset="-122"/>
                 <a:cs typeface="Poppins" pitchFamily="34" charset="-120"/>
               </a:rPr>
-              <a:t>28</a:t>
+              <a:t>30</a:t>
             </a:r>
             <a:endParaRPr lang="en-US" sz="950" dirty="0"/>
           </a:p>
@@ -34179,1320 +38441,9 @@
 </p:sld>
 </file>
 
-<file path=ppt/slides/slide3.xml><?xml version="1.0" encoding="utf-8"?>
+<file path=ppt/slides/slide32.xml><?xml version="1.0" encoding="utf-8"?>
 <p:sld xmlns:a="http://schemas.openxmlformats.org/drawingml/2006/main" xmlns:r="http://schemas.openxmlformats.org/officeDocument/2006/relationships" xmlns:p="http://schemas.openxmlformats.org/presentationml/2006/main">
-  <p:cSld name="Slide 3">
-    <p:spTree>
-      <p:nvGrpSpPr>
-        <p:cNvPr id="1" name=""/>
-        <p:cNvGrpSpPr/>
-        <p:nvPr/>
-      </p:nvGrpSpPr>
-      <p:grpSpPr>
-        <a:xfrm>
-          <a:off x="0" y="0"/>
-          <a:ext cx="0" cy="0"/>
-          <a:chOff x="0" y="0"/>
-          <a:chExt cx="0" cy="0"/>
-        </a:xfrm>
-      </p:grpSpPr>
-      <p:sp>
-        <p:nvSpPr>
-          <p:cNvPr id="2" name="Text 0"/>
-          <p:cNvSpPr/>
-          <p:nvPr/>
-        </p:nvSpPr>
-        <p:spPr>
-          <a:xfrm>
-            <a:off x="457200" y="384048"/>
-            <a:ext cx="8229600" cy="274320"/>
-          </a:xfrm>
-          <a:prstGeom prst="rect">
-            <a:avLst/>
-          </a:prstGeom>
-          <a:noFill/>
-          <a:ln/>
-        </p:spPr>
-        <p:txBody>
-          <a:bodyPr wrap="square" lIns="0" tIns="0" rIns="0" bIns="0" rtlCol="0" anchor="ctr"/>
-          <a:lstStyle/>
-          <a:p>
-            <a:pPr indent="0" marL="0">
-              <a:buNone/>
-            </a:pPr>
-            <a:r>
-              <a:rPr lang="en-US" sz="1200" b="1" spc="200" kern="0" dirty="0">
-                <a:solidFill>
-                  <a:srgbClr val="0092DB"/>
-                </a:solidFill>
-                <a:latin typeface="Poppins" pitchFamily="34" charset="0"/>
-                <a:ea typeface="Poppins" pitchFamily="34" charset="-122"/>
-                <a:cs typeface="Poppins" pitchFamily="34" charset="-120"/>
-              </a:rPr>
-              <a:t>GET IT &amp; LEARN IT</a:t>
-            </a:r>
-            <a:endParaRPr lang="en-US" sz="1200" dirty="0"/>
-          </a:p>
-        </p:txBody>
-      </p:sp>
-      <p:sp>
-        <p:nvSpPr>
-          <p:cNvPr id="3" name="Text 1"/>
-          <p:cNvSpPr/>
-          <p:nvPr/>
-        </p:nvSpPr>
-        <p:spPr>
-          <a:xfrm>
-            <a:off x="457200" y="658368"/>
-            <a:ext cx="9326880" cy="640080"/>
-          </a:xfrm>
-          <a:prstGeom prst="rect">
-            <a:avLst/>
-          </a:prstGeom>
-          <a:noFill/>
-          <a:ln/>
-        </p:spPr>
-        <p:txBody>
-          <a:bodyPr wrap="square" lIns="0" tIns="0" rIns="0" bIns="0" rtlCol="0" anchor="ctr"/>
-          <a:lstStyle/>
-          <a:p>
-            <a:pPr indent="0" marL="0">
-              <a:buNone/>
-            </a:pPr>
-            <a:r>
-              <a:rPr lang="en-US" sz="3200" b="1" dirty="0">
-                <a:solidFill>
-                  <a:srgbClr val="00357A"/>
-                </a:solidFill>
-                <a:latin typeface="Poppins" pitchFamily="34" charset="0"/>
-                <a:ea typeface="Poppins" pitchFamily="34" charset="-122"/>
-                <a:cs typeface="Poppins" pitchFamily="34" charset="-120"/>
-              </a:rPr>
-              <a:t>Install &amp; Resources</a:t>
-            </a:r>
-            <a:endParaRPr lang="en-US" sz="3200" dirty="0"/>
-          </a:p>
-        </p:txBody>
-      </p:sp>
-      <p:sp>
-        <p:nvSpPr>
-          <p:cNvPr id="4" name="Shape 2"/>
-          <p:cNvSpPr/>
-          <p:nvPr/>
-        </p:nvSpPr>
-        <p:spPr>
-          <a:xfrm>
-            <a:off x="457200" y="1691640"/>
-            <a:ext cx="3602736" cy="3566160"/>
-          </a:xfrm>
-          <a:prstGeom prst="roundRect">
-            <a:avLst>
-              <a:gd name="adj" fmla="val 2051"/>
-            </a:avLst>
-          </a:prstGeom>
-          <a:solidFill>
-            <a:srgbClr val="FFFFFF"/>
-          </a:solidFill>
-          <a:ln w="12700">
-            <a:solidFill>
-              <a:srgbClr val="A9D6F2"/>
-            </a:solidFill>
-            <a:prstDash val="solid"/>
-          </a:ln>
-          <a:effectLst>
-            <a:outerShdw sx="100000" sy="100000" kx="0" ky="0" algn="bl" rotWithShape="0" blurRad="63500" dist="25400" dir="5400000">
-              <a:srgbClr val="C3D7EE">
-                <a:alpha val="30000"/>
-              </a:srgbClr>
-            </a:outerShdw>
-          </a:effectLst>
-        </p:spPr>
-      </p:sp>
-      <p:sp>
-        <p:nvSpPr>
-          <p:cNvPr id="5" name="Shape 3"/>
-          <p:cNvSpPr/>
-          <p:nvPr/>
-        </p:nvSpPr>
-        <p:spPr>
-          <a:xfrm>
-            <a:off x="457200" y="1691640"/>
-            <a:ext cx="3602736" cy="128016"/>
-          </a:xfrm>
-          <a:prstGeom prst="rect">
-            <a:avLst/>
-          </a:prstGeom>
-          <a:solidFill>
-            <a:srgbClr val="0057C2"/>
-          </a:solidFill>
-          <a:ln/>
-        </p:spPr>
-      </p:sp>
-      <p:sp>
-        <p:nvSpPr>
-          <p:cNvPr id="6" name="Shape 4"/>
-          <p:cNvSpPr/>
-          <p:nvPr/>
-        </p:nvSpPr>
-        <p:spPr>
-          <a:xfrm>
-            <a:off x="731520" y="2075688"/>
-            <a:ext cx="566928" cy="566928"/>
-          </a:xfrm>
-          <a:prstGeom prst="ellipse">
-            <a:avLst/>
-          </a:prstGeom>
-          <a:solidFill>
-            <a:srgbClr val="0057C2"/>
-          </a:solidFill>
-          <a:ln/>
-        </p:spPr>
-      </p:sp>
-      <p:sp>
-        <p:nvSpPr>
-          <p:cNvPr id="7" name="Text 5"/>
-          <p:cNvSpPr/>
-          <p:nvPr/>
-        </p:nvSpPr>
-        <p:spPr>
-          <a:xfrm>
-            <a:off x="731520" y="2075688"/>
-            <a:ext cx="566928" cy="566928"/>
-          </a:xfrm>
-          <a:prstGeom prst="rect">
-            <a:avLst/>
-          </a:prstGeom>
-          <a:noFill/>
-          <a:ln/>
-        </p:spPr>
-        <p:txBody>
-          <a:bodyPr wrap="square" lIns="0" tIns="0" rIns="0" bIns="0" rtlCol="0" anchor="ctr"/>
-          <a:lstStyle/>
-          <a:p>
-            <a:pPr algn="ctr" indent="0" marL="0">
-              <a:buNone/>
-            </a:pPr>
-            <a:r>
-              <a:rPr lang="en-US" sz="2000" b="1" dirty="0">
-                <a:solidFill>
-                  <a:srgbClr val="FFFFFF"/>
-                </a:solidFill>
-                <a:latin typeface="Poppins" pitchFamily="34" charset="0"/>
-                <a:ea typeface="Poppins" pitchFamily="34" charset="-122"/>
-                <a:cs typeface="Poppins" pitchFamily="34" charset="-120"/>
-              </a:rPr>
-              <a:t>⌥</a:t>
-            </a:r>
-            <a:endParaRPr lang="en-US" sz="2000" dirty="0"/>
-          </a:p>
-        </p:txBody>
-      </p:sp>
-      <p:sp>
-        <p:nvSpPr>
-          <p:cNvPr id="8" name="Text 6"/>
-          <p:cNvSpPr/>
-          <p:nvPr/>
-        </p:nvSpPr>
-        <p:spPr>
-          <a:xfrm>
-            <a:off x="1417320" y="2075688"/>
-            <a:ext cx="2459736" cy="566928"/>
-          </a:xfrm>
-          <a:prstGeom prst="rect">
-            <a:avLst/>
-          </a:prstGeom>
-          <a:noFill/>
-          <a:ln/>
-        </p:spPr>
-        <p:txBody>
-          <a:bodyPr wrap="square" lIns="0" tIns="0" rIns="0" bIns="0" rtlCol="0" anchor="ctr"/>
-          <a:lstStyle/>
-          <a:p>
-            <a:pPr indent="0" marL="0">
-              <a:buNone/>
-            </a:pPr>
-            <a:r>
-              <a:rPr lang="en-US" sz="1600" b="1" dirty="0">
-                <a:solidFill>
-                  <a:srgbClr val="00357A"/>
-                </a:solidFill>
-                <a:latin typeface="Poppins" pitchFamily="34" charset="0"/>
-                <a:ea typeface="Poppins" pitchFamily="34" charset="-122"/>
-                <a:cs typeface="Poppins" pitchFamily="34" charset="-120"/>
-              </a:rPr>
-              <a:t>GitHub Repository</a:t>
-            </a:r>
-            <a:endParaRPr lang="en-US" sz="1600" dirty="0"/>
-          </a:p>
-        </p:txBody>
-      </p:sp>
-      <p:sp>
-        <p:nvSpPr>
-          <p:cNvPr id="9" name="Text 7"/>
-          <p:cNvSpPr/>
-          <p:nvPr/>
-        </p:nvSpPr>
-        <p:spPr>
-          <a:xfrm>
-            <a:off x="731520" y="2825496"/>
-            <a:ext cx="3054096" cy="822960"/>
-          </a:xfrm>
-          <a:prstGeom prst="rect">
-            <a:avLst/>
-          </a:prstGeom>
-          <a:noFill/>
-          <a:ln/>
-        </p:spPr>
-        <p:txBody>
-          <a:bodyPr wrap="square" lIns="0" tIns="0" rIns="0" bIns="0" rtlCol="0" anchor="t"/>
-          <a:lstStyle/>
-          <a:p>
-            <a:pPr indent="0" marL="0">
-              <a:lnSpc>
-                <a:spcPct val="108000"/>
-              </a:lnSpc>
-              <a:buNone/>
-            </a:pPr>
-            <a:r>
-              <a:rPr lang="en-US" sz="1250" dirty="0">
-                <a:solidFill>
-                  <a:srgbClr val="53565A"/>
-                </a:solidFill>
-                <a:latin typeface="Poppins" pitchFamily="34" charset="0"/>
-                <a:ea typeface="Poppins" pitchFamily="34" charset="-122"/>
-                <a:cs typeface="Poppins" pitchFamily="34" charset="-120"/>
-              </a:rPr>
-              <a:t>Source code, issues, and contributions.</a:t>
-            </a:r>
-            <a:endParaRPr lang="en-US" sz="1250" dirty="0"/>
-          </a:p>
-        </p:txBody>
-      </p:sp>
-      <p:sp>
-        <p:nvSpPr>
-          <p:cNvPr id="10" name="Shape 8"/>
-          <p:cNvSpPr/>
-          <p:nvPr/>
-        </p:nvSpPr>
-        <p:spPr>
-          <a:xfrm>
-            <a:off x="731520" y="3703320"/>
-            <a:ext cx="3054096" cy="749808"/>
-          </a:xfrm>
-          <a:prstGeom prst="roundRect">
-            <a:avLst>
-              <a:gd name="adj" fmla="val 6098"/>
-            </a:avLst>
-          </a:prstGeom>
-          <a:solidFill>
-            <a:srgbClr val="011837"/>
-          </a:solidFill>
-          <a:ln/>
-        </p:spPr>
-      </p:sp>
-      <p:sp>
-        <p:nvSpPr>
-          <p:cNvPr id="11" name="Text 9"/>
-          <p:cNvSpPr/>
-          <p:nvPr/>
-        </p:nvSpPr>
-        <p:spPr>
-          <a:xfrm>
-            <a:off x="859536" y="3703320"/>
-            <a:ext cx="2798064" cy="749808"/>
-          </a:xfrm>
-          <a:prstGeom prst="rect">
-            <a:avLst/>
-          </a:prstGeom>
-          <a:noFill/>
-          <a:ln/>
-        </p:spPr>
-        <p:txBody>
-          <a:bodyPr wrap="square" lIns="0" tIns="0" rIns="0" bIns="0" rtlCol="0" anchor="ctr"/>
-          <a:lstStyle/>
-          <a:p>
-            <a:pPr indent="0" marL="0">
-              <a:lnSpc>
-                <a:spcPct val="100000"/>
-              </a:lnSpc>
-              <a:buNone/>
-            </a:pPr>
-            <a:r>
-              <a:rPr lang="en-US" sz="1050" dirty="0">
-                <a:solidFill>
-                  <a:srgbClr val="0097A7"/>
-                </a:solidFill>
-                <a:latin typeface="Courier New" pitchFamily="34" charset="0"/>
-                <a:ea typeface="Courier New" pitchFamily="34" charset="-122"/>
-                <a:cs typeface="Courier New" pitchFamily="34" charset="-120"/>
-              </a:rPr>
-              <a:t>git clone https://github.com/</a:t>
-            </a:r>
-            <a:endParaRPr lang="en-US" sz="1050" dirty="0"/>
-          </a:p>
-          <a:p>
-            <a:pPr indent="0" marL="0">
-              <a:lnSpc>
-                <a:spcPct val="100000"/>
-              </a:lnSpc>
-              <a:buNone/>
-            </a:pPr>
-            <a:r>
-              <a:rPr lang="en-US" sz="1050" dirty="0">
-                <a:solidFill>
-                  <a:srgbClr val="0097A7"/>
-                </a:solidFill>
-                <a:latin typeface="Courier New" pitchFamily="34" charset="0"/>
-                <a:ea typeface="Courier New" pitchFamily="34" charset="-122"/>
-                <a:cs typeface="Courier New" pitchFamily="34" charset="-120"/>
-              </a:rPr>
-              <a:t>  NCAR/rda-python-dsquasar.git</a:t>
-            </a:r>
-            <a:endParaRPr lang="en-US" sz="1050" dirty="0"/>
-          </a:p>
-        </p:txBody>
-      </p:sp>
-      <p:sp>
-        <p:nvSpPr>
-          <p:cNvPr id="12" name="Shape 10"/>
-          <p:cNvSpPr/>
-          <p:nvPr/>
-        </p:nvSpPr>
-        <p:spPr>
-          <a:xfrm>
-            <a:off x="731520" y="4800600"/>
-            <a:ext cx="3054096" cy="0"/>
-          </a:xfrm>
-          <a:prstGeom prst="line">
-            <a:avLst/>
-          </a:prstGeom>
-          <a:noFill/>
-          <a:ln w="12700">
-            <a:solidFill>
-              <a:srgbClr val="A9D6F2"/>
-            </a:solidFill>
-            <a:prstDash val="solid"/>
-          </a:ln>
-        </p:spPr>
-      </p:sp>
-      <p:sp>
-        <p:nvSpPr>
-          <p:cNvPr id="13" name="Text 11"/>
-          <p:cNvSpPr/>
-          <p:nvPr/>
-        </p:nvSpPr>
-        <p:spPr>
-          <a:xfrm>
-            <a:off x="731520" y="4855464"/>
-            <a:ext cx="3218688" cy="310896"/>
-          </a:xfrm>
-          <a:prstGeom prst="rect">
-            <a:avLst/>
-          </a:prstGeom>
-          <a:noFill/>
-          <a:ln/>
-        </p:spPr>
-        <p:txBody>
-          <a:bodyPr wrap="square" lIns="0" tIns="0" rIns="0" bIns="0" rtlCol="0" anchor="ctr"/>
-          <a:lstStyle/>
-          <a:p>
-            <a:pPr indent="0" marL="0">
-              <a:buNone/>
-            </a:pPr>
-            <a:r>
-              <a:rPr lang="en-US" sz="950" b="1" dirty="0">
-                <a:solidFill>
-                  <a:srgbClr val="0057C2"/>
-                </a:solidFill>
-                <a:latin typeface="Courier New" pitchFamily="34" charset="0"/>
-                <a:ea typeface="Courier New" pitchFamily="34" charset="-122"/>
-                <a:cs typeface="Courier New" pitchFamily="34" charset="-120"/>
-              </a:rPr>
-              <a:t>→  </a:t>
-            </a:r>
-            <a:pPr indent="0" marL="0">
-              <a:buNone/>
-            </a:pPr>
-            <a:r>
-              <a:rPr lang="en-US" sz="950" b="1" u="sng" dirty="0">
-                <a:solidFill>
-                  <a:srgbClr val="0057C2"/>
-                </a:solidFill>
-                <a:latin typeface="Courier New" pitchFamily="34" charset="0"/>
-                <a:ea typeface="Courier New" pitchFamily="34" charset="-122"/>
-                <a:cs typeface="Courier New" pitchFamily="34" charset="-120"/>
-                <a:hlinkClick r:id="rId1" invalidUrl="" action="" tgtFrame="" tooltip="" history="1" highlightClick="0" endSnd="0">
-                  <a:extLst>
-                    <a:ext uri="{A12FA001-AC4F-418D-AE19-62706E023703}">
-                      <ahyp:hlinkClr xmlns:ahyp="http://schemas.microsoft.com/office/drawing/2018/hyperlinkcolor" val="tx"/>
-                    </a:ext>
-                  </a:extLst>
-                </a:hlinkClick>
-              </a:rPr>
-              <a:t>github.com/NCAR/rda-python-dsquasar</a:t>
-            </a:r>
-            <a:endParaRPr lang="en-US" sz="950" dirty="0"/>
-          </a:p>
-        </p:txBody>
-      </p:sp>
-      <p:sp>
-        <p:nvSpPr>
-          <p:cNvPr id="14" name="Shape 12"/>
-          <p:cNvSpPr/>
-          <p:nvPr/>
-        </p:nvSpPr>
-        <p:spPr>
-          <a:xfrm>
-            <a:off x="4297680" y="1691640"/>
-            <a:ext cx="3602736" cy="3566160"/>
-          </a:xfrm>
-          <a:prstGeom prst="roundRect">
-            <a:avLst>
-              <a:gd name="adj" fmla="val 2051"/>
-            </a:avLst>
-          </a:prstGeom>
-          <a:solidFill>
-            <a:srgbClr val="FFFFFF"/>
-          </a:solidFill>
-          <a:ln w="12700">
-            <a:solidFill>
-              <a:srgbClr val="A9D6F2"/>
-            </a:solidFill>
-            <a:prstDash val="solid"/>
-          </a:ln>
-          <a:effectLst>
-            <a:outerShdw sx="100000" sy="100000" kx="0" ky="0" algn="bl" rotWithShape="0" blurRad="63500" dist="25400" dir="5400000">
-              <a:srgbClr val="C3D7EE">
-                <a:alpha val="30000"/>
-              </a:srgbClr>
-            </a:outerShdw>
-          </a:effectLst>
-        </p:spPr>
-      </p:sp>
-      <p:sp>
-        <p:nvSpPr>
-          <p:cNvPr id="15" name="Shape 13"/>
-          <p:cNvSpPr/>
-          <p:nvPr/>
-        </p:nvSpPr>
-        <p:spPr>
-          <a:xfrm>
-            <a:off x="4297680" y="1691640"/>
-            <a:ext cx="3602736" cy="128016"/>
-          </a:xfrm>
-          <a:prstGeom prst="rect">
-            <a:avLst/>
-          </a:prstGeom>
-          <a:solidFill>
-            <a:srgbClr val="0097A7"/>
-          </a:solidFill>
-          <a:ln/>
-        </p:spPr>
-      </p:sp>
-      <p:sp>
-        <p:nvSpPr>
-          <p:cNvPr id="16" name="Shape 14"/>
-          <p:cNvSpPr/>
-          <p:nvPr/>
-        </p:nvSpPr>
-        <p:spPr>
-          <a:xfrm>
-            <a:off x="4572000" y="2075688"/>
-            <a:ext cx="566928" cy="566928"/>
-          </a:xfrm>
-          <a:prstGeom prst="ellipse">
-            <a:avLst/>
-          </a:prstGeom>
-          <a:solidFill>
-            <a:srgbClr val="0097A7"/>
-          </a:solidFill>
-          <a:ln/>
-        </p:spPr>
-      </p:sp>
-      <p:sp>
-        <p:nvSpPr>
-          <p:cNvPr id="17" name="Text 15"/>
-          <p:cNvSpPr/>
-          <p:nvPr/>
-        </p:nvSpPr>
-        <p:spPr>
-          <a:xfrm>
-            <a:off x="4572000" y="2075688"/>
-            <a:ext cx="566928" cy="566928"/>
-          </a:xfrm>
-          <a:prstGeom prst="rect">
-            <a:avLst/>
-          </a:prstGeom>
-          <a:noFill/>
-          <a:ln/>
-        </p:spPr>
-        <p:txBody>
-          <a:bodyPr wrap="square" lIns="0" tIns="0" rIns="0" bIns="0" rtlCol="0" anchor="ctr"/>
-          <a:lstStyle/>
-          <a:p>
-            <a:pPr algn="ctr" indent="0" marL="0">
-              <a:buNone/>
-            </a:pPr>
-            <a:r>
-              <a:rPr lang="en-US" sz="2000" b="1" dirty="0">
-                <a:solidFill>
-                  <a:srgbClr val="FFFFFF"/>
-                </a:solidFill>
-                <a:latin typeface="Poppins" pitchFamily="34" charset="0"/>
-                <a:ea typeface="Poppins" pitchFamily="34" charset="-122"/>
-                <a:cs typeface="Poppins" pitchFamily="34" charset="-120"/>
-              </a:rPr>
-              <a:t>▼</a:t>
-            </a:r>
-            <a:endParaRPr lang="en-US" sz="2000" dirty="0"/>
-          </a:p>
-        </p:txBody>
-      </p:sp>
-      <p:sp>
-        <p:nvSpPr>
-          <p:cNvPr id="18" name="Text 16"/>
-          <p:cNvSpPr/>
-          <p:nvPr/>
-        </p:nvSpPr>
-        <p:spPr>
-          <a:xfrm>
-            <a:off x="5257800" y="2075688"/>
-            <a:ext cx="2459736" cy="566928"/>
-          </a:xfrm>
-          <a:prstGeom prst="rect">
-            <a:avLst/>
-          </a:prstGeom>
-          <a:noFill/>
-          <a:ln/>
-        </p:spPr>
-        <p:txBody>
-          <a:bodyPr wrap="square" lIns="0" tIns="0" rIns="0" bIns="0" rtlCol="0" anchor="ctr"/>
-          <a:lstStyle/>
-          <a:p>
-            <a:pPr indent="0" marL="0">
-              <a:buNone/>
-            </a:pPr>
-            <a:r>
-              <a:rPr lang="en-US" sz="1600" b="1" dirty="0">
-                <a:solidFill>
-                  <a:srgbClr val="00357A"/>
-                </a:solidFill>
-                <a:latin typeface="Poppins" pitchFamily="34" charset="0"/>
-                <a:ea typeface="Poppins" pitchFamily="34" charset="-122"/>
-                <a:cs typeface="Poppins" pitchFamily="34" charset="-120"/>
-              </a:rPr>
-              <a:t>PyPI Package</a:t>
-            </a:r>
-            <a:endParaRPr lang="en-US" sz="1600" dirty="0"/>
-          </a:p>
-        </p:txBody>
-      </p:sp>
-      <p:sp>
-        <p:nvSpPr>
-          <p:cNvPr id="19" name="Text 17"/>
-          <p:cNvSpPr/>
-          <p:nvPr/>
-        </p:nvSpPr>
-        <p:spPr>
-          <a:xfrm>
-            <a:off x="4572000" y="2825496"/>
-            <a:ext cx="3054096" cy="822960"/>
-          </a:xfrm>
-          <a:prstGeom prst="rect">
-            <a:avLst/>
-          </a:prstGeom>
-          <a:noFill/>
-          <a:ln/>
-        </p:spPr>
-        <p:txBody>
-          <a:bodyPr wrap="square" lIns="0" tIns="0" rIns="0" bIns="0" rtlCol="0" anchor="t"/>
-          <a:lstStyle/>
-          <a:p>
-            <a:pPr indent="0" marL="0">
-              <a:lnSpc>
-                <a:spcPct val="108000"/>
-              </a:lnSpc>
-              <a:buNone/>
-            </a:pPr>
-            <a:r>
-              <a:rPr lang="en-US" sz="1250" dirty="0">
-                <a:solidFill>
-                  <a:srgbClr val="53565A"/>
-                </a:solidFill>
-                <a:latin typeface="Poppins" pitchFamily="34" charset="0"/>
-                <a:ea typeface="Poppins" pitchFamily="34" charset="-122"/>
-                <a:cs typeface="Poppins" pitchFamily="34" charset="-120"/>
-              </a:rPr>
-              <a:t>Install the released package with pip; pulls in rda_python_common and rda_python_dsarch.</a:t>
-            </a:r>
-            <a:endParaRPr lang="en-US" sz="1250" dirty="0"/>
-          </a:p>
-        </p:txBody>
-      </p:sp>
-      <p:sp>
-        <p:nvSpPr>
-          <p:cNvPr id="20" name="Shape 18"/>
-          <p:cNvSpPr/>
-          <p:nvPr/>
-        </p:nvSpPr>
-        <p:spPr>
-          <a:xfrm>
-            <a:off x="4572000" y="3703320"/>
-            <a:ext cx="3054096" cy="749808"/>
-          </a:xfrm>
-          <a:prstGeom prst="roundRect">
-            <a:avLst>
-              <a:gd name="adj" fmla="val 6098"/>
-            </a:avLst>
-          </a:prstGeom>
-          <a:solidFill>
-            <a:srgbClr val="011837"/>
-          </a:solidFill>
-          <a:ln/>
-        </p:spPr>
-      </p:sp>
-      <p:sp>
-        <p:nvSpPr>
-          <p:cNvPr id="21" name="Text 19"/>
-          <p:cNvSpPr/>
-          <p:nvPr/>
-        </p:nvSpPr>
-        <p:spPr>
-          <a:xfrm>
-            <a:off x="4700016" y="3703320"/>
-            <a:ext cx="2798064" cy="749808"/>
-          </a:xfrm>
-          <a:prstGeom prst="rect">
-            <a:avLst/>
-          </a:prstGeom>
-          <a:noFill/>
-          <a:ln/>
-        </p:spPr>
-        <p:txBody>
-          <a:bodyPr wrap="square" lIns="0" tIns="0" rIns="0" bIns="0" rtlCol="0" anchor="ctr"/>
-          <a:lstStyle/>
-          <a:p>
-            <a:pPr indent="0" marL="0">
-              <a:lnSpc>
-                <a:spcPct val="100000"/>
-              </a:lnSpc>
-              <a:buNone/>
-            </a:pPr>
-            <a:r>
-              <a:rPr lang="en-US" sz="1050" dirty="0">
-                <a:solidFill>
-                  <a:srgbClr val="0097A7"/>
-                </a:solidFill>
-                <a:latin typeface="Courier New" pitchFamily="34" charset="0"/>
-                <a:ea typeface="Courier New" pitchFamily="34" charset="-122"/>
-                <a:cs typeface="Courier New" pitchFamily="34" charset="-120"/>
-              </a:rPr>
-              <a:t>pip install rda_python_dsquasar</a:t>
-            </a:r>
-            <a:endParaRPr lang="en-US" sz="1050" dirty="0"/>
-          </a:p>
-        </p:txBody>
-      </p:sp>
-      <p:sp>
-        <p:nvSpPr>
-          <p:cNvPr id="22" name="Shape 20"/>
-          <p:cNvSpPr/>
-          <p:nvPr/>
-        </p:nvSpPr>
-        <p:spPr>
-          <a:xfrm>
-            <a:off x="4572000" y="4800600"/>
-            <a:ext cx="3054096" cy="0"/>
-          </a:xfrm>
-          <a:prstGeom prst="line">
-            <a:avLst/>
-          </a:prstGeom>
-          <a:noFill/>
-          <a:ln w="12700">
-            <a:solidFill>
-              <a:srgbClr val="A9D6F2"/>
-            </a:solidFill>
-            <a:prstDash val="solid"/>
-          </a:ln>
-        </p:spPr>
-      </p:sp>
-      <p:sp>
-        <p:nvSpPr>
-          <p:cNvPr id="23" name="Text 21"/>
-          <p:cNvSpPr/>
-          <p:nvPr/>
-        </p:nvSpPr>
-        <p:spPr>
-          <a:xfrm>
-            <a:off x="4572000" y="4855464"/>
-            <a:ext cx="3218688" cy="310896"/>
-          </a:xfrm>
-          <a:prstGeom prst="rect">
-            <a:avLst/>
-          </a:prstGeom>
-          <a:noFill/>
-          <a:ln/>
-        </p:spPr>
-        <p:txBody>
-          <a:bodyPr wrap="square" lIns="0" tIns="0" rIns="0" bIns="0" rtlCol="0" anchor="ctr"/>
-          <a:lstStyle/>
-          <a:p>
-            <a:pPr indent="0" marL="0">
-              <a:buNone/>
-            </a:pPr>
-            <a:r>
-              <a:rPr lang="en-US" sz="950" b="1" dirty="0">
-                <a:solidFill>
-                  <a:srgbClr val="0097A7"/>
-                </a:solidFill>
-                <a:latin typeface="Courier New" pitchFamily="34" charset="0"/>
-                <a:ea typeface="Courier New" pitchFamily="34" charset="-122"/>
-                <a:cs typeface="Courier New" pitchFamily="34" charset="-120"/>
-              </a:rPr>
-              <a:t>→  </a:t>
-            </a:r>
-            <a:pPr indent="0" marL="0">
-              <a:buNone/>
-            </a:pPr>
-            <a:r>
-              <a:rPr lang="en-US" sz="950" b="1" u="sng" dirty="0">
-                <a:solidFill>
-                  <a:srgbClr val="0057C2"/>
-                </a:solidFill>
-                <a:latin typeface="Courier New" pitchFamily="34" charset="0"/>
-                <a:ea typeface="Courier New" pitchFamily="34" charset="-122"/>
-                <a:cs typeface="Courier New" pitchFamily="34" charset="-120"/>
-                <a:hlinkClick r:id="rId2" invalidUrl="" action="" tgtFrame="" tooltip="" history="1" highlightClick="0" endSnd="0">
-                  <a:extLst>
-                    <a:ext uri="{A12FA001-AC4F-418D-AE19-62706E023703}">
-                      <ahyp:hlinkClr xmlns:ahyp="http://schemas.microsoft.com/office/drawing/2018/hyperlinkcolor" val="tx"/>
-                    </a:ext>
-                  </a:extLst>
-                </a:hlinkClick>
-              </a:rPr>
-              <a:t>pypi.org/project/rda-python-dsquasar</a:t>
-            </a:r>
-            <a:endParaRPr lang="en-US" sz="950" dirty="0"/>
-          </a:p>
-        </p:txBody>
-      </p:sp>
-      <p:sp>
-        <p:nvSpPr>
-          <p:cNvPr id="24" name="Shape 22"/>
-          <p:cNvSpPr/>
-          <p:nvPr/>
-        </p:nvSpPr>
-        <p:spPr>
-          <a:xfrm>
-            <a:off x="8138160" y="1691640"/>
-            <a:ext cx="3602736" cy="3566160"/>
-          </a:xfrm>
-          <a:prstGeom prst="roundRect">
-            <a:avLst>
-              <a:gd name="adj" fmla="val 2051"/>
-            </a:avLst>
-          </a:prstGeom>
-          <a:solidFill>
-            <a:srgbClr val="FFFFFF"/>
-          </a:solidFill>
-          <a:ln w="12700">
-            <a:solidFill>
-              <a:srgbClr val="A9D6F2"/>
-            </a:solidFill>
-            <a:prstDash val="solid"/>
-          </a:ln>
-          <a:effectLst>
-            <a:outerShdw sx="100000" sy="100000" kx="0" ky="0" algn="bl" rotWithShape="0" blurRad="63500" dist="25400" dir="5400000">
-              <a:srgbClr val="C3D7EE">
-                <a:alpha val="30000"/>
-              </a:srgbClr>
-            </a:outerShdw>
-          </a:effectLst>
-        </p:spPr>
-      </p:sp>
-      <p:sp>
-        <p:nvSpPr>
-          <p:cNvPr id="25" name="Shape 23"/>
-          <p:cNvSpPr/>
-          <p:nvPr/>
-        </p:nvSpPr>
-        <p:spPr>
-          <a:xfrm>
-            <a:off x="8138160" y="1691640"/>
-            <a:ext cx="3602736" cy="128016"/>
-          </a:xfrm>
-          <a:prstGeom prst="rect">
-            <a:avLst/>
-          </a:prstGeom>
-          <a:solidFill>
-            <a:srgbClr val="C25E00"/>
-          </a:solidFill>
-          <a:ln/>
-        </p:spPr>
-      </p:sp>
-      <p:sp>
-        <p:nvSpPr>
-          <p:cNvPr id="26" name="Shape 24"/>
-          <p:cNvSpPr/>
-          <p:nvPr/>
-        </p:nvSpPr>
-        <p:spPr>
-          <a:xfrm>
-            <a:off x="8412480" y="2075688"/>
-            <a:ext cx="566928" cy="566928"/>
-          </a:xfrm>
-          <a:prstGeom prst="ellipse">
-            <a:avLst/>
-          </a:prstGeom>
-          <a:solidFill>
-            <a:srgbClr val="C25E00"/>
-          </a:solidFill>
-          <a:ln/>
-        </p:spPr>
-      </p:sp>
-      <p:sp>
-        <p:nvSpPr>
-          <p:cNvPr id="27" name="Text 25"/>
-          <p:cNvSpPr/>
-          <p:nvPr/>
-        </p:nvSpPr>
-        <p:spPr>
-          <a:xfrm>
-            <a:off x="8412480" y="2075688"/>
-            <a:ext cx="566928" cy="566928"/>
-          </a:xfrm>
-          <a:prstGeom prst="rect">
-            <a:avLst/>
-          </a:prstGeom>
-          <a:noFill/>
-          <a:ln/>
-        </p:spPr>
-        <p:txBody>
-          <a:bodyPr wrap="square" lIns="0" tIns="0" rIns="0" bIns="0" rtlCol="0" anchor="ctr"/>
-          <a:lstStyle/>
-          <a:p>
-            <a:pPr algn="ctr" indent="0" marL="0">
-              <a:buNone/>
-            </a:pPr>
-            <a:r>
-              <a:rPr lang="en-US" sz="2000" b="1" dirty="0">
-                <a:solidFill>
-                  <a:srgbClr val="FFFFFF"/>
-                </a:solidFill>
-                <a:latin typeface="Poppins" pitchFamily="34" charset="0"/>
-                <a:ea typeface="Poppins" pitchFamily="34" charset="-122"/>
-                <a:cs typeface="Poppins" pitchFamily="34" charset="-120"/>
-              </a:rPr>
-              <a:t>▤</a:t>
-            </a:r>
-            <a:endParaRPr lang="en-US" sz="2000" dirty="0"/>
-          </a:p>
-        </p:txBody>
-      </p:sp>
-      <p:sp>
-        <p:nvSpPr>
-          <p:cNvPr id="28" name="Text 26"/>
-          <p:cNvSpPr/>
-          <p:nvPr/>
-        </p:nvSpPr>
-        <p:spPr>
-          <a:xfrm>
-            <a:off x="9098280" y="2075688"/>
-            <a:ext cx="2459736" cy="566928"/>
-          </a:xfrm>
-          <a:prstGeom prst="rect">
-            <a:avLst/>
-          </a:prstGeom>
-          <a:noFill/>
-          <a:ln/>
-        </p:spPr>
-        <p:txBody>
-          <a:bodyPr wrap="square" lIns="0" tIns="0" rIns="0" bIns="0" rtlCol="0" anchor="ctr"/>
-          <a:lstStyle/>
-          <a:p>
-            <a:pPr indent="0" marL="0">
-              <a:buNone/>
-            </a:pPr>
-            <a:r>
-              <a:rPr lang="en-US" sz="1600" b="1" dirty="0">
-                <a:solidFill>
-                  <a:srgbClr val="00357A"/>
-                </a:solidFill>
-                <a:latin typeface="Poppins" pitchFamily="34" charset="0"/>
-                <a:ea typeface="Poppins" pitchFamily="34" charset="-122"/>
-                <a:cs typeface="Poppins" pitchFamily="34" charset="-120"/>
-              </a:rPr>
-              <a:t>Built-in Help</a:t>
-            </a:r>
-            <a:endParaRPr lang="en-US" sz="1600" dirty="0"/>
-          </a:p>
-        </p:txBody>
-      </p:sp>
-      <p:sp>
-        <p:nvSpPr>
-          <p:cNvPr id="29" name="Text 27"/>
-          <p:cNvSpPr/>
-          <p:nvPr/>
-        </p:nvSpPr>
-        <p:spPr>
-          <a:xfrm>
-            <a:off x="8412480" y="2825496"/>
-            <a:ext cx="3054096" cy="822960"/>
-          </a:xfrm>
-          <a:prstGeom prst="rect">
-            <a:avLst/>
-          </a:prstGeom>
-          <a:noFill/>
-          <a:ln/>
-        </p:spPr>
-        <p:txBody>
-          <a:bodyPr wrap="square" lIns="0" tIns="0" rIns="0" bIns="0" rtlCol="0" anchor="t"/>
-          <a:lstStyle/>
-          <a:p>
-            <a:pPr indent="0" marL="0">
-              <a:lnSpc>
-                <a:spcPct val="108000"/>
-              </a:lnSpc>
-              <a:buNone/>
-            </a:pPr>
-            <a:r>
-              <a:rPr lang="en-US" sz="1250" dirty="0">
-                <a:solidFill>
-                  <a:srgbClr val="53565A"/>
-                </a:solidFill>
-                <a:latin typeface="Poppins" pitchFamily="34" charset="0"/>
-                <a:ea typeface="Poppins" pitchFamily="34" charset="-122"/>
-                <a:cs typeface="Poppins" pitchFamily="34" charset="-120"/>
-              </a:rPr>
-              <a:t>The full usage document ships with the package and is shown by -h.</a:t>
-            </a:r>
-            <a:endParaRPr lang="en-US" sz="1250" dirty="0"/>
-          </a:p>
-        </p:txBody>
-      </p:sp>
-      <p:sp>
-        <p:nvSpPr>
-          <p:cNvPr id="30" name="Shape 28"/>
-          <p:cNvSpPr/>
-          <p:nvPr/>
-        </p:nvSpPr>
-        <p:spPr>
-          <a:xfrm>
-            <a:off x="8412480" y="3703320"/>
-            <a:ext cx="3054096" cy="749808"/>
-          </a:xfrm>
-          <a:prstGeom prst="roundRect">
-            <a:avLst>
-              <a:gd name="adj" fmla="val 6098"/>
-            </a:avLst>
-          </a:prstGeom>
-          <a:solidFill>
-            <a:srgbClr val="011837"/>
-          </a:solidFill>
-          <a:ln/>
-        </p:spPr>
-      </p:sp>
-      <p:sp>
-        <p:nvSpPr>
-          <p:cNvPr id="31" name="Text 29"/>
-          <p:cNvSpPr/>
-          <p:nvPr/>
-        </p:nvSpPr>
-        <p:spPr>
-          <a:xfrm>
-            <a:off x="8540496" y="3703320"/>
-            <a:ext cx="2798064" cy="749808"/>
-          </a:xfrm>
-          <a:prstGeom prst="rect">
-            <a:avLst/>
-          </a:prstGeom>
-          <a:noFill/>
-          <a:ln/>
-        </p:spPr>
-        <p:txBody>
-          <a:bodyPr wrap="square" lIns="0" tIns="0" rIns="0" bIns="0" rtlCol="0" anchor="ctr"/>
-          <a:lstStyle/>
-          <a:p>
-            <a:pPr indent="0" marL="0">
-              <a:lnSpc>
-                <a:spcPct val="100000"/>
-              </a:lnSpc>
-              <a:buNone/>
-            </a:pPr>
-            <a:r>
-              <a:rPr lang="en-US" sz="1050" dirty="0">
-                <a:solidFill>
-                  <a:srgbClr val="0097A7"/>
-                </a:solidFill>
-                <a:latin typeface="Courier New" pitchFamily="34" charset="0"/>
-                <a:ea typeface="Courier New" pitchFamily="34" charset="-122"/>
-                <a:cs typeface="Courier New" pitchFamily="34" charset="-120"/>
-              </a:rPr>
-              <a:t>dsquasar -h</a:t>
-            </a:r>
-            <a:endParaRPr lang="en-US" sz="1050" dirty="0"/>
-          </a:p>
-          <a:p>
-            <a:pPr indent="0" marL="0">
-              <a:lnSpc>
-                <a:spcPct val="100000"/>
-              </a:lnSpc>
-              <a:buNone/>
-            </a:pPr>
-            <a:r>
-              <a:rPr lang="en-US" sz="1050" dirty="0">
-                <a:solidFill>
-                  <a:srgbClr val="0097A7"/>
-                </a:solidFill>
-                <a:latin typeface="Courier New" pitchFamily="34" charset="0"/>
-                <a:ea typeface="Courier New" pitchFamily="34" charset="-122"/>
-                <a:cs typeface="Courier New" pitchFamily="34" charset="-120"/>
-              </a:rPr>
-              <a:t># renders dsquasar.usg</a:t>
-            </a:r>
-            <a:endParaRPr lang="en-US" sz="1050" dirty="0"/>
-          </a:p>
-        </p:txBody>
-      </p:sp>
-      <p:sp>
-        <p:nvSpPr>
-          <p:cNvPr id="32" name="Shape 30"/>
-          <p:cNvSpPr/>
-          <p:nvPr/>
-        </p:nvSpPr>
-        <p:spPr>
-          <a:xfrm>
-            <a:off x="8412480" y="4800600"/>
-            <a:ext cx="3054096" cy="0"/>
-          </a:xfrm>
-          <a:prstGeom prst="line">
-            <a:avLst/>
-          </a:prstGeom>
-          <a:noFill/>
-          <a:ln w="12700">
-            <a:solidFill>
-              <a:srgbClr val="A9D6F2"/>
-            </a:solidFill>
-            <a:prstDash val="solid"/>
-          </a:ln>
-        </p:spPr>
-      </p:sp>
-      <p:sp>
-        <p:nvSpPr>
-          <p:cNvPr id="33" name="Text 31"/>
-          <p:cNvSpPr/>
-          <p:nvPr/>
-        </p:nvSpPr>
-        <p:spPr>
-          <a:xfrm>
-            <a:off x="8412480" y="4855464"/>
-            <a:ext cx="3218688" cy="310896"/>
-          </a:xfrm>
-          <a:prstGeom prst="rect">
-            <a:avLst/>
-          </a:prstGeom>
-          <a:noFill/>
-          <a:ln/>
-        </p:spPr>
-        <p:txBody>
-          <a:bodyPr wrap="square" lIns="0" tIns="0" rIns="0" bIns="0" rtlCol="0" anchor="ctr"/>
-          <a:lstStyle/>
-          <a:p>
-            <a:pPr indent="0" marL="0">
-              <a:buNone/>
-            </a:pPr>
-            <a:r>
-              <a:rPr lang="en-US" sz="950" b="1" dirty="0">
-                <a:solidFill>
-                  <a:srgbClr val="C25E00"/>
-                </a:solidFill>
-                <a:latin typeface="Courier New" pitchFamily="34" charset="0"/>
-                <a:ea typeface="Courier New" pitchFamily="34" charset="-122"/>
-                <a:cs typeface="Courier New" pitchFamily="34" charset="-120"/>
-              </a:rPr>
-              <a:t>→  </a:t>
-            </a:r>
-            <a:pPr indent="0" marL="0">
-              <a:buNone/>
-            </a:pPr>
-            <a:r>
-              <a:rPr lang="en-US" sz="950" b="1" u="sng" dirty="0">
-                <a:solidFill>
-                  <a:srgbClr val="0057C2"/>
-                </a:solidFill>
-                <a:latin typeface="Courier New" pitchFamily="34" charset="0"/>
-                <a:ea typeface="Courier New" pitchFamily="34" charset="-122"/>
-                <a:cs typeface="Courier New" pitchFamily="34" charset="-120"/>
-                <a:hlinkClick r:id="rId3" invalidUrl="" action="" tgtFrame="" tooltip="" history="1" highlightClick="0" endSnd="0">
-                  <a:extLst>
-                    <a:ext uri="{A12FA001-AC4F-418D-AE19-62706E023703}">
-                      <ahyp:hlinkClr xmlns:ahyp="http://schemas.microsoft.com/office/drawing/2018/hyperlinkcolor" val="tx"/>
-                    </a:ext>
-                  </a:extLst>
-                </a:hlinkClick>
-              </a:rPr>
-              <a:t>src/rda_python_dsquasar/dsquasar.usg</a:t>
-            </a:r>
-            <a:endParaRPr lang="en-US" sz="950" dirty="0"/>
-          </a:p>
-        </p:txBody>
-      </p:sp>
-      <p:sp>
-        <p:nvSpPr>
-          <p:cNvPr id="34" name="Text 32"/>
-          <p:cNvSpPr/>
-          <p:nvPr/>
-        </p:nvSpPr>
-        <p:spPr>
-          <a:xfrm>
-            <a:off x="457200" y="5989320"/>
-            <a:ext cx="11274552" cy="365760"/>
-          </a:xfrm>
-          <a:prstGeom prst="rect">
-            <a:avLst/>
-          </a:prstGeom>
-          <a:noFill/>
-          <a:ln/>
-        </p:spPr>
-        <p:txBody>
-          <a:bodyPr wrap="square" lIns="0" tIns="0" rIns="0" bIns="0" rtlCol="0" anchor="ctr"/>
-          <a:lstStyle/>
-          <a:p>
-            <a:pPr algn="ctr" indent="0" marL="0">
-              <a:buNone/>
-            </a:pPr>
-            <a:r>
-              <a:rPr lang="en-US" sz="1300" b="1" dirty="0">
-                <a:solidFill>
-                  <a:srgbClr val="C25E00"/>
-                </a:solidFill>
-                <a:latin typeface="Poppins" pitchFamily="34" charset="0"/>
-                <a:ea typeface="Poppins" pitchFamily="34" charset="-122"/>
-                <a:cs typeface="Poppins" pitchFamily="34" charset="-120"/>
-              </a:rPr>
-              <a:t>one console command:  </a:t>
-            </a:r>
-            <a:pPr algn="ctr" indent="0" marL="0">
-              <a:buNone/>
-            </a:pPr>
-            <a:r>
-              <a:rPr lang="en-US" sz="1300" b="1" dirty="0">
-                <a:solidFill>
-                  <a:srgbClr val="00357A"/>
-                </a:solidFill>
-                <a:latin typeface="Courier New" pitchFamily="34" charset="0"/>
-                <a:ea typeface="Courier New" pitchFamily="34" charset="-122"/>
-                <a:cs typeface="Courier New" pitchFamily="34" charset="-120"/>
-              </a:rPr>
-              <a:t>dsquasar</a:t>
-            </a:r>
-            <a:pPr algn="ctr" indent="0" marL="0">
-              <a:buNone/>
-            </a:pPr>
-            <a:r>
-              <a:rPr lang="en-US" sz="1300" dirty="0">
-                <a:solidFill>
-                  <a:srgbClr val="00357A"/>
-                </a:solidFill>
-                <a:latin typeface="Poppins" pitchFamily="34" charset="0"/>
-                <a:ea typeface="Poppins" pitchFamily="34" charset="-122"/>
-                <a:cs typeface="Poppins" pitchFamily="34" charset="-120"/>
-              </a:rPr>
-              <a:t>  backs up the whole GDEX archive onto the Quasar end points.</a:t>
-            </a:r>
-            <a:endParaRPr lang="en-US" sz="1300" dirty="0"/>
-          </a:p>
-        </p:txBody>
-      </p:sp>
-      <p:sp>
-        <p:nvSpPr>
-          <p:cNvPr id="35" name="Text 33"/>
-          <p:cNvSpPr/>
-          <p:nvPr/>
-        </p:nvSpPr>
-        <p:spPr>
-          <a:xfrm>
-            <a:off x="256032" y="6446520"/>
-            <a:ext cx="365760" cy="274320"/>
-          </a:xfrm>
-          <a:prstGeom prst="rect">
-            <a:avLst/>
-          </a:prstGeom>
-          <a:noFill/>
-          <a:ln/>
-        </p:spPr>
-        <p:txBody>
-          <a:bodyPr wrap="square" lIns="0" tIns="0" rIns="0" bIns="0" rtlCol="0" anchor="ctr"/>
-          <a:lstStyle/>
-          <a:p>
-            <a:pPr indent="0" marL="0">
-              <a:buNone/>
-            </a:pPr>
-            <a:r>
-              <a:rPr lang="en-US" sz="950" b="1" dirty="0">
-                <a:solidFill>
-                  <a:srgbClr val="00357A"/>
-                </a:solidFill>
-                <a:latin typeface="Poppins" pitchFamily="34" charset="0"/>
-                <a:ea typeface="Poppins" pitchFamily="34" charset="-122"/>
-                <a:cs typeface="Poppins" pitchFamily="34" charset="-120"/>
-              </a:rPr>
-              <a:t>2</a:t>
-            </a:r>
-            <a:endParaRPr lang="en-US" sz="950" dirty="0"/>
-          </a:p>
-        </p:txBody>
-      </p:sp>
-      <p:sp>
-        <p:nvSpPr>
-          <p:cNvPr id="36" name="Text 34"/>
-          <p:cNvSpPr/>
-          <p:nvPr/>
-        </p:nvSpPr>
-        <p:spPr>
-          <a:xfrm>
-            <a:off x="786384" y="6446520"/>
-            <a:ext cx="5486400" cy="274320"/>
-          </a:xfrm>
-          <a:prstGeom prst="rect">
-            <a:avLst/>
-          </a:prstGeom>
-          <a:noFill/>
-          <a:ln/>
-        </p:spPr>
-        <p:txBody>
-          <a:bodyPr wrap="square" lIns="0" tIns="0" rIns="0" bIns="0" rtlCol="0" anchor="ctr"/>
-          <a:lstStyle/>
-          <a:p>
-            <a:pPr indent="0" marL="0">
-              <a:buNone/>
-            </a:pPr>
-            <a:r>
-              <a:rPr lang="en-US" sz="950" b="1" dirty="0">
-                <a:solidFill>
-                  <a:srgbClr val="00357A"/>
-                </a:solidFill>
-                <a:latin typeface="Poppins" pitchFamily="34" charset="0"/>
-                <a:ea typeface="Poppins" pitchFamily="34" charset="-122"/>
-                <a:cs typeface="Poppins" pitchFamily="34" charset="-120"/>
-              </a:rPr>
-              <a:t>DSQUASAR  •  QUASAR BACKUP GUIDE</a:t>
-            </a:r>
-            <a:endParaRPr lang="en-US" sz="950" dirty="0"/>
-          </a:p>
-        </p:txBody>
-      </p:sp>
-    </p:spTree>
-  </p:cSld>
-  <p:clrMapOvr>
-    <a:masterClrMapping/>
-  </p:clrMapOvr>
-</p:sld>
-</file>
-
-<file path=ppt/slides/slide30.xml><?xml version="1.0" encoding="utf-8"?>
-<p:sld xmlns:a="http://schemas.openxmlformats.org/drawingml/2006/main" xmlns:r="http://schemas.openxmlformats.org/officeDocument/2006/relationships" xmlns:p="http://schemas.openxmlformats.org/presentationml/2006/main">
-  <p:cSld name="Slide 30">
+  <p:cSld name="Slide 32">
     <p:bg>
       <p:bgPr>
         <a:solidFill>
@@ -35619,7 +38570,7 @@
                 <a:ea typeface="Poppins" pitchFamily="34" charset="-122"/>
                 <a:cs typeface="Poppins" pitchFamily="34" charset="-120"/>
               </a:rPr>
-              <a:t>29</a:t>
+              <a:t>31</a:t>
             </a:r>
             <a:endParaRPr lang="en-US" sz="950" dirty="0"/>
           </a:p>
@@ -36775,9 +39726,9 @@
 </p:sld>
 </file>
 
-<file path=ppt/slides/slide31.xml><?xml version="1.0" encoding="utf-8"?>
+<file path=ppt/slides/slide33.xml><?xml version="1.0" encoding="utf-8"?>
 <p:sld xmlns:a="http://schemas.openxmlformats.org/drawingml/2006/main" xmlns:r="http://schemas.openxmlformats.org/officeDocument/2006/relationships" xmlns:p="http://schemas.openxmlformats.org/presentationml/2006/main">
-  <p:cSld name="Slide 31">
+  <p:cSld name="Slide 33">
     <p:bg>
       <p:bgPr>
         <a:solidFill>
@@ -36904,7 +39855,7 @@
                 <a:ea typeface="Poppins" pitchFamily="34" charset="-122"/>
                 <a:cs typeface="Poppins" pitchFamily="34" charset="-120"/>
               </a:rPr>
-              <a:t>30</a:t>
+              <a:t>32</a:t>
             </a:r>
             <a:endParaRPr lang="en-US" sz="950" dirty="0"/>
           </a:p>

--- a/docs/slides/dsquasar_guide.pptx
+++ b/docs/slides/dsquasar_guide.pptx
@@ -16143,7 +16143,7 @@
                 <a:ea typeface="Poppins" pitchFamily="34" charset="-122"/>
                 <a:cs typeface="Poppins" pitchFamily="34" charset="-120"/>
               </a:rPr>
-              <a:t>The 23-hour walltime guard stops a long job cleanly and leaves its 'N' and 'T' records on file; the next run simply picks them up.</a:t>
+              <a:t>A job killed at the walltime leaves its 'N' and 'T' records on file and its progress report in dscheck.einfo; the next run simply picks them up.</a:t>
             </a:r>
             <a:endParaRPr lang="en-US" sz="1050" dirty="0"/>
           </a:p>
@@ -21893,7 +21893,7 @@
                 <a:ea typeface="Poppins" pitchFamily="34" charset="-122"/>
                 <a:cs typeface="Poppins" pitchFamily="34" charset="-120"/>
               </a:rPr>
-              <a:t>Stopping Cleanly Before PBS Kills the Job</a:t>
+              <a:t>Making Sure the Report Outlives the Job</a:t>
             </a:r>
             <a:endParaRPr lang="en-US" sz="3200" dirty="0"/>
           </a:p>
@@ -21935,7 +21935,7 @@
                 <a:ea typeface="Poppins" pitchFamily="34" charset="-122"/>
                 <a:cs typeface="Poppins" pitchFamily="34" charset="-120"/>
               </a:rPr>
-              <a:t>The queue gives the job 24 hours. A tar file killed halfway through leaves a partial file on disk and a bfile record that claims work is in progress. So dsquasar watches the clock itself.</a:t>
+              <a:t>The queue gives the job 24 hours, and a full pass over the archive can want more. Cutting the work short to make time for the mail wastes a whole run, so instead dsquasar parks a progress report in its dscheck record an hour before the limit, and keeps working.</a:t>
             </a:r>
             <a:endParaRPr lang="en-US" sz="1450" dirty="0"/>
           </a:p>
@@ -21955,262 +21955,6 @@
           <a:prstGeom prst="roundRect">
             <a:avLst>
               <a:gd name="adj" fmla="val 19048"/>
-            </a:avLst>
-          </a:prstGeom>
-          <a:solidFill>
-            <a:srgbClr val="0B2A63"/>
-          </a:solidFill>
-          <a:ln/>
-        </p:spPr>
-      </p:sp>
-      <p:sp>
-        <p:nvSpPr>
-          <p:cNvPr id="6" name="Shape 4"/>
-          <p:cNvSpPr/>
-          <p:nvPr/>
-        </p:nvSpPr>
-        <p:spPr>
-          <a:xfrm>
-            <a:off x="822960" y="2514600"/>
-            <a:ext cx="10077450" cy="384048"/>
-          </a:xfrm>
-          <a:prstGeom prst="roundRect">
-            <a:avLst>
-              <a:gd name="adj" fmla="val 19048"/>
-            </a:avLst>
-          </a:prstGeom>
-          <a:solidFill>
-            <a:srgbClr val="0057C2"/>
-          </a:solidFill>
-          <a:ln/>
-        </p:spPr>
-      </p:sp>
-      <p:sp>
-        <p:nvSpPr>
-          <p:cNvPr id="7" name="Text 5"/>
-          <p:cNvSpPr/>
-          <p:nvPr/>
-        </p:nvSpPr>
-        <p:spPr>
-          <a:xfrm>
-            <a:off x="822960" y="2514600"/>
-            <a:ext cx="10077450" cy="384048"/>
-          </a:xfrm>
-          <a:prstGeom prst="rect">
-            <a:avLst/>
-          </a:prstGeom>
-          <a:noFill/>
-          <a:ln/>
-        </p:spPr>
-        <p:txBody>
-          <a:bodyPr wrap="square" lIns="0" tIns="0" rIns="0" bIns="0" rtlCol="0" anchor="ctr"/>
-          <a:lstStyle/>
-          <a:p>
-            <a:pPr algn="ctr" indent="0" marL="0">
-              <a:buNone/>
-            </a:pPr>
-            <a:r>
-              <a:rPr lang="en-US" sz="1200" b="1" dirty="0">
-                <a:solidFill>
-                  <a:srgbClr val="FFFFFF"/>
-                </a:solidFill>
-                <a:latin typeface="Poppins" pitchFamily="34" charset="0"/>
-                <a:ea typeface="Poppins" pitchFamily="34" charset="-122"/>
-                <a:cs typeface="Poppins" pitchFamily="34" charset="-120"/>
-              </a:rPr>
-              <a:t>work accepted   —   0 h to 23 h</a:t>
-            </a:r>
-            <a:endParaRPr lang="en-US" sz="1200" dirty="0"/>
-          </a:p>
-        </p:txBody>
-      </p:sp>
-      <p:sp>
-        <p:nvSpPr>
-          <p:cNvPr id="8" name="Text 6"/>
-          <p:cNvSpPr/>
-          <p:nvPr/>
-        </p:nvSpPr>
-        <p:spPr>
-          <a:xfrm>
-            <a:off x="10900410" y="2496312"/>
-            <a:ext cx="438150" cy="420624"/>
-          </a:xfrm>
-          <a:prstGeom prst="rect">
-            <a:avLst/>
-          </a:prstGeom>
-          <a:noFill/>
-          <a:ln/>
-        </p:spPr>
-        <p:txBody>
-          <a:bodyPr wrap="square" lIns="0" tIns="0" rIns="0" bIns="0" rtlCol="0" anchor="ctr"/>
-          <a:lstStyle/>
-          <a:p>
-            <a:pPr algn="ctr" indent="0" marL="0">
-              <a:buNone/>
-            </a:pPr>
-            <a:r>
-              <a:rPr lang="en-US" sz="800" b="1" dirty="0">
-                <a:solidFill>
-                  <a:srgbClr val="42C0FF"/>
-                </a:solidFill>
-                <a:latin typeface="Poppins" pitchFamily="34" charset="0"/>
-                <a:ea typeface="Poppins" pitchFamily="34" charset="-122"/>
-                <a:cs typeface="Poppins" pitchFamily="34" charset="-120"/>
-              </a:rPr>
-              <a:t>wind</a:t>
-            </a:r>
-            <a:endParaRPr lang="en-US" sz="800" dirty="0"/>
-          </a:p>
-          <a:p>
-            <a:pPr algn="ctr" indent="0" marL="0">
-              <a:buNone/>
-            </a:pPr>
-            <a:r>
-              <a:rPr lang="en-US" sz="800" b="1" dirty="0">
-                <a:solidFill>
-                  <a:srgbClr val="42C0FF"/>
-                </a:solidFill>
-                <a:latin typeface="Poppins" pitchFamily="34" charset="0"/>
-                <a:ea typeface="Poppins" pitchFamily="34" charset="-122"/>
-                <a:cs typeface="Poppins" pitchFamily="34" charset="-120"/>
-              </a:rPr>
-              <a:t>down</a:t>
-            </a:r>
-            <a:endParaRPr lang="en-US" sz="800" dirty="0"/>
-          </a:p>
-        </p:txBody>
-      </p:sp>
-      <p:sp>
-        <p:nvSpPr>
-          <p:cNvPr id="9" name="Text 7"/>
-          <p:cNvSpPr/>
-          <p:nvPr/>
-        </p:nvSpPr>
-        <p:spPr>
-          <a:xfrm>
-            <a:off x="8705850" y="2185416"/>
-            <a:ext cx="2194560" cy="274320"/>
-          </a:xfrm>
-          <a:prstGeom prst="rect">
-            <a:avLst/>
-          </a:prstGeom>
-          <a:noFill/>
-          <a:ln/>
-        </p:spPr>
-        <p:txBody>
-          <a:bodyPr wrap="square" lIns="0" tIns="0" rIns="0" bIns="0" rtlCol="0" anchor="ctr"/>
-          <a:lstStyle/>
-          <a:p>
-            <a:pPr algn="r" indent="0" marL="0">
-              <a:buNone/>
-            </a:pPr>
-            <a:r>
-              <a:rPr lang="en-US" sz="1000" dirty="0">
-                <a:solidFill>
-                  <a:srgbClr val="42C0FF"/>
-                </a:solidFill>
-                <a:latin typeface="Courier New" pitchFamily="34" charset="0"/>
-                <a:ea typeface="Courier New" pitchFamily="34" charset="-122"/>
-                <a:cs typeface="Courier New" pitchFamily="34" charset="-120"/>
-              </a:rPr>
-              <a:t>MAXRUNTIME  23 h</a:t>
-            </a:r>
-            <a:endParaRPr lang="en-US" sz="1000" dirty="0"/>
-          </a:p>
-        </p:txBody>
-      </p:sp>
-      <p:sp>
-        <p:nvSpPr>
-          <p:cNvPr id="10" name="Text 8"/>
-          <p:cNvSpPr/>
-          <p:nvPr/>
-        </p:nvSpPr>
-        <p:spPr>
-          <a:xfrm>
-            <a:off x="822960" y="2971800"/>
-            <a:ext cx="1645920" cy="274320"/>
-          </a:xfrm>
-          <a:prstGeom prst="rect">
-            <a:avLst/>
-          </a:prstGeom>
-          <a:noFill/>
-          <a:ln/>
-        </p:spPr>
-        <p:txBody>
-          <a:bodyPr wrap="square" lIns="0" tIns="0" rIns="0" bIns="0" rtlCol="0" anchor="ctr"/>
-          <a:lstStyle/>
-          <a:p>
-            <a:pPr algn="l" indent="0" marL="0">
-              <a:buNone/>
-            </a:pPr>
-            <a:r>
-              <a:rPr lang="en-US" sz="1000" dirty="0">
-                <a:solidFill>
-                  <a:srgbClr val="97999B"/>
-                </a:solidFill>
-                <a:latin typeface="Courier New" pitchFamily="34" charset="0"/>
-                <a:ea typeface="Courier New" pitchFamily="34" charset="-122"/>
-                <a:cs typeface="Courier New" pitchFamily="34" charset="-120"/>
-              </a:rPr>
-              <a:t>0 h</a:t>
-            </a:r>
-            <a:endParaRPr lang="en-US" sz="1000" dirty="0"/>
-          </a:p>
-        </p:txBody>
-      </p:sp>
-      <p:sp>
-        <p:nvSpPr>
-          <p:cNvPr id="11" name="Text 9"/>
-          <p:cNvSpPr/>
-          <p:nvPr/>
-        </p:nvSpPr>
-        <p:spPr>
-          <a:xfrm>
-            <a:off x="9144000" y="2971800"/>
-            <a:ext cx="2194560" cy="274320"/>
-          </a:xfrm>
-          <a:prstGeom prst="rect">
-            <a:avLst/>
-          </a:prstGeom>
-          <a:noFill/>
-          <a:ln/>
-        </p:spPr>
-        <p:txBody>
-          <a:bodyPr wrap="square" lIns="0" tIns="0" rIns="0" bIns="0" rtlCol="0" anchor="ctr"/>
-          <a:lstStyle/>
-          <a:p>
-            <a:pPr algn="r" indent="0" marL="0">
-              <a:buNone/>
-            </a:pPr>
-            <a:r>
-              <a:rPr lang="en-US" sz="1000" dirty="0">
-                <a:solidFill>
-                  <a:srgbClr val="97999B"/>
-                </a:solidFill>
-                <a:latin typeface="Courier New" pitchFamily="34" charset="0"/>
-                <a:ea typeface="Courier New" pitchFamily="34" charset="-122"/>
-                <a:cs typeface="Courier New" pitchFamily="34" charset="-120"/>
-              </a:rPr>
-              <a:t>24 h  PBS walltime</a:t>
-            </a:r>
-            <a:endParaRPr lang="en-US" sz="1000" dirty="0"/>
-          </a:p>
-        </p:txBody>
-      </p:sp>
-      <p:sp>
-        <p:nvSpPr>
-          <p:cNvPr id="12" name="Shape 10"/>
-          <p:cNvSpPr/>
-          <p:nvPr/>
-        </p:nvSpPr>
-        <p:spPr>
-          <a:xfrm>
-            <a:off x="822960" y="3246120"/>
-            <a:ext cx="10515600" cy="621792"/>
-          </a:xfrm>
-          <a:prstGeom prst="roundRect">
-            <a:avLst>
-              <a:gd name="adj" fmla="val 10294"/>
             </a:avLst>
           </a:prstGeom>
           <a:solidFill>
@@ -22226,14 +21970,14 @@
       </p:sp>
       <p:sp>
         <p:nvSpPr>
-          <p:cNvPr id="13" name="Text 11"/>
-          <p:cNvSpPr/>
-          <p:nvPr/>
-        </p:nvSpPr>
-        <p:spPr>
-          <a:xfrm>
-            <a:off x="1005840" y="3246120"/>
-            <a:ext cx="2286000" cy="621792"/>
+          <p:cNvPr id="6" name="Text 4"/>
+          <p:cNvSpPr/>
+          <p:nvPr/>
+        </p:nvSpPr>
+        <p:spPr>
+          <a:xfrm>
+            <a:off x="822960" y="2514600"/>
+            <a:ext cx="10515600" cy="384048"/>
           </a:xfrm>
           <a:prstGeom prst="rect">
             <a:avLst/>
@@ -22245,34 +21989,96 @@
           <a:bodyPr wrap="square" lIns="0" tIns="0" rIns="0" bIns="0" rtlCol="0" anchor="ctr"/>
           <a:lstStyle/>
           <a:p>
-            <a:pPr indent="0" marL="0">
-              <a:buNone/>
-            </a:pPr>
-            <a:r>
-              <a:rPr lang="en-US" sz="1250" b="1" dirty="0">
+            <a:pPr algn="ctr" indent="0" marL="0">
+              <a:buNone/>
+            </a:pPr>
+            <a:r>
+              <a:rPr lang="en-US" sz="1200" b="1" dirty="0">
+                <a:solidFill>
+                  <a:srgbClr val="FFFFFF"/>
+                </a:solidFill>
+                <a:latin typeface="Poppins" pitchFamily="34" charset="0"/>
+                <a:ea typeface="Poppins" pitchFamily="34" charset="-122"/>
+                <a:cs typeface="Poppins" pitchFamily="34" charset="-120"/>
+              </a:rPr>
+              <a:t>work continues   —   0 h to the walltime</a:t>
+            </a:r>
+            <a:endParaRPr lang="en-US" sz="1200" dirty="0"/>
+          </a:p>
+        </p:txBody>
+      </p:sp>
+      <p:sp>
+        <p:nvSpPr>
+          <p:cNvPr id="7" name="Shape 5"/>
+          <p:cNvSpPr/>
+          <p:nvPr/>
+        </p:nvSpPr>
+        <p:spPr>
+          <a:xfrm>
+            <a:off x="10900410" y="2404872"/>
+            <a:ext cx="0" cy="603504"/>
+          </a:xfrm>
+          <a:prstGeom prst="line">
+            <a:avLst/>
+          </a:prstGeom>
+          <a:noFill/>
+          <a:ln w="25400">
+            <a:solidFill>
+              <a:srgbClr val="42C0FF"/>
+            </a:solidFill>
+            <a:prstDash val="solid"/>
+          </a:ln>
+        </p:spPr>
+      </p:sp>
+      <p:sp>
+        <p:nvSpPr>
+          <p:cNvPr id="8" name="Text 6"/>
+          <p:cNvSpPr/>
+          <p:nvPr/>
+        </p:nvSpPr>
+        <p:spPr>
+          <a:xfrm>
+            <a:off x="7059930" y="2130552"/>
+            <a:ext cx="3840480" cy="274320"/>
+          </a:xfrm>
+          <a:prstGeom prst="rect">
+            <a:avLst/>
+          </a:prstGeom>
+          <a:noFill/>
+          <a:ln/>
+        </p:spPr>
+        <p:txBody>
+          <a:bodyPr wrap="square" lIns="0" tIns="0" rIns="0" bIns="0" rtlCol="0" anchor="ctr"/>
+          <a:lstStyle/>
+          <a:p>
+            <a:pPr algn="r" indent="0" marL="0">
+              <a:buNone/>
+            </a:pPr>
+            <a:r>
+              <a:rPr lang="en-US" sz="1000" dirty="0">
                 <a:solidFill>
                   <a:srgbClr val="42C0FF"/>
                 </a:solidFill>
-                <a:latin typeface="Poppins" pitchFamily="34" charset="0"/>
-                <a:ea typeface="Poppins" pitchFamily="34" charset="-122"/>
-                <a:cs typeface="Poppins" pitchFamily="34" charset="-120"/>
-              </a:rPr>
-              <a:t>Before each unit</a:t>
-            </a:r>
-            <a:endParaRPr lang="en-US" sz="1250" dirty="0"/>
-          </a:p>
-        </p:txBody>
-      </p:sp>
-      <p:sp>
-        <p:nvSpPr>
-          <p:cNvPr id="14" name="Text 12"/>
-          <p:cNvSpPr/>
-          <p:nvPr/>
-        </p:nvSpPr>
-        <p:spPr>
-          <a:xfrm>
-            <a:off x="3337560" y="3246120"/>
-            <a:ext cx="7818120" cy="621792"/>
+                <a:latin typeface="Courier New" pitchFamily="34" charset="0"/>
+                <a:ea typeface="Courier New" pitchFamily="34" charset="-122"/>
+                <a:cs typeface="Courier New" pitchFamily="34" charset="-120"/>
+              </a:rPr>
+              <a:t>MAXRUNTIME  23 h  —  cache the report</a:t>
+            </a:r>
+            <a:endParaRPr lang="en-US" sz="1000" dirty="0"/>
+          </a:p>
+        </p:txBody>
+      </p:sp>
+      <p:sp>
+        <p:nvSpPr>
+          <p:cNvPr id="9" name="Text 7"/>
+          <p:cNvSpPr/>
+          <p:nvPr/>
+        </p:nvSpPr>
+        <p:spPr>
+          <a:xfrm>
+            <a:off x="822960" y="2971800"/>
+            <a:ext cx="1645920" cy="274320"/>
           </a:xfrm>
           <a:prstGeom prst="rect">
             <a:avLst/>
@@ -22284,36 +22090,72 @@
           <a:bodyPr wrap="square" lIns="0" tIns="0" rIns="0" bIns="0" rtlCol="0" anchor="ctr"/>
           <a:lstStyle/>
           <a:p>
-            <a:pPr indent="0" marL="0">
-              <a:lnSpc>
-                <a:spcPct val="100000"/>
-              </a:lnSpc>
-              <a:buNone/>
-            </a:pPr>
-            <a:r>
-              <a:rPr lang="en-US" sz="1100" dirty="0">
-                <a:solidFill>
-                  <a:srgbClr val="C3D7EE"/>
-                </a:solidFill>
-                <a:latin typeface="Poppins" pitchFamily="34" charset="0"/>
-                <a:ea typeface="Poppins" pitchFamily="34" charset="-122"/>
-                <a:cs typeface="Poppins" pitchFamily="34" charset="-120"/>
-              </a:rPr>
-              <a:t>The remaining time is compared against what the next tar file or transfer batch is expected to need.</a:t>
-            </a:r>
-            <a:endParaRPr lang="en-US" sz="1100" dirty="0"/>
-          </a:p>
-        </p:txBody>
-      </p:sp>
-      <p:sp>
-        <p:nvSpPr>
-          <p:cNvPr id="15" name="Shape 13"/>
-          <p:cNvSpPr/>
-          <p:nvPr/>
-        </p:nvSpPr>
-        <p:spPr>
-          <a:xfrm>
-            <a:off x="822960" y="3931920"/>
+            <a:pPr algn="l" indent="0" marL="0">
+              <a:buNone/>
+            </a:pPr>
+            <a:r>
+              <a:rPr lang="en-US" sz="1000" dirty="0">
+                <a:solidFill>
+                  <a:srgbClr val="97999B"/>
+                </a:solidFill>
+                <a:latin typeface="Courier New" pitchFamily="34" charset="0"/>
+                <a:ea typeface="Courier New" pitchFamily="34" charset="-122"/>
+                <a:cs typeface="Courier New" pitchFamily="34" charset="-120"/>
+              </a:rPr>
+              <a:t>0 h</a:t>
+            </a:r>
+            <a:endParaRPr lang="en-US" sz="1000" dirty="0"/>
+          </a:p>
+        </p:txBody>
+      </p:sp>
+      <p:sp>
+        <p:nvSpPr>
+          <p:cNvPr id="10" name="Text 8"/>
+          <p:cNvSpPr/>
+          <p:nvPr/>
+        </p:nvSpPr>
+        <p:spPr>
+          <a:xfrm>
+            <a:off x="9144000" y="2971800"/>
+            <a:ext cx="2194560" cy="274320"/>
+          </a:xfrm>
+          <a:prstGeom prst="rect">
+            <a:avLst/>
+          </a:prstGeom>
+          <a:noFill/>
+          <a:ln/>
+        </p:spPr>
+        <p:txBody>
+          <a:bodyPr wrap="square" lIns="0" tIns="0" rIns="0" bIns="0" rtlCol="0" anchor="ctr"/>
+          <a:lstStyle/>
+          <a:p>
+            <a:pPr algn="r" indent="0" marL="0">
+              <a:buNone/>
+            </a:pPr>
+            <a:r>
+              <a:rPr lang="en-US" sz="1000" dirty="0">
+                <a:solidFill>
+                  <a:srgbClr val="97999B"/>
+                </a:solidFill>
+                <a:latin typeface="Courier New" pitchFamily="34" charset="0"/>
+                <a:ea typeface="Courier New" pitchFamily="34" charset="-122"/>
+                <a:cs typeface="Courier New" pitchFamily="34" charset="-120"/>
+              </a:rPr>
+              <a:t>24 h  PBS walltime</a:t>
+            </a:r>
+            <a:endParaRPr lang="en-US" sz="1000" dirty="0"/>
+          </a:p>
+        </p:txBody>
+      </p:sp>
+      <p:sp>
+        <p:nvSpPr>
+          <p:cNvPr id="11" name="Shape 9"/>
+          <p:cNvSpPr/>
+          <p:nvPr/>
+        </p:nvSpPr>
+        <p:spPr>
+          <a:xfrm>
+            <a:off x="822960" y="3246120"/>
             <a:ext cx="10515600" cy="621792"/>
           </a:xfrm>
           <a:prstGeom prst="roundRect">
@@ -22334,13 +22176,13 @@
       </p:sp>
       <p:sp>
         <p:nvSpPr>
-          <p:cNvPr id="16" name="Text 14"/>
-          <p:cNvSpPr/>
-          <p:nvPr/>
-        </p:nvSpPr>
-        <p:spPr>
-          <a:xfrm>
-            <a:off x="1005840" y="3931920"/>
+          <p:cNvPr id="12" name="Text 10"/>
+          <p:cNvSpPr/>
+          <p:nvPr/>
+        </p:nvSpPr>
+        <p:spPr>
+          <a:xfrm>
+            <a:off x="1005840" y="3246120"/>
             <a:ext cx="2286000" cy="621792"/>
           </a:xfrm>
           <a:prstGeom prst="rect">
@@ -22365,7 +22207,7 @@
                 <a:ea typeface="Poppins" pitchFamily="34" charset="-122"/>
                 <a:cs typeface="Poppins" pitchFamily="34" charset="-120"/>
               </a:rPr>
-              <a:t>Past 23 hours</a:t>
+              <a:t>Ask PBS, not the clock</a:t>
             </a:r>
             <a:endParaRPr lang="en-US" sz="1250" dirty="0"/>
           </a:p>
@@ -22373,13 +22215,13 @@
       </p:sp>
       <p:sp>
         <p:nvSpPr>
-          <p:cNvPr id="17" name="Text 15"/>
-          <p:cNvSpPr/>
-          <p:nvPr/>
-        </p:nvSpPr>
-        <p:spPr>
-          <a:xfrm>
-            <a:off x="3337560" y="3931920"/>
+          <p:cNvPr id="13" name="Text 11"/>
+          <p:cNvSpPr/>
+          <p:nvPr/>
+        </p:nvSpPr>
+        <p:spPr>
+          <a:xfrm>
+            <a:off x="3337560" y="3246120"/>
             <a:ext cx="7818120" cy="621792"/>
           </a:xfrm>
           <a:prstGeom prst="rect">
@@ -22407,7 +22249,7 @@
                 <a:ea typeface="Poppins" pitchFamily="34" charset="-122"/>
                 <a:cs typeface="Poppins" pitchFamily="34" charset="-120"/>
               </a:rPr>
-              <a:t>No new unit is started. Children already running are waited on so nothing is truncated.</a:t>
+              <a:t>qstat gives back the walltime actually granted — the daemon can cap the 24 hours asked for to the queue maximum. The cutoff is always one hour short of it.</a:t>
             </a:r>
             <a:endParaRPr lang="en-US" sz="1100" dirty="0"/>
           </a:p>
@@ -22415,13 +22257,13 @@
       </p:sp>
       <p:sp>
         <p:nvSpPr>
-          <p:cNvPr id="18" name="Shape 16"/>
-          <p:cNvSpPr/>
-          <p:nvPr/>
-        </p:nvSpPr>
-        <p:spPr>
-          <a:xfrm>
-            <a:off x="822960" y="4617720"/>
+          <p:cNvPr id="14" name="Shape 12"/>
+          <p:cNvSpPr/>
+          <p:nvPr/>
+        </p:nvSpPr>
+        <p:spPr>
+          <a:xfrm>
+            <a:off x="822960" y="3931920"/>
             <a:ext cx="10515600" cy="621792"/>
           </a:xfrm>
           <a:prstGeom prst="roundRect">
@@ -22442,13 +22284,13 @@
       </p:sp>
       <p:sp>
         <p:nvSpPr>
-          <p:cNvPr id="19" name="Text 17"/>
-          <p:cNvSpPr/>
-          <p:nvPr/>
-        </p:nvSpPr>
-        <p:spPr>
-          <a:xfrm>
-            <a:off x="1005840" y="4617720"/>
+          <p:cNvPr id="15" name="Text 13"/>
+          <p:cNvSpPr/>
+          <p:nvPr/>
+        </p:nvSpPr>
+        <p:spPr>
+          <a:xfrm>
+            <a:off x="1005840" y="3931920"/>
             <a:ext cx="2286000" cy="621792"/>
           </a:xfrm>
           <a:prstGeom prst="rect">
@@ -22473,7 +22315,7 @@
                 <a:ea typeface="Poppins" pitchFamily="34" charset="-122"/>
                 <a:cs typeface="Poppins" pitchFamily="34" charset="-120"/>
               </a:rPr>
-              <a:t>Progress email</a:t>
+              <a:t>At the cutoff</a:t>
             </a:r>
             <a:endParaRPr lang="en-US" sz="1250" dirty="0"/>
           </a:p>
@@ -22481,13 +22323,13 @@
       </p:sp>
       <p:sp>
         <p:nvSpPr>
-          <p:cNvPr id="20" name="Text 18"/>
-          <p:cNvSpPr/>
-          <p:nvPr/>
-        </p:nvSpPr>
-        <p:spPr>
-          <a:xfrm>
-            <a:off x="3337560" y="4617720"/>
+          <p:cNvPr id="16" name="Text 14"/>
+          <p:cNvSpPr/>
+          <p:nvPr/>
+        </p:nvSpPr>
+        <p:spPr>
+          <a:xfrm>
+            <a:off x="3337560" y="3931920"/>
             <a:ext cx="7818120" cy="621792"/>
           </a:xfrm>
           <a:prstGeom prst="rect">
@@ -22515,7 +22357,7 @@
                 <a:ea typeface="Poppins" pitchFamily="34" charset="-122"/>
                 <a:cs typeface="Poppins" pitchFamily="34" charset="-120"/>
               </a:rPr>
-              <a:t>The specialist is mailed what finished and what is still outstanding, so the next run is not a surprise.</a:t>
+              <a:t>A progress report is written straight into dscheck.einfo, naming the elapsed time and the tar files left to build and to transfer. The run does not stop.</a:t>
             </a:r>
             <a:endParaRPr lang="en-US" sz="1100" dirty="0"/>
           </a:p>
@@ -22523,13 +22365,13 @@
       </p:sp>
       <p:sp>
         <p:nvSpPr>
-          <p:cNvPr id="21" name="Shape 19"/>
-          <p:cNvSpPr/>
-          <p:nvPr/>
-        </p:nvSpPr>
-        <p:spPr>
-          <a:xfrm>
-            <a:off x="822960" y="5303520"/>
+          <p:cNvPr id="17" name="Shape 15"/>
+          <p:cNvSpPr/>
+          <p:nvPr/>
+        </p:nvSpPr>
+        <p:spPr>
+          <a:xfrm>
+            <a:off x="822960" y="4617720"/>
             <a:ext cx="10515600" cy="621792"/>
           </a:xfrm>
           <a:prstGeom prst="roundRect">
@@ -22550,13 +22392,13 @@
       </p:sp>
       <p:sp>
         <p:nvSpPr>
-          <p:cNvPr id="22" name="Text 20"/>
-          <p:cNvSpPr/>
-          <p:nvPr/>
-        </p:nvSpPr>
-        <p:spPr>
-          <a:xfrm>
-            <a:off x="1005840" y="5303520"/>
+          <p:cNvPr id="18" name="Text 16"/>
+          <p:cNvSpPr/>
+          <p:nvPr/>
+        </p:nvSpPr>
+        <p:spPr>
+          <a:xfrm>
+            <a:off x="1005840" y="4617720"/>
             <a:ext cx="2286000" cy="621792"/>
           </a:xfrm>
           <a:prstGeom prst="rect">
@@ -22581,7 +22423,7 @@
                 <a:ea typeface="Poppins" pitchFamily="34" charset="-122"/>
                 <a:cs typeface="Poppins" pitchFamily="34" charset="-120"/>
               </a:rPr>
-              <a:t>Record kept open</a:t>
+              <a:t>If PBS kills the job</a:t>
             </a:r>
             <a:endParaRPr lang="en-US" sz="1250" dirty="0"/>
           </a:p>
@@ -22589,13 +22431,13 @@
       </p:sp>
       <p:sp>
         <p:nvSpPr>
-          <p:cNvPr id="23" name="Text 21"/>
-          <p:cNvSpPr/>
-          <p:nvPr/>
-        </p:nvSpPr>
-        <p:spPr>
-          <a:xfrm>
-            <a:off x="3337560" y="5303520"/>
+          <p:cNvPr id="19" name="Text 17"/>
+          <p:cNvSpPr/>
+          <p:nvPr/>
+        </p:nvSpPr>
+        <p:spPr>
+          <a:xfrm>
+            <a:off x="3337560" y="4617720"/>
             <a:ext cx="7818120" cy="621792"/>
           </a:xfrm>
           <a:prstGeom prst="rect">
@@ -22623,7 +22465,7 @@
                 <a:ea typeface="Poppins" pitchFamily="34" charset="-122"/>
                 <a:cs typeface="Poppins" pitchFamily="34" charset="-120"/>
               </a:rPr>
-              <a:t>Untarred bfile records stay at 'N' and untransferred ones at 'T'. The next scheduled run simply resumes.</a:t>
+              <a:t>The daemon unlocks the dead record, finds einfo filled in, mails it and clears it. An overrun is reported instead of silent.</a:t>
             </a:r>
             <a:endParaRPr lang="en-US" sz="1100" dirty="0"/>
           </a:p>
@@ -22631,7 +22473,115 @@
       </p:sp>
       <p:sp>
         <p:nvSpPr>
-          <p:cNvPr id="24" name="Text 22"/>
+          <p:cNvPr id="20" name="Shape 18"/>
+          <p:cNvSpPr/>
+          <p:nvPr/>
+        </p:nvSpPr>
+        <p:spPr>
+          <a:xfrm>
+            <a:off x="822960" y="5303520"/>
+            <a:ext cx="10515600" cy="621792"/>
+          </a:xfrm>
+          <a:prstGeom prst="roundRect">
+            <a:avLst>
+              <a:gd name="adj" fmla="val 10294"/>
+            </a:avLst>
+          </a:prstGeom>
+          <a:solidFill>
+            <a:srgbClr val="0B2A63"/>
+          </a:solidFill>
+          <a:ln w="12700">
+            <a:solidFill>
+              <a:srgbClr val="2C4E7D"/>
+            </a:solidFill>
+            <a:prstDash val="solid"/>
+          </a:ln>
+        </p:spPr>
+      </p:sp>
+      <p:sp>
+        <p:nvSpPr>
+          <p:cNvPr id="21" name="Text 19"/>
+          <p:cNvSpPr/>
+          <p:nvPr/>
+        </p:nvSpPr>
+        <p:spPr>
+          <a:xfrm>
+            <a:off x="1005840" y="5303520"/>
+            <a:ext cx="2286000" cy="621792"/>
+          </a:xfrm>
+          <a:prstGeom prst="rect">
+            <a:avLst/>
+          </a:prstGeom>
+          <a:noFill/>
+          <a:ln/>
+        </p:spPr>
+        <p:txBody>
+          <a:bodyPr wrap="square" lIns="0" tIns="0" rIns="0" bIns="0" rtlCol="0" anchor="ctr"/>
+          <a:lstStyle/>
+          <a:p>
+            <a:pPr indent="0" marL="0">
+              <a:buNone/>
+            </a:pPr>
+            <a:r>
+              <a:rPr lang="en-US" sz="1250" b="1" dirty="0">
+                <a:solidFill>
+                  <a:srgbClr val="42C0FF"/>
+                </a:solidFill>
+                <a:latin typeface="Poppins" pitchFamily="34" charset="0"/>
+                <a:ea typeface="Poppins" pitchFamily="34" charset="-122"/>
+                <a:cs typeface="Poppins" pitchFamily="34" charset="-120"/>
+              </a:rPr>
+              <a:t>If the run finishes</a:t>
+            </a:r>
+            <a:endParaRPr lang="en-US" sz="1250" dirty="0"/>
+          </a:p>
+        </p:txBody>
+      </p:sp>
+      <p:sp>
+        <p:nvSpPr>
+          <p:cNvPr id="22" name="Text 20"/>
+          <p:cNvSpPr/>
+          <p:nvPr/>
+        </p:nvSpPr>
+        <p:spPr>
+          <a:xfrm>
+            <a:off x="3337560" y="5303520"/>
+            <a:ext cx="7818120" cy="621792"/>
+          </a:xfrm>
+          <a:prstGeom prst="rect">
+            <a:avLst/>
+          </a:prstGeom>
+          <a:noFill/>
+          <a:ln/>
+        </p:spPr>
+        <p:txBody>
+          <a:bodyPr wrap="square" lIns="0" tIns="0" rIns="0" bIns="0" rtlCol="0" anchor="ctr"/>
+          <a:lstStyle/>
+          <a:p>
+            <a:pPr indent="0" marL="0">
+              <a:lnSpc>
+                <a:spcPct val="100000"/>
+              </a:lnSpc>
+              <a:buNone/>
+            </a:pPr>
+            <a:r>
+              <a:rPr lang="en-US" sz="1100" dirty="0">
+                <a:solidFill>
+                  <a:srgbClr val="C3D7EE"/>
+                </a:solidFill>
+                <a:latin typeface="Poppins" pitchFamily="34" charset="0"/>
+                <a:ea typeface="Poppins" pitchFamily="34" charset="-122"/>
+                <a:cs typeface="Poppins" pitchFamily="34" charset="-120"/>
+              </a:rPr>
+              <a:t>The full report overwrites the cached one in einfo, so exactly one mail goes out — the complete one.</a:t>
+            </a:r>
+            <a:endParaRPr lang="en-US" sz="1100" dirty="0"/>
+          </a:p>
+        </p:txBody>
+      </p:sp>
+      <p:sp>
+        <p:nvSpPr>
+          <p:cNvPr id="23" name="Text 21"/>
           <p:cNvSpPr/>
           <p:nvPr/>
         </p:nvSpPr>
@@ -22662,7 +22612,7 @@
                 <a:ea typeface="Poppins" pitchFamily="34" charset="-122"/>
                 <a:cs typeface="Poppins" pitchFamily="34" charset="-120"/>
               </a:rPr>
-              <a:t>The guard only runs inside a real batch job; a foreground run is left to the operator.</a:t>
+              <a:t>The guard only runs inside a real batch job under dscheck with -e; a foreground run mails its report directly.</a:t>
             </a:r>
             <a:endParaRPr lang="en-US" sz="1100" dirty="0"/>
           </a:p>
@@ -22670,7 +22620,7 @@
       </p:sp>
       <p:sp>
         <p:nvSpPr>
-          <p:cNvPr id="25" name="Text 23"/>
+          <p:cNvPr id="24" name="Text 22"/>
           <p:cNvSpPr/>
           <p:nvPr/>
         </p:nvSpPr>
@@ -22709,7 +22659,7 @@
       </p:sp>
       <p:sp>
         <p:nvSpPr>
-          <p:cNvPr id="26" name="Text 24"/>
+          <p:cNvPr id="25" name="Text 23"/>
           <p:cNvSpPr/>
           <p:nvPr/>
         </p:nvSpPr>
@@ -26091,7 +26041,7 @@
                 <a:ea typeface="Poppins" pitchFamily="34" charset="-122"/>
                 <a:cs typeface="Poppins" pitchFamily="34" charset="-120"/>
               </a:rPr>
-              <a:t>The walltime guard mails too.  </a:t>
+              <a:t>A run that overruns still mails.  </a:t>
             </a:r>
             <a:pPr indent="0" marL="0">
               <a:buNone/>
@@ -26105,7 +26055,7 @@
                 <a:ea typeface="Poppins" pitchFamily="34" charset="-122"/>
                 <a:cs typeface="Poppins" pitchFamily="34" charset="-120"/>
               </a:rPr>
-              <a:t>A batch job that stops at 23 hours sends a progress note listing what finished and what is left, so an incomplete run is visible rather than silent.</a:t>
+              <a:t>An hour before the PBS walltime the report so far is cached in dscheck.einfo, so even a job killed by the queue is reported rather than silent.</a:t>
             </a:r>
             <a:endParaRPr lang="en-US" sz="1150" dirty="0"/>
           </a:p>

--- a/docs/slides/dsquasar_guide.pptx
+++ b/docs/slides/dsquasar_guide.pptx
@@ -22835,7 +22835,7 @@
                 <a:ea typeface="Poppins" pitchFamily="34" charset="-122"/>
                 <a:cs typeface="Poppins" pitchFamily="34" charset="-120"/>
               </a:rPr>
-              <a:t>The -A 3 gather runs from cron several times a day, so a crashed job restarts quickly — dead locks are taken over and dscheck retries. The gap was a job that is alive but making no progress: it holds the duplicate key and every later cron line simply blocks.</a:t>
+              <a:t>The -A 3 gather runs from cron several times a day, so a crashed job restarts quickly — dead locks are taken over and dscheck retries. The gap was a job that is alive but too slow to finish: it holds the duplicate key and every later cron line simply blocks.</a:t>
             </a:r>
             <a:endParaRPr lang="en-US" sz="1400" dirty="0"/>
           </a:p>
@@ -22913,7 +22913,7 @@
                 <a:ea typeface="Poppins" pitchFamily="34" charset="-122"/>
                 <a:cs typeface="Poppins" pitchFamily="34" charset="-120"/>
               </a:rPr>
-              <a:t>A repeat submit inspects the running job. Both conditions must hold:</a:t>
+              <a:t>A repeat submit inspects the running job. All three must hold:</a:t>
             </a:r>
             <a:endParaRPr lang="en-US" sz="1150" dirty="0"/>
           </a:p>
@@ -22928,11 +22928,11 @@
         <p:spPr>
           <a:xfrm>
             <a:off x="457200" y="2788920"/>
-            <a:ext cx="5532120" cy="731520"/>
+            <a:ext cx="5532120" cy="960120"/>
           </a:xfrm>
           <a:prstGeom prst="roundRect">
             <a:avLst>
-              <a:gd name="adj" fmla="val 6250"/>
+              <a:gd name="adj" fmla="val 4762"/>
             </a:avLst>
           </a:prstGeom>
           <a:solidFill>
@@ -22950,7 +22950,7 @@
         <p:spPr>
           <a:xfrm>
             <a:off x="585216" y="2788920"/>
-            <a:ext cx="5276088" cy="731520"/>
+            <a:ext cx="5276088" cy="960120"/>
           </a:xfrm>
           <a:prstGeom prst="rect">
             <a:avLst/>
@@ -22977,7 +22977,7 @@
                 <a:ea typeface="Courier New" pitchFamily="34" charset="-122"/>
                 <a:cs typeface="Courier New" pitchFamily="34" charset="-120"/>
               </a:rPr>
-              <a:t>runtime  &gt;  WORKGRACE  (6 hours)</a:t>
+              <a:t>runtime  &gt;  WORKGRACE  (2 hours)</a:t>
             </a:r>
             <a:endParaRPr lang="en-US" sz="1200" dirty="0"/>
           </a:p>
@@ -22997,10 +22997,30 @@
                 <a:ea typeface="Courier New" pitchFamily="34" charset="-122"/>
                 <a:cs typeface="Courier New" pitchFamily="34" charset="-120"/>
               </a:rPr>
-              <a:t>dcount / fcount  &lt;=  MINWDONE  (1 %)</a:t>
+              <a:t>dcount   &gt;  0  (gather finished)</a:t>
             </a:r>
             <a:endParaRPr lang="en-US" sz="1200" dirty="0"/>
           </a:p>
+          <a:p>
+            <a:pPr indent="0" marL="0">
+              <a:lnSpc>
+                <a:spcPct val="100000"/>
+              </a:lnSpc>
+              <a:buNone/>
+            </a:pPr>
+            <a:r>
+              <a:rPr lang="en-US" sz="1200" dirty="0">
+                <a:solidFill>
+                  <a:srgbClr val="0097A7"/>
+                </a:solidFill>
+                <a:latin typeface="Courier New" pitchFamily="34" charset="0"/>
+                <a:ea typeface="Courier New" pitchFamily="34" charset="-122"/>
+                <a:cs typeface="Courier New" pitchFamily="34" charset="-120"/>
+              </a:rPr>
+              <a:t>done rate x walltime  &lt;  MINWPROJ  (90 %)</a:t>
+            </a:r>
+            <a:endParaRPr lang="en-US" sz="1200" dirty="0"/>
+          </a:p>
         </p:txBody>
       </p:sp>
       <p:sp>
@@ -23011,8 +23031,8 @@
         </p:nvSpPr>
         <p:spPr>
           <a:xfrm>
-            <a:off x="457200" y="3657600"/>
-            <a:ext cx="5532120" cy="594360"/>
+            <a:off x="457200" y="3840480"/>
+            <a:ext cx="5532120" cy="566928"/>
           </a:xfrm>
           <a:prstGeom prst="rect">
             <a:avLst/>
@@ -23039,7 +23059,7 @@
                 <a:ea typeface="Poppins" pitchFamily="34" charset="-122"/>
                 <a:cs typeface="Poppins" pitchFamily="34" charset="-120"/>
               </a:rPr>
-              <a:t>Six hours in with under one percent of its recorded work done, the job is treated as stalled and an extra worker is submitted alongside it — up to -W MaxWorkers, default 2.</a:t>
+              <a:t>A job that cannot finish its recorded work this attempt is treated as stalled, and the next cron submit adds an extra worker alongside it — up to -W MaxWorkers, default 2.</a:t>
             </a:r>
             <a:endParaRPr lang="en-US" sz="1150" dirty="0"/>
           </a:p>
@@ -23053,12 +23073,12 @@
         </p:nvSpPr>
         <p:spPr>
           <a:xfrm>
-            <a:off x="457200" y="4343400"/>
-            <a:ext cx="5532120" cy="457200"/>
+            <a:off x="457200" y="4480560"/>
+            <a:ext cx="5532120" cy="411480"/>
           </a:xfrm>
           <a:prstGeom prst="roundRect">
             <a:avLst>
-              <a:gd name="adj" fmla="val 10000"/>
+              <a:gd name="adj" fmla="val 11111"/>
             </a:avLst>
           </a:prstGeom>
           <a:solidFill>
@@ -23075,8 +23095,8 @@
         </p:nvSpPr>
         <p:spPr>
           <a:xfrm>
-            <a:off x="585216" y="4343400"/>
-            <a:ext cx="5276088" cy="457200"/>
+            <a:off x="585216" y="4480560"/>
+            <a:ext cx="5276088" cy="411480"/>
           </a:xfrm>
           <a:prstGeom prst="rect">
             <a:avLst/>
@@ -23117,12 +23137,12 @@
         </p:nvSpPr>
         <p:spPr>
           <a:xfrm>
-            <a:off x="457200" y="4956048"/>
-            <a:ext cx="5532120" cy="1051560"/>
+            <a:off x="457200" y="5029200"/>
+            <a:ext cx="5532120" cy="978408"/>
           </a:xfrm>
           <a:prstGeom prst="roundRect">
             <a:avLst>
-              <a:gd name="adj" fmla="val 6957"/>
+              <a:gd name="adj" fmla="val 7477"/>
             </a:avLst>
           </a:prstGeom>
           <a:solidFill>
@@ -23144,8 +23164,8 @@
         </p:nvSpPr>
         <p:spPr>
           <a:xfrm>
-            <a:off x="640080" y="4956048"/>
-            <a:ext cx="5166360" cy="1051560"/>
+            <a:off x="640080" y="5029200"/>
+            <a:ext cx="5166360" cy="978408"/>
           </a:xfrm>
           <a:prstGeom prst="rect">
             <a:avLst/>

--- a/docs/slides/dsquasar_guide.pptx
+++ b/docs/slides/dsquasar_guide.pptx
@@ -21214,12 +21214,12 @@
         </p:nvSpPr>
         <p:spPr>
           <a:xfrm>
-            <a:off x="685800" y="2926080"/>
-            <a:ext cx="5120640" cy="685800"/>
+            <a:off x="685800" y="2907792"/>
+            <a:ext cx="5120640" cy="987552"/>
           </a:xfrm>
           <a:prstGeom prst="roundRect">
             <a:avLst>
-              <a:gd name="adj" fmla="val 6667"/>
+              <a:gd name="adj" fmla="val 4630"/>
             </a:avLst>
           </a:prstGeom>
           <a:solidFill>
@@ -21236,8 +21236,8 @@
         </p:nvSpPr>
         <p:spPr>
           <a:xfrm>
-            <a:off x="813816" y="2926080"/>
-            <a:ext cx="4864608" cy="685800"/>
+            <a:off x="813816" y="2907792"/>
+            <a:ext cx="4864608" cy="987552"/>
           </a:xfrm>
           <a:prstGeom prst="rect">
             <a:avLst/>
@@ -21256,7 +21256,7 @@
               <a:buNone/>
             </a:pPr>
             <a:r>
-              <a:rPr lang="en-US" sz="1150" dirty="0">
+              <a:rPr lang="en-US" sz="1100" dirty="0">
                 <a:solidFill>
                   <a:srgbClr val="0097A7"/>
                 </a:solidFill>
@@ -21264,9 +21264,9 @@
                 <a:ea typeface="Courier New" pitchFamily="34" charset="-122"/>
                 <a:cs typeface="Courier New" pitchFamily="34" charset="-120"/>
               </a:rPr>
-              <a:t>MPTLIMIT = 200   tar files per process</a:t>
-            </a:r>
-            <a:endParaRPr lang="en-US" sz="1150" dirty="0"/>
+              <a:t>MPTLIMIT = 200   Glade tar files per process</a:t>
+            </a:r>
+            <a:endParaRPr lang="en-US" sz="1100" dirty="0"/>
           </a:p>
           <a:p>
             <a:pPr indent="0" marL="0">
@@ -21276,7 +21276,7 @@
               <a:buNone/>
             </a:pPr>
             <a:r>
-              <a:rPr lang="en-US" sz="1150" dirty="0">
+              <a:rPr lang="en-US" sz="1100" dirty="0">
                 <a:solidFill>
                   <a:srgbClr val="0097A7"/>
                 </a:solidFill>
@@ -21284,9 +21284,49 @@
                 <a:ea typeface="Courier New" pitchFamily="34" charset="-122"/>
                 <a:cs typeface="Courier New" pitchFamily="34" charset="-120"/>
               </a:rPr>
+              <a:t>MPOLIMIT =  20   Boreas tar files per process</a:t>
+            </a:r>
+            <a:endParaRPr lang="en-US" sz="1100" dirty="0"/>
+          </a:p>
+          <a:p>
+            <a:pPr indent="0" marL="0">
+              <a:lnSpc>
+                <a:spcPct val="100000"/>
+              </a:lnSpc>
+              <a:buNone/>
+            </a:pPr>
+            <a:r>
+              <a:rPr lang="en-US" sz="1100" dirty="0">
+                <a:solidFill>
+                  <a:srgbClr val="0097A7"/>
+                </a:solidFill>
+                <a:latin typeface="Courier New" pitchFamily="34" charset="0"/>
+                <a:ea typeface="Courier New" pitchFamily="34" charset="-122"/>
+                <a:cs typeface="Courier New" pitchFamily="34" charset="-120"/>
+              </a:rPr>
               <a:t>MPTMAX   =  12   process ceiling</a:t>
             </a:r>
-            <a:endParaRPr lang="en-US" sz="1150" dirty="0"/>
+            <a:endParaRPr lang="en-US" sz="1100" dirty="0"/>
+          </a:p>
+          <a:p>
+            <a:pPr indent="0" marL="0">
+              <a:lnSpc>
+                <a:spcPct val="100000"/>
+              </a:lnSpc>
+              <a:buNone/>
+            </a:pPr>
+            <a:r>
+              <a:rPr lang="en-US" sz="1100" dirty="0">
+                <a:solidFill>
+                  <a:srgbClr val="0097A7"/>
+                </a:solidFill>
+                <a:latin typeface="Courier New" pitchFamily="34" charset="0"/>
+                <a:ea typeface="Courier New" pitchFamily="34" charset="-122"/>
+                <a:cs typeface="Courier New" pitchFamily="34" charset="-120"/>
+              </a:rPr>
+              <a:t>procs = ceil(Glade/200 + Boreas/20)</a:t>
+            </a:r>
+            <a:endParaRPr lang="en-US" sz="1100" dirty="0"/>
           </a:p>
         </p:txBody>
       </p:sp>
@@ -21298,8 +21338,8 @@
         </p:nvSpPr>
         <p:spPr>
           <a:xfrm>
-            <a:off x="685800" y="3703320"/>
-            <a:ext cx="5120640" cy="548640"/>
+            <a:off x="685800" y="3968496"/>
+            <a:ext cx="5120640" cy="365760"/>
           </a:xfrm>
           <a:prstGeom prst="rect">
             <a:avLst/>
@@ -21323,7 +21363,7 @@
                 <a:ea typeface="Poppins" pitchFamily="34" charset="-122"/>
                 <a:cs typeface="Poppins" pitchFamily="34" charset="-120"/>
               </a:rPr>
-              <a:t>A small divisor with a high cap: lots of tar work should spread wide.</a:t>
+              <a:t>A small divisor with a high cap: tar work spreads wide, Boreas tars ten times wider.</a:t>
             </a:r>
             <a:endParaRPr lang="en-US" sz="1100" dirty="0"/>
           </a:p>
@@ -21590,7 +21630,7 @@
                 <a:ea typeface="Poppins" pitchFamily="34" charset="-122"/>
                 <a:cs typeface="Poppins" pitchFamily="34" charset="-120"/>
               </a:rPr>
-              <a:t>Why the two sets of numbers</a:t>
+              <a:t>Why Boreas tars get more processes</a:t>
             </a:r>
             <a:endParaRPr lang="en-US" sz="1500" dirty="0"/>
           </a:p>
@@ -21632,7 +21672,7 @@
                 <a:ea typeface="Poppins" pitchFamily="34" charset="-122"/>
                 <a:cs typeface="Poppins" pitchFamily="34" charset="-120"/>
               </a:rPr>
-              <a:t>Both phases once shared a single limit. Tarring came out under-provisioned while uploading reserved cpus it could never use — cpus that PBS charges for and that other jobs then cannot have. Splitting the constants fixed both ends.</a:t>
+              <a:t>Every member of a Boreas tar is staged down from the object store and checksummed before it is tarred, so it takes many times longer than a Glade tar. The backlog sat in one dataset, d694517 (~730 GB, ~146 tars): one process per 200 tars gave it 1, per 20 it gets 8.</a:t>
             </a:r>
             <a:endParaRPr lang="en-US" sz="1200" dirty="0"/>
           </a:p>
@@ -22913,7 +22953,7 @@
                 <a:ea typeface="Poppins" pitchFamily="34" charset="-122"/>
                 <a:cs typeface="Poppins" pitchFamily="34" charset="-120"/>
               </a:rPr>
-              <a:t>A repeat submit inspects the running job. All three must hold:</a:t>
+              <a:t>A repeat submit inspects the running job. Either way counts as stalled:</a:t>
             </a:r>
             <a:endParaRPr lang="en-US" sz="1150" dirty="0"/>
           </a:p>
@@ -22977,7 +23017,7 @@
                 <a:ea typeface="Courier New" pitchFamily="34" charset="-122"/>
                 <a:cs typeface="Courier New" pitchFamily="34" charset="-120"/>
               </a:rPr>
-              <a:t>runtime  &gt;  WORKGRACE  (2 hours)</a:t>
+              <a:t>runtime &gt; WORKGRACE (1 hour) and</a:t>
             </a:r>
             <a:endParaRPr lang="en-US" sz="1200" dirty="0"/>
           </a:p>
@@ -22997,7 +23037,7 @@
                 <a:ea typeface="Courier New" pitchFamily="34" charset="-122"/>
                 <a:cs typeface="Courier New" pitchFamily="34" charset="-120"/>
               </a:rPr>
-              <a:t>dcount   &gt;  0  (gather finished)</a:t>
+              <a:t>   done rate x walltime &lt; MINWPROJ (150 %)</a:t>
             </a:r>
             <a:endParaRPr lang="en-US" sz="1200" dirty="0"/>
           </a:p>
@@ -23017,7 +23057,7 @@
                 <a:ea typeface="Courier New" pitchFamily="34" charset="-122"/>
                 <a:cs typeface="Courier New" pitchFamily="34" charset="-120"/>
               </a:rPr>
-              <a:t>done rate x walltime  &lt;  MINWPROJ  (90 %)</a:t>
+              <a:t>runtime &gt; GATHGRACE (2 hours) and dcount = 0</a:t>
             </a:r>
             <a:endParaRPr lang="en-US" sz="1200" dirty="0"/>
           </a:p>
@@ -23059,7 +23099,7 @@
                 <a:ea typeface="Poppins" pitchFamily="34" charset="-122"/>
                 <a:cs typeface="Poppins" pitchFamily="34" charset="-120"/>
               </a:rPr>
-              <a:t>A job that cannot finish its recorded work this attempt is treated as stalled, and the next cron submit adds an extra worker alongside it — up to -W MaxWorkers, default 2.</a:t>
+              <a:t>A job that is not well on its way to finishing its recorded work this attempt is treated as stalled, and the next cron submit adds an extra worker alongside it — up to -W MaxWorkers, default 2.</a:t>
             </a:r>
             <a:endParaRPr lang="en-US" sz="1150" dirty="0"/>
           </a:p>
@@ -23684,7 +23724,7 @@
                           <a:ea typeface="Poppins" pitchFamily="34" charset="-122"/>
                           <a:cs typeface="Poppins" pitchFamily="34" charset="-120"/>
                         </a:rPr>
-                        <a:t>walks datasets in ascending dsid order</a:t>
+                        <a:t>Boreas datasets first, then Glade; dsid ascending</a:t>
                       </a:r>
                       <a:endParaRPr lang="en-US" sz="1200" dirty="0">
                         <a:latin typeface="Poppins" charset="0"/>
@@ -23822,7 +23862,7 @@
                           <a:ea typeface="Poppins" pitchFamily="34" charset="-122"/>
                           <a:cs typeface="Poppins" pitchFamily="34" charset="-120"/>
                         </a:rPr>
-                        <a:t>walks datasets descending, from d999999</a:t>
+                        <a:t>Glade datasets first, then Boreas; dsid descending</a:t>
                       </a:r>
                       <a:endParaRPr lang="en-US" sz="1200" dirty="0">
                         <a:latin typeface="Poppins" charset="0"/>
@@ -23914,7 +23954,7 @@
                 <a:ea typeface="Poppins" pitchFamily="34" charset="-122"/>
                 <a:cs typeface="Poppins" pitchFamily="34" charset="-120"/>
               </a:rPr>
-              <a:t>A pair of workers therefore meets in the middle rather than fighting over the same dataset lock from the same end of the list.</a:t>
+              <a:t>A pair of workers starts on different storage and meets in the middle rather than fighting over the same dataset lock.</a:t>
             </a:r>
             <a:endParaRPr lang="en-US" sz="1150" dirty="0"/>
           </a:p>
@@ -23978,7 +24018,7 @@
                 <a:ea typeface="Poppins" pitchFamily="34" charset="-122"/>
                 <a:cs typeface="Poppins" pitchFamily="34" charset="-120"/>
               </a:rPr>
-              <a:t>Not a fix for one huge dataset.  </a:t>
+              <a:t>One huge dataset needs more processes.  </a:t>
             </a:r>
             <a:pPr indent="0" marL="0">
               <a:lnSpc>
@@ -23995,7 +24035,7 @@
                 <a:ea typeface="Poppins" pitchFamily="34" charset="-122"/>
                 <a:cs typeface="Poppins" pitchFamily="34" charset="-120"/>
               </a:rPr>
-              <a:t>Locks are per dataset, so a second worker cannot help inside the dataset that is actually stuck.</a:t>
+              <a:t>Locks are per dataset, so a second worker cannot help inside it; more tar processes (MPOLIMIT) do.</a:t>
             </a:r>
             <a:endParaRPr lang="en-US" sz="1100" dirty="0"/>
           </a:p>
